--- a/Slides_IA_AWS_UG_Cucuta.pptx
+++ b/Slides_IA_AWS_UG_Cucuta.pptx
@@ -4,6 +4,9 @@
   <p:sldMasterIdLst>
     <p:sldMasterId id="2147483648" r:id="rId1"/>
   </p:sldMasterIdLst>
+  <p:notesMasterIdLst>
+    <p:notesMasterId r:id="rId40"/>
+  </p:notesMasterIdLst>
   <p:sldIdLst>
     <p:sldId id="256" r:id="rId2"/>
     <p:sldId id="257" r:id="rId3"/>
@@ -44,9 +47,6 @@
     <p:sldId id="292" r:id="rId38"/>
     <p:sldId id="293" r:id="rId39"/>
   </p:sldIdLst>
-  <p:notesMasterIdLst>
-    <p:notesMasterId r:id="rId40"/>
-  </p:notesMasterIdLst>
   <p:sldSz cx="12192000" cy="6858000"/>
   <p:notesSz cx="6858000" cy="12192000"/>
   <p:defaultTextStyle>
@@ -141,6 +141,11 @@
       </a:defRPr>
     </a:lvl9pPr>
   </p:defaultTextStyle>
+  <p:extLst>
+    <p:ext uri="{EFAFB233-063F-42B5-8137-9DF3F51BA10A}">
+      <p15:sldGuideLst xmlns:p15="http://schemas.microsoft.com/office/powerpoint/2012/main"/>
+    </p:ext>
+  </p:extLst>
 </p:presentation>
 </file>
 
@@ -166,234 +171,10 @@
           <a:chExt cx="0" cy="0"/>
         </a:xfrm>
       </p:grpSpPr>
-      <p:sp>
-        <p:nvSpPr>
-          <p:cNvPr id="2" name="Header Placeholder 1"/>
-          <p:cNvSpPr>
-            <a:spLocks noGrp="1"/>
-          </p:cNvSpPr>
-          <p:nvPr>
-            <p:ph type="hdr" sz="quarter"/>
-          </p:nvPr>
-        </p:nvSpPr>
-        <p:spPr>
-          <a:xfrm>
-            <a:off x="0" y="0"/>
-            <a:ext cx="2971800" cy="458788"/>
-          </a:xfrm>
-          <a:prstGeom prst="rect">
-            <a:avLst/>
-          </a:prstGeom>
-        </p:spPr>
-        <p:txBody>
-          <a:bodyPr vert="horz" lIns="91440" tIns="45720" rIns="91440" bIns="45720" rtlCol="0"/>
-          <a:lstStyle>
-            <a:lvl1pPr algn="l">
-              <a:defRPr sz="1200"/>
-            </a:lvl1pPr>
-          </a:lstStyle>
-          <a:p>
-            <a:endParaRPr lang="en-US"/>
-          </a:p>
-        </p:txBody>
-      </p:sp>
-      <p:sp>
-        <p:nvSpPr>
-          <p:cNvPr id="3" name="Date Placeholder 2"/>
-          <p:cNvSpPr>
-            <a:spLocks noGrp="1"/>
-          </p:cNvSpPr>
-          <p:nvPr>
-            <p:ph type="dt" idx="1"/>
-          </p:nvPr>
-        </p:nvSpPr>
-        <p:spPr>
-          <a:xfrm>
-            <a:off x="3884613" y="0"/>
-            <a:ext cx="2971800" cy="458788"/>
-          </a:xfrm>
-          <a:prstGeom prst="rect">
-            <a:avLst/>
-          </a:prstGeom>
-        </p:spPr>
-        <p:txBody>
-          <a:bodyPr vert="horz" lIns="91440" tIns="45720" rIns="91440" bIns="45720" rtlCol="0"/>
-          <a:lstStyle>
-            <a:lvl1pPr algn="r">
-              <a:defRPr sz="1200"/>
-            </a:lvl1pPr>
-          </a:lstStyle>
-          <a:p>
-            <a:fld id="{5282F153-3F37-0F45-9E97-73ACFA13230C}" type="datetimeFigureOut">
-              <a:rPr lang="en-US"/>
-              <a:t>7/23/19</a:t>
-            </a:fld>
-            <a:endParaRPr lang="en-US"/>
-          </a:p>
-        </p:txBody>
-      </p:sp>
-      <p:sp>
-        <p:nvSpPr>
-          <p:cNvPr id="4" name="Slide Image Placeholder 3"/>
-          <p:cNvSpPr>
-            <a:spLocks noGrp="1" noRot="1" noChangeAspect="1"/>
-          </p:cNvSpPr>
-          <p:nvPr>
-            <p:ph type="sldImg" idx="2"/>
-          </p:nvPr>
-        </p:nvSpPr>
-        <p:spPr>
-          <a:xfrm>
-            <a:off x="685800" y="1143000"/>
-            <a:ext cx="5486400" cy="3086100"/>
-          </a:xfrm>
-          <a:prstGeom prst="rect">
-            <a:avLst/>
-          </a:prstGeom>
-          <a:noFill/>
-          <a:ln w="12700">
-            <a:solidFill>
-              <a:prstClr val="black"/>
-            </a:solidFill>
-          </a:ln>
-        </p:spPr>
-        <p:txBody>
-          <a:bodyPr vert="horz" lIns="91440" tIns="45720" rIns="91440" bIns="45720" rtlCol="0" anchor="ctr"/>
-          <a:lstStyle/>
-          <a:p>
-            <a:endParaRPr lang="en-US"/>
-          </a:p>
-        </p:txBody>
-      </p:sp>
-      <p:sp>
-        <p:nvSpPr>
-          <p:cNvPr id="5" name="Notes Placeholder 4"/>
-          <p:cNvSpPr>
-            <a:spLocks noGrp="1"/>
-          </p:cNvSpPr>
-          <p:nvPr>
-            <p:ph type="body" sz="quarter" idx="3"/>
-          </p:nvPr>
-        </p:nvSpPr>
-        <p:spPr>
-          <a:xfrm>
-            <a:off x="685800" y="4400550"/>
-            <a:ext cx="5486400" cy="3600450"/>
-          </a:xfrm>
-          <a:prstGeom prst="rect">
-            <a:avLst/>
-          </a:prstGeom>
-        </p:spPr>
-        <p:txBody>
-          <a:bodyPr vert="horz" lIns="91440" tIns="45720" rIns="91440" bIns="45720" rtlCol="0"/>
-          <a:lstStyle/>
-          <a:p>
-            <a:pPr lvl="0"/>
-            <a:r>
-              <a:rPr lang="en-US"/>
-              <a:t>Click to edit Master text styles</a:t>
-            </a:r>
-          </a:p>
-          <a:p>
-            <a:pPr lvl="1"/>
-            <a:r>
-              <a:rPr lang="en-US"/>
-              <a:t>Second level</a:t>
-            </a:r>
-          </a:p>
-          <a:p>
-            <a:pPr lvl="2"/>
-            <a:r>
-              <a:rPr lang="en-US"/>
-              <a:t>Third level</a:t>
-            </a:r>
-          </a:p>
-          <a:p>
-            <a:pPr lvl="3"/>
-            <a:r>
-              <a:rPr lang="en-US"/>
-              <a:t>Fourth level</a:t>
-            </a:r>
-          </a:p>
-          <a:p>
-            <a:pPr lvl="4"/>
-            <a:r>
-              <a:rPr lang="en-US"/>
-              <a:t>Fifth level</a:t>
-            </a:r>
-          </a:p>
-        </p:txBody>
-      </p:sp>
-      <p:sp>
-        <p:nvSpPr>
-          <p:cNvPr id="6" name="Footer Placeholder 5"/>
-          <p:cNvSpPr>
-            <a:spLocks noGrp="1"/>
-          </p:cNvSpPr>
-          <p:nvPr>
-            <p:ph type="ftr" sz="quarter" idx="4"/>
-          </p:nvPr>
-        </p:nvSpPr>
-        <p:spPr>
-          <a:xfrm>
-            <a:off x="0" y="8685213"/>
-            <a:ext cx="2971800" cy="458787"/>
-          </a:xfrm>
-          <a:prstGeom prst="rect">
-            <a:avLst/>
-          </a:prstGeom>
-        </p:spPr>
-        <p:txBody>
-          <a:bodyPr vert="horz" lIns="91440" tIns="45720" rIns="91440" bIns="45720" rtlCol="0" anchor="b"/>
-          <a:lstStyle>
-            <a:lvl1pPr algn="l">
-              <a:defRPr sz="1200"/>
-            </a:lvl1pPr>
-          </a:lstStyle>
-          <a:p>
-            <a:endParaRPr lang="en-US"/>
-          </a:p>
-        </p:txBody>
-      </p:sp>
-      <p:sp>
-        <p:nvSpPr>
-          <p:cNvPr id="7" name="Slide Number Placeholder 6"/>
-          <p:cNvSpPr>
-            <a:spLocks noGrp="1"/>
-          </p:cNvSpPr>
-          <p:nvPr>
-            <p:ph type="sldNum" sz="quarter" idx="5"/>
-          </p:nvPr>
-        </p:nvSpPr>
-        <p:spPr>
-          <a:xfrm>
-            <a:off x="3884613" y="8685213"/>
-            <a:ext cx="2971800" cy="458787"/>
-          </a:xfrm>
-          <a:prstGeom prst="rect">
-            <a:avLst/>
-          </a:prstGeom>
-        </p:spPr>
-        <p:txBody>
-          <a:bodyPr vert="horz" lIns="91440" tIns="45720" rIns="91440" bIns="45720" rtlCol="0" anchor="b"/>
-          <a:lstStyle>
-            <a:lvl1pPr algn="r">
-              <a:defRPr sz="1200"/>
-            </a:lvl1pPr>
-          </a:lstStyle>
-          <a:p>
-            <a:fld id="{CE5E9CC1-C706-0F49-92D6-E571CC5EEA8F}" type="slidenum">
-              <a:rPr lang="en-US"/>
-              <a:t>‹#›</a:t>
-            </a:fld>
-            <a:endParaRPr lang="en-US"/>
-          </a:p>
-        </p:txBody>
-      </p:sp>
     </p:spTree>
     <p:extLst>
       <p:ext uri="{BB962C8B-B14F-4D97-AF65-F5344CB8AC3E}">
-        <p14:creationId xmlns:p14="http://schemas.microsoft.com/office/powerpoint/2010/main" val="1024086991"/>
+        <p14:creationId xmlns:p14="http://schemas.microsoft.com/office/powerpoint/2010/main" val="197807418"/>
       </p:ext>
     </p:extLst>
   </p:cSld>
@@ -544,7 +325,6 @@
 Se proyecta mientras te presentan y subes a tarima. No la narres.
 Avanza a la siguiente cuando vayas a decir “Antes de empezar, un minuto sobre mí”.</a:t>
             </a:r>
-            <a:endParaRPr lang="en-US" dirty="0"/>
           </a:p>
         </p:txBody>
       </p:sp>
@@ -644,7 +424,6 @@
 Vamos a volver a ella al final.
 &gt;&gt; Este es el gancho que se cierra en el Acto de cierre. No lo resuelvas aquí.</a:t>
             </a:r>
-            <a:endParaRPr lang="en-US" dirty="0"/>
           </a:p>
         </p:txBody>
       </p:sp>
@@ -756,7 +535,6 @@
 Ahí está el verdadero cambio.
 &gt;&gt; La infografía "2015 vs 2026" ya la mostraste en 0.3. Si alguien la trae de vuelta aquí, retómala: la segunda etapa es exactamente lo que hizo crecer esa silueta.</a:t>
             </a:r>
-            <a:endParaRPr lang="en-US" dirty="0"/>
           </a:p>
         </p:txBody>
       </p:sp>
@@ -852,7 +630,6 @@
 Cloud no eliminó a los ingenieros porque dejamos de instalar servidores físicamente.
 &gt;&gt; Ritmo de lista. Cada par debe caer con confianza, sin explicación adicional.</a:t>
             </a:r>
-            <a:endParaRPr lang="en-US" dirty="0"/>
           </a:p>
         </p:txBody>
       </p:sp>
@@ -944,7 +721,6 @@
 La abstracción mueve el nivel en el que resolvemos los problemas.
 La IA está haciendo exactamente eso. Nos está obligando a subir un nivel.</a:t>
             </a:r>
-            <a:endParaRPr lang="en-US" dirty="0"/>
           </a:p>
         </p:txBody>
       </p:sp>
@@ -1041,7 +817,6 @@
 Pero sigue siendo difícil responder si son las trescientas líneas correctas.
 Y de eso quiero hablar ahora.</a:t>
             </a:r>
-            <a:endParaRPr lang="en-US" dirty="0"/>
           </a:p>
         </p:txBody>
       </p:sp>
@@ -1136,7 +911,6 @@
 La IA puede producir una respuesta.
 El ingeniero sigue siendo responsable de determinar si es una buena respuesta.</a:t>
             </a:r>
-            <a:endParaRPr lang="en-US" dirty="0"/>
           </a:p>
         </p:txBody>
       </p:sp>
@@ -1231,7 +1005,6 @@
 Pero también significa algo más incómodo.
 &gt;&gt; Pausa antes de la línea siguiente. Es el giro del acto.</a:t>
             </a:r>
-            <a:endParaRPr lang="en-US" dirty="0"/>
           </a:p>
         </p:txBody>
       </p:sp>
@@ -1325,7 +1098,6 @@
 La velocidad no reemplaza al conocimiento.
 La velocidad multiplica aquello que ya sabemos hacer.</a:t>
             </a:r>
-            <a:endParaRPr lang="en-US" dirty="0"/>
           </a:p>
         </p:txBody>
       </p:sp>
@@ -1421,7 +1193,6 @@
 Fíjense en el verbo. No "escribir". Coordinar.
 &gt;&gt; Esta es la transición conceptual más importante del acto. Si algo se recuerda de esta sección, que sea el cambio de encargo que viene ahora.</a:t>
             </a:r>
-            <a:endParaRPr lang="en-US" dirty="0"/>
           </a:p>
         </p:txBody>
       </p:sp>
@@ -1519,7 +1290,6 @@
 Esa última parte es la que no se delega.
 La IA puede construir el sistema. Demostrar que cumple sigue siendo tu trabajo.</a:t>
             </a:r>
-            <a:endParaRPr lang="en-US" dirty="0"/>
           </a:p>
         </p:txBody>
       </p:sp>
@@ -1616,7 +1386,6 @@
 &gt;&gt; Menciona la UFPS con intención. Si en la sala hay estudiantes de allí, esa frase hace más por tu credibilidad que toda la lista de clientes. Estás diciendo "yo estuve sentado donde ustedes están".
 &gt;&gt; Un minuto. No más. Los enlaces están en pantalla; no los leas en voz alta, solo di "ahí quedan mis datos si quieren escribirme". Un speaker que se presenta largo pierde la sala antes de empezar.</a:t>
             </a:r>
-            <a:endParaRPr lang="en-US" dirty="0"/>
           </a:p>
         </p:txBody>
       </p:sp>
@@ -1713,7 +1482,6 @@
 Por eso el perfil valioso se está moviendo de "sé programar en X" hacia "sé resolver problemas usando software".
 &gt;&gt; Aquí baja el registro. Deja el tono de conferencia y habla como si le contaras algo a un amigo. Esta es la única parte de la charla donde el argumento deja de ser una idea y pasa a ser tu vida.</a:t>
             </a:r>
-            <a:endParaRPr lang="en-US" dirty="0"/>
           </a:p>
         </p:txBody>
       </p:sp>
@@ -1822,7 +1590,6 @@
 Yo puedo trabajar en Rust sin dominar Rust porque pasé años dominando Java lo suficientemente bien como para entender qué está haciendo un programa por debajo.
 Sin esos años, la IA me habría entregado código que yo no habría sabido evaluar.</a:t>
             </a:r>
-            <a:endParaRPr lang="en-US" dirty="0"/>
           </a:p>
         </p:txBody>
       </p:sp>
@@ -1918,7 +1685,6 @@
 Para prototipos, experimentos, hackathones, aprender y validar ideas, esto es increíble. De verdad. No estoy aquí a decirles que no lo usen.
 El problema empieza en otro punto.</a:t>
             </a:r>
-            <a:endParaRPr lang="en-US" dirty="0"/>
           </a:p>
         </p:txBody>
       </p:sp>
@@ -2009,7 +1775,6 @@
 ----------------------------------------
 El problema empieza cuando confundimos "funciona en mi computador" con "está listo para producción".</a:t>
             </a:r>
-            <a:endParaRPr lang="en-US" dirty="0"/>
           </a:p>
         </p:txBody>
       </p:sp>
@@ -2115,7 +1880,6 @@
 No sabemos.
 &gt;&gt; Pausa larga.</a:t>
             </a:r>
-            <a:endParaRPr lang="en-US" dirty="0"/>
           </a:p>
         </p:txBody>
       </p:sp>
@@ -2208,7 +1972,6 @@
 Somos propietarios de un sistema que no entendemos.
 Ese es, para mí, el riesgo más importante de construir software solamente mediante prompts.</a:t>
             </a:r>
-            <a:endParaRPr lang="en-US" dirty="0"/>
           </a:p>
         </p:txBody>
       </p:sp>
@@ -2317,7 +2080,6 @@
 No está en la herramienta. Las dos personas usan la misma herramienta.
 Está en lo que uno trae.</a:t>
             </a:r>
-            <a:endParaRPr lang="en-US" dirty="0"/>
           </a:p>
         </p:txBody>
       </p:sp>
@@ -2413,7 +2175,6 @@
 Programar enseña a dividir problemas grandes en problemas pequeños. A construir abstracciones. A modelar información. A pensar en estados. A manejar errores. A comprender algoritmos. A razonar sobre eficiencia. A diseñar interfaces. A depurar sistemas. A pensar sistemáticamente.
 Eso no se depreció. Eso subió de valor.</a:t>
             </a:r>
-            <a:endParaRPr lang="en-US" dirty="0"/>
           </a:p>
         </p:txBody>
       </p:sp>
@@ -2513,7 +2274,6 @@
 Y hay un detalle que me parece revelador: antes de escribir código, Kiro revisa los requisitos buscando contradicciones y vacíos.
 Piénsenlo un segundo. La herramienta no está optimizando la escritura de código. Está optimizando la calidad de la especificación.</a:t>
             </a:r>
-            <a:endParaRPr lang="en-US" dirty="0"/>
           </a:p>
         </p:txBody>
       </p:sp>
@@ -2604,7 +2364,6 @@
 ----------------------------------------
 La IA no elimina la ingeniería. Nos obliga a hacerla explícita.</a:t>
             </a:r>
-            <a:endParaRPr lang="en-US" dirty="0"/>
           </a:p>
         </p:txBody>
       </p:sp>
@@ -2702,7 +2461,6 @@
 Pero mientras preparaba esa charla apareció una pregunta mucho más incómoda.
 &gt;&gt; Pausa. Deja que la pregunta llegue sola antes de proyectarla.</a:t>
             </a:r>
-            <a:endParaRPr lang="en-US" dirty="0"/>
           </a:p>
         </p:txBody>
       </p:sp>
@@ -2815,7 +2573,6 @@
 Alguien todavía tiene que escoger una.
 &gt;&gt; Aquí la charla deja de ser conceptual y se vuelve accionable. Cambia la energía: menos reflexión, más instrucción. Si vas corto de tiempo, este es el acto que se comprime — pero nunca se elimina, porque es lo único que el público se puede llevar y ejecutar el lunes.</a:t>
             </a:r>
-            <a:endParaRPr lang="en-US" dirty="0"/>
           </a:p>
         </p:txBody>
       </p:sp>
@@ -2922,7 +2679,6 @@
 Siete. Construiría evidencia de que sé hacer cosas.
 GitHub. Proyectos desplegados. Arquitecturas documentadas. Experimentos. Contribuciones. Certificaciones. Experiencia.</a:t>
             </a:r>
-            <a:endParaRPr lang="en-US" dirty="0"/>
           </a:p>
         </p:txBody>
       </p:sp>
@@ -3038,7 +2794,6 @@
 Alguien que quiera ser arquitecto y alguien que quiera trabajar en datos van a recorrer esa misma secuencia con contenidos distintos.
 También existen las microcredenciales, que a mí me parecen especialmente interesantes para quien está empezando: se evalúan en un entorno real de AWS, no con preguntas de selección múltiple. Hay temas como serverless, agentic AI, redes de aplicaciones y respuesta a incidentes. Y no requieren suscripción a Skill Builder.</a:t>
             </a:r>
-            <a:endParaRPr lang="en-US" dirty="0"/>
           </a:p>
         </p:txBody>
       </p:sp>
@@ -3133,7 +2888,6 @@
 La IA no reemplaza ninguna de las dos.
 Las tres cosas se complementan.</a:t>
             </a:r>
-            <a:endParaRPr lang="en-US" dirty="0"/>
           </a:p>
         </p:txBody>
       </p:sp>
@@ -3229,7 +2983,6 @@
 Porque el objetivo nunca fue aprender a escribir código.
 El objetivo era aprender a construir sistemas.</a:t>
             </a:r>
-            <a:endParaRPr lang="en-US" dirty="0"/>
           </a:p>
         </p:txBody>
       </p:sp>
@@ -3324,7 +3077,6 @@
 Porque la habilidad no es usar IA.
 La habilidad es hacer ingeniería con IA.</a:t>
             </a:r>
-            <a:endParaRPr lang="en-US" dirty="0"/>
           </a:p>
         </p:txBody>
       </p:sp>
@@ -3419,7 +3171,6 @@
 Tercera. El código ya no será la parte más difícil de construir software. El problema, los requisitos, la arquitectura, la seguridad, la operación, el costo y las decisiones siguen siendo difíciles.
 Y ahí sigue haciendo falta un ingeniero.</a:t>
             </a:r>
-            <a:endParaRPr lang="en-US" dirty="0"/>
           </a:p>
         </p:txBody>
       </p:sp>
@@ -3516,7 +3267,6 @@
 Así que no tengan miedo de que la inteligencia artificial aprenda a programar.
 Preocúpense por aprender ustedes a hacer ingeniería.</a:t>
             </a:r>
-            <a:endParaRPr lang="en-US" dirty="0"/>
           </a:p>
         </p:txBody>
       </p:sp>
@@ -3607,7 +3357,6 @@
 ----------------------------------------
 </a:t>
             </a:r>
-            <a:endParaRPr lang="en-US" dirty="0"/>
           </a:p>
         </p:txBody>
       </p:sp>
@@ -3698,7 +3447,6 @@
 ----------------------------------------
 Porque algo extraño está pasando en nuestra industria.</a:t>
             </a:r>
-            <a:endParaRPr lang="en-US" dirty="0"/>
           </a:p>
         </p:txBody>
       </p:sp>
@@ -3798,7 +3546,6 @@
 Pero con la inteligencia artificial empecé a pensar que estaba pasando algo distinto.
 &gt;&gt; Baja el ritmo aquí. Esta es la primera idea fuerte de la charla.</a:t>
             </a:r>
-            <a:endParaRPr lang="en-US" dirty="0"/>
           </a:p>
         </p:txBody>
       </p:sp>
@@ -3892,7 +3639,6 @@
 Puede escribir código. Puede crear pruebas. Puede explicar un repositorio completo. Puede modificar repositorios completos. Puede encontrar errores. Puede crear infraestructura. Puede proponer arquitecturas. Puede documentar. Puede tomar una tarea y empezar a implementarla sola.
 Entonces la pregunta dejó de ser una y pasó a ser otra.</a:t>
             </a:r>
-            <a:endParaRPr lang="en-US" dirty="0"/>
           </a:p>
         </p:txBody>
       </p:sp>
@@ -3983,7 +3729,6 @@
 ----------------------------------------
 </a:t>
             </a:r>
-            <a:endParaRPr lang="en-US" dirty="0"/>
           </a:p>
         </p:txBody>
       </p:sp>
@@ -4086,7 +3831,6 @@
 Tres perspectivas diferentes sobre el mismo cambio.
 &gt;&gt; Si el público es mayoritariamente estudiantes, pregunta a mano alzada quién se ha hecho la primera pregunta. Genera complicidad temprana.</a:t>
             </a:r>
-            <a:endParaRPr lang="en-US" dirty="0"/>
           </a:p>
         </p:txBody>
       </p:sp>
@@ -4186,7 +3930,6 @@
 &gt;&gt; Cada pregunta corresponde exactamente a un acto, en orden. Si proyectas esta pantalla entre actos, resalta la que estás por responder.
 No tengo una bola de cristal. Pero sí podemos mirar lo que está ocurriendo hoy y entender hacia dónde se está moviendo la profesión.</a:t>
             </a:r>
-            <a:endParaRPr lang="en-US" dirty="0"/>
           </a:p>
         </p:txBody>
       </p:sp>
@@ -4259,6 +4002,11 @@
 <file path=ppt/slideMasters/slideMaster1.xml><?xml version="1.0" encoding="utf-8"?>
 <p:sldMaster xmlns:a="http://schemas.openxmlformats.org/drawingml/2006/main" xmlns:r="http://schemas.openxmlformats.org/officeDocument/2006/relationships" xmlns:p="http://schemas.openxmlformats.org/presentationml/2006/main">
   <p:cSld>
+    <p:bg>
+      <p:bgRef idx="1001">
+        <a:schemeClr val="bg1"/>
+      </p:bgRef>
+    </p:bg>
     <p:spTree>
       <p:nvGrpSpPr>
         <p:cNvPr id="1" name=""/>
@@ -4541,6 +4289,7 @@
         <a:solidFill>
           <a:srgbClr val="161D2D"/>
         </a:solidFill>
+        <a:effectLst/>
       </p:bgPr>
     </p:bg>
     <p:spTree>
@@ -4578,7 +4327,7 @@
           <a:bodyPr wrap="square" lIns="0" tIns="0" rIns="0" bIns="0" rtlCol="0" anchor="ctr"/>
           <a:lstStyle/>
           <a:p>
-            <a:pPr algn="r" indent="0" marL="0">
+            <a:pPr marL="0" indent="0" algn="r">
               <a:buNone/>
             </a:pPr>
             <a:r>
@@ -4617,7 +4366,7 @@
           <a:bodyPr wrap="square" lIns="0" tIns="0" rIns="0" bIns="0" rtlCol="0" anchor="ctr"/>
           <a:lstStyle/>
           <a:p>
-            <a:pPr indent="0" marL="0">
+            <a:pPr marL="0" indent="0">
               <a:buNone/>
             </a:pPr>
             <a:r>
@@ -4656,7 +4405,7 @@
           <a:bodyPr wrap="square" lIns="0" tIns="0" rIns="0" bIns="0" rtlCol="0" anchor="ctr"/>
           <a:lstStyle/>
           <a:p>
-            <a:pPr indent="0" marL="0">
+            <a:pPr marL="0" indent="0">
               <a:buNone/>
             </a:pPr>
             <a:r>
@@ -4695,11 +4444,11 @@
           <a:bodyPr wrap="square" lIns="0" tIns="0" rIns="0" bIns="0" rtlCol="0" anchor="ctr"/>
           <a:lstStyle/>
           <a:p>
-            <a:pPr indent="0" marL="0">
-              <a:buNone/>
-            </a:pPr>
-            <a:r>
-              <a:rPr lang="en-US" sz="1700" spc="100" kern="0" dirty="0">
+            <a:pPr marL="0" indent="0">
+              <a:buNone/>
+            </a:pPr>
+            <a:r>
+              <a:rPr lang="en-US" sz="1700" kern="0" spc="100" dirty="0">
                 <a:solidFill>
                   <a:srgbClr val="8A93A8"/>
                 </a:solidFill>
@@ -4715,14 +4464,14 @@
       </p:sp>
       <p:pic>
         <p:nvPicPr>
-          <p:cNvPr id="7" name="Image 0" descr="/sessions/awesome-wizardly-sagan/mnt/charla-ia-aws-ug-cucuta/multimedia/aws_ug_cucuta_cover.jpeg">    </p:cNvPr>
+          <p:cNvPr id="7" name="Image 0" descr="/sessions/awesome-wizardly-sagan/mnt/charla-ia-aws-ug-cucuta/multimedia/aws_ug_cucuta_cover.jpeg"/>
           <p:cNvPicPr>
             <a:picLocks noChangeAspect="1"/>
           </p:cNvPicPr>
           <p:nvPr/>
         </p:nvPicPr>
         <p:blipFill>
-          <a:blip r:embed="rId1"/>
+          <a:blip r:embed="rId3"/>
           <a:stretch>
             <a:fillRect/>
           </a:stretch>
@@ -4753,6 +4502,7 @@
         <a:solidFill>
           <a:srgbClr val="161D2D"/>
         </a:solidFill>
+        <a:effectLst/>
       </p:bgPr>
     </p:bg>
     <p:spTree>
@@ -4790,7 +4540,7 @@
           <a:bodyPr wrap="square" lIns="0" tIns="0" rIns="0" bIns="0" rtlCol="0" anchor="ctr"/>
           <a:lstStyle/>
           <a:p>
-            <a:pPr algn="l" indent="0" marL="0">
+            <a:pPr marL="0" indent="0" algn="l">
               <a:buNone/>
             </a:pPr>
             <a:r>
@@ -4829,7 +4579,7 @@
           <a:bodyPr wrap="square" lIns="0" tIns="0" rIns="0" bIns="0" rtlCol="0" anchor="ctr"/>
           <a:lstStyle/>
           <a:p>
-            <a:pPr algn="r" indent="0" marL="0">
+            <a:pPr marL="0" indent="0" algn="r">
               <a:buNone/>
             </a:pPr>
             <a:r>
@@ -4849,14 +4599,14 @@
       </p:sp>
       <p:pic>
         <p:nvPicPr>
-          <p:cNvPr id="5" name="Image 0" descr="/sessions/awesome-wizardly-sagan/mnt/charla-ia-aws-ug-cucuta/multimedia/aws_ug_cucuta_logo.jpeg">    </p:cNvPr>
+          <p:cNvPr id="5" name="Image 0" descr="/sessions/awesome-wizardly-sagan/mnt/charla-ia-aws-ug-cucuta/multimedia/aws_ug_cucuta_logo.jpeg"/>
           <p:cNvPicPr>
             <a:picLocks noChangeAspect="1"/>
           </p:cNvPicPr>
           <p:nvPr/>
         </p:nvPicPr>
         <p:blipFill>
-          <a:blip r:embed="rId1">
+          <a:blip r:embed="rId3">
             <a:alphaModFix amt="75000"/>
           </a:blip>
           <a:stretch>
@@ -4894,7 +4644,7 @@
           <a:bodyPr wrap="square" lIns="0" tIns="0" rIns="0" bIns="0" rtlCol="0" anchor="ctr"/>
           <a:lstStyle/>
           <a:p>
-            <a:pPr algn="r" indent="0" marL="0">
+            <a:pPr marL="0" indent="0" algn="r">
               <a:buNone/>
             </a:pPr>
             <a:r>
@@ -4933,7 +4683,7 @@
           <a:bodyPr wrap="square" lIns="0" tIns="0" rIns="0" bIns="0" rtlCol="0" anchor="ctr"/>
           <a:lstStyle/>
           <a:p>
-            <a:pPr indent="0" marL="0">
+            <a:pPr marL="0" indent="0">
               <a:buNone/>
             </a:pPr>
             <a:r>
@@ -4972,7 +4722,7 @@
           <a:bodyPr wrap="square" lIns="0" tIns="0" rIns="0" bIns="0" rtlCol="0" anchor="ctr"/>
           <a:lstStyle/>
           <a:p>
-            <a:pPr algn="r" indent="0" marL="0">
+            <a:pPr marL="0" indent="0" algn="r">
               <a:buNone/>
             </a:pPr>
             <a:r>
@@ -5011,7 +4761,7 @@
           <a:bodyPr wrap="square" lIns="0" tIns="0" rIns="0" bIns="0" rtlCol="0" anchor="ctr"/>
           <a:lstStyle/>
           <a:p>
-            <a:pPr indent="0" marL="0">
+            <a:pPr marL="0" indent="0">
               <a:buNone/>
             </a:pPr>
             <a:r>
@@ -5050,7 +4800,7 @@
           <a:bodyPr wrap="square" lIns="0" tIns="0" rIns="0" bIns="0" rtlCol="0" anchor="ctr"/>
           <a:lstStyle/>
           <a:p>
-            <a:pPr algn="ctr" indent="0" marL="0">
+            <a:pPr marL="0" indent="0" algn="ctr">
               <a:buNone/>
             </a:pPr>
             <a:r>
@@ -5062,7 +4812,29 @@
                 <a:ea typeface="Arial" pitchFamily="34" charset="-122"/>
                 <a:cs typeface="Arial" pitchFamily="34" charset="-120"/>
               </a:rPr>
-              <a:t>¿Perdieron esas tres horas?</a:t>
+              <a:t>¿Se </a:t>
+            </a:r>
+            <a:r>
+              <a:rPr lang="en-US" sz="5000" b="1" dirty="0" err="1">
+                <a:solidFill>
+                  <a:srgbClr val="FFFFFF"/>
+                </a:solidFill>
+                <a:latin typeface="Arial" pitchFamily="34" charset="0"/>
+                <a:ea typeface="Arial" pitchFamily="34" charset="-122"/>
+                <a:cs typeface="Arial" pitchFamily="34" charset="-120"/>
+              </a:rPr>
+              <a:t>perdieron</a:t>
+            </a:r>
+            <a:r>
+              <a:rPr lang="en-US" sz="5000" b="1" dirty="0">
+                <a:solidFill>
+                  <a:srgbClr val="FFFFFF"/>
+                </a:solidFill>
+                <a:latin typeface="Arial" pitchFamily="34" charset="0"/>
+                <a:ea typeface="Arial" pitchFamily="34" charset="-122"/>
+                <a:cs typeface="Arial" pitchFamily="34" charset="-120"/>
+              </a:rPr>
+              <a:t> esas tres horas?</a:t>
             </a:r>
             <a:endParaRPr lang="en-US" sz="5000" dirty="0"/>
           </a:p>
@@ -5084,6 +4856,7 @@
         <a:solidFill>
           <a:srgbClr val="161D2D"/>
         </a:solidFill>
+        <a:effectLst/>
       </p:bgPr>
     </p:bg>
     <p:spTree>
@@ -5121,7 +4894,7 @@
           <a:bodyPr wrap="square" lIns="0" tIns="0" rIns="0" bIns="0" rtlCol="0" anchor="ctr"/>
           <a:lstStyle/>
           <a:p>
-            <a:pPr algn="l" indent="0" marL="0">
+            <a:pPr marL="0" indent="0" algn="l">
               <a:buNone/>
             </a:pPr>
             <a:r>
@@ -5160,7 +4933,7 @@
           <a:bodyPr wrap="square" lIns="0" tIns="0" rIns="0" bIns="0" rtlCol="0" anchor="ctr"/>
           <a:lstStyle/>
           <a:p>
-            <a:pPr algn="r" indent="0" marL="0">
+            <a:pPr marL="0" indent="0" algn="r">
               <a:buNone/>
             </a:pPr>
             <a:r>
@@ -5180,14 +4953,14 @@
       </p:sp>
       <p:pic>
         <p:nvPicPr>
-          <p:cNvPr id="5" name="Image 0" descr="/sessions/awesome-wizardly-sagan/mnt/charla-ia-aws-ug-cucuta/multimedia/aws_ug_cucuta_logo.jpeg">    </p:cNvPr>
+          <p:cNvPr id="5" name="Image 0" descr="/sessions/awesome-wizardly-sagan/mnt/charla-ia-aws-ug-cucuta/multimedia/aws_ug_cucuta_logo.jpeg"/>
           <p:cNvPicPr>
             <a:picLocks noChangeAspect="1"/>
           </p:cNvPicPr>
           <p:nvPr/>
         </p:nvPicPr>
         <p:blipFill>
-          <a:blip r:embed="rId1">
+          <a:blip r:embed="rId3">
             <a:alphaModFix amt="75000"/>
           </a:blip>
           <a:stretch>
@@ -5225,11 +4998,11 @@
           <a:bodyPr wrap="square" lIns="0" tIns="0" rIns="0" bIns="0" rtlCol="0" anchor="ctr"/>
           <a:lstStyle/>
           <a:p>
-            <a:pPr indent="0" marL="0">
-              <a:buNone/>
-            </a:pPr>
-            <a:r>
-              <a:rPr lang="en-US" sz="1200" b="1" spc="200" kern="0" dirty="0">
+            <a:pPr marL="0" indent="0">
+              <a:buNone/>
+            </a:pPr>
+            <a:r>
+              <a:rPr lang="en-US" sz="1200" b="1" kern="0" spc="200" dirty="0">
                 <a:solidFill>
                   <a:srgbClr val="9257F1"/>
                 </a:solidFill>
@@ -5264,7 +5037,7 @@
           <a:bodyPr wrap="square" lIns="0" tIns="0" rIns="0" bIns="0" rtlCol="0" anchor="t"/>
           <a:lstStyle/>
           <a:p>
-            <a:pPr indent="0" marL="0">
+            <a:pPr marL="0" indent="0">
               <a:buNone/>
             </a:pPr>
             <a:r>
@@ -5291,7 +5064,7 @@
         <p:spPr>
           <a:xfrm>
             <a:off x="822960" y="2103120"/>
-            <a:ext cx="2396414" cy="3291840"/>
+            <a:ext cx="2396414" cy="3529584"/>
           </a:xfrm>
           <a:prstGeom prst="rect">
             <a:avLst/>
@@ -5306,6 +5079,13 @@
             <a:prstDash val="solid"/>
           </a:ln>
         </p:spPr>
+        <p:txBody>
+          <a:bodyPr/>
+          <a:lstStyle/>
+          <a:p>
+            <a:endParaRPr lang="en-CO"/>
+          </a:p>
+        </p:txBody>
       </p:sp>
       <p:sp>
         <p:nvSpPr>
@@ -5328,11 +5108,11 @@
           <a:bodyPr wrap="square" lIns="0" tIns="0" rIns="0" bIns="0" rtlCol="0" anchor="ctr"/>
           <a:lstStyle/>
           <a:p>
-            <a:pPr indent="0" marL="0">
-              <a:buNone/>
-            </a:pPr>
-            <a:r>
-              <a:rPr lang="en-US" sz="1200" b="1" spc="200" kern="0" dirty="0">
+            <a:pPr marL="0" indent="0">
+              <a:buNone/>
+            </a:pPr>
+            <a:r>
+              <a:rPr lang="en-US" sz="1200" b="1" kern="0" spc="200" dirty="0">
                 <a:solidFill>
                   <a:srgbClr val="9257F1"/>
                 </a:solidFill>
@@ -5367,7 +5147,7 @@
           <a:bodyPr wrap="square" lIns="0" tIns="0" rIns="0" bIns="0" rtlCol="0" anchor="t"/>
           <a:lstStyle/>
           <a:p>
-            <a:pPr indent="0" marL="0">
+            <a:pPr marL="0" indent="0">
               <a:lnSpc>
                 <a:spcPts val="2600"/>
               </a:lnSpc>
@@ -5387,7 +5167,7 @@
             <a:endParaRPr lang="en-US" sz="1500" dirty="0"/>
           </a:p>
           <a:p>
-            <a:pPr indent="0" marL="0">
+            <a:pPr marL="0" indent="0">
               <a:lnSpc>
                 <a:spcPts val="2600"/>
               </a:lnSpc>
@@ -5396,7 +5176,7 @@
             <a:endParaRPr lang="en-US" sz="1500" dirty="0"/>
           </a:p>
           <a:p>
-            <a:pPr indent="0" marL="0">
+            <a:pPr marL="0" indent="0">
               <a:lnSpc>
                 <a:spcPts val="2600"/>
               </a:lnSpc>
@@ -5426,7 +5206,7 @@
         <p:spPr>
           <a:xfrm>
             <a:off x="3539414" y="2103120"/>
-            <a:ext cx="2396414" cy="3291840"/>
+            <a:ext cx="2396414" cy="3529584"/>
           </a:xfrm>
           <a:prstGeom prst="rect">
             <a:avLst/>
@@ -5441,6 +5221,13 @@
             <a:prstDash val="solid"/>
           </a:ln>
         </p:spPr>
+        <p:txBody>
+          <a:bodyPr/>
+          <a:lstStyle/>
+          <a:p>
+            <a:endParaRPr lang="en-CO"/>
+          </a:p>
+        </p:txBody>
       </p:sp>
       <p:sp>
         <p:nvSpPr>
@@ -5463,11 +5250,11 @@
           <a:bodyPr wrap="square" lIns="0" tIns="0" rIns="0" bIns="0" rtlCol="0" anchor="ctr"/>
           <a:lstStyle/>
           <a:p>
-            <a:pPr indent="0" marL="0">
-              <a:buNone/>
-            </a:pPr>
-            <a:r>
-              <a:rPr lang="en-US" sz="1200" b="1" spc="200" kern="0" dirty="0">
+            <a:pPr marL="0" indent="0">
+              <a:buNone/>
+            </a:pPr>
+            <a:r>
+              <a:rPr lang="en-US" sz="1200" b="1" kern="0" spc="200" dirty="0">
                 <a:solidFill>
                   <a:srgbClr val="9257F1"/>
                 </a:solidFill>
@@ -5502,7 +5289,7 @@
           <a:bodyPr wrap="square" lIns="0" tIns="0" rIns="0" bIns="0" rtlCol="0" anchor="t"/>
           <a:lstStyle/>
           <a:p>
-            <a:pPr indent="0" marL="0">
+            <a:pPr marL="0" indent="0">
               <a:lnSpc>
                 <a:spcPts val="2600"/>
               </a:lnSpc>
@@ -5522,7 +5309,7 @@
             <a:endParaRPr lang="en-US" sz="1500" dirty="0"/>
           </a:p>
           <a:p>
-            <a:pPr indent="0" marL="0">
+            <a:pPr marL="0" indent="0">
               <a:lnSpc>
                 <a:spcPts val="2600"/>
               </a:lnSpc>
@@ -5531,7 +5318,7 @@
             <a:endParaRPr lang="en-US" sz="1500" dirty="0"/>
           </a:p>
           <a:p>
-            <a:pPr indent="0" marL="0">
+            <a:pPr marL="0" indent="0">
               <a:lnSpc>
                 <a:spcPts val="2600"/>
               </a:lnSpc>
@@ -5561,7 +5348,7 @@
         <p:spPr>
           <a:xfrm>
             <a:off x="6255868" y="2103120"/>
-            <a:ext cx="2396414" cy="3291840"/>
+            <a:ext cx="2396414" cy="3529584"/>
           </a:xfrm>
           <a:prstGeom prst="rect">
             <a:avLst/>
@@ -5576,6 +5363,13 @@
             <a:prstDash val="solid"/>
           </a:ln>
         </p:spPr>
+        <p:txBody>
+          <a:bodyPr/>
+          <a:lstStyle/>
+          <a:p>
+            <a:endParaRPr lang="en-CO"/>
+          </a:p>
+        </p:txBody>
       </p:sp>
       <p:sp>
         <p:nvSpPr>
@@ -5598,11 +5392,11 @@
           <a:bodyPr wrap="square" lIns="0" tIns="0" rIns="0" bIns="0" rtlCol="0" anchor="ctr"/>
           <a:lstStyle/>
           <a:p>
-            <a:pPr indent="0" marL="0">
-              <a:buNone/>
-            </a:pPr>
-            <a:r>
-              <a:rPr lang="en-US" sz="1200" b="1" spc="200" kern="0" dirty="0">
+            <a:pPr marL="0" indent="0">
+              <a:buNone/>
+            </a:pPr>
+            <a:r>
+              <a:rPr lang="en-US" sz="1200" b="1" kern="0" spc="200" dirty="0">
                 <a:solidFill>
                   <a:srgbClr val="9257F1"/>
                 </a:solidFill>
@@ -5637,7 +5431,7 @@
           <a:bodyPr wrap="square" lIns="0" tIns="0" rIns="0" bIns="0" rtlCol="0" anchor="t"/>
           <a:lstStyle/>
           <a:p>
-            <a:pPr indent="0" marL="0">
+            <a:pPr marL="0" indent="0">
               <a:lnSpc>
                 <a:spcPts val="2600"/>
               </a:lnSpc>
@@ -5657,7 +5451,7 @@
             <a:endParaRPr lang="en-US" sz="1500" dirty="0"/>
           </a:p>
           <a:p>
-            <a:pPr indent="0" marL="0">
+            <a:pPr marL="0" indent="0">
               <a:lnSpc>
                 <a:spcPts val="2600"/>
               </a:lnSpc>
@@ -5666,7 +5460,7 @@
             <a:endParaRPr lang="en-US" sz="1500" dirty="0"/>
           </a:p>
           <a:p>
-            <a:pPr indent="0" marL="0">
+            <a:pPr marL="0" indent="0">
               <a:lnSpc>
                 <a:spcPts val="2600"/>
               </a:lnSpc>
@@ -5696,7 +5490,7 @@
         <p:spPr>
           <a:xfrm>
             <a:off x="8972321" y="2103120"/>
-            <a:ext cx="2396414" cy="3291840"/>
+            <a:ext cx="2396414" cy="3529584"/>
           </a:xfrm>
           <a:prstGeom prst="rect">
             <a:avLst/>
@@ -5711,6 +5505,13 @@
             <a:prstDash val="solid"/>
           </a:ln>
         </p:spPr>
+        <p:txBody>
+          <a:bodyPr/>
+          <a:lstStyle/>
+          <a:p>
+            <a:endParaRPr lang="en-CO"/>
+          </a:p>
+        </p:txBody>
       </p:sp>
       <p:sp>
         <p:nvSpPr>
@@ -5733,11 +5534,11 @@
           <a:bodyPr wrap="square" lIns="0" tIns="0" rIns="0" bIns="0" rtlCol="0" anchor="ctr"/>
           <a:lstStyle/>
           <a:p>
-            <a:pPr indent="0" marL="0">
-              <a:buNone/>
-            </a:pPr>
-            <a:r>
-              <a:rPr lang="en-US" sz="1200" b="1" spc="200" kern="0" dirty="0">
+            <a:pPr marL="0" indent="0">
+              <a:buNone/>
+            </a:pPr>
+            <a:r>
+              <a:rPr lang="en-US" sz="1200" b="1" kern="0" spc="200" dirty="0">
                 <a:solidFill>
                   <a:srgbClr val="9257F1"/>
                 </a:solidFill>
@@ -5772,7 +5573,7 @@
           <a:bodyPr wrap="square" lIns="0" tIns="0" rIns="0" bIns="0" rtlCol="0" anchor="t"/>
           <a:lstStyle/>
           <a:p>
-            <a:pPr indent="0" marL="0">
+            <a:pPr marL="0" indent="0">
               <a:lnSpc>
                 <a:spcPts val="2600"/>
               </a:lnSpc>
@@ -5792,7 +5593,7 @@
             <a:endParaRPr lang="en-US" sz="1500" dirty="0"/>
           </a:p>
           <a:p>
-            <a:pPr indent="0" marL="0">
+            <a:pPr marL="0" indent="0">
               <a:lnSpc>
                 <a:spcPts val="2600"/>
               </a:lnSpc>
@@ -5801,7 +5602,7 @@
             <a:endParaRPr lang="en-US" sz="1500" dirty="0"/>
           </a:p>
           <a:p>
-            <a:pPr indent="0" marL="0">
+            <a:pPr marL="0" indent="0">
               <a:lnSpc>
                 <a:spcPts val="2600"/>
               </a:lnSpc>
@@ -5830,7 +5631,7 @@
         </p:nvSpPr>
         <p:spPr>
           <a:xfrm>
-            <a:off x="822960" y="5669280"/>
+            <a:off x="822960" y="5821785"/>
             <a:ext cx="10545775" cy="365760"/>
           </a:xfrm>
           <a:prstGeom prst="rect">
@@ -5843,7 +5644,7 @@
           <a:bodyPr wrap="square" lIns="0" tIns="0" rIns="0" bIns="0" rtlCol="0" anchor="ctr"/>
           <a:lstStyle/>
           <a:p>
-            <a:pPr indent="0" marL="0">
+            <a:pPr marL="0" indent="0">
               <a:buNone/>
             </a:pPr>
             <a:r>
@@ -5877,6 +5678,7 @@
         <a:solidFill>
           <a:srgbClr val="161D2D"/>
         </a:solidFill>
+        <a:effectLst/>
       </p:bgPr>
     </p:bg>
     <p:spTree>
@@ -5914,7 +5716,7 @@
           <a:bodyPr wrap="square" lIns="0" tIns="0" rIns="0" bIns="0" rtlCol="0" anchor="ctr"/>
           <a:lstStyle/>
           <a:p>
-            <a:pPr algn="l" indent="0" marL="0">
+            <a:pPr marL="0" indent="0" algn="l">
               <a:buNone/>
             </a:pPr>
             <a:r>
@@ -5953,7 +5755,7 @@
           <a:bodyPr wrap="square" lIns="0" tIns="0" rIns="0" bIns="0" rtlCol="0" anchor="ctr"/>
           <a:lstStyle/>
           <a:p>
-            <a:pPr algn="r" indent="0" marL="0">
+            <a:pPr marL="0" indent="0" algn="r">
               <a:buNone/>
             </a:pPr>
             <a:r>
@@ -5973,14 +5775,14 @@
       </p:sp>
       <p:pic>
         <p:nvPicPr>
-          <p:cNvPr id="5" name="Image 0" descr="/sessions/awesome-wizardly-sagan/mnt/charla-ia-aws-ug-cucuta/multimedia/aws_ug_cucuta_logo.jpeg">    </p:cNvPr>
+          <p:cNvPr id="5" name="Image 0" descr="/sessions/awesome-wizardly-sagan/mnt/charla-ia-aws-ug-cucuta/multimedia/aws_ug_cucuta_logo.jpeg"/>
           <p:cNvPicPr>
             <a:picLocks noChangeAspect="1"/>
           </p:cNvPicPr>
           <p:nvPr/>
         </p:nvPicPr>
         <p:blipFill>
-          <a:blip r:embed="rId1">
+          <a:blip r:embed="rId3">
             <a:alphaModFix amt="75000"/>
           </a:blip>
           <a:stretch>
@@ -6018,11 +5820,11 @@
           <a:bodyPr wrap="square" lIns="0" tIns="0" rIns="0" bIns="0" rtlCol="0" anchor="ctr"/>
           <a:lstStyle/>
           <a:p>
-            <a:pPr indent="0" marL="0">
-              <a:buNone/>
-            </a:pPr>
-            <a:r>
-              <a:rPr lang="en-US" sz="1200" b="1" spc="200" kern="0" dirty="0">
+            <a:pPr marL="0" indent="0">
+              <a:buNone/>
+            </a:pPr>
+            <a:r>
+              <a:rPr lang="en-US" sz="1200" b="1" kern="0" spc="200" dirty="0">
                 <a:solidFill>
                   <a:srgbClr val="9257F1"/>
                 </a:solidFill>
@@ -6057,7 +5859,7 @@
           <a:bodyPr wrap="square" lIns="0" tIns="0" rIns="0" bIns="0" rtlCol="0" anchor="ctr"/>
           <a:lstStyle/>
           <a:p>
-            <a:pPr algn="r" indent="0" marL="0">
+            <a:pPr marL="0" indent="0" algn="r">
               <a:buNone/>
             </a:pPr>
             <a:r>
@@ -6096,7 +5898,7 @@
           <a:bodyPr wrap="square" lIns="0" tIns="0" rIns="0" bIns="0" rtlCol="0" anchor="ctr"/>
           <a:lstStyle/>
           <a:p>
-            <a:pPr indent="0" marL="0">
+            <a:pPr marL="0" indent="0">
               <a:buNone/>
             </a:pPr>
             <a:r>
@@ -6135,7 +5937,7 @@
           <a:bodyPr wrap="square" lIns="0" tIns="0" rIns="0" bIns="0" rtlCol="0" anchor="ctr"/>
           <a:lstStyle/>
           <a:p>
-            <a:pPr algn="r" indent="0" marL="0">
+            <a:pPr marL="0" indent="0" algn="r">
               <a:buNone/>
             </a:pPr>
             <a:r>
@@ -6174,7 +5976,7 @@
           <a:bodyPr wrap="square" lIns="0" tIns="0" rIns="0" bIns="0" rtlCol="0" anchor="ctr"/>
           <a:lstStyle/>
           <a:p>
-            <a:pPr indent="0" marL="0">
+            <a:pPr marL="0" indent="0">
               <a:buNone/>
             </a:pPr>
             <a:r>
@@ -6213,7 +6015,7 @@
           <a:bodyPr wrap="square" lIns="0" tIns="0" rIns="0" bIns="0" rtlCol="0" anchor="ctr"/>
           <a:lstStyle/>
           <a:p>
-            <a:pPr algn="r" indent="0" marL="0">
+            <a:pPr marL="0" indent="0" algn="r">
               <a:buNone/>
             </a:pPr>
             <a:r>
@@ -6252,7 +6054,7 @@
           <a:bodyPr wrap="square" lIns="0" tIns="0" rIns="0" bIns="0" rtlCol="0" anchor="ctr"/>
           <a:lstStyle/>
           <a:p>
-            <a:pPr indent="0" marL="0">
+            <a:pPr marL="0" indent="0">
               <a:buNone/>
             </a:pPr>
             <a:r>
@@ -6291,7 +6093,7 @@
           <a:bodyPr wrap="square" lIns="0" tIns="0" rIns="0" bIns="0" rtlCol="0" anchor="ctr"/>
           <a:lstStyle/>
           <a:p>
-            <a:pPr algn="r" indent="0" marL="0">
+            <a:pPr marL="0" indent="0" algn="r">
               <a:buNone/>
             </a:pPr>
             <a:r>
@@ -6330,7 +6132,7 @@
           <a:bodyPr wrap="square" lIns="0" tIns="0" rIns="0" bIns="0" rtlCol="0" anchor="ctr"/>
           <a:lstStyle/>
           <a:p>
-            <a:pPr indent="0" marL="0">
+            <a:pPr marL="0" indent="0">
               <a:buNone/>
             </a:pPr>
             <a:r>
@@ -6364,6 +6166,7 @@
         <a:solidFill>
           <a:srgbClr val="161D2D"/>
         </a:solidFill>
+        <a:effectLst/>
       </p:bgPr>
     </p:bg>
     <p:spTree>
@@ -6401,7 +6204,7 @@
           <a:bodyPr wrap="square" lIns="0" tIns="0" rIns="0" bIns="0" rtlCol="0" anchor="ctr"/>
           <a:lstStyle/>
           <a:p>
-            <a:pPr algn="l" indent="0" marL="0">
+            <a:pPr marL="0" indent="0" algn="l">
               <a:buNone/>
             </a:pPr>
             <a:r>
@@ -6440,7 +6243,7 @@
           <a:bodyPr wrap="square" lIns="0" tIns="0" rIns="0" bIns="0" rtlCol="0" anchor="ctr"/>
           <a:lstStyle/>
           <a:p>
-            <a:pPr algn="r" indent="0" marL="0">
+            <a:pPr marL="0" indent="0" algn="r">
               <a:buNone/>
             </a:pPr>
             <a:r>
@@ -6460,14 +6263,14 @@
       </p:sp>
       <p:pic>
         <p:nvPicPr>
-          <p:cNvPr id="5" name="Image 0" descr="/sessions/awesome-wizardly-sagan/mnt/charla-ia-aws-ug-cucuta/multimedia/aws_ug_cucuta_logo.jpeg">    </p:cNvPr>
+          <p:cNvPr id="5" name="Image 0" descr="/sessions/awesome-wizardly-sagan/mnt/charla-ia-aws-ug-cucuta/multimedia/aws_ug_cucuta_logo.jpeg"/>
           <p:cNvPicPr>
             <a:picLocks noChangeAspect="1"/>
           </p:cNvPicPr>
           <p:nvPr/>
         </p:nvPicPr>
         <p:blipFill>
-          <a:blip r:embed="rId1">
+          <a:blip r:embed="rId3">
             <a:alphaModFix amt="75000"/>
           </a:blip>
           <a:stretch>
@@ -6505,7 +6308,7 @@
           <a:bodyPr wrap="square" lIns="0" tIns="0" rIns="0" bIns="0" rtlCol="0" anchor="ctr"/>
           <a:lstStyle/>
           <a:p>
-            <a:pPr algn="ctr" indent="0" marL="0">
+            <a:pPr marL="0" indent="0" algn="ctr">
               <a:lnSpc>
                 <a:spcPts val="4600"/>
               </a:lnSpc>
@@ -6525,7 +6328,7 @@
             <a:endParaRPr lang="en-US" sz="4200" dirty="0"/>
           </a:p>
           <a:p>
-            <a:pPr algn="ctr" indent="0" marL="0">
+            <a:pPr marL="0" indent="0" algn="ctr">
               <a:lnSpc>
                 <a:spcPts val="4600"/>
               </a:lnSpc>
@@ -6562,6 +6365,7 @@
         <a:solidFill>
           <a:srgbClr val="161D2D"/>
         </a:solidFill>
+        <a:effectLst/>
       </p:bgPr>
     </p:bg>
     <p:spTree>
@@ -6599,7 +6403,7 @@
           <a:bodyPr wrap="square" lIns="0" tIns="0" rIns="0" bIns="0" rtlCol="0" anchor="ctr"/>
           <a:lstStyle/>
           <a:p>
-            <a:pPr algn="l" indent="0" marL="0">
+            <a:pPr marL="0" indent="0" algn="l">
               <a:buNone/>
             </a:pPr>
             <a:r>
@@ -6638,7 +6442,7 @@
           <a:bodyPr wrap="square" lIns="0" tIns="0" rIns="0" bIns="0" rtlCol="0" anchor="ctr"/>
           <a:lstStyle/>
           <a:p>
-            <a:pPr algn="r" indent="0" marL="0">
+            <a:pPr marL="0" indent="0" algn="r">
               <a:buNone/>
             </a:pPr>
             <a:r>
@@ -6658,14 +6462,14 @@
       </p:sp>
       <p:pic>
         <p:nvPicPr>
-          <p:cNvPr id="5" name="Image 0" descr="/sessions/awesome-wizardly-sagan/mnt/charla-ia-aws-ug-cucuta/multimedia/aws_ug_cucuta_logo.jpeg">    </p:cNvPr>
+          <p:cNvPr id="5" name="Image 0" descr="/sessions/awesome-wizardly-sagan/mnt/charla-ia-aws-ug-cucuta/multimedia/aws_ug_cucuta_logo.jpeg"/>
           <p:cNvPicPr>
             <a:picLocks noChangeAspect="1"/>
           </p:cNvPicPr>
           <p:nvPr/>
         </p:nvPicPr>
         <p:blipFill>
-          <a:blip r:embed="rId1">
+          <a:blip r:embed="rId3">
             <a:alphaModFix amt="75000"/>
           </a:blip>
           <a:stretch>
@@ -6703,7 +6507,7 @@
           <a:bodyPr wrap="square" lIns="0" tIns="0" rIns="0" bIns="0" rtlCol="0" anchor="ctr"/>
           <a:lstStyle/>
           <a:p>
-            <a:pPr algn="ctr" indent="0" marL="0">
+            <a:pPr marL="0" indent="0" algn="ctr">
               <a:lnSpc>
                 <a:spcPts val="4600"/>
               </a:lnSpc>
@@ -6723,7 +6527,7 @@
             <a:endParaRPr lang="en-US" sz="4200" dirty="0"/>
           </a:p>
           <a:p>
-            <a:pPr algn="ctr" indent="0" marL="0">
+            <a:pPr marL="0" indent="0" algn="ctr">
               <a:lnSpc>
                 <a:spcPts val="4600"/>
               </a:lnSpc>
@@ -6760,6 +6564,7 @@
         <a:solidFill>
           <a:srgbClr val="161D2D"/>
         </a:solidFill>
+        <a:effectLst/>
       </p:bgPr>
     </p:bg>
     <p:spTree>
@@ -6797,7 +6602,7 @@
           <a:bodyPr wrap="square" lIns="0" tIns="0" rIns="0" bIns="0" rtlCol="0" anchor="ctr"/>
           <a:lstStyle/>
           <a:p>
-            <a:pPr algn="l" indent="0" marL="0">
+            <a:pPr marL="0" indent="0" algn="l">
               <a:buNone/>
             </a:pPr>
             <a:r>
@@ -6836,7 +6641,7 @@
           <a:bodyPr wrap="square" lIns="0" tIns="0" rIns="0" bIns="0" rtlCol="0" anchor="ctr"/>
           <a:lstStyle/>
           <a:p>
-            <a:pPr algn="r" indent="0" marL="0">
+            <a:pPr marL="0" indent="0" algn="r">
               <a:buNone/>
             </a:pPr>
             <a:r>
@@ -6856,14 +6661,14 @@
       </p:sp>
       <p:pic>
         <p:nvPicPr>
-          <p:cNvPr id="5" name="Image 0" descr="/sessions/awesome-wizardly-sagan/mnt/charla-ia-aws-ug-cucuta/multimedia/aws_ug_cucuta_logo.jpeg">    </p:cNvPr>
+          <p:cNvPr id="5" name="Image 0" descr="/sessions/awesome-wizardly-sagan/mnt/charla-ia-aws-ug-cucuta/multimedia/aws_ug_cucuta_logo.jpeg"/>
           <p:cNvPicPr>
             <a:picLocks noChangeAspect="1"/>
           </p:cNvPicPr>
           <p:nvPr/>
         </p:nvPicPr>
         <p:blipFill>
-          <a:blip r:embed="rId1">
+          <a:blip r:embed="rId3">
             <a:alphaModFix amt="75000"/>
           </a:blip>
           <a:stretch>
@@ -6901,11 +6706,11 @@
           <a:bodyPr wrap="square" lIns="0" tIns="0" rIns="0" bIns="0" rtlCol="0" anchor="ctr"/>
           <a:lstStyle/>
           <a:p>
-            <a:pPr indent="0" marL="0">
-              <a:buNone/>
-            </a:pPr>
-            <a:r>
-              <a:rPr lang="en-US" sz="1200" b="1" spc="200" kern="0" dirty="0">
+            <a:pPr marL="0" indent="0">
+              <a:buNone/>
+            </a:pPr>
+            <a:r>
+              <a:rPr lang="en-US" sz="1200" b="1" kern="0" spc="200" dirty="0">
                 <a:solidFill>
                   <a:srgbClr val="9257F1"/>
                 </a:solidFill>
@@ -6940,7 +6745,7 @@
           <a:bodyPr wrap="square" lIns="0" tIns="0" rIns="0" bIns="0" rtlCol="0" anchor="ctr"/>
           <a:lstStyle/>
           <a:p>
-            <a:pPr indent="0" marL="0">
+            <a:pPr marL="0" indent="0">
               <a:buNone/>
             </a:pPr>
             <a:r>
@@ -6979,7 +6784,7 @@
           <a:bodyPr wrap="square" lIns="0" tIns="0" rIns="0" bIns="0" rtlCol="0" anchor="ctr"/>
           <a:lstStyle/>
           <a:p>
-            <a:pPr indent="0" marL="0">
+            <a:pPr marL="0" indent="0">
               <a:buNone/>
             </a:pPr>
             <a:r>
@@ -7018,7 +6823,7 @@
           <a:bodyPr wrap="square" lIns="0" tIns="0" rIns="0" bIns="0" rtlCol="0" anchor="ctr"/>
           <a:lstStyle/>
           <a:p>
-            <a:pPr indent="0" marL="0">
+            <a:pPr marL="0" indent="0">
               <a:buNone/>
             </a:pPr>
             <a:r>
@@ -7057,7 +6862,7 @@
           <a:bodyPr wrap="square" lIns="0" tIns="0" rIns="0" bIns="0" rtlCol="0" anchor="ctr"/>
           <a:lstStyle/>
           <a:p>
-            <a:pPr indent="0" marL="0">
+            <a:pPr marL="0" indent="0">
               <a:buNone/>
             </a:pPr>
             <a:r>
@@ -7096,7 +6901,7 @@
           <a:bodyPr wrap="square" lIns="0" tIns="0" rIns="0" bIns="0" rtlCol="0" anchor="ctr"/>
           <a:lstStyle/>
           <a:p>
-            <a:pPr indent="0" marL="0">
+            <a:pPr marL="0" indent="0">
               <a:buNone/>
             </a:pPr>
             <a:r>
@@ -7135,7 +6940,7 @@
           <a:bodyPr wrap="square" lIns="0" tIns="0" rIns="0" bIns="0" rtlCol="0" anchor="ctr"/>
           <a:lstStyle/>
           <a:p>
-            <a:pPr indent="0" marL="0">
+            <a:pPr marL="0" indent="0">
               <a:buNone/>
             </a:pPr>
             <a:r>
@@ -7174,7 +6979,7 @@
           <a:bodyPr wrap="square" lIns="0" tIns="0" rIns="0" bIns="0" rtlCol="0" anchor="ctr"/>
           <a:lstStyle/>
           <a:p>
-            <a:pPr indent="0" marL="0">
+            <a:pPr marL="0" indent="0">
               <a:buNone/>
             </a:pPr>
             <a:r>
@@ -7213,7 +7018,7 @@
           <a:bodyPr wrap="square" lIns="0" tIns="0" rIns="0" bIns="0" rtlCol="0" anchor="ctr"/>
           <a:lstStyle/>
           <a:p>
-            <a:pPr indent="0" marL="0">
+            <a:pPr marL="0" indent="0">
               <a:buNone/>
             </a:pPr>
             <a:r>
@@ -7252,7 +7057,7 @@
           <a:bodyPr wrap="square" lIns="0" tIns="0" rIns="0" bIns="0" rtlCol="0" anchor="ctr"/>
           <a:lstStyle/>
           <a:p>
-            <a:pPr indent="0" marL="0">
+            <a:pPr marL="0" indent="0">
               <a:buNone/>
             </a:pPr>
             <a:r>
@@ -7286,6 +7091,7 @@
         <a:solidFill>
           <a:srgbClr val="161D2D"/>
         </a:solidFill>
+        <a:effectLst/>
       </p:bgPr>
     </p:bg>
     <p:spTree>
@@ -7323,7 +7129,7 @@
           <a:bodyPr wrap="square" lIns="0" tIns="0" rIns="0" bIns="0" rtlCol="0" anchor="ctr"/>
           <a:lstStyle/>
           <a:p>
-            <a:pPr algn="l" indent="0" marL="0">
+            <a:pPr marL="0" indent="0" algn="l">
               <a:buNone/>
             </a:pPr>
             <a:r>
@@ -7362,7 +7168,7 @@
           <a:bodyPr wrap="square" lIns="0" tIns="0" rIns="0" bIns="0" rtlCol="0" anchor="ctr"/>
           <a:lstStyle/>
           <a:p>
-            <a:pPr algn="r" indent="0" marL="0">
+            <a:pPr marL="0" indent="0" algn="r">
               <a:buNone/>
             </a:pPr>
             <a:r>
@@ -7382,14 +7188,14 @@
       </p:sp>
       <p:pic>
         <p:nvPicPr>
-          <p:cNvPr id="5" name="Image 0" descr="/sessions/awesome-wizardly-sagan/mnt/charla-ia-aws-ug-cucuta/multimedia/aws_ug_cucuta_logo.jpeg">    </p:cNvPr>
+          <p:cNvPr id="5" name="Image 0" descr="/sessions/awesome-wizardly-sagan/mnt/charla-ia-aws-ug-cucuta/multimedia/aws_ug_cucuta_logo.jpeg"/>
           <p:cNvPicPr>
             <a:picLocks noChangeAspect="1"/>
           </p:cNvPicPr>
           <p:nvPr/>
         </p:nvPicPr>
         <p:blipFill>
-          <a:blip r:embed="rId1">
+          <a:blip r:embed="rId3">
             <a:alphaModFix amt="75000"/>
           </a:blip>
           <a:stretch>
@@ -7427,11 +7233,11 @@
           <a:bodyPr wrap="square" lIns="0" tIns="0" rIns="0" bIns="0" rtlCol="0" anchor="ctr"/>
           <a:lstStyle/>
           <a:p>
-            <a:pPr indent="0" marL="0">
-              <a:buNone/>
-            </a:pPr>
-            <a:r>
-              <a:rPr lang="en-US" sz="1200" b="1" spc="200" kern="0" dirty="0">
+            <a:pPr marL="0" indent="0">
+              <a:buNone/>
+            </a:pPr>
+            <a:r>
+              <a:rPr lang="en-US" sz="1200" b="1" kern="0" spc="200" dirty="0">
                 <a:solidFill>
                   <a:srgbClr val="9257F1"/>
                 </a:solidFill>
@@ -7466,7 +7272,7 @@
           <a:bodyPr wrap="square" lIns="0" tIns="0" rIns="0" bIns="0" rtlCol="0" anchor="ctr"/>
           <a:lstStyle/>
           <a:p>
-            <a:pPr algn="ctr" indent="0" marL="0">
+            <a:pPr marL="0" indent="0" algn="ctr">
               <a:buNone/>
             </a:pPr>
             <a:r>
@@ -7505,7 +7311,7 @@
           <a:bodyPr wrap="square" lIns="0" tIns="0" rIns="0" bIns="0" rtlCol="0" anchor="ctr"/>
           <a:lstStyle/>
           <a:p>
-            <a:pPr algn="ctr" indent="0" marL="0">
+            <a:pPr marL="0" indent="0" algn="ctr">
               <a:buNone/>
             </a:pPr>
             <a:r>
@@ -7519,9 +7325,6 @@
               </a:rPr>
               <a:t>Problema  →  ingeniero  →  </a:t>
             </a:r>
-            <a:pPr algn="ctr" indent="0" marL="0">
-              <a:buNone/>
-            </a:pPr>
             <a:r>
               <a:rPr lang="en-US" sz="2400" b="1" dirty="0">
                 <a:solidFill>
@@ -7533,9 +7336,6 @@
               </a:rPr>
               <a:t>IA / agentes / herramientas</a:t>
             </a:r>
-            <a:pPr algn="ctr" indent="0" marL="0">
-              <a:buNone/>
-            </a:pPr>
             <a:r>
               <a:rPr lang="en-US" sz="2400" b="1" dirty="0">
                 <a:solidFill>
@@ -7567,6 +7367,7 @@
         <a:solidFill>
           <a:srgbClr val="161D2D"/>
         </a:solidFill>
+        <a:effectLst/>
       </p:bgPr>
     </p:bg>
     <p:spTree>
@@ -7604,7 +7405,7 @@
           <a:bodyPr wrap="square" lIns="0" tIns="0" rIns="0" bIns="0" rtlCol="0" anchor="ctr"/>
           <a:lstStyle/>
           <a:p>
-            <a:pPr algn="l" indent="0" marL="0">
+            <a:pPr marL="0" indent="0" algn="l">
               <a:buNone/>
             </a:pPr>
             <a:r>
@@ -7643,7 +7444,7 @@
           <a:bodyPr wrap="square" lIns="0" tIns="0" rIns="0" bIns="0" rtlCol="0" anchor="ctr"/>
           <a:lstStyle/>
           <a:p>
-            <a:pPr algn="r" indent="0" marL="0">
+            <a:pPr marL="0" indent="0" algn="r">
               <a:buNone/>
             </a:pPr>
             <a:r>
@@ -7663,14 +7464,14 @@
       </p:sp>
       <p:pic>
         <p:nvPicPr>
-          <p:cNvPr id="5" name="Image 0" descr="/sessions/awesome-wizardly-sagan/mnt/charla-ia-aws-ug-cucuta/multimedia/aws_ug_cucuta_logo.jpeg">    </p:cNvPr>
+          <p:cNvPr id="5" name="Image 0" descr="/sessions/awesome-wizardly-sagan/mnt/charla-ia-aws-ug-cucuta/multimedia/aws_ug_cucuta_logo.jpeg"/>
           <p:cNvPicPr>
             <a:picLocks noChangeAspect="1"/>
           </p:cNvPicPr>
           <p:nvPr/>
         </p:nvPicPr>
         <p:blipFill>
-          <a:blip r:embed="rId1">
+          <a:blip r:embed="rId3">
             <a:alphaModFix amt="75000"/>
           </a:blip>
           <a:stretch>
@@ -7708,7 +7509,7 @@
           <a:bodyPr wrap="square" lIns="0" tIns="0" rIns="0" bIns="0" rtlCol="0" anchor="ctr"/>
           <a:lstStyle/>
           <a:p>
-            <a:pPr algn="ctr" indent="0" marL="0">
+            <a:pPr marL="0" indent="0" algn="ctr">
               <a:lnSpc>
                 <a:spcPts val="4600"/>
               </a:lnSpc>
@@ -7728,7 +7529,7 @@
             <a:endParaRPr lang="en-US" sz="4000" dirty="0"/>
           </a:p>
           <a:p>
-            <a:pPr algn="ctr" indent="0" marL="0">
+            <a:pPr marL="0" indent="0" algn="ctr">
               <a:lnSpc>
                 <a:spcPts val="4600"/>
               </a:lnSpc>
@@ -7765,6 +7566,7 @@
         <a:solidFill>
           <a:srgbClr val="161D2D"/>
         </a:solidFill>
+        <a:effectLst/>
       </p:bgPr>
     </p:bg>
     <p:spTree>
@@ -7802,7 +7604,7 @@
           <a:bodyPr wrap="square" lIns="0" tIns="0" rIns="0" bIns="0" rtlCol="0" anchor="ctr"/>
           <a:lstStyle/>
           <a:p>
-            <a:pPr algn="l" indent="0" marL="0">
+            <a:pPr marL="0" indent="0" algn="l">
               <a:buNone/>
             </a:pPr>
             <a:r>
@@ -7841,7 +7643,7 @@
           <a:bodyPr wrap="square" lIns="0" tIns="0" rIns="0" bIns="0" rtlCol="0" anchor="ctr"/>
           <a:lstStyle/>
           <a:p>
-            <a:pPr algn="r" indent="0" marL="0">
+            <a:pPr marL="0" indent="0" algn="r">
               <a:buNone/>
             </a:pPr>
             <a:r>
@@ -7861,14 +7663,14 @@
       </p:sp>
       <p:pic>
         <p:nvPicPr>
-          <p:cNvPr id="5" name="Image 0" descr="/sessions/awesome-wizardly-sagan/mnt/charla-ia-aws-ug-cucuta/multimedia/aws_ug_cucuta_logo.jpeg">    </p:cNvPr>
+          <p:cNvPr id="5" name="Image 0" descr="/sessions/awesome-wizardly-sagan/mnt/charla-ia-aws-ug-cucuta/multimedia/aws_ug_cucuta_logo.jpeg"/>
           <p:cNvPicPr>
             <a:picLocks noChangeAspect="1"/>
           </p:cNvPicPr>
           <p:nvPr/>
         </p:nvPicPr>
         <p:blipFill>
-          <a:blip r:embed="rId1">
+          <a:blip r:embed="rId3">
             <a:alphaModFix amt="75000"/>
           </a:blip>
           <a:stretch>
@@ -7906,11 +7708,11 @@
           <a:bodyPr wrap="square" lIns="0" tIns="0" rIns="0" bIns="0" rtlCol="0" anchor="ctr"/>
           <a:lstStyle/>
           <a:p>
-            <a:pPr indent="0" marL="0">
-              <a:buNone/>
-            </a:pPr>
-            <a:r>
-              <a:rPr lang="en-US" sz="1200" b="1" spc="200" kern="0" dirty="0">
+            <a:pPr marL="0" indent="0">
+              <a:buNone/>
+            </a:pPr>
+            <a:r>
+              <a:rPr lang="en-US" sz="1200" b="1" kern="0" spc="200" dirty="0">
                 <a:solidFill>
                   <a:srgbClr val="9257F1"/>
                 </a:solidFill>
@@ -7948,6 +7750,13 @@
             <a:prstDash val="solid"/>
           </a:ln>
         </p:spPr>
+        <p:txBody>
+          <a:bodyPr/>
+          <a:lstStyle/>
+          <a:p>
+            <a:endParaRPr lang="en-CO"/>
+          </a:p>
+        </p:txBody>
       </p:sp>
       <p:sp>
         <p:nvSpPr>
@@ -7970,11 +7779,11 @@
           <a:bodyPr wrap="square" lIns="0" tIns="0" rIns="0" bIns="0" rtlCol="0" anchor="ctr"/>
           <a:lstStyle/>
           <a:p>
-            <a:pPr indent="0" marL="0">
-              <a:buNone/>
-            </a:pPr>
-            <a:r>
-              <a:rPr lang="en-US" sz="1200" b="1" spc="200" kern="0" dirty="0">
+            <a:pPr marL="0" indent="0">
+              <a:buNone/>
+            </a:pPr>
+            <a:r>
+              <a:rPr lang="en-US" sz="1200" b="1" kern="0" spc="200" dirty="0">
                 <a:solidFill>
                   <a:srgbClr val="8A93A8"/>
                 </a:solidFill>
@@ -8009,7 +7818,7 @@
           <a:bodyPr wrap="square" lIns="0" tIns="0" rIns="0" bIns="0" rtlCol="0" anchor="t"/>
           <a:lstStyle/>
           <a:p>
-            <a:pPr indent="0" marL="0">
+            <a:pPr marL="0" indent="0">
               <a:lnSpc>
                 <a:spcPts val="2600"/>
               </a:lnSpc>
@@ -8054,6 +7863,13 @@
             <a:prstDash val="solid"/>
           </a:ln>
         </p:spPr>
+        <p:txBody>
+          <a:bodyPr/>
+          <a:lstStyle/>
+          <a:p>
+            <a:endParaRPr lang="en-CO"/>
+          </a:p>
+        </p:txBody>
       </p:sp>
       <p:sp>
         <p:nvSpPr>
@@ -8076,11 +7892,11 @@
           <a:bodyPr wrap="square" lIns="0" tIns="0" rIns="0" bIns="0" rtlCol="0" anchor="ctr"/>
           <a:lstStyle/>
           <a:p>
-            <a:pPr indent="0" marL="0">
-              <a:buNone/>
-            </a:pPr>
-            <a:r>
-              <a:rPr lang="en-US" sz="1200" b="1" spc="200" kern="0" dirty="0">
+            <a:pPr marL="0" indent="0">
+              <a:buNone/>
+            </a:pPr>
+            <a:r>
+              <a:rPr lang="en-US" sz="1200" b="1" kern="0" spc="200" dirty="0">
                 <a:solidFill>
                   <a:srgbClr val="8A93A8"/>
                 </a:solidFill>
@@ -8115,7 +7931,7 @@
           <a:bodyPr wrap="square" lIns="0" tIns="0" rIns="0" bIns="0" rtlCol="0" anchor="t"/>
           <a:lstStyle/>
           <a:p>
-            <a:pPr indent="0" marL="0">
+            <a:pPr marL="0" indent="0">
               <a:lnSpc>
                 <a:spcPts val="2600"/>
               </a:lnSpc>
@@ -8160,6 +7976,13 @@
             <a:prstDash val="solid"/>
           </a:ln>
         </p:spPr>
+        <p:txBody>
+          <a:bodyPr/>
+          <a:lstStyle/>
+          <a:p>
+            <a:endParaRPr lang="en-CO"/>
+          </a:p>
+        </p:txBody>
       </p:sp>
       <p:sp>
         <p:nvSpPr>
@@ -8182,11 +8005,11 @@
           <a:bodyPr wrap="square" lIns="0" tIns="0" rIns="0" bIns="0" rtlCol="0" anchor="ctr"/>
           <a:lstStyle/>
           <a:p>
-            <a:pPr indent="0" marL="0">
-              <a:buNone/>
-            </a:pPr>
-            <a:r>
-              <a:rPr lang="en-US" sz="1200" b="1" spc="200" kern="0" dirty="0">
+            <a:pPr marL="0" indent="0">
+              <a:buNone/>
+            </a:pPr>
+            <a:r>
+              <a:rPr lang="en-US" sz="1200" b="1" kern="0" spc="200" dirty="0">
                 <a:solidFill>
                   <a:srgbClr val="9257F1"/>
                 </a:solidFill>
@@ -8221,7 +8044,7 @@
           <a:bodyPr wrap="square" lIns="0" tIns="0" rIns="0" bIns="0" rtlCol="0" anchor="t"/>
           <a:lstStyle/>
           <a:p>
-            <a:pPr indent="0" marL="0">
+            <a:pPr marL="0" indent="0">
               <a:lnSpc>
                 <a:spcPts val="2600"/>
               </a:lnSpc>
@@ -8263,7 +8086,7 @@
           <a:bodyPr wrap="square" lIns="0" tIns="0" rIns="0" bIns="0" rtlCol="0" anchor="ctr"/>
           <a:lstStyle/>
           <a:p>
-            <a:pPr indent="0" marL="0">
+            <a:pPr marL="0" indent="0">
               <a:buNone/>
             </a:pPr>
             <a:r>
@@ -8297,6 +8120,7 @@
         <a:solidFill>
           <a:srgbClr val="161D2D"/>
         </a:solidFill>
+        <a:effectLst/>
       </p:bgPr>
     </p:bg>
     <p:spTree>
@@ -8334,7 +8158,7 @@
           <a:bodyPr wrap="square" lIns="0" tIns="0" rIns="0" bIns="0" rtlCol="0" anchor="ctr"/>
           <a:lstStyle/>
           <a:p>
-            <a:pPr algn="l" indent="0" marL="0">
+            <a:pPr marL="0" indent="0" algn="l">
               <a:buNone/>
             </a:pPr>
             <a:r>
@@ -8373,7 +8197,7 @@
           <a:bodyPr wrap="square" lIns="0" tIns="0" rIns="0" bIns="0" rtlCol="0" anchor="ctr"/>
           <a:lstStyle/>
           <a:p>
-            <a:pPr algn="r" indent="0" marL="0">
+            <a:pPr marL="0" indent="0" algn="r">
               <a:buNone/>
             </a:pPr>
             <a:r>
@@ -8393,14 +8217,14 @@
       </p:sp>
       <p:pic>
         <p:nvPicPr>
-          <p:cNvPr id="5" name="Image 0" descr="/sessions/awesome-wizardly-sagan/mnt/charla-ia-aws-ug-cucuta/multimedia/aws_ug_cucuta_logo.jpeg">    </p:cNvPr>
+          <p:cNvPr id="5" name="Image 0" descr="/sessions/awesome-wizardly-sagan/mnt/charla-ia-aws-ug-cucuta/multimedia/aws_ug_cucuta_logo.jpeg"/>
           <p:cNvPicPr>
             <a:picLocks noChangeAspect="1"/>
           </p:cNvPicPr>
           <p:nvPr/>
         </p:nvPicPr>
         <p:blipFill>
-          <a:blip r:embed="rId1">
+          <a:blip r:embed="rId3">
             <a:alphaModFix amt="75000"/>
           </a:blip>
           <a:stretch>
@@ -8438,7 +8262,7 @@
           <a:bodyPr wrap="square" lIns="0" tIns="0" rIns="0" bIns="0" rtlCol="0" anchor="ctr"/>
           <a:lstStyle/>
           <a:p>
-            <a:pPr algn="ctr" indent="0" marL="0">
+            <a:pPr marL="0" indent="0" algn="ctr">
               <a:buNone/>
             </a:pPr>
             <a:r>
@@ -8477,7 +8301,7 @@
           <a:bodyPr wrap="square" lIns="0" tIns="0" rIns="0" bIns="0" rtlCol="0" anchor="ctr"/>
           <a:lstStyle/>
           <a:p>
-            <a:pPr algn="ctr" indent="0" marL="0">
+            <a:pPr marL="0" indent="0" algn="ctr">
               <a:lnSpc>
                 <a:spcPts val="4400"/>
               </a:lnSpc>
@@ -8497,12 +8321,6 @@
 Estas son las condiciones bajo las que debe funcionar.
 </a:t>
             </a:r>
-            <a:pPr algn="ctr" indent="0" marL="0">
-              <a:lnSpc>
-                <a:spcPts val="4400"/>
-              </a:lnSpc>
-              <a:buNone/>
-            </a:pPr>
             <a:r>
               <a:rPr lang="en-US" sz="3000" b="1" dirty="0">
                 <a:solidFill>
@@ -8534,6 +8352,7 @@
         <a:solidFill>
           <a:srgbClr val="161D2D"/>
         </a:solidFill>
+        <a:effectLst/>
       </p:bgPr>
     </p:bg>
     <p:spTree>
@@ -8571,7 +8390,7 @@
           <a:bodyPr wrap="square" lIns="0" tIns="0" rIns="0" bIns="0" rtlCol="0" anchor="ctr"/>
           <a:lstStyle/>
           <a:p>
-            <a:pPr algn="l" indent="0" marL="0">
+            <a:pPr marL="0" indent="0" algn="l">
               <a:buNone/>
             </a:pPr>
             <a:r>
@@ -8610,7 +8429,7 @@
           <a:bodyPr wrap="square" lIns="0" tIns="0" rIns="0" bIns="0" rtlCol="0" anchor="ctr"/>
           <a:lstStyle/>
           <a:p>
-            <a:pPr algn="r" indent="0" marL="0">
+            <a:pPr marL="0" indent="0" algn="r">
               <a:buNone/>
             </a:pPr>
             <a:r>
@@ -8630,14 +8449,14 @@
       </p:sp>
       <p:pic>
         <p:nvPicPr>
-          <p:cNvPr id="5" name="Image 0" descr="/sessions/awesome-wizardly-sagan/mnt/charla-ia-aws-ug-cucuta/multimedia/aws_ug_cucuta_logo.jpeg">    </p:cNvPr>
+          <p:cNvPr id="5" name="Image 0" descr="/sessions/awesome-wizardly-sagan/mnt/charla-ia-aws-ug-cucuta/multimedia/aws_ug_cucuta_logo.jpeg"/>
           <p:cNvPicPr>
             <a:picLocks noChangeAspect="1"/>
           </p:cNvPicPr>
           <p:nvPr/>
         </p:nvPicPr>
         <p:blipFill>
-          <a:blip r:embed="rId1">
+          <a:blip r:embed="rId3">
             <a:alphaModFix amt="75000"/>
           </a:blip>
           <a:stretch>
@@ -8656,14 +8475,14 @@
       </p:pic>
       <p:pic>
         <p:nvPicPr>
-          <p:cNvPr id="6" name="Image 1" descr="/sessions/awesome-wizardly-sagan/mnt/charla-ia-aws-ug-cucuta/multimedia/gldiazcardenas_recorte.png">    </p:cNvPr>
+          <p:cNvPr id="6" name="Image 1" descr="/sessions/awesome-wizardly-sagan/mnt/charla-ia-aws-ug-cucuta/multimedia/gldiazcardenas_recorte.png"/>
           <p:cNvPicPr>
             <a:picLocks noChangeAspect="1"/>
           </p:cNvPicPr>
           <p:nvPr/>
         </p:nvPicPr>
         <p:blipFill>
-          <a:blip r:embed="rId2"/>
+          <a:blip r:embed="rId4"/>
           <a:stretch>
             <a:fillRect/>
           </a:stretch>
@@ -8699,7 +8518,7 @@
           <a:bodyPr wrap="square" lIns="0" tIns="0" rIns="0" bIns="0" rtlCol="0" anchor="t"/>
           <a:lstStyle/>
           <a:p>
-            <a:pPr indent="0" marL="0">
+            <a:pPr marL="0" indent="0">
               <a:buNone/>
             </a:pPr>
             <a:r>
@@ -8754,7 +8573,29 @@
                 <a:ea typeface="Arial" pitchFamily="34" charset="-122"/>
                 <a:cs typeface="Arial" pitchFamily="34" charset="-120"/>
               </a:rPr>
-              <a:t>CEO y fundador de GLD Consulting</a:t>
+              <a:t>CEO y </a:t>
+            </a:r>
+            <a:r>
+              <a:rPr lang="en-US" sz="1600" dirty="0" err="1">
+                <a:solidFill>
+                  <a:srgbClr val="FFFFFF"/>
+                </a:solidFill>
+                <a:latin typeface="Arial" pitchFamily="34" charset="0"/>
+                <a:ea typeface="Arial" pitchFamily="34" charset="-122"/>
+                <a:cs typeface="Arial" pitchFamily="34" charset="-120"/>
+              </a:rPr>
+              <a:t>Fundador</a:t>
+            </a:r>
+            <a:r>
+              <a:rPr lang="en-US" sz="1600" dirty="0">
+                <a:solidFill>
+                  <a:srgbClr val="FFFFFF"/>
+                </a:solidFill>
+                <a:latin typeface="Arial" pitchFamily="34" charset="0"/>
+                <a:ea typeface="Arial" pitchFamily="34" charset="-122"/>
+                <a:cs typeface="Arial" pitchFamily="34" charset="-120"/>
+              </a:rPr>
+              <a:t> de GLD Consulting</a:t>
             </a:r>
             <a:endParaRPr lang="en-US" sz="1600" dirty="0"/>
           </a:p>
@@ -8788,6 +8629,17 @@
               <a:buChar char="•"/>
             </a:pPr>
             <a:r>
+              <a:rPr lang="en-US" sz="1600" dirty="0" err="1">
+                <a:solidFill>
+                  <a:srgbClr val="FFFFFF"/>
+                </a:solidFill>
+                <a:latin typeface="Arial" pitchFamily="34" charset="0"/>
+                <a:ea typeface="Arial" pitchFamily="34" charset="-122"/>
+                <a:cs typeface="Arial" pitchFamily="34" charset="-120"/>
+              </a:rPr>
+              <a:t>Máster</a:t>
+            </a:r>
+            <a:r>
               <a:rPr lang="en-US" sz="1600" dirty="0">
                 <a:solidFill>
                   <a:srgbClr val="FFFFFF"/>
@@ -8796,7 +8648,73 @@
                 <a:ea typeface="Arial" pitchFamily="34" charset="-122"/>
                 <a:cs typeface="Arial" pitchFamily="34" charset="-120"/>
               </a:rPr>
-              <a:t>Cursando Máster en Inteligencia Artificial en el Instituto Europeo de Postgrado</a:t>
+              <a:t> en Inteligencia Artificial en el Instituto Europeo de </a:t>
+            </a:r>
+            <a:r>
+              <a:rPr lang="en-US" sz="1600" dirty="0" err="1">
+                <a:solidFill>
+                  <a:srgbClr val="FFFFFF"/>
+                </a:solidFill>
+                <a:latin typeface="Arial" pitchFamily="34" charset="0"/>
+                <a:ea typeface="Arial" pitchFamily="34" charset="-122"/>
+                <a:cs typeface="Arial" pitchFamily="34" charset="-120"/>
+              </a:rPr>
+              <a:t>Postgrado</a:t>
+            </a:r>
+            <a:r>
+              <a:rPr lang="en-US" sz="1600" dirty="0">
+                <a:solidFill>
+                  <a:srgbClr val="FFFFFF"/>
+                </a:solidFill>
+                <a:latin typeface="Arial" pitchFamily="34" charset="0"/>
+                <a:ea typeface="Arial" pitchFamily="34" charset="-122"/>
+                <a:cs typeface="Arial" pitchFamily="34" charset="-120"/>
+              </a:rPr>
+              <a:t> (</a:t>
+            </a:r>
+            <a:r>
+              <a:rPr lang="en-US" sz="1600" dirty="0" err="1">
+                <a:solidFill>
+                  <a:srgbClr val="FFFFFF"/>
+                </a:solidFill>
+                <a:latin typeface="Arial" pitchFamily="34" charset="0"/>
+                <a:ea typeface="Arial" pitchFamily="34" charset="-122"/>
+                <a:cs typeface="Arial" pitchFamily="34" charset="-120"/>
+              </a:rPr>
+              <a:t>en</a:t>
+            </a:r>
+            <a:r>
+              <a:rPr lang="en-US" sz="1600" dirty="0">
+                <a:solidFill>
+                  <a:srgbClr val="FFFFFF"/>
+                </a:solidFill>
+                <a:latin typeface="Arial" pitchFamily="34" charset="0"/>
+                <a:ea typeface="Arial" pitchFamily="34" charset="-122"/>
+                <a:cs typeface="Arial" pitchFamily="34" charset="-120"/>
+              </a:rPr>
+              <a:t> </a:t>
+            </a:r>
+            <a:r>
+              <a:rPr lang="en-US" sz="1600" dirty="0" err="1">
+                <a:solidFill>
+                  <a:srgbClr val="FFFFFF"/>
+                </a:solidFill>
+                <a:latin typeface="Arial" pitchFamily="34" charset="0"/>
+                <a:ea typeface="Arial" pitchFamily="34" charset="-122"/>
+                <a:cs typeface="Arial" pitchFamily="34" charset="-120"/>
+              </a:rPr>
+              <a:t>curso</a:t>
+            </a:r>
+            <a:r>
+              <a:rPr lang="en-US" sz="1600" dirty="0">
+                <a:solidFill>
+                  <a:srgbClr val="FFFFFF"/>
+                </a:solidFill>
+                <a:latin typeface="Arial" pitchFamily="34" charset="0"/>
+                <a:ea typeface="Arial" pitchFamily="34" charset="-122"/>
+                <a:cs typeface="Arial" pitchFamily="34" charset="-120"/>
+              </a:rPr>
+              <a:t>)</a:t>
             </a:r>
             <a:endParaRPr lang="en-US" sz="1600" dirty="0"/>
           </a:p>
@@ -8928,7 +8846,7 @@
           <a:bodyPr wrap="square" lIns="0" tIns="0" rIns="0" bIns="0" rtlCol="0" anchor="ctr"/>
           <a:lstStyle/>
           <a:p>
-            <a:pPr indent="0" marL="0">
+            <a:pPr marL="0" indent="0">
               <a:buNone/>
             </a:pPr>
             <a:r>
@@ -8939,7 +8857,7 @@
                 <a:latin typeface="Arial" pitchFamily="34" charset="0"/>
                 <a:ea typeface="Arial" pitchFamily="34" charset="-122"/>
                 <a:cs typeface="Arial" pitchFamily="34" charset="-120"/>
-                <a:hlinkClick r:id="rId3" invalidUrl="" action="" tgtFrame="" tooltip="" history="1" highlightClick="0" endSnd="0">
+                <a:hlinkClick r:id="rId5">
                   <a:extLst>
                     <a:ext uri="{A12FA001-AC4F-418D-AE19-62706E023703}">
                       <ahyp:hlinkClr xmlns:ahyp="http://schemas.microsoft.com/office/drawing/2018/hyperlinkcolor" val="tx"/>
@@ -8949,9 +8867,6 @@
               </a:rPr>
               <a:t>github.com/gldiazcardenas</a:t>
             </a:r>
-            <a:pPr indent="0" marL="0">
-              <a:buNone/>
-            </a:pPr>
             <a:r>
               <a:rPr lang="en-US" sz="1400" dirty="0">
                 <a:solidFill>
@@ -8963,9 +8878,6 @@
               </a:rPr>
               <a:t>   ·   </a:t>
             </a:r>
-            <a:pPr indent="0" marL="0">
-              <a:buNone/>
-            </a:pPr>
             <a:r>
               <a:rPr lang="en-US" sz="1400" u="sng" dirty="0">
                 <a:solidFill>
@@ -8974,7 +8886,7 @@
                 <a:latin typeface="Arial" pitchFamily="34" charset="0"/>
                 <a:ea typeface="Arial" pitchFamily="34" charset="-122"/>
                 <a:cs typeface="Arial" pitchFamily="34" charset="-120"/>
-                <a:hlinkClick r:id="rId4" invalidUrl="" action="" tgtFrame="" tooltip="" history="1" highlightClick="0" endSnd="0">
+                <a:hlinkClick r:id="rId6">
                   <a:extLst>
                     <a:ext uri="{A12FA001-AC4F-418D-AE19-62706E023703}">
                       <ahyp:hlinkClr xmlns:ahyp="http://schemas.microsoft.com/office/drawing/2018/hyperlinkcolor" val="tx"/>
@@ -8984,9 +8896,6 @@
               </a:rPr>
               <a:t>linkedin.com/in/gldiazcardenas</a:t>
             </a:r>
-            <a:pPr indent="0" marL="0">
-              <a:buNone/>
-            </a:pPr>
             <a:r>
               <a:rPr lang="en-US" sz="1400" dirty="0">
                 <a:solidFill>
@@ -8998,9 +8907,6 @@
               </a:rPr>
               <a:t>   ·   </a:t>
             </a:r>
-            <a:pPr indent="0" marL="0">
-              <a:buNone/>
-            </a:pPr>
             <a:r>
               <a:rPr lang="en-US" sz="1400" u="sng" dirty="0">
                 <a:solidFill>
@@ -9009,7 +8915,7 @@
                 <a:latin typeface="Arial" pitchFamily="34" charset="0"/>
                 <a:ea typeface="Arial" pitchFamily="34" charset="-122"/>
                 <a:cs typeface="Arial" pitchFamily="34" charset="-120"/>
-                <a:hlinkClick r:id="rId5" invalidUrl="" action="" tgtFrame="" tooltip="" history="1" highlightClick="0" endSnd="0">
+                <a:hlinkClick r:id="rId7">
                   <a:extLst>
                     <a:ext uri="{A12FA001-AC4F-418D-AE19-62706E023703}">
                       <ahyp:hlinkClr xmlns:ahyp="http://schemas.microsoft.com/office/drawing/2018/hyperlinkcolor" val="tx"/>
@@ -9039,6 +8945,7 @@
         <a:solidFill>
           <a:srgbClr val="161D2D"/>
         </a:solidFill>
+        <a:effectLst/>
       </p:bgPr>
     </p:bg>
     <p:spTree>
@@ -9076,7 +8983,7 @@
           <a:bodyPr wrap="square" lIns="0" tIns="0" rIns="0" bIns="0" rtlCol="0" anchor="ctr"/>
           <a:lstStyle/>
           <a:p>
-            <a:pPr algn="l" indent="0" marL="0">
+            <a:pPr marL="0" indent="0" algn="l">
               <a:buNone/>
             </a:pPr>
             <a:r>
@@ -9115,7 +9022,7 @@
           <a:bodyPr wrap="square" lIns="0" tIns="0" rIns="0" bIns="0" rtlCol="0" anchor="ctr"/>
           <a:lstStyle/>
           <a:p>
-            <a:pPr algn="r" indent="0" marL="0">
+            <a:pPr marL="0" indent="0" algn="r">
               <a:buNone/>
             </a:pPr>
             <a:r>
@@ -9135,14 +9042,14 @@
       </p:sp>
       <p:pic>
         <p:nvPicPr>
-          <p:cNvPr id="5" name="Image 0" descr="/sessions/awesome-wizardly-sagan/mnt/charla-ia-aws-ug-cucuta/multimedia/aws_ug_cucuta_logo.jpeg">    </p:cNvPr>
+          <p:cNvPr id="5" name="Image 0" descr="/sessions/awesome-wizardly-sagan/mnt/charla-ia-aws-ug-cucuta/multimedia/aws_ug_cucuta_logo.jpeg"/>
           <p:cNvPicPr>
             <a:picLocks noChangeAspect="1"/>
           </p:cNvPicPr>
           <p:nvPr/>
         </p:nvPicPr>
         <p:blipFill>
-          <a:blip r:embed="rId1">
+          <a:blip r:embed="rId3">
             <a:alphaModFix amt="75000"/>
           </a:blip>
           <a:stretch>
@@ -9180,11 +9087,11 @@
           <a:bodyPr wrap="square" lIns="0" tIns="0" rIns="0" bIns="0" rtlCol="0" anchor="ctr"/>
           <a:lstStyle/>
           <a:p>
-            <a:pPr indent="0" marL="0">
-              <a:buNone/>
-            </a:pPr>
-            <a:r>
-              <a:rPr lang="en-US" sz="1200" b="1" spc="200" kern="0" dirty="0">
+            <a:pPr marL="0" indent="0">
+              <a:buNone/>
+            </a:pPr>
+            <a:r>
+              <a:rPr lang="en-US" sz="1200" b="1" kern="0" spc="200" dirty="0">
                 <a:solidFill>
                   <a:srgbClr val="9257F1"/>
                 </a:solidFill>
@@ -9219,7 +9126,7 @@
           <a:bodyPr wrap="square" lIns="0" tIns="0" rIns="0" bIns="0" rtlCol="0" anchor="ctr"/>
           <a:lstStyle/>
           <a:p>
-            <a:pPr algn="ctr" indent="0" marL="0">
+            <a:pPr marL="0" indent="0" algn="ctr">
               <a:buNone/>
             </a:pPr>
             <a:r>
@@ -9258,7 +9165,7 @@
           <a:bodyPr wrap="square" lIns="0" tIns="0" rIns="0" bIns="0" rtlCol="0" anchor="ctr"/>
           <a:lstStyle/>
           <a:p>
-            <a:pPr algn="ctr" indent="0" marL="0">
+            <a:pPr marL="0" indent="0" algn="ctr">
               <a:buNone/>
             </a:pPr>
             <a:r>
@@ -9292,6 +9199,7 @@
         <a:solidFill>
           <a:srgbClr val="161D2D"/>
         </a:solidFill>
+        <a:effectLst/>
       </p:bgPr>
     </p:bg>
     <p:spTree>
@@ -9329,7 +9237,7 @@
           <a:bodyPr wrap="square" lIns="0" tIns="0" rIns="0" bIns="0" rtlCol="0" anchor="ctr"/>
           <a:lstStyle/>
           <a:p>
-            <a:pPr algn="l" indent="0" marL="0">
+            <a:pPr marL="0" indent="0" algn="l">
               <a:buNone/>
             </a:pPr>
             <a:r>
@@ -9368,7 +9276,7 @@
           <a:bodyPr wrap="square" lIns="0" tIns="0" rIns="0" bIns="0" rtlCol="0" anchor="ctr"/>
           <a:lstStyle/>
           <a:p>
-            <a:pPr algn="r" indent="0" marL="0">
+            <a:pPr marL="0" indent="0" algn="r">
               <a:buNone/>
             </a:pPr>
             <a:r>
@@ -9388,14 +9296,14 @@
       </p:sp>
       <p:pic>
         <p:nvPicPr>
-          <p:cNvPr id="5" name="Image 0" descr="/sessions/awesome-wizardly-sagan/mnt/charla-ia-aws-ug-cucuta/multimedia/aws_ug_cucuta_logo.jpeg">    </p:cNvPr>
+          <p:cNvPr id="5" name="Image 0" descr="/sessions/awesome-wizardly-sagan/mnt/charla-ia-aws-ug-cucuta/multimedia/aws_ug_cucuta_logo.jpeg"/>
           <p:cNvPicPr>
             <a:picLocks noChangeAspect="1"/>
           </p:cNvPicPr>
           <p:nvPr/>
         </p:nvPicPr>
         <p:blipFill>
-          <a:blip r:embed="rId1">
+          <a:blip r:embed="rId3">
             <a:alphaModFix amt="75000"/>
           </a:blip>
           <a:stretch>
@@ -9433,11 +9341,11 @@
           <a:bodyPr wrap="square" lIns="0" tIns="0" rIns="0" bIns="0" rtlCol="0" anchor="ctr"/>
           <a:lstStyle/>
           <a:p>
-            <a:pPr indent="0" marL="0">
-              <a:buNone/>
-            </a:pPr>
-            <a:r>
-              <a:rPr lang="en-US" sz="1200" b="1" spc="200" kern="0" dirty="0">
+            <a:pPr marL="0" indent="0">
+              <a:buNone/>
+            </a:pPr>
+            <a:r>
+              <a:rPr lang="en-US" sz="1200" b="1" kern="0" spc="200" dirty="0">
                 <a:solidFill>
                   <a:srgbClr val="9257F1"/>
                 </a:solidFill>
@@ -9472,11 +9380,11 @@
           <a:bodyPr wrap="square" lIns="0" tIns="0" rIns="0" bIns="0" rtlCol="0" anchor="ctr"/>
           <a:lstStyle/>
           <a:p>
-            <a:pPr algn="ctr" indent="0" marL="0">
-              <a:buNone/>
-            </a:pPr>
-            <a:r>
-              <a:rPr lang="en-US" sz="1200" b="1" spc="200" kern="0" dirty="0">
+            <a:pPr marL="0" indent="0" algn="ctr">
+              <a:buNone/>
+            </a:pPr>
+            <a:r>
+              <a:rPr lang="en-US" sz="1200" b="1" kern="0" spc="200" dirty="0">
                 <a:solidFill>
                   <a:srgbClr val="8A93A8"/>
                 </a:solidFill>
@@ -9514,6 +9422,13 @@
             <a:prstDash val="solid"/>
           </a:ln>
         </p:spPr>
+        <p:txBody>
+          <a:bodyPr/>
+          <a:lstStyle/>
+          <a:p>
+            <a:endParaRPr lang="en-CO" dirty="0"/>
+          </a:p>
+        </p:txBody>
       </p:sp>
       <p:sp>
         <p:nvSpPr>
@@ -9536,7 +9451,7 @@
           <a:bodyPr wrap="square" lIns="0" tIns="0" rIns="0" bIns="0" rtlCol="0" anchor="ctr"/>
           <a:lstStyle/>
           <a:p>
-            <a:pPr algn="ctr" indent="0" marL="0">
+            <a:pPr marL="0" indent="0" algn="ctr">
               <a:buNone/>
             </a:pPr>
             <a:r>
@@ -9549,6 +9464,27 @@
                 <a:cs typeface="Arial" pitchFamily="34" charset="-120"/>
               </a:rPr>
               <a:t>Java</a:t>
+            </a:r>
+            <a:br>
+              <a:rPr lang="en-US" sz="5400" b="1" dirty="0">
+                <a:solidFill>
+                  <a:srgbClr val="FFFFFF"/>
+                </a:solidFill>
+                <a:latin typeface="Arial" pitchFamily="34" charset="0"/>
+                <a:ea typeface="Arial" pitchFamily="34" charset="-122"/>
+                <a:cs typeface="Arial" pitchFamily="34" charset="-120"/>
+              </a:rPr>
+            </a:br>
+            <a:r>
+              <a:rPr lang="en-US" sz="5400" b="1" dirty="0">
+                <a:solidFill>
+                  <a:srgbClr val="FFFFFF"/>
+                </a:solidFill>
+                <a:latin typeface="Arial" pitchFamily="34" charset="0"/>
+                <a:ea typeface="Arial" pitchFamily="34" charset="-122"/>
+                <a:cs typeface="Arial" pitchFamily="34" charset="-120"/>
+              </a:rPr>
+              <a:t>AWS</a:t>
             </a:r>
             <a:endParaRPr lang="en-US" sz="5400" dirty="0"/>
           </a:p>
@@ -9575,11 +9511,11 @@
           <a:bodyPr wrap="square" lIns="0" tIns="0" rIns="0" bIns="0" rtlCol="0" anchor="ctr"/>
           <a:lstStyle/>
           <a:p>
-            <a:pPr algn="ctr" indent="0" marL="0">
-              <a:buNone/>
-            </a:pPr>
-            <a:r>
-              <a:rPr lang="en-US" sz="1200" b="1" spc="200" kern="0" dirty="0">
+            <a:pPr marL="0" indent="0" algn="ctr">
+              <a:buNone/>
+            </a:pPr>
+            <a:r>
+              <a:rPr lang="en-US" sz="1200" b="1" kern="0" spc="200" dirty="0">
                 <a:solidFill>
                   <a:srgbClr val="9257F1"/>
                 </a:solidFill>
@@ -9617,6 +9553,13 @@
             <a:prstDash val="solid"/>
           </a:ln>
         </p:spPr>
+        <p:txBody>
+          <a:bodyPr/>
+          <a:lstStyle/>
+          <a:p>
+            <a:endParaRPr lang="en-CO"/>
+          </a:p>
+        </p:txBody>
       </p:sp>
       <p:sp>
         <p:nvSpPr>
@@ -9639,7 +9582,7 @@
           <a:bodyPr wrap="square" lIns="0" tIns="0" rIns="0" bIns="0" rtlCol="0" anchor="ctr"/>
           <a:lstStyle/>
           <a:p>
-            <a:pPr algn="ctr" indent="0" marL="0">
+            <a:pPr marL="0" indent="0" algn="ctr">
               <a:lnSpc>
                 <a:spcPts val="4000"/>
               </a:lnSpc>
@@ -9659,7 +9602,7 @@
             <a:endParaRPr lang="en-US" sz="2600" dirty="0"/>
           </a:p>
           <a:p>
-            <a:pPr algn="ctr" indent="0" marL="0">
+            <a:pPr marL="0" indent="0" algn="ctr">
               <a:lnSpc>
                 <a:spcPts val="4000"/>
               </a:lnSpc>
@@ -9679,7 +9622,7 @@
             <a:endParaRPr lang="en-US" sz="2600" dirty="0"/>
           </a:p>
           <a:p>
-            <a:pPr algn="ctr" indent="0" marL="0">
+            <a:pPr marL="0" indent="0" algn="ctr">
               <a:lnSpc>
                 <a:spcPts val="4000"/>
               </a:lnSpc>
@@ -9699,7 +9642,7 @@
             <a:endParaRPr lang="en-US" sz="2600" dirty="0"/>
           </a:p>
           <a:p>
-            <a:pPr algn="ctr" indent="0" marL="0">
+            <a:pPr marL="0" indent="0" algn="ctr">
               <a:lnSpc>
                 <a:spcPts val="4000"/>
               </a:lnSpc>
@@ -9741,7 +9684,7 @@
           <a:bodyPr wrap="square" lIns="0" tIns="0" rIns="0" bIns="0" rtlCol="0" anchor="ctr"/>
           <a:lstStyle/>
           <a:p>
-            <a:pPr algn="ctr" indent="0" marL="0">
+            <a:pPr marL="0" indent="0" algn="ctr">
               <a:buNone/>
             </a:pPr>
             <a:r>
@@ -9775,6 +9718,7 @@
         <a:solidFill>
           <a:srgbClr val="161D2D"/>
         </a:solidFill>
+        <a:effectLst/>
       </p:bgPr>
     </p:bg>
     <p:spTree>
@@ -9812,7 +9756,7 @@
           <a:bodyPr wrap="square" lIns="0" tIns="0" rIns="0" bIns="0" rtlCol="0" anchor="ctr"/>
           <a:lstStyle/>
           <a:p>
-            <a:pPr algn="l" indent="0" marL="0">
+            <a:pPr marL="0" indent="0" algn="l">
               <a:buNone/>
             </a:pPr>
             <a:r>
@@ -9851,7 +9795,7 @@
           <a:bodyPr wrap="square" lIns="0" tIns="0" rIns="0" bIns="0" rtlCol="0" anchor="ctr"/>
           <a:lstStyle/>
           <a:p>
-            <a:pPr algn="r" indent="0" marL="0">
+            <a:pPr marL="0" indent="0" algn="r">
               <a:buNone/>
             </a:pPr>
             <a:r>
@@ -9871,14 +9815,14 @@
       </p:sp>
       <p:pic>
         <p:nvPicPr>
-          <p:cNvPr id="5" name="Image 0" descr="/sessions/awesome-wizardly-sagan/mnt/charla-ia-aws-ug-cucuta/multimedia/aws_ug_cucuta_logo.jpeg">    </p:cNvPr>
+          <p:cNvPr id="5" name="Image 0" descr="/sessions/awesome-wizardly-sagan/mnt/charla-ia-aws-ug-cucuta/multimedia/aws_ug_cucuta_logo.jpeg"/>
           <p:cNvPicPr>
             <a:picLocks noChangeAspect="1"/>
           </p:cNvPicPr>
           <p:nvPr/>
         </p:nvPicPr>
         <p:blipFill>
-          <a:blip r:embed="rId1">
+          <a:blip r:embed="rId3">
             <a:alphaModFix amt="75000"/>
           </a:blip>
           <a:stretch>
@@ -9916,11 +9860,11 @@
           <a:bodyPr wrap="square" lIns="0" tIns="0" rIns="0" bIns="0" rtlCol="0" anchor="ctr"/>
           <a:lstStyle/>
           <a:p>
-            <a:pPr indent="0" marL="0">
-              <a:buNone/>
-            </a:pPr>
-            <a:r>
-              <a:rPr lang="en-US" sz="1200" b="1" spc="200" kern="0" dirty="0">
+            <a:pPr marL="0" indent="0">
+              <a:buNone/>
+            </a:pPr>
+            <a:r>
+              <a:rPr lang="en-US" sz="1200" b="1" kern="0" spc="200" dirty="0">
                 <a:solidFill>
                   <a:srgbClr val="9257F1"/>
                 </a:solidFill>
@@ -9960,6 +9904,13 @@
             <a:prstDash val="solid"/>
           </a:ln>
         </p:spPr>
+        <p:txBody>
+          <a:bodyPr/>
+          <a:lstStyle/>
+          <a:p>
+            <a:endParaRPr lang="en-CO"/>
+          </a:p>
+        </p:txBody>
       </p:sp>
       <p:sp>
         <p:nvSpPr>
@@ -9982,7 +9933,7 @@
           <a:bodyPr wrap="square" lIns="0" tIns="0" rIns="0" bIns="0" rtlCol="0" anchor="ctr"/>
           <a:lstStyle/>
           <a:p>
-            <a:pPr indent="0" marL="0">
+            <a:pPr marL="0" indent="0">
               <a:buNone/>
             </a:pPr>
             <a:r>
@@ -10026,6 +9977,13 @@
             <a:prstDash val="solid"/>
           </a:ln>
         </p:spPr>
+        <p:txBody>
+          <a:bodyPr/>
+          <a:lstStyle/>
+          <a:p>
+            <a:endParaRPr lang="en-CO"/>
+          </a:p>
+        </p:txBody>
       </p:sp>
       <p:sp>
         <p:nvSpPr>
@@ -10048,7 +10006,7 @@
           <a:bodyPr wrap="square" lIns="0" tIns="0" rIns="0" bIns="0" rtlCol="0" anchor="ctr"/>
           <a:lstStyle/>
           <a:p>
-            <a:pPr indent="0" marL="0">
+            <a:pPr marL="0" indent="0">
               <a:buNone/>
             </a:pPr>
             <a:r>
@@ -10092,6 +10050,13 @@
             <a:prstDash val="solid"/>
           </a:ln>
         </p:spPr>
+        <p:txBody>
+          <a:bodyPr/>
+          <a:lstStyle/>
+          <a:p>
+            <a:endParaRPr lang="en-CO"/>
+          </a:p>
+        </p:txBody>
       </p:sp>
       <p:sp>
         <p:nvSpPr>
@@ -10114,7 +10079,7 @@
           <a:bodyPr wrap="square" lIns="0" tIns="0" rIns="0" bIns="0" rtlCol="0" anchor="ctr"/>
           <a:lstStyle/>
           <a:p>
-            <a:pPr indent="0" marL="0">
+            <a:pPr marL="0" indent="0">
               <a:buNone/>
             </a:pPr>
             <a:r>
@@ -10158,6 +10123,13 @@
             <a:prstDash val="solid"/>
           </a:ln>
         </p:spPr>
+        <p:txBody>
+          <a:bodyPr/>
+          <a:lstStyle/>
+          <a:p>
+            <a:endParaRPr lang="en-CO"/>
+          </a:p>
+        </p:txBody>
       </p:sp>
       <p:sp>
         <p:nvSpPr>
@@ -10180,7 +10152,7 @@
           <a:bodyPr wrap="square" lIns="0" tIns="0" rIns="0" bIns="0" rtlCol="0" anchor="ctr"/>
           <a:lstStyle/>
           <a:p>
-            <a:pPr indent="0" marL="0">
+            <a:pPr marL="0" indent="0">
               <a:buNone/>
             </a:pPr>
             <a:r>
@@ -10219,7 +10191,7 @@
           <a:bodyPr wrap="square" lIns="0" tIns="0" rIns="0" bIns="0" rtlCol="0" anchor="ctr"/>
           <a:lstStyle/>
           <a:p>
-            <a:pPr indent="0" marL="0">
+            <a:pPr marL="0" indent="0">
               <a:lnSpc>
                 <a:spcPts val="2800"/>
               </a:lnSpc>
@@ -10239,7 +10211,7 @@
             <a:endParaRPr lang="en-US" sz="1900" dirty="0"/>
           </a:p>
           <a:p>
-            <a:pPr indent="0" marL="0">
+            <a:pPr marL="0" indent="0">
               <a:lnSpc>
                 <a:spcPts val="2800"/>
               </a:lnSpc>
@@ -10259,7 +10231,7 @@
             <a:endParaRPr lang="en-US" sz="1900" dirty="0"/>
           </a:p>
           <a:p>
-            <a:pPr indent="0" marL="0">
+            <a:pPr marL="0" indent="0">
               <a:lnSpc>
                 <a:spcPts val="2800"/>
               </a:lnSpc>
@@ -10280,7 +10252,7 @@
             <a:endParaRPr lang="en-US" sz="1900" dirty="0"/>
           </a:p>
           <a:p>
-            <a:pPr indent="0" marL="0">
+            <a:pPr marL="0" indent="0">
               <a:lnSpc>
                 <a:spcPts val="2800"/>
               </a:lnSpc>
@@ -10317,6 +10289,7 @@
         <a:solidFill>
           <a:srgbClr val="161D2D"/>
         </a:solidFill>
+        <a:effectLst/>
       </p:bgPr>
     </p:bg>
     <p:spTree>
@@ -10354,7 +10327,7 @@
           <a:bodyPr wrap="square" lIns="0" tIns="0" rIns="0" bIns="0" rtlCol="0" anchor="ctr"/>
           <a:lstStyle/>
           <a:p>
-            <a:pPr algn="l" indent="0" marL="0">
+            <a:pPr marL="0" indent="0" algn="l">
               <a:buNone/>
             </a:pPr>
             <a:r>
@@ -10393,7 +10366,7 @@
           <a:bodyPr wrap="square" lIns="0" tIns="0" rIns="0" bIns="0" rtlCol="0" anchor="ctr"/>
           <a:lstStyle/>
           <a:p>
-            <a:pPr algn="r" indent="0" marL="0">
+            <a:pPr marL="0" indent="0" algn="r">
               <a:buNone/>
             </a:pPr>
             <a:r>
@@ -10413,14 +10386,14 @@
       </p:sp>
       <p:pic>
         <p:nvPicPr>
-          <p:cNvPr id="5" name="Image 0" descr="/sessions/awesome-wizardly-sagan/mnt/charla-ia-aws-ug-cucuta/multimedia/aws_ug_cucuta_logo.jpeg">    </p:cNvPr>
+          <p:cNvPr id="5" name="Image 0" descr="/sessions/awesome-wizardly-sagan/mnt/charla-ia-aws-ug-cucuta/multimedia/aws_ug_cucuta_logo.jpeg"/>
           <p:cNvPicPr>
             <a:picLocks noChangeAspect="1"/>
           </p:cNvPicPr>
           <p:nvPr/>
         </p:nvPicPr>
         <p:blipFill>
-          <a:blip r:embed="rId1">
+          <a:blip r:embed="rId3">
             <a:alphaModFix amt="75000"/>
           </a:blip>
           <a:stretch>
@@ -10458,7 +10431,7 @@
           <a:bodyPr wrap="square" lIns="0" tIns="0" rIns="0" bIns="0" rtlCol="0" anchor="ctr"/>
           <a:lstStyle/>
           <a:p>
-            <a:pPr algn="ctr" indent="0" marL="0">
+            <a:pPr marL="0" indent="0" algn="ctr">
               <a:buNone/>
             </a:pPr>
             <a:r>
@@ -10497,7 +10470,7 @@
           <a:bodyPr wrap="square" lIns="0" tIns="0" rIns="0" bIns="0" rtlCol="0" anchor="ctr"/>
           <a:lstStyle/>
           <a:p>
-            <a:pPr algn="ctr" indent="0" marL="0">
+            <a:pPr marL="0" indent="0" algn="ctr">
               <a:buNone/>
             </a:pPr>
             <a:r>
@@ -10531,6 +10504,7 @@
         <a:solidFill>
           <a:srgbClr val="161D2D"/>
         </a:solidFill>
+        <a:effectLst/>
       </p:bgPr>
     </p:bg>
     <p:spTree>
@@ -10568,7 +10542,7 @@
           <a:bodyPr wrap="square" lIns="0" tIns="0" rIns="0" bIns="0" rtlCol="0" anchor="ctr"/>
           <a:lstStyle/>
           <a:p>
-            <a:pPr algn="l" indent="0" marL="0">
+            <a:pPr marL="0" indent="0" algn="l">
               <a:buNone/>
             </a:pPr>
             <a:r>
@@ -10607,7 +10581,7 @@
           <a:bodyPr wrap="square" lIns="0" tIns="0" rIns="0" bIns="0" rtlCol="0" anchor="ctr"/>
           <a:lstStyle/>
           <a:p>
-            <a:pPr algn="r" indent="0" marL="0">
+            <a:pPr marL="0" indent="0" algn="r">
               <a:buNone/>
             </a:pPr>
             <a:r>
@@ -10627,14 +10601,14 @@
       </p:sp>
       <p:pic>
         <p:nvPicPr>
-          <p:cNvPr id="5" name="Image 0" descr="/sessions/awesome-wizardly-sagan/mnt/charla-ia-aws-ug-cucuta/multimedia/aws_ug_cucuta_logo.jpeg">    </p:cNvPr>
+          <p:cNvPr id="5" name="Image 0" descr="/sessions/awesome-wizardly-sagan/mnt/charla-ia-aws-ug-cucuta/multimedia/aws_ug_cucuta_logo.jpeg"/>
           <p:cNvPicPr>
             <a:picLocks noChangeAspect="1"/>
           </p:cNvPicPr>
           <p:nvPr/>
         </p:nvPicPr>
         <p:blipFill>
-          <a:blip r:embed="rId1">
+          <a:blip r:embed="rId3">
             <a:alphaModFix amt="75000"/>
           </a:blip>
           <a:stretch>
@@ -10672,11 +10646,11 @@
           <a:bodyPr wrap="square" lIns="0" tIns="0" rIns="0" bIns="0" rtlCol="0" anchor="ctr"/>
           <a:lstStyle/>
           <a:p>
-            <a:pPr indent="0" marL="0">
-              <a:buNone/>
-            </a:pPr>
-            <a:r>
-              <a:rPr lang="en-US" sz="1200" b="1" spc="200" kern="0" dirty="0">
+            <a:pPr marL="0" indent="0">
+              <a:buNone/>
+            </a:pPr>
+            <a:r>
+              <a:rPr lang="en-US" sz="1200" b="1" kern="0" spc="200" dirty="0">
                 <a:solidFill>
                   <a:srgbClr val="FF5C6C"/>
                 </a:solidFill>
@@ -10711,7 +10685,7 @@
           <a:bodyPr wrap="square" lIns="0" tIns="0" rIns="0" bIns="0" rtlCol="0" anchor="ctr"/>
           <a:lstStyle/>
           <a:p>
-            <a:pPr indent="0" marL="0">
+            <a:pPr marL="0" indent="0">
               <a:buNone/>
             </a:pPr>
             <a:r>
@@ -10750,7 +10724,7 @@
           <a:bodyPr wrap="square" lIns="0" tIns="0" rIns="0" bIns="0" rtlCol="0" anchor="ctr"/>
           <a:lstStyle/>
           <a:p>
-            <a:pPr indent="0" marL="0">
+            <a:pPr marL="0" indent="0">
               <a:buNone/>
             </a:pPr>
             <a:r>
@@ -10789,7 +10763,7 @@
           <a:bodyPr wrap="square" lIns="0" tIns="0" rIns="0" bIns="0" rtlCol="0" anchor="ctr"/>
           <a:lstStyle/>
           <a:p>
-            <a:pPr indent="0" marL="0">
+            <a:pPr marL="0" indent="0">
               <a:buNone/>
             </a:pPr>
             <a:r>
@@ -10828,7 +10802,7 @@
           <a:bodyPr wrap="square" lIns="0" tIns="0" rIns="0" bIns="0" rtlCol="0" anchor="ctr"/>
           <a:lstStyle/>
           <a:p>
-            <a:pPr indent="0" marL="0">
+            <a:pPr marL="0" indent="0">
               <a:buNone/>
             </a:pPr>
             <a:r>
@@ -10867,7 +10841,7 @@
           <a:bodyPr wrap="square" lIns="0" tIns="0" rIns="0" bIns="0" rtlCol="0" anchor="ctr"/>
           <a:lstStyle/>
           <a:p>
-            <a:pPr indent="0" marL="0">
+            <a:pPr marL="0" indent="0">
               <a:buNone/>
             </a:pPr>
             <a:r>
@@ -10906,7 +10880,7 @@
           <a:bodyPr wrap="square" lIns="0" tIns="0" rIns="0" bIns="0" rtlCol="0" anchor="ctr"/>
           <a:lstStyle/>
           <a:p>
-            <a:pPr indent="0" marL="0">
+            <a:pPr marL="0" indent="0">
               <a:buNone/>
             </a:pPr>
             <a:r>
@@ -10945,7 +10919,7 @@
           <a:bodyPr wrap="square" lIns="0" tIns="0" rIns="0" bIns="0" rtlCol="0" anchor="ctr"/>
           <a:lstStyle/>
           <a:p>
-            <a:pPr indent="0" marL="0">
+            <a:pPr marL="0" indent="0">
               <a:buNone/>
             </a:pPr>
             <a:r>
@@ -10984,7 +10958,7 @@
           <a:bodyPr wrap="square" lIns="0" tIns="0" rIns="0" bIns="0" rtlCol="0" anchor="ctr"/>
           <a:lstStyle/>
           <a:p>
-            <a:pPr indent="0" marL="0">
+            <a:pPr marL="0" indent="0">
               <a:buNone/>
             </a:pPr>
             <a:r>
@@ -11023,7 +10997,7 @@
           <a:bodyPr wrap="square" lIns="0" tIns="0" rIns="0" bIns="0" rtlCol="0" anchor="ctr"/>
           <a:lstStyle/>
           <a:p>
-            <a:pPr indent="0" marL="0">
+            <a:pPr marL="0" indent="0">
               <a:buNone/>
             </a:pPr>
             <a:r>
@@ -11062,7 +11036,7 @@
           <a:bodyPr wrap="square" lIns="0" tIns="0" rIns="0" bIns="0" rtlCol="0" anchor="ctr"/>
           <a:lstStyle/>
           <a:p>
-            <a:pPr indent="0" marL="0">
+            <a:pPr marL="0" indent="0">
               <a:buNone/>
             </a:pPr>
             <a:r>
@@ -11096,6 +11070,7 @@
         <a:solidFill>
           <a:srgbClr val="161D2D"/>
         </a:solidFill>
+        <a:effectLst/>
       </p:bgPr>
     </p:bg>
     <p:spTree>
@@ -11133,7 +11108,7 @@
           <a:bodyPr wrap="square" lIns="0" tIns="0" rIns="0" bIns="0" rtlCol="0" anchor="ctr"/>
           <a:lstStyle/>
           <a:p>
-            <a:pPr algn="l" indent="0" marL="0">
+            <a:pPr marL="0" indent="0" algn="l">
               <a:buNone/>
             </a:pPr>
             <a:r>
@@ -11172,7 +11147,7 @@
           <a:bodyPr wrap="square" lIns="0" tIns="0" rIns="0" bIns="0" rtlCol="0" anchor="ctr"/>
           <a:lstStyle/>
           <a:p>
-            <a:pPr algn="r" indent="0" marL="0">
+            <a:pPr marL="0" indent="0" algn="r">
               <a:buNone/>
             </a:pPr>
             <a:r>
@@ -11192,14 +11167,14 @@
       </p:sp>
       <p:pic>
         <p:nvPicPr>
-          <p:cNvPr id="5" name="Image 0" descr="/sessions/awesome-wizardly-sagan/mnt/charla-ia-aws-ug-cucuta/multimedia/aws_ug_cucuta_logo.jpeg">    </p:cNvPr>
+          <p:cNvPr id="5" name="Image 0" descr="/sessions/awesome-wizardly-sagan/mnt/charla-ia-aws-ug-cucuta/multimedia/aws_ug_cucuta_logo.jpeg"/>
           <p:cNvPicPr>
             <a:picLocks noChangeAspect="1"/>
           </p:cNvPicPr>
           <p:nvPr/>
         </p:nvPicPr>
         <p:blipFill>
-          <a:blip r:embed="rId1">
+          <a:blip r:embed="rId3">
             <a:alphaModFix amt="75000"/>
           </a:blip>
           <a:stretch>
@@ -11237,7 +11212,7 @@
           <a:bodyPr wrap="square" lIns="0" tIns="0" rIns="0" bIns="0" rtlCol="0" anchor="ctr"/>
           <a:lstStyle/>
           <a:p>
-            <a:pPr algn="ctr" indent="0" marL="0">
+            <a:pPr marL="0" indent="0" algn="ctr">
               <a:lnSpc>
                 <a:spcPts val="4600"/>
               </a:lnSpc>
@@ -11257,7 +11232,7 @@
             <a:endParaRPr lang="en-US" sz="4200" dirty="0"/>
           </a:p>
           <a:p>
-            <a:pPr algn="ctr" indent="0" marL="0">
+            <a:pPr marL="0" indent="0" algn="ctr">
               <a:lnSpc>
                 <a:spcPts val="4600"/>
               </a:lnSpc>
@@ -11294,6 +11269,7 @@
         <a:solidFill>
           <a:srgbClr val="161D2D"/>
         </a:solidFill>
+        <a:effectLst/>
       </p:bgPr>
     </p:bg>
     <p:spTree>
@@ -11331,7 +11307,7 @@
           <a:bodyPr wrap="square" lIns="0" tIns="0" rIns="0" bIns="0" rtlCol="0" anchor="ctr"/>
           <a:lstStyle/>
           <a:p>
-            <a:pPr algn="l" indent="0" marL="0">
+            <a:pPr marL="0" indent="0" algn="l">
               <a:buNone/>
             </a:pPr>
             <a:r>
@@ -11370,7 +11346,7 @@
           <a:bodyPr wrap="square" lIns="0" tIns="0" rIns="0" bIns="0" rtlCol="0" anchor="ctr"/>
           <a:lstStyle/>
           <a:p>
-            <a:pPr algn="r" indent="0" marL="0">
+            <a:pPr marL="0" indent="0" algn="r">
               <a:buNone/>
             </a:pPr>
             <a:r>
@@ -11390,14 +11366,14 @@
       </p:sp>
       <p:pic>
         <p:nvPicPr>
-          <p:cNvPr id="5" name="Image 0" descr="/sessions/awesome-wizardly-sagan/mnt/charla-ia-aws-ug-cucuta/multimedia/aws_ug_cucuta_logo.jpeg">    </p:cNvPr>
+          <p:cNvPr id="5" name="Image 0" descr="/sessions/awesome-wizardly-sagan/mnt/charla-ia-aws-ug-cucuta/multimedia/aws_ug_cucuta_logo.jpeg"/>
           <p:cNvPicPr>
             <a:picLocks noChangeAspect="1"/>
           </p:cNvPicPr>
           <p:nvPr/>
         </p:nvPicPr>
         <p:blipFill>
-          <a:blip r:embed="rId1">
+          <a:blip r:embed="rId3">
             <a:alphaModFix amt="75000"/>
           </a:blip>
           <a:stretch>
@@ -11435,7 +11411,7 @@
           <a:bodyPr wrap="square" lIns="0" tIns="0" rIns="0" bIns="0" rtlCol="0" anchor="ctr"/>
           <a:lstStyle/>
           <a:p>
-            <a:pPr algn="ctr" indent="0" marL="0">
+            <a:pPr marL="0" indent="0" algn="ctr">
               <a:lnSpc>
                 <a:spcPts val="5000"/>
               </a:lnSpc>
@@ -11455,7 +11431,7 @@
             <a:endParaRPr lang="en-US" sz="3600" dirty="0"/>
           </a:p>
           <a:p>
-            <a:pPr algn="ctr" indent="0" marL="0">
+            <a:pPr marL="0" indent="0" algn="ctr">
               <a:lnSpc>
                 <a:spcPts val="5000"/>
               </a:lnSpc>
@@ -11475,7 +11451,7 @@
             <a:endParaRPr lang="en-US" sz="3600" dirty="0"/>
           </a:p>
           <a:p>
-            <a:pPr algn="ctr" indent="0" marL="0">
+            <a:pPr marL="0" indent="0" algn="ctr">
               <a:lnSpc>
                 <a:spcPts val="5000"/>
               </a:lnSpc>
@@ -11512,6 +11488,7 @@
         <a:solidFill>
           <a:srgbClr val="161D2D"/>
         </a:solidFill>
+        <a:effectLst/>
       </p:bgPr>
     </p:bg>
     <p:spTree>
@@ -11549,7 +11526,7 @@
           <a:bodyPr wrap="square" lIns="0" tIns="0" rIns="0" bIns="0" rtlCol="0" anchor="ctr"/>
           <a:lstStyle/>
           <a:p>
-            <a:pPr algn="l" indent="0" marL="0">
+            <a:pPr marL="0" indent="0" algn="l">
               <a:buNone/>
             </a:pPr>
             <a:r>
@@ -11588,7 +11565,7 @@
           <a:bodyPr wrap="square" lIns="0" tIns="0" rIns="0" bIns="0" rtlCol="0" anchor="ctr"/>
           <a:lstStyle/>
           <a:p>
-            <a:pPr algn="r" indent="0" marL="0">
+            <a:pPr marL="0" indent="0" algn="r">
               <a:buNone/>
             </a:pPr>
             <a:r>
@@ -11608,14 +11585,14 @@
       </p:sp>
       <p:pic>
         <p:nvPicPr>
-          <p:cNvPr id="5" name="Image 0" descr="/sessions/awesome-wizardly-sagan/mnt/charla-ia-aws-ug-cucuta/multimedia/aws_ug_cucuta_logo.jpeg">    </p:cNvPr>
+          <p:cNvPr id="5" name="Image 0" descr="/sessions/awesome-wizardly-sagan/mnt/charla-ia-aws-ug-cucuta/multimedia/aws_ug_cucuta_logo.jpeg"/>
           <p:cNvPicPr>
             <a:picLocks noChangeAspect="1"/>
           </p:cNvPicPr>
           <p:nvPr/>
         </p:nvPicPr>
         <p:blipFill>
-          <a:blip r:embed="rId1">
+          <a:blip r:embed="rId3">
             <a:alphaModFix amt="75000"/>
           </a:blip>
           <a:stretch>
@@ -11653,11 +11630,11 @@
           <a:bodyPr wrap="square" lIns="0" tIns="0" rIns="0" bIns="0" rtlCol="0" anchor="ctr"/>
           <a:lstStyle/>
           <a:p>
-            <a:pPr indent="0" marL="0">
-              <a:buNone/>
-            </a:pPr>
-            <a:r>
-              <a:rPr lang="en-US" sz="1200" b="1" spc="200" kern="0" dirty="0">
+            <a:pPr marL="0" indent="0">
+              <a:buNone/>
+            </a:pPr>
+            <a:r>
+              <a:rPr lang="en-US" sz="1200" b="1" kern="0" spc="200" dirty="0">
                 <a:solidFill>
                   <a:srgbClr val="9257F1"/>
                 </a:solidFill>
@@ -11695,6 +11672,13 @@
             <a:prstDash val="solid"/>
           </a:ln>
         </p:spPr>
+        <p:txBody>
+          <a:bodyPr/>
+          <a:lstStyle/>
+          <a:p>
+            <a:endParaRPr lang="en-CO"/>
+          </a:p>
+        </p:txBody>
       </p:sp>
       <p:sp>
         <p:nvSpPr>
@@ -11717,7 +11701,7 @@
           <a:bodyPr wrap="square" lIns="0" tIns="0" rIns="0" bIns="0" rtlCol="0" anchor="ctr"/>
           <a:lstStyle/>
           <a:p>
-            <a:pPr algn="ctr" indent="0" marL="0">
+            <a:pPr marL="0" indent="0" algn="ctr">
               <a:lnSpc>
                 <a:spcPts val="3200"/>
               </a:lnSpc>
@@ -11737,7 +11721,7 @@
             <a:endParaRPr lang="en-US" sz="2200" dirty="0"/>
           </a:p>
           <a:p>
-            <a:pPr algn="ctr" indent="0" marL="0">
+            <a:pPr marL="0" indent="0" algn="ctr">
               <a:lnSpc>
                 <a:spcPts val="3200"/>
               </a:lnSpc>
@@ -11757,7 +11741,7 @@
             <a:endParaRPr lang="en-US" sz="2200" dirty="0"/>
           </a:p>
           <a:p>
-            <a:pPr algn="ctr" indent="0" marL="0">
+            <a:pPr marL="0" indent="0" algn="ctr">
               <a:lnSpc>
                 <a:spcPts val="3200"/>
               </a:lnSpc>
@@ -11777,7 +11761,7 @@
             <a:endParaRPr lang="en-US" sz="2200" dirty="0"/>
           </a:p>
           <a:p>
-            <a:pPr algn="ctr" indent="0" marL="0">
+            <a:pPr marL="0" indent="0" algn="ctr">
               <a:lnSpc>
                 <a:spcPts val="3200"/>
               </a:lnSpc>
@@ -11797,7 +11781,7 @@
             <a:endParaRPr lang="en-US" sz="2200" dirty="0"/>
           </a:p>
           <a:p>
-            <a:pPr algn="ctr" indent="0" marL="0">
+            <a:pPr marL="0" indent="0" algn="ctr">
               <a:lnSpc>
                 <a:spcPts val="3200"/>
               </a:lnSpc>
@@ -11839,7 +11823,7 @@
           <a:bodyPr wrap="square" lIns="0" tIns="0" rIns="0" bIns="0" rtlCol="0" anchor="ctr"/>
           <a:lstStyle/>
           <a:p>
-            <a:pPr algn="ctr" indent="0" marL="0">
+            <a:pPr marL="0" indent="0" algn="ctr">
               <a:buNone/>
             </a:pPr>
             <a:r>
@@ -11878,7 +11862,7 @@
           <a:bodyPr wrap="square" lIns="0" tIns="0" rIns="0" bIns="0" rtlCol="0" anchor="t"/>
           <a:lstStyle/>
           <a:p>
-            <a:pPr algn="l" indent="0" marL="0">
+            <a:pPr marL="0" indent="0" algn="l">
               <a:lnSpc>
                 <a:spcPts val="3000"/>
               </a:lnSpc>
@@ -11898,7 +11882,7 @@
             <a:endParaRPr lang="en-US" sz="1800" dirty="0"/>
           </a:p>
           <a:p>
-            <a:pPr algn="l" indent="0" marL="0">
+            <a:pPr marL="0" indent="0" algn="l">
               <a:lnSpc>
                 <a:spcPts val="3000"/>
               </a:lnSpc>
@@ -11918,7 +11902,7 @@
             <a:endParaRPr lang="en-US" sz="1800" dirty="0"/>
           </a:p>
           <a:p>
-            <a:pPr algn="l" indent="0" marL="0">
+            <a:pPr marL="0" indent="0" algn="l">
               <a:lnSpc>
                 <a:spcPts val="3000"/>
               </a:lnSpc>
@@ -11938,7 +11922,7 @@
             <a:endParaRPr lang="en-US" sz="1800" dirty="0"/>
           </a:p>
           <a:p>
-            <a:pPr algn="l" indent="0" marL="0">
+            <a:pPr marL="0" indent="0" algn="l">
               <a:lnSpc>
                 <a:spcPts val="3000"/>
               </a:lnSpc>
@@ -11958,7 +11942,7 @@
             <a:endParaRPr lang="en-US" sz="1800" dirty="0"/>
           </a:p>
           <a:p>
-            <a:pPr algn="l" indent="0" marL="0">
+            <a:pPr marL="0" indent="0" algn="l">
               <a:lnSpc>
                 <a:spcPts val="3000"/>
               </a:lnSpc>
@@ -11978,7 +11962,7 @@
             <a:endParaRPr lang="en-US" sz="1800" dirty="0"/>
           </a:p>
           <a:p>
-            <a:pPr algn="l" indent="0" marL="0">
+            <a:pPr marL="0" indent="0" algn="l">
               <a:lnSpc>
                 <a:spcPts val="3000"/>
               </a:lnSpc>
@@ -11998,7 +11982,7 @@
             <a:endParaRPr lang="en-US" sz="1800" dirty="0"/>
           </a:p>
           <a:p>
-            <a:pPr algn="l" indent="0" marL="0">
+            <a:pPr marL="0" indent="0" algn="l">
               <a:lnSpc>
                 <a:spcPts val="3000"/>
               </a:lnSpc>
@@ -12018,7 +12002,7 @@
             <a:endParaRPr lang="en-US" sz="1800" dirty="0"/>
           </a:p>
           <a:p>
-            <a:pPr algn="l" indent="0" marL="0">
+            <a:pPr marL="0" indent="0" algn="l">
               <a:lnSpc>
                 <a:spcPts val="3000"/>
               </a:lnSpc>
@@ -12038,7 +12022,7 @@
             <a:endParaRPr lang="en-US" sz="1800" dirty="0"/>
           </a:p>
           <a:p>
-            <a:pPr algn="l" indent="0" marL="0">
+            <a:pPr marL="0" indent="0" algn="l">
               <a:lnSpc>
                 <a:spcPts val="3000"/>
               </a:lnSpc>
@@ -12058,7 +12042,7 @@
             <a:endParaRPr lang="en-US" sz="1800" dirty="0"/>
           </a:p>
           <a:p>
-            <a:pPr algn="l" indent="0" marL="0">
+            <a:pPr marL="0" indent="0" algn="l">
               <a:lnSpc>
                 <a:spcPts val="3000"/>
               </a:lnSpc>
@@ -12100,7 +12084,7 @@
           <a:bodyPr wrap="square" lIns="0" tIns="0" rIns="0" bIns="0" rtlCol="0" anchor="ctr"/>
           <a:lstStyle/>
           <a:p>
-            <a:pPr indent="0" marL="0">
+            <a:pPr marL="0" indent="0">
               <a:buNone/>
             </a:pPr>
             <a:r>
@@ -12134,6 +12118,7 @@
         <a:solidFill>
           <a:srgbClr val="161D2D"/>
         </a:solidFill>
+        <a:effectLst/>
       </p:bgPr>
     </p:bg>
     <p:spTree>
@@ -12171,7 +12156,7 @@
           <a:bodyPr wrap="square" lIns="0" tIns="0" rIns="0" bIns="0" rtlCol="0" anchor="ctr"/>
           <a:lstStyle/>
           <a:p>
-            <a:pPr algn="l" indent="0" marL="0">
+            <a:pPr marL="0" indent="0" algn="l">
               <a:buNone/>
             </a:pPr>
             <a:r>
@@ -12210,7 +12195,7 @@
           <a:bodyPr wrap="square" lIns="0" tIns="0" rIns="0" bIns="0" rtlCol="0" anchor="ctr"/>
           <a:lstStyle/>
           <a:p>
-            <a:pPr algn="r" indent="0" marL="0">
+            <a:pPr marL="0" indent="0" algn="r">
               <a:buNone/>
             </a:pPr>
             <a:r>
@@ -12230,14 +12215,14 @@
       </p:sp>
       <p:pic>
         <p:nvPicPr>
-          <p:cNvPr id="5" name="Image 0" descr="/sessions/awesome-wizardly-sagan/mnt/charla-ia-aws-ug-cucuta/multimedia/aws_ug_cucuta_logo.jpeg">    </p:cNvPr>
+          <p:cNvPr id="5" name="Image 0" descr="/sessions/awesome-wizardly-sagan/mnt/charla-ia-aws-ug-cucuta/multimedia/aws_ug_cucuta_logo.jpeg"/>
           <p:cNvPicPr>
             <a:picLocks noChangeAspect="1"/>
           </p:cNvPicPr>
           <p:nvPr/>
         </p:nvPicPr>
         <p:blipFill>
-          <a:blip r:embed="rId1">
+          <a:blip r:embed="rId3">
             <a:alphaModFix amt="75000"/>
           </a:blip>
           <a:stretch>
@@ -12275,11 +12260,11 @@
           <a:bodyPr wrap="square" lIns="0" tIns="0" rIns="0" bIns="0" rtlCol="0" anchor="ctr"/>
           <a:lstStyle/>
           <a:p>
-            <a:pPr indent="0" marL="0">
-              <a:buNone/>
-            </a:pPr>
-            <a:r>
-              <a:rPr lang="en-US" sz="1200" b="1" spc="200" kern="0" dirty="0">
+            <a:pPr marL="0" indent="0">
+              <a:buNone/>
+            </a:pPr>
+            <a:r>
+              <a:rPr lang="en-US" sz="1200" b="1" kern="0" spc="200" dirty="0">
                 <a:solidFill>
                   <a:srgbClr val="9257F1"/>
                 </a:solidFill>
@@ -12314,7 +12299,7 @@
           <a:bodyPr wrap="square" lIns="0" tIns="0" rIns="0" bIns="0" rtlCol="0" anchor="ctr"/>
           <a:lstStyle/>
           <a:p>
-            <a:pPr algn="ctr" indent="0" marL="0">
+            <a:pPr marL="0" indent="0" algn="ctr">
               <a:buNone/>
             </a:pPr>
             <a:r>
@@ -12356,6 +12341,13 @@
             <a:prstDash val="solid"/>
           </a:ln>
         </p:spPr>
+        <p:txBody>
+          <a:bodyPr/>
+          <a:lstStyle/>
+          <a:p>
+            <a:endParaRPr lang="en-CO"/>
+          </a:p>
+        </p:txBody>
       </p:sp>
       <p:sp>
         <p:nvSpPr>
@@ -12378,7 +12370,7 @@
           <a:bodyPr wrap="square" lIns="0" tIns="0" rIns="0" bIns="0" rtlCol="0" anchor="ctr"/>
           <a:lstStyle/>
           <a:p>
-            <a:pPr algn="ctr" indent="0" marL="0">
+            <a:pPr marL="0" indent="0" algn="ctr">
               <a:buNone/>
             </a:pPr>
             <a:r>
@@ -12420,6 +12412,13 @@
             <a:prstDash val="solid"/>
           </a:ln>
         </p:spPr>
+        <p:txBody>
+          <a:bodyPr/>
+          <a:lstStyle/>
+          <a:p>
+            <a:endParaRPr lang="en-CO"/>
+          </a:p>
+        </p:txBody>
       </p:sp>
       <p:sp>
         <p:nvSpPr>
@@ -12442,7 +12441,7 @@
           <a:bodyPr wrap="square" lIns="0" tIns="0" rIns="0" bIns="0" rtlCol="0" anchor="ctr"/>
           <a:lstStyle/>
           <a:p>
-            <a:pPr algn="ctr" indent="0" marL="0">
+            <a:pPr marL="0" indent="0" algn="ctr">
               <a:buNone/>
             </a:pPr>
             <a:r>
@@ -12484,6 +12483,13 @@
             <a:prstDash val="solid"/>
           </a:ln>
         </p:spPr>
+        <p:txBody>
+          <a:bodyPr/>
+          <a:lstStyle/>
+          <a:p>
+            <a:endParaRPr lang="en-CO"/>
+          </a:p>
+        </p:txBody>
       </p:sp>
       <p:sp>
         <p:nvSpPr>
@@ -12506,7 +12512,7 @@
           <a:bodyPr wrap="square" lIns="0" tIns="0" rIns="0" bIns="0" rtlCol="0" anchor="ctr"/>
           <a:lstStyle/>
           <a:p>
-            <a:pPr algn="ctr" indent="0" marL="0">
+            <a:pPr marL="0" indent="0" algn="ctr">
               <a:buNone/>
             </a:pPr>
             <a:r>
@@ -12548,6 +12554,13 @@
             <a:prstDash val="solid"/>
           </a:ln>
         </p:spPr>
+        <p:txBody>
+          <a:bodyPr/>
+          <a:lstStyle/>
+          <a:p>
+            <a:endParaRPr lang="en-CO"/>
+          </a:p>
+        </p:txBody>
       </p:sp>
       <p:sp>
         <p:nvSpPr>
@@ -12570,7 +12583,7 @@
           <a:bodyPr wrap="square" lIns="0" tIns="0" rIns="0" bIns="0" rtlCol="0" anchor="ctr"/>
           <a:lstStyle/>
           <a:p>
-            <a:pPr algn="ctr" indent="0" marL="0">
+            <a:pPr marL="0" indent="0" algn="ctr">
               <a:buNone/>
             </a:pPr>
             <a:r>
@@ -12612,6 +12625,13 @@
             <a:prstDash val="solid"/>
           </a:ln>
         </p:spPr>
+        <p:txBody>
+          <a:bodyPr/>
+          <a:lstStyle/>
+          <a:p>
+            <a:endParaRPr lang="en-CO"/>
+          </a:p>
+        </p:txBody>
       </p:sp>
       <p:sp>
         <p:nvSpPr>
@@ -12634,7 +12654,7 @@
           <a:bodyPr wrap="square" lIns="0" tIns="0" rIns="0" bIns="0" rtlCol="0" anchor="ctr"/>
           <a:lstStyle/>
           <a:p>
-            <a:pPr algn="ctr" indent="0" marL="0">
+            <a:pPr marL="0" indent="0" algn="ctr">
               <a:buNone/>
             </a:pPr>
             <a:r>
@@ -12676,6 +12696,13 @@
             <a:prstDash val="solid"/>
           </a:ln>
         </p:spPr>
+        <p:txBody>
+          <a:bodyPr/>
+          <a:lstStyle/>
+          <a:p>
+            <a:endParaRPr lang="en-CO"/>
+          </a:p>
+        </p:txBody>
       </p:sp>
       <p:sp>
         <p:nvSpPr>
@@ -12698,7 +12725,7 @@
           <a:bodyPr wrap="square" lIns="0" tIns="0" rIns="0" bIns="0" rtlCol="0" anchor="ctr"/>
           <a:lstStyle/>
           <a:p>
-            <a:pPr algn="ctr" indent="0" marL="0">
+            <a:pPr marL="0" indent="0" algn="ctr">
               <a:buNone/>
             </a:pPr>
             <a:r>
@@ -12737,7 +12764,7 @@
           <a:bodyPr wrap="square" lIns="0" tIns="0" rIns="0" bIns="0" rtlCol="0" anchor="ctr"/>
           <a:lstStyle/>
           <a:p>
-            <a:pPr algn="ctr" indent="0" marL="0">
+            <a:pPr marL="0" indent="0" algn="ctr">
               <a:buNone/>
             </a:pPr>
             <a:r>
@@ -12771,6 +12798,7 @@
         <a:solidFill>
           <a:srgbClr val="161D2D"/>
         </a:solidFill>
+        <a:effectLst/>
       </p:bgPr>
     </p:bg>
     <p:spTree>
@@ -12808,7 +12836,7 @@
           <a:bodyPr wrap="square" lIns="0" tIns="0" rIns="0" bIns="0" rtlCol="0" anchor="ctr"/>
           <a:lstStyle/>
           <a:p>
-            <a:pPr algn="l" indent="0" marL="0">
+            <a:pPr marL="0" indent="0" algn="l">
               <a:buNone/>
             </a:pPr>
             <a:r>
@@ -12847,7 +12875,7 @@
           <a:bodyPr wrap="square" lIns="0" tIns="0" rIns="0" bIns="0" rtlCol="0" anchor="ctr"/>
           <a:lstStyle/>
           <a:p>
-            <a:pPr algn="r" indent="0" marL="0">
+            <a:pPr marL="0" indent="0" algn="r">
               <a:buNone/>
             </a:pPr>
             <a:r>
@@ -12867,14 +12895,14 @@
       </p:sp>
       <p:pic>
         <p:nvPicPr>
-          <p:cNvPr id="5" name="Image 0" descr="/sessions/awesome-wizardly-sagan/mnt/charla-ia-aws-ug-cucuta/multimedia/aws_ug_cucuta_logo.jpeg">    </p:cNvPr>
+          <p:cNvPr id="5" name="Image 0" descr="/sessions/awesome-wizardly-sagan/mnt/charla-ia-aws-ug-cucuta/multimedia/aws_ug_cucuta_logo.jpeg"/>
           <p:cNvPicPr>
             <a:picLocks noChangeAspect="1"/>
           </p:cNvPicPr>
           <p:nvPr/>
         </p:nvPicPr>
         <p:blipFill>
-          <a:blip r:embed="rId1">
+          <a:blip r:embed="rId3">
             <a:alphaModFix amt="75000"/>
           </a:blip>
           <a:stretch>
@@ -12912,7 +12940,7 @@
           <a:bodyPr wrap="square" lIns="0" tIns="0" rIns="0" bIns="0" rtlCol="0" anchor="ctr"/>
           <a:lstStyle/>
           <a:p>
-            <a:pPr algn="ctr" indent="0" marL="0">
+            <a:pPr marL="0" indent="0" algn="ctr">
               <a:lnSpc>
                 <a:spcPts val="4600"/>
               </a:lnSpc>
@@ -12932,7 +12960,7 @@
             <a:endParaRPr lang="en-US" sz="4000" dirty="0"/>
           </a:p>
           <a:p>
-            <a:pPr algn="ctr" indent="0" marL="0">
+            <a:pPr marL="0" indent="0" algn="ctr">
               <a:lnSpc>
                 <a:spcPts val="4600"/>
               </a:lnSpc>
@@ -12969,6 +12997,7 @@
         <a:solidFill>
           <a:srgbClr val="161D2D"/>
         </a:solidFill>
+        <a:effectLst/>
       </p:bgPr>
     </p:bg>
     <p:spTree>
@@ -13006,7 +13035,7 @@
           <a:bodyPr wrap="square" lIns="0" tIns="0" rIns="0" bIns="0" rtlCol="0" anchor="ctr"/>
           <a:lstStyle/>
           <a:p>
-            <a:pPr algn="l" indent="0" marL="0">
+            <a:pPr marL="0" indent="0" algn="l">
               <a:buNone/>
             </a:pPr>
             <a:r>
@@ -13045,7 +13074,7 @@
           <a:bodyPr wrap="square" lIns="0" tIns="0" rIns="0" bIns="0" rtlCol="0" anchor="ctr"/>
           <a:lstStyle/>
           <a:p>
-            <a:pPr algn="r" indent="0" marL="0">
+            <a:pPr marL="0" indent="0" algn="r">
               <a:buNone/>
             </a:pPr>
             <a:r>
@@ -13065,14 +13094,14 @@
       </p:sp>
       <p:pic>
         <p:nvPicPr>
-          <p:cNvPr id="5" name="Image 0" descr="/sessions/awesome-wizardly-sagan/mnt/charla-ia-aws-ug-cucuta/multimedia/aws_ug_cucuta_logo.jpeg">    </p:cNvPr>
+          <p:cNvPr id="5" name="Image 0" descr="/sessions/awesome-wizardly-sagan/mnt/charla-ia-aws-ug-cucuta/multimedia/aws_ug_cucuta_logo.jpeg"/>
           <p:cNvPicPr>
             <a:picLocks noChangeAspect="1"/>
           </p:cNvPicPr>
           <p:nvPr/>
         </p:nvPicPr>
         <p:blipFill>
-          <a:blip r:embed="rId1">
+          <a:blip r:embed="rId3">
             <a:alphaModFix amt="75000"/>
           </a:blip>
           <a:stretch>
@@ -13110,11 +13139,11 @@
           <a:bodyPr wrap="square" lIns="0" tIns="0" rIns="0" bIns="0" rtlCol="0" anchor="ctr"/>
           <a:lstStyle/>
           <a:p>
-            <a:pPr indent="0" marL="0">
-              <a:buNone/>
-            </a:pPr>
-            <a:r>
-              <a:rPr lang="en-US" sz="1200" b="1" spc="200" kern="0" dirty="0">
+            <a:pPr marL="0" indent="0">
+              <a:buNone/>
+            </a:pPr>
+            <a:r>
+              <a:rPr lang="en-US" sz="1200" b="1" kern="0" spc="200" dirty="0">
                 <a:solidFill>
                   <a:srgbClr val="9257F1"/>
                 </a:solidFill>
@@ -13149,7 +13178,7 @@
           <a:bodyPr wrap="square" lIns="0" tIns="0" rIns="0" bIns="0" rtlCol="0" anchor="ctr"/>
           <a:lstStyle/>
           <a:p>
-            <a:pPr algn="ctr" indent="0" marL="0">
+            <a:pPr marL="0" indent="0" algn="ctr">
               <a:lnSpc>
                 <a:spcPts val="6000"/>
               </a:lnSpc>
@@ -13169,7 +13198,7 @@
             <a:endParaRPr lang="en-US" sz="3000" dirty="0"/>
           </a:p>
           <a:p>
-            <a:pPr algn="ctr" indent="0" marL="0">
+            <a:pPr marL="0" indent="0" algn="ctr">
               <a:lnSpc>
                 <a:spcPts val="6000"/>
               </a:lnSpc>
@@ -13211,7 +13240,7 @@
           <a:bodyPr wrap="square" lIns="0" tIns="0" rIns="0" bIns="0" rtlCol="0" anchor="ctr"/>
           <a:lstStyle/>
           <a:p>
-            <a:pPr algn="ctr" indent="0" marL="0">
+            <a:pPr marL="0" indent="0" algn="ctr">
               <a:buNone/>
             </a:pPr>
             <a:r>
@@ -13245,6 +13274,7 @@
         <a:solidFill>
           <a:srgbClr val="161D2D"/>
         </a:solidFill>
+        <a:effectLst/>
       </p:bgPr>
     </p:bg>
     <p:spTree>
@@ -13282,7 +13312,7 @@
           <a:bodyPr wrap="square" lIns="0" tIns="0" rIns="0" bIns="0" rtlCol="0" anchor="ctr"/>
           <a:lstStyle/>
           <a:p>
-            <a:pPr algn="l" indent="0" marL="0">
+            <a:pPr marL="0" indent="0" algn="l">
               <a:buNone/>
             </a:pPr>
             <a:r>
@@ -13321,7 +13351,7 @@
           <a:bodyPr wrap="square" lIns="0" tIns="0" rIns="0" bIns="0" rtlCol="0" anchor="ctr"/>
           <a:lstStyle/>
           <a:p>
-            <a:pPr algn="r" indent="0" marL="0">
+            <a:pPr marL="0" indent="0" algn="r">
               <a:buNone/>
             </a:pPr>
             <a:r>
@@ -13341,14 +13371,14 @@
       </p:sp>
       <p:pic>
         <p:nvPicPr>
-          <p:cNvPr id="5" name="Image 0" descr="/sessions/awesome-wizardly-sagan/mnt/charla-ia-aws-ug-cucuta/multimedia/aws_ug_cucuta_logo.jpeg">    </p:cNvPr>
+          <p:cNvPr id="5" name="Image 0" descr="/sessions/awesome-wizardly-sagan/mnt/charla-ia-aws-ug-cucuta/multimedia/aws_ug_cucuta_logo.jpeg"/>
           <p:cNvPicPr>
             <a:picLocks noChangeAspect="1"/>
           </p:cNvPicPr>
           <p:nvPr/>
         </p:nvPicPr>
         <p:blipFill>
-          <a:blip r:embed="rId1">
+          <a:blip r:embed="rId3">
             <a:alphaModFix amt="75000"/>
           </a:blip>
           <a:stretch>
@@ -13386,11 +13416,11 @@
           <a:bodyPr wrap="square" lIns="0" tIns="0" rIns="0" bIns="0" rtlCol="0" anchor="ctr"/>
           <a:lstStyle/>
           <a:p>
-            <a:pPr indent="0" marL="0">
-              <a:buNone/>
-            </a:pPr>
-            <a:r>
-              <a:rPr lang="en-US" sz="1200" b="1" spc="200" kern="0" dirty="0">
+            <a:pPr marL="0" indent="0">
+              <a:buNone/>
+            </a:pPr>
+            <a:r>
+              <a:rPr lang="en-US" sz="1200" b="1" kern="0" spc="200" dirty="0">
                 <a:solidFill>
                   <a:srgbClr val="9257F1"/>
                 </a:solidFill>
@@ -13428,6 +13458,13 @@
             <a:prstDash val="solid"/>
           </a:ln>
         </p:spPr>
+        <p:txBody>
+          <a:bodyPr/>
+          <a:lstStyle/>
+          <a:p>
+            <a:endParaRPr lang="en-CO"/>
+          </a:p>
+        </p:txBody>
       </p:sp>
       <p:sp>
         <p:nvSpPr>
@@ -13450,7 +13487,7 @@
           <a:bodyPr wrap="square" lIns="0" tIns="0" rIns="0" bIns="0" rtlCol="0" anchor="ctr"/>
           <a:lstStyle/>
           <a:p>
-            <a:pPr indent="0" marL="0">
+            <a:pPr marL="0" indent="0">
               <a:buNone/>
             </a:pPr>
             <a:r>
@@ -13489,7 +13526,7 @@
           <a:bodyPr wrap="square" lIns="0" tIns="0" rIns="0" bIns="0" rtlCol="0" anchor="ctr"/>
           <a:lstStyle/>
           <a:p>
-            <a:pPr indent="0" marL="0">
+            <a:pPr marL="0" indent="0">
               <a:buNone/>
             </a:pPr>
             <a:r>
@@ -13528,7 +13565,7 @@
           <a:bodyPr wrap="square" lIns="0" tIns="0" rIns="0" bIns="0" rtlCol="0" anchor="ctr"/>
           <a:lstStyle/>
           <a:p>
-            <a:pPr indent="0" marL="0">
+            <a:pPr marL="0" indent="0">
               <a:buNone/>
             </a:pPr>
             <a:r>
@@ -13570,6 +13607,13 @@
             <a:prstDash val="solid"/>
           </a:ln>
         </p:spPr>
+        <p:txBody>
+          <a:bodyPr/>
+          <a:lstStyle/>
+          <a:p>
+            <a:endParaRPr lang="en-CO"/>
+          </a:p>
+        </p:txBody>
       </p:sp>
       <p:sp>
         <p:nvSpPr>
@@ -13592,7 +13636,7 @@
           <a:bodyPr wrap="square" lIns="0" tIns="0" rIns="0" bIns="0" rtlCol="0" anchor="ctr"/>
           <a:lstStyle/>
           <a:p>
-            <a:pPr indent="0" marL="0">
+            <a:pPr marL="0" indent="0">
               <a:buNone/>
             </a:pPr>
             <a:r>
@@ -13631,7 +13675,7 @@
           <a:bodyPr wrap="square" lIns="0" tIns="0" rIns="0" bIns="0" rtlCol="0" anchor="ctr"/>
           <a:lstStyle/>
           <a:p>
-            <a:pPr indent="0" marL="0">
+            <a:pPr marL="0" indent="0">
               <a:buNone/>
             </a:pPr>
             <a:r>
@@ -13670,7 +13714,7 @@
           <a:bodyPr wrap="square" lIns="0" tIns="0" rIns="0" bIns="0" rtlCol="0" anchor="ctr"/>
           <a:lstStyle/>
           <a:p>
-            <a:pPr indent="0" marL="0">
+            <a:pPr marL="0" indent="0">
               <a:buNone/>
             </a:pPr>
             <a:r>
@@ -13712,6 +13756,13 @@
             <a:prstDash val="solid"/>
           </a:ln>
         </p:spPr>
+        <p:txBody>
+          <a:bodyPr/>
+          <a:lstStyle/>
+          <a:p>
+            <a:endParaRPr lang="en-CO"/>
+          </a:p>
+        </p:txBody>
       </p:sp>
       <p:sp>
         <p:nvSpPr>
@@ -13734,7 +13785,7 @@
           <a:bodyPr wrap="square" lIns="0" tIns="0" rIns="0" bIns="0" rtlCol="0" anchor="ctr"/>
           <a:lstStyle/>
           <a:p>
-            <a:pPr indent="0" marL="0">
+            <a:pPr marL="0" indent="0">
               <a:buNone/>
             </a:pPr>
             <a:r>
@@ -13773,7 +13824,7 @@
           <a:bodyPr wrap="square" lIns="0" tIns="0" rIns="0" bIns="0" rtlCol="0" anchor="ctr"/>
           <a:lstStyle/>
           <a:p>
-            <a:pPr indent="0" marL="0">
+            <a:pPr marL="0" indent="0">
               <a:buNone/>
             </a:pPr>
             <a:r>
@@ -13812,7 +13863,7 @@
           <a:bodyPr wrap="square" lIns="0" tIns="0" rIns="0" bIns="0" rtlCol="0" anchor="ctr"/>
           <a:lstStyle/>
           <a:p>
-            <a:pPr indent="0" marL="0">
+            <a:pPr marL="0" indent="0">
               <a:buNone/>
             </a:pPr>
             <a:r>
@@ -13854,6 +13905,13 @@
             <a:prstDash val="solid"/>
           </a:ln>
         </p:spPr>
+        <p:txBody>
+          <a:bodyPr/>
+          <a:lstStyle/>
+          <a:p>
+            <a:endParaRPr lang="en-CO"/>
+          </a:p>
+        </p:txBody>
       </p:sp>
       <p:sp>
         <p:nvSpPr>
@@ -13876,7 +13934,7 @@
           <a:bodyPr wrap="square" lIns="0" tIns="0" rIns="0" bIns="0" rtlCol="0" anchor="ctr"/>
           <a:lstStyle/>
           <a:p>
-            <a:pPr indent="0" marL="0">
+            <a:pPr marL="0" indent="0">
               <a:buNone/>
             </a:pPr>
             <a:r>
@@ -13915,7 +13973,7 @@
           <a:bodyPr wrap="square" lIns="0" tIns="0" rIns="0" bIns="0" rtlCol="0" anchor="ctr"/>
           <a:lstStyle/>
           <a:p>
-            <a:pPr indent="0" marL="0">
+            <a:pPr marL="0" indent="0">
               <a:buNone/>
             </a:pPr>
             <a:r>
@@ -13954,7 +14012,7 @@
           <a:bodyPr wrap="square" lIns="0" tIns="0" rIns="0" bIns="0" rtlCol="0" anchor="ctr"/>
           <a:lstStyle/>
           <a:p>
-            <a:pPr indent="0" marL="0">
+            <a:pPr marL="0" indent="0">
               <a:buNone/>
             </a:pPr>
             <a:r>
@@ -13996,6 +14054,13 @@
             <a:prstDash val="solid"/>
           </a:ln>
         </p:spPr>
+        <p:txBody>
+          <a:bodyPr/>
+          <a:lstStyle/>
+          <a:p>
+            <a:endParaRPr lang="en-CO"/>
+          </a:p>
+        </p:txBody>
       </p:sp>
       <p:sp>
         <p:nvSpPr>
@@ -14018,7 +14083,7 @@
           <a:bodyPr wrap="square" lIns="0" tIns="0" rIns="0" bIns="0" rtlCol="0" anchor="ctr"/>
           <a:lstStyle/>
           <a:p>
-            <a:pPr indent="0" marL="0">
+            <a:pPr marL="0" indent="0">
               <a:buNone/>
             </a:pPr>
             <a:r>
@@ -14057,7 +14122,7 @@
           <a:bodyPr wrap="square" lIns="0" tIns="0" rIns="0" bIns="0" rtlCol="0" anchor="ctr"/>
           <a:lstStyle/>
           <a:p>
-            <a:pPr indent="0" marL="0">
+            <a:pPr marL="0" indent="0">
               <a:buNone/>
             </a:pPr>
             <a:r>
@@ -14096,7 +14161,7 @@
           <a:bodyPr wrap="square" lIns="0" tIns="0" rIns="0" bIns="0" rtlCol="0" anchor="ctr"/>
           <a:lstStyle/>
           <a:p>
-            <a:pPr indent="0" marL="0">
+            <a:pPr marL="0" indent="0">
               <a:buNone/>
             </a:pPr>
             <a:r>
@@ -14135,7 +14200,7 @@
           <a:bodyPr wrap="square" lIns="0" tIns="0" rIns="0" bIns="0" rtlCol="0" anchor="ctr"/>
           <a:lstStyle/>
           <a:p>
-            <a:pPr indent="0" marL="0">
+            <a:pPr marL="0" indent="0">
               <a:buNone/>
             </a:pPr>
             <a:r>
@@ -14169,6 +14234,7 @@
         <a:solidFill>
           <a:srgbClr val="161D2D"/>
         </a:solidFill>
+        <a:effectLst/>
       </p:bgPr>
     </p:bg>
     <p:spTree>
@@ -14206,7 +14272,7 @@
           <a:bodyPr wrap="square" lIns="0" tIns="0" rIns="0" bIns="0" rtlCol="0" anchor="ctr"/>
           <a:lstStyle/>
           <a:p>
-            <a:pPr algn="l" indent="0" marL="0">
+            <a:pPr marL="0" indent="0" algn="l">
               <a:buNone/>
             </a:pPr>
             <a:r>
@@ -14245,7 +14311,7 @@
           <a:bodyPr wrap="square" lIns="0" tIns="0" rIns="0" bIns="0" rtlCol="0" anchor="ctr"/>
           <a:lstStyle/>
           <a:p>
-            <a:pPr algn="r" indent="0" marL="0">
+            <a:pPr marL="0" indent="0" algn="r">
               <a:buNone/>
             </a:pPr>
             <a:r>
@@ -14265,14 +14331,14 @@
       </p:sp>
       <p:pic>
         <p:nvPicPr>
-          <p:cNvPr id="5" name="Image 0" descr="/sessions/awesome-wizardly-sagan/mnt/charla-ia-aws-ug-cucuta/multimedia/aws_ug_cucuta_logo.jpeg">    </p:cNvPr>
+          <p:cNvPr id="5" name="Image 0" descr="/sessions/awesome-wizardly-sagan/mnt/charla-ia-aws-ug-cucuta/multimedia/aws_ug_cucuta_logo.jpeg"/>
           <p:cNvPicPr>
             <a:picLocks noChangeAspect="1"/>
           </p:cNvPicPr>
           <p:nvPr/>
         </p:nvPicPr>
         <p:blipFill>
-          <a:blip r:embed="rId1">
+          <a:blip r:embed="rId3">
             <a:alphaModFix amt="75000"/>
           </a:blip>
           <a:stretch>
@@ -14310,11 +14376,11 @@
           <a:bodyPr wrap="square" lIns="0" tIns="0" rIns="0" bIns="0" rtlCol="0" anchor="ctr"/>
           <a:lstStyle/>
           <a:p>
-            <a:pPr indent="0" marL="0">
-              <a:buNone/>
-            </a:pPr>
-            <a:r>
-              <a:rPr lang="en-US" sz="1200" b="1" spc="200" kern="0" dirty="0">
+            <a:pPr marL="0" indent="0">
+              <a:buNone/>
+            </a:pPr>
+            <a:r>
+              <a:rPr lang="en-US" sz="1200" b="1" kern="0" spc="200" dirty="0">
                 <a:solidFill>
                   <a:srgbClr val="9257F1"/>
                 </a:solidFill>
@@ -14349,7 +14415,7 @@
           <a:bodyPr wrap="square" lIns="0" tIns="0" rIns="0" bIns="0" rtlCol="0" anchor="ctr"/>
           <a:lstStyle/>
           <a:p>
-            <a:pPr indent="0" marL="0">
+            <a:pPr marL="0" indent="0">
               <a:buNone/>
             </a:pPr>
             <a:r>
@@ -14388,7 +14454,7 @@
           <a:bodyPr wrap="square" lIns="0" tIns="0" rIns="0" bIns="0" rtlCol="0" anchor="ctr"/>
           <a:lstStyle/>
           <a:p>
-            <a:pPr indent="0" marL="0">
+            <a:pPr marL="0" indent="0">
               <a:buNone/>
             </a:pPr>
             <a:r>
@@ -14427,7 +14493,7 @@
           <a:bodyPr wrap="square" lIns="0" tIns="0" rIns="0" bIns="0" rtlCol="0" anchor="ctr"/>
           <a:lstStyle/>
           <a:p>
-            <a:pPr indent="0" marL="0">
+            <a:pPr marL="0" indent="0">
               <a:buNone/>
             </a:pPr>
             <a:r>
@@ -14466,7 +14532,7 @@
           <a:bodyPr wrap="square" lIns="0" tIns="0" rIns="0" bIns="0" rtlCol="0" anchor="ctr"/>
           <a:lstStyle/>
           <a:p>
-            <a:pPr indent="0" marL="0">
+            <a:pPr marL="0" indent="0">
               <a:buNone/>
             </a:pPr>
             <a:r>
@@ -14505,7 +14571,7 @@
           <a:bodyPr wrap="square" lIns="0" tIns="0" rIns="0" bIns="0" rtlCol="0" anchor="ctr"/>
           <a:lstStyle/>
           <a:p>
-            <a:pPr indent="0" marL="0">
+            <a:pPr marL="0" indent="0">
               <a:buNone/>
             </a:pPr>
             <a:r>
@@ -14544,7 +14610,7 @@
           <a:bodyPr wrap="square" lIns="0" tIns="0" rIns="0" bIns="0" rtlCol="0" anchor="ctr"/>
           <a:lstStyle/>
           <a:p>
-            <a:pPr indent="0" marL="0">
+            <a:pPr marL="0" indent="0">
               <a:buNone/>
             </a:pPr>
             <a:r>
@@ -14583,7 +14649,7 @@
           <a:bodyPr wrap="square" lIns="0" tIns="0" rIns="0" bIns="0" rtlCol="0" anchor="ctr"/>
           <a:lstStyle/>
           <a:p>
-            <a:pPr indent="0" marL="0">
+            <a:pPr marL="0" indent="0">
               <a:buNone/>
             </a:pPr>
             <a:r>
@@ -14622,7 +14688,7 @@
           <a:bodyPr wrap="square" lIns="0" tIns="0" rIns="0" bIns="0" rtlCol="0" anchor="ctr"/>
           <a:lstStyle/>
           <a:p>
-            <a:pPr indent="0" marL="0">
+            <a:pPr marL="0" indent="0">
               <a:buNone/>
             </a:pPr>
             <a:r>
@@ -14661,7 +14727,7 @@
           <a:bodyPr wrap="square" lIns="0" tIns="0" rIns="0" bIns="0" rtlCol="0" anchor="ctr"/>
           <a:lstStyle/>
           <a:p>
-            <a:pPr indent="0" marL="0">
+            <a:pPr marL="0" indent="0">
               <a:buNone/>
             </a:pPr>
             <a:r>
@@ -14700,7 +14766,7 @@
           <a:bodyPr wrap="square" lIns="0" tIns="0" rIns="0" bIns="0" rtlCol="0" anchor="ctr"/>
           <a:lstStyle/>
           <a:p>
-            <a:pPr indent="0" marL="0">
+            <a:pPr marL="0" indent="0">
               <a:buNone/>
             </a:pPr>
             <a:r>
@@ -14739,7 +14805,7 @@
           <a:bodyPr wrap="square" lIns="0" tIns="0" rIns="0" bIns="0" rtlCol="0" anchor="ctr"/>
           <a:lstStyle/>
           <a:p>
-            <a:pPr indent="0" marL="0">
+            <a:pPr marL="0" indent="0">
               <a:buNone/>
             </a:pPr>
             <a:r>
@@ -14778,7 +14844,7 @@
           <a:bodyPr wrap="square" lIns="0" tIns="0" rIns="0" bIns="0" rtlCol="0" anchor="ctr"/>
           <a:lstStyle/>
           <a:p>
-            <a:pPr indent="0" marL="0">
+            <a:pPr marL="0" indent="0">
               <a:buNone/>
             </a:pPr>
             <a:r>
@@ -14817,7 +14883,7 @@
           <a:bodyPr wrap="square" lIns="0" tIns="0" rIns="0" bIns="0" rtlCol="0" anchor="ctr"/>
           <a:lstStyle/>
           <a:p>
-            <a:pPr indent="0" marL="0">
+            <a:pPr marL="0" indent="0">
               <a:buNone/>
             </a:pPr>
             <a:r>
@@ -14856,7 +14922,7 @@
           <a:bodyPr wrap="square" lIns="0" tIns="0" rIns="0" bIns="0" rtlCol="0" anchor="ctr"/>
           <a:lstStyle/>
           <a:p>
-            <a:pPr indent="0" marL="0">
+            <a:pPr marL="0" indent="0">
               <a:buNone/>
             </a:pPr>
             <a:r>
@@ -14890,6 +14956,7 @@
         <a:solidFill>
           <a:srgbClr val="161D2D"/>
         </a:solidFill>
+        <a:effectLst/>
       </p:bgPr>
     </p:bg>
     <p:spTree>
@@ -14927,7 +14994,7 @@
           <a:bodyPr wrap="square" lIns="0" tIns="0" rIns="0" bIns="0" rtlCol="0" anchor="ctr"/>
           <a:lstStyle/>
           <a:p>
-            <a:pPr algn="l" indent="0" marL="0">
+            <a:pPr marL="0" indent="0" algn="l">
               <a:buNone/>
             </a:pPr>
             <a:r>
@@ -14966,7 +15033,7 @@
           <a:bodyPr wrap="square" lIns="0" tIns="0" rIns="0" bIns="0" rtlCol="0" anchor="ctr"/>
           <a:lstStyle/>
           <a:p>
-            <a:pPr algn="r" indent="0" marL="0">
+            <a:pPr marL="0" indent="0" algn="r">
               <a:buNone/>
             </a:pPr>
             <a:r>
@@ -14986,14 +15053,14 @@
       </p:sp>
       <p:pic>
         <p:nvPicPr>
-          <p:cNvPr id="5" name="Image 0" descr="/sessions/awesome-wizardly-sagan/mnt/charla-ia-aws-ug-cucuta/multimedia/aws_ug_cucuta_logo.jpeg">    </p:cNvPr>
+          <p:cNvPr id="5" name="Image 0" descr="/sessions/awesome-wizardly-sagan/mnt/charla-ia-aws-ug-cucuta/multimedia/aws_ug_cucuta_logo.jpeg"/>
           <p:cNvPicPr>
             <a:picLocks noChangeAspect="1"/>
           </p:cNvPicPr>
           <p:nvPr/>
         </p:nvPicPr>
         <p:blipFill>
-          <a:blip r:embed="rId1">
+          <a:blip r:embed="rId3">
             <a:alphaModFix amt="75000"/>
           </a:blip>
           <a:stretch>
@@ -15031,11 +15098,11 @@
           <a:bodyPr wrap="square" lIns="0" tIns="0" rIns="0" bIns="0" rtlCol="0" anchor="ctr"/>
           <a:lstStyle/>
           <a:p>
-            <a:pPr indent="0" marL="0">
-              <a:buNone/>
-            </a:pPr>
-            <a:r>
-              <a:rPr lang="en-US" sz="1200" b="1" spc="200" kern="0" dirty="0">
+            <a:pPr marL="0" indent="0">
+              <a:buNone/>
+            </a:pPr>
+            <a:r>
+              <a:rPr lang="en-US" sz="1200" b="1" kern="0" spc="200" dirty="0">
                 <a:solidFill>
                   <a:srgbClr val="9257F1"/>
                 </a:solidFill>
@@ -15073,6 +15140,13 @@
             <a:prstDash val="solid"/>
           </a:ln>
         </p:spPr>
+        <p:txBody>
+          <a:bodyPr/>
+          <a:lstStyle/>
+          <a:p>
+            <a:endParaRPr lang="en-CO"/>
+          </a:p>
+        </p:txBody>
       </p:sp>
       <p:sp>
         <p:nvSpPr>
@@ -15095,7 +15169,7 @@
           <a:bodyPr wrap="square" lIns="0" tIns="0" rIns="0" bIns="0" rtlCol="0" anchor="t"/>
           <a:lstStyle/>
           <a:p>
-            <a:pPr indent="0" marL="0">
+            <a:pPr marL="0" indent="0">
               <a:buNone/>
             </a:pPr>
             <a:r>
@@ -15134,7 +15208,7 @@
           <a:bodyPr wrap="square" lIns="0" tIns="0" rIns="0" bIns="0" rtlCol="0" anchor="t"/>
           <a:lstStyle/>
           <a:p>
-            <a:pPr indent="0" marL="0">
+            <a:pPr marL="0" indent="0">
               <a:lnSpc>
                 <a:spcPts val="1800"/>
               </a:lnSpc>
@@ -15154,7 +15228,7 @@
             <a:endParaRPr lang="en-US" sz="1200" dirty="0"/>
           </a:p>
           <a:p>
-            <a:pPr indent="0" marL="0">
+            <a:pPr marL="0" indent="0">
               <a:lnSpc>
                 <a:spcPts val="1800"/>
               </a:lnSpc>
@@ -15174,7 +15248,7 @@
             <a:endParaRPr lang="en-US" sz="1200" dirty="0"/>
           </a:p>
           <a:p>
-            <a:pPr indent="0" marL="0">
+            <a:pPr marL="0" indent="0">
               <a:lnSpc>
                 <a:spcPts val="1800"/>
               </a:lnSpc>
@@ -15219,6 +15293,13 @@
             <a:prstDash val="solid"/>
           </a:ln>
         </p:spPr>
+        <p:txBody>
+          <a:bodyPr/>
+          <a:lstStyle/>
+          <a:p>
+            <a:endParaRPr lang="en-CO"/>
+          </a:p>
+        </p:txBody>
       </p:sp>
       <p:sp>
         <p:nvSpPr>
@@ -15241,7 +15322,7 @@
           <a:bodyPr wrap="square" lIns="0" tIns="0" rIns="0" bIns="0" rtlCol="0" anchor="t"/>
           <a:lstStyle/>
           <a:p>
-            <a:pPr indent="0" marL="0">
+            <a:pPr marL="0" indent="0">
               <a:buNone/>
             </a:pPr>
             <a:r>
@@ -15280,7 +15361,7 @@
           <a:bodyPr wrap="square" lIns="0" tIns="0" rIns="0" bIns="0" rtlCol="0" anchor="t"/>
           <a:lstStyle/>
           <a:p>
-            <a:pPr indent="0" marL="0">
+            <a:pPr marL="0" indent="0">
               <a:lnSpc>
                 <a:spcPts val="1800"/>
               </a:lnSpc>
@@ -15300,7 +15381,7 @@
             <a:endParaRPr lang="en-US" sz="1200" dirty="0"/>
           </a:p>
           <a:p>
-            <a:pPr indent="0" marL="0">
+            <a:pPr marL="0" indent="0">
               <a:lnSpc>
                 <a:spcPts val="1800"/>
               </a:lnSpc>
@@ -15320,7 +15401,7 @@
             <a:endParaRPr lang="en-US" sz="1200" dirty="0"/>
           </a:p>
           <a:p>
-            <a:pPr indent="0" marL="0">
+            <a:pPr marL="0" indent="0">
               <a:lnSpc>
                 <a:spcPts val="1800"/>
               </a:lnSpc>
@@ -15365,6 +15446,13 @@
             <a:prstDash val="solid"/>
           </a:ln>
         </p:spPr>
+        <p:txBody>
+          <a:bodyPr/>
+          <a:lstStyle/>
+          <a:p>
+            <a:endParaRPr lang="en-CO"/>
+          </a:p>
+        </p:txBody>
       </p:sp>
       <p:sp>
         <p:nvSpPr>
@@ -15387,7 +15475,7 @@
           <a:bodyPr wrap="square" lIns="0" tIns="0" rIns="0" bIns="0" rtlCol="0" anchor="t"/>
           <a:lstStyle/>
           <a:p>
-            <a:pPr indent="0" marL="0">
+            <a:pPr marL="0" indent="0">
               <a:buNone/>
             </a:pPr>
             <a:r>
@@ -15426,7 +15514,7 @@
           <a:bodyPr wrap="square" lIns="0" tIns="0" rIns="0" bIns="0" rtlCol="0" anchor="t"/>
           <a:lstStyle/>
           <a:p>
-            <a:pPr indent="0" marL="0">
+            <a:pPr marL="0" indent="0">
               <a:lnSpc>
                 <a:spcPts val="1800"/>
               </a:lnSpc>
@@ -15446,7 +15534,7 @@
             <a:endParaRPr lang="en-US" sz="1200" dirty="0"/>
           </a:p>
           <a:p>
-            <a:pPr indent="0" marL="0">
+            <a:pPr marL="0" indent="0">
               <a:lnSpc>
                 <a:spcPts val="1800"/>
               </a:lnSpc>
@@ -15466,7 +15554,7 @@
             <a:endParaRPr lang="en-US" sz="1200" dirty="0"/>
           </a:p>
           <a:p>
-            <a:pPr indent="0" marL="0">
+            <a:pPr marL="0" indent="0">
               <a:lnSpc>
                 <a:spcPts val="1800"/>
               </a:lnSpc>
@@ -15511,6 +15599,13 @@
             <a:prstDash val="solid"/>
           </a:ln>
         </p:spPr>
+        <p:txBody>
+          <a:bodyPr/>
+          <a:lstStyle/>
+          <a:p>
+            <a:endParaRPr lang="en-CO"/>
+          </a:p>
+        </p:txBody>
       </p:sp>
       <p:sp>
         <p:nvSpPr>
@@ -15533,7 +15628,7 @@
           <a:bodyPr wrap="square" lIns="0" tIns="0" rIns="0" bIns="0" rtlCol="0" anchor="t"/>
           <a:lstStyle/>
           <a:p>
-            <a:pPr indent="0" marL="0">
+            <a:pPr marL="0" indent="0">
               <a:buNone/>
             </a:pPr>
             <a:r>
@@ -15572,7 +15667,7 @@
           <a:bodyPr wrap="square" lIns="0" tIns="0" rIns="0" bIns="0" rtlCol="0" anchor="t"/>
           <a:lstStyle/>
           <a:p>
-            <a:pPr indent="0" marL="0">
+            <a:pPr marL="0" indent="0">
               <a:lnSpc>
                 <a:spcPts val="1800"/>
               </a:lnSpc>
@@ -15592,7 +15687,7 @@
             <a:endParaRPr lang="en-US" sz="1200" dirty="0"/>
           </a:p>
           <a:p>
-            <a:pPr indent="0" marL="0">
+            <a:pPr marL="0" indent="0">
               <a:lnSpc>
                 <a:spcPts val="1800"/>
               </a:lnSpc>
@@ -15612,7 +15707,7 @@
             <a:endParaRPr lang="en-US" sz="1200" dirty="0"/>
           </a:p>
           <a:p>
-            <a:pPr indent="0" marL="0">
+            <a:pPr marL="0" indent="0">
               <a:lnSpc>
                 <a:spcPts val="1800"/>
               </a:lnSpc>
@@ -15654,7 +15749,7 @@
           <a:bodyPr wrap="square" lIns="0" tIns="0" rIns="0" bIns="0" rtlCol="0" anchor="ctr"/>
           <a:lstStyle/>
           <a:p>
-            <a:pPr indent="0" marL="0">
+            <a:pPr marL="0" indent="0">
               <a:buNone/>
             </a:pPr>
             <a:r>
@@ -15688,6 +15783,7 @@
         <a:solidFill>
           <a:srgbClr val="161D2D"/>
         </a:solidFill>
+        <a:effectLst/>
       </p:bgPr>
     </p:bg>
     <p:spTree>
@@ -15725,7 +15821,7 @@
           <a:bodyPr wrap="square" lIns="0" tIns="0" rIns="0" bIns="0" rtlCol="0" anchor="ctr"/>
           <a:lstStyle/>
           <a:p>
-            <a:pPr algn="l" indent="0" marL="0">
+            <a:pPr marL="0" indent="0" algn="l">
               <a:buNone/>
             </a:pPr>
             <a:r>
@@ -15764,7 +15860,7 @@
           <a:bodyPr wrap="square" lIns="0" tIns="0" rIns="0" bIns="0" rtlCol="0" anchor="ctr"/>
           <a:lstStyle/>
           <a:p>
-            <a:pPr algn="r" indent="0" marL="0">
+            <a:pPr marL="0" indent="0" algn="r">
               <a:buNone/>
             </a:pPr>
             <a:r>
@@ -15784,14 +15880,14 @@
       </p:sp>
       <p:pic>
         <p:nvPicPr>
-          <p:cNvPr id="5" name="Image 0" descr="/sessions/awesome-wizardly-sagan/mnt/charla-ia-aws-ug-cucuta/multimedia/aws_ug_cucuta_logo.jpeg">    </p:cNvPr>
+          <p:cNvPr id="5" name="Image 0" descr="/sessions/awesome-wizardly-sagan/mnt/charla-ia-aws-ug-cucuta/multimedia/aws_ug_cucuta_logo.jpeg"/>
           <p:cNvPicPr>
             <a:picLocks noChangeAspect="1"/>
           </p:cNvPicPr>
           <p:nvPr/>
         </p:nvPicPr>
         <p:blipFill>
-          <a:blip r:embed="rId1">
+          <a:blip r:embed="rId3">
             <a:alphaModFix amt="75000"/>
           </a:blip>
           <a:stretch>
@@ -15829,7 +15925,7 @@
           <a:bodyPr wrap="square" lIns="0" tIns="0" rIns="0" bIns="0" rtlCol="0" anchor="ctr"/>
           <a:lstStyle/>
           <a:p>
-            <a:pPr algn="ctr" indent="0" marL="0">
+            <a:pPr marL="0" indent="0" algn="ctr">
               <a:lnSpc>
                 <a:spcPts val="4800"/>
               </a:lnSpc>
@@ -15849,7 +15945,7 @@
             <a:endParaRPr lang="en-US" sz="2800" dirty="0"/>
           </a:p>
           <a:p>
-            <a:pPr algn="ctr" indent="0" marL="0">
+            <a:pPr marL="0" indent="0" algn="ctr">
               <a:lnSpc>
                 <a:spcPts val="4800"/>
               </a:lnSpc>
@@ -15869,7 +15965,7 @@
             <a:endParaRPr lang="en-US" sz="2800" dirty="0"/>
           </a:p>
           <a:p>
-            <a:pPr algn="ctr" indent="0" marL="0">
+            <a:pPr marL="0" indent="0" algn="ctr">
               <a:lnSpc>
                 <a:spcPts val="4800"/>
               </a:lnSpc>
@@ -15889,7 +15985,7 @@
             <a:endParaRPr lang="en-US" sz="2800" dirty="0"/>
           </a:p>
           <a:p>
-            <a:pPr algn="ctr" indent="0" marL="0">
+            <a:pPr marL="0" indent="0" algn="ctr">
               <a:lnSpc>
                 <a:spcPts val="4800"/>
               </a:lnSpc>
@@ -15910,7 +16006,7 @@
             <a:endParaRPr lang="en-US" sz="2800" dirty="0"/>
           </a:p>
           <a:p>
-            <a:pPr algn="ctr" indent="0" marL="0">
+            <a:pPr marL="0" indent="0" algn="ctr">
               <a:lnSpc>
                 <a:spcPts val="4800"/>
               </a:lnSpc>
@@ -15947,6 +16043,7 @@
         <a:solidFill>
           <a:srgbClr val="161D2D"/>
         </a:solidFill>
+        <a:effectLst/>
       </p:bgPr>
     </p:bg>
     <p:spTree>
@@ -15984,7 +16081,7 @@
           <a:bodyPr wrap="square" lIns="0" tIns="0" rIns="0" bIns="0" rtlCol="0" anchor="ctr"/>
           <a:lstStyle/>
           <a:p>
-            <a:pPr algn="l" indent="0" marL="0">
+            <a:pPr marL="0" indent="0" algn="l">
               <a:buNone/>
             </a:pPr>
             <a:r>
@@ -16023,7 +16120,7 @@
           <a:bodyPr wrap="square" lIns="0" tIns="0" rIns="0" bIns="0" rtlCol="0" anchor="ctr"/>
           <a:lstStyle/>
           <a:p>
-            <a:pPr algn="r" indent="0" marL="0">
+            <a:pPr marL="0" indent="0" algn="r">
               <a:buNone/>
             </a:pPr>
             <a:r>
@@ -16043,14 +16140,14 @@
       </p:sp>
       <p:pic>
         <p:nvPicPr>
-          <p:cNvPr id="5" name="Image 0" descr="/sessions/awesome-wizardly-sagan/mnt/charla-ia-aws-ug-cucuta/multimedia/aws_ug_cucuta_logo.jpeg">    </p:cNvPr>
+          <p:cNvPr id="5" name="Image 0" descr="/sessions/awesome-wizardly-sagan/mnt/charla-ia-aws-ug-cucuta/multimedia/aws_ug_cucuta_logo.jpeg"/>
           <p:cNvPicPr>
             <a:picLocks noChangeAspect="1"/>
           </p:cNvPicPr>
           <p:nvPr/>
         </p:nvPicPr>
         <p:blipFill>
-          <a:blip r:embed="rId1">
+          <a:blip r:embed="rId3">
             <a:alphaModFix amt="75000"/>
           </a:blip>
           <a:stretch>
@@ -16088,7 +16185,7 @@
           <a:bodyPr wrap="square" lIns="0" tIns="0" rIns="0" bIns="0" rtlCol="0" anchor="ctr"/>
           <a:lstStyle/>
           <a:p>
-            <a:pPr algn="r" indent="0" marL="0">
+            <a:pPr marL="0" indent="0" algn="r">
               <a:buNone/>
             </a:pPr>
             <a:r>
@@ -16127,7 +16224,7 @@
           <a:bodyPr wrap="square" lIns="0" tIns="0" rIns="0" bIns="0" rtlCol="0" anchor="ctr"/>
           <a:lstStyle/>
           <a:p>
-            <a:pPr indent="0" marL="0">
+            <a:pPr marL="0" indent="0">
               <a:buNone/>
             </a:pPr>
             <a:r>
@@ -16166,7 +16263,7 @@
           <a:bodyPr wrap="square" lIns="0" tIns="0" rIns="0" bIns="0" rtlCol="0" anchor="ctr"/>
           <a:lstStyle/>
           <a:p>
-            <a:pPr algn="r" indent="0" marL="0">
+            <a:pPr marL="0" indent="0" algn="r">
               <a:buNone/>
             </a:pPr>
             <a:r>
@@ -16205,7 +16302,7 @@
           <a:bodyPr wrap="square" lIns="0" tIns="0" rIns="0" bIns="0" rtlCol="0" anchor="ctr"/>
           <a:lstStyle/>
           <a:p>
-            <a:pPr indent="0" marL="0">
+            <a:pPr marL="0" indent="0">
               <a:buNone/>
             </a:pPr>
             <a:r>
@@ -16244,7 +16341,7 @@
           <a:bodyPr wrap="square" lIns="0" tIns="0" rIns="0" bIns="0" rtlCol="0" anchor="ctr"/>
           <a:lstStyle/>
           <a:p>
-            <a:pPr algn="ctr" indent="0" marL="0">
+            <a:pPr marL="0" indent="0" algn="ctr">
               <a:buNone/>
             </a:pPr>
             <a:r>
@@ -16256,7 +16353,29 @@
                 <a:ea typeface="Arial" pitchFamily="34" charset="-122"/>
                 <a:cs typeface="Arial" pitchFamily="34" charset="-120"/>
               </a:rPr>
-              <a:t>¿Perdieron esas tres horas?</a:t>
+              <a:t>¿Se </a:t>
+            </a:r>
+            <a:r>
+              <a:rPr lang="en-US" sz="5000" b="1" dirty="0" err="1">
+                <a:solidFill>
+                  <a:srgbClr val="FFFFFF"/>
+                </a:solidFill>
+                <a:latin typeface="Arial" pitchFamily="34" charset="0"/>
+                <a:ea typeface="Arial" pitchFamily="34" charset="-122"/>
+                <a:cs typeface="Arial" pitchFamily="34" charset="-120"/>
+              </a:rPr>
+              <a:t>Perdieron</a:t>
+            </a:r>
+            <a:r>
+              <a:rPr lang="en-US" sz="5000" b="1" dirty="0">
+                <a:solidFill>
+                  <a:srgbClr val="FFFFFF"/>
+                </a:solidFill>
+                <a:latin typeface="Arial" pitchFamily="34" charset="0"/>
+                <a:ea typeface="Arial" pitchFamily="34" charset="-122"/>
+                <a:cs typeface="Arial" pitchFamily="34" charset="-120"/>
+              </a:rPr>
+              <a:t> esas tres horas?</a:t>
             </a:r>
             <a:endParaRPr lang="en-US" sz="5000" dirty="0"/>
           </a:p>
@@ -16278,6 +16397,7 @@
         <a:solidFill>
           <a:srgbClr val="161D2D"/>
         </a:solidFill>
+        <a:effectLst/>
       </p:bgPr>
     </p:bg>
     <p:spTree>
@@ -16315,7 +16435,7 @@
           <a:bodyPr wrap="square" lIns="0" tIns="0" rIns="0" bIns="0" rtlCol="0" anchor="ctr"/>
           <a:lstStyle/>
           <a:p>
-            <a:pPr algn="l" indent="0" marL="0">
+            <a:pPr marL="0" indent="0" algn="l">
               <a:buNone/>
             </a:pPr>
             <a:r>
@@ -16354,7 +16474,7 @@
           <a:bodyPr wrap="square" lIns="0" tIns="0" rIns="0" bIns="0" rtlCol="0" anchor="ctr"/>
           <a:lstStyle/>
           <a:p>
-            <a:pPr algn="r" indent="0" marL="0">
+            <a:pPr marL="0" indent="0" algn="r">
               <a:buNone/>
             </a:pPr>
             <a:r>
@@ -16374,14 +16494,14 @@
       </p:sp>
       <p:pic>
         <p:nvPicPr>
-          <p:cNvPr id="5" name="Image 0" descr="/sessions/awesome-wizardly-sagan/mnt/charla-ia-aws-ug-cucuta/multimedia/aws_ug_cucuta_logo.jpeg">    </p:cNvPr>
+          <p:cNvPr id="5" name="Image 0" descr="/sessions/awesome-wizardly-sagan/mnt/charla-ia-aws-ug-cucuta/multimedia/aws_ug_cucuta_logo.jpeg"/>
           <p:cNvPicPr>
             <a:picLocks noChangeAspect="1"/>
           </p:cNvPicPr>
           <p:nvPr/>
         </p:nvPicPr>
         <p:blipFill>
-          <a:blip r:embed="rId1">
+          <a:blip r:embed="rId3">
             <a:alphaModFix amt="75000"/>
           </a:blip>
           <a:stretch>
@@ -16419,7 +16539,7 @@
           <a:bodyPr wrap="square" lIns="0" tIns="0" rIns="0" bIns="0" rtlCol="0" anchor="ctr"/>
           <a:lstStyle/>
           <a:p>
-            <a:pPr algn="ctr" indent="0" marL="0">
+            <a:pPr marL="0" indent="0" algn="ctr">
               <a:lnSpc>
                 <a:spcPts val="4800"/>
               </a:lnSpc>
@@ -16439,7 +16559,7 @@
             <a:endParaRPr lang="en-US" sz="3600" dirty="0"/>
           </a:p>
           <a:p>
-            <a:pPr algn="ctr" indent="0" marL="0">
+            <a:pPr marL="0" indent="0" algn="ctr">
               <a:lnSpc>
                 <a:spcPts val="4800"/>
               </a:lnSpc>
@@ -16459,7 +16579,7 @@
             <a:endParaRPr lang="en-US" sz="3600" dirty="0"/>
           </a:p>
           <a:p>
-            <a:pPr algn="ctr" indent="0" marL="0">
+            <a:pPr marL="0" indent="0" algn="ctr">
               <a:lnSpc>
                 <a:spcPts val="4800"/>
               </a:lnSpc>
@@ -16468,7 +16588,7 @@
             <a:endParaRPr lang="en-US" sz="3600" dirty="0"/>
           </a:p>
           <a:p>
-            <a:pPr algn="ctr" indent="0" marL="0">
+            <a:pPr marL="0" indent="0" algn="ctr">
               <a:lnSpc>
                 <a:spcPts val="4800"/>
               </a:lnSpc>
@@ -16505,6 +16625,7 @@
         <a:solidFill>
           <a:srgbClr val="161D2D"/>
         </a:solidFill>
+        <a:effectLst/>
       </p:bgPr>
     </p:bg>
     <p:spTree>
@@ -16542,7 +16663,7 @@
           <a:bodyPr wrap="square" lIns="0" tIns="0" rIns="0" bIns="0" rtlCol="0" anchor="ctr"/>
           <a:lstStyle/>
           <a:p>
-            <a:pPr algn="l" indent="0" marL="0">
+            <a:pPr marL="0" indent="0" algn="l">
               <a:buNone/>
             </a:pPr>
             <a:r>
@@ -16581,7 +16702,7 @@
           <a:bodyPr wrap="square" lIns="0" tIns="0" rIns="0" bIns="0" rtlCol="0" anchor="ctr"/>
           <a:lstStyle/>
           <a:p>
-            <a:pPr algn="r" indent="0" marL="0">
+            <a:pPr marL="0" indent="0" algn="r">
               <a:buNone/>
             </a:pPr>
             <a:r>
@@ -16601,14 +16722,14 @@
       </p:sp>
       <p:pic>
         <p:nvPicPr>
-          <p:cNvPr id="5" name="Image 0" descr="/sessions/awesome-wizardly-sagan/mnt/charla-ia-aws-ug-cucuta/multimedia/aws_ug_cucuta_logo.jpeg">    </p:cNvPr>
+          <p:cNvPr id="5" name="Image 0" descr="/sessions/awesome-wizardly-sagan/mnt/charla-ia-aws-ug-cucuta/multimedia/aws_ug_cucuta_logo.jpeg"/>
           <p:cNvPicPr>
             <a:picLocks noChangeAspect="1"/>
           </p:cNvPicPr>
           <p:nvPr/>
         </p:nvPicPr>
         <p:blipFill>
-          <a:blip r:embed="rId1">
+          <a:blip r:embed="rId3">
             <a:alphaModFix amt="75000"/>
           </a:blip>
           <a:stretch>
@@ -16646,11 +16767,11 @@
           <a:bodyPr wrap="square" lIns="0" tIns="0" rIns="0" bIns="0" rtlCol="0" anchor="ctr"/>
           <a:lstStyle/>
           <a:p>
-            <a:pPr indent="0" marL="0">
-              <a:buNone/>
-            </a:pPr>
-            <a:r>
-              <a:rPr lang="en-US" sz="1200" b="1" spc="200" kern="0" dirty="0">
+            <a:pPr marL="0" indent="0">
+              <a:buNone/>
+            </a:pPr>
+            <a:r>
+              <a:rPr lang="en-US" sz="1200" b="1" kern="0" spc="200" dirty="0">
                 <a:solidFill>
                   <a:srgbClr val="9257F1"/>
                 </a:solidFill>
@@ -16688,6 +16809,13 @@
             <a:prstDash val="solid"/>
           </a:ln>
         </p:spPr>
+        <p:txBody>
+          <a:bodyPr/>
+          <a:lstStyle/>
+          <a:p>
+            <a:endParaRPr lang="en-CO"/>
+          </a:p>
+        </p:txBody>
       </p:sp>
       <p:sp>
         <p:nvSpPr>
@@ -16710,11 +16838,11 @@
           <a:bodyPr wrap="square" lIns="0" tIns="0" rIns="0" bIns="0" rtlCol="0" anchor="ctr"/>
           <a:lstStyle/>
           <a:p>
-            <a:pPr indent="0" marL="0">
-              <a:buNone/>
-            </a:pPr>
-            <a:r>
-              <a:rPr lang="en-US" sz="1200" b="1" spc="200" kern="0" dirty="0">
+            <a:pPr marL="0" indent="0">
+              <a:buNone/>
+            </a:pPr>
+            <a:r>
+              <a:rPr lang="en-US" sz="1200" b="1" kern="0" spc="200" dirty="0">
                 <a:solidFill>
                   <a:srgbClr val="9257F1"/>
                 </a:solidFill>
@@ -16749,7 +16877,7 @@
           <a:bodyPr wrap="square" lIns="0" tIns="0" rIns="0" bIns="0" rtlCol="0" anchor="t"/>
           <a:lstStyle/>
           <a:p>
-            <a:pPr indent="0" marL="0">
+            <a:pPr marL="0" indent="0">
               <a:lnSpc>
                 <a:spcPts val="2600"/>
               </a:lnSpc>
@@ -16794,6 +16922,13 @@
             <a:prstDash val="solid"/>
           </a:ln>
         </p:spPr>
+        <p:txBody>
+          <a:bodyPr/>
+          <a:lstStyle/>
+          <a:p>
+            <a:endParaRPr lang="en-CO"/>
+          </a:p>
+        </p:txBody>
       </p:sp>
       <p:sp>
         <p:nvSpPr>
@@ -16816,11 +16951,11 @@
           <a:bodyPr wrap="square" lIns="0" tIns="0" rIns="0" bIns="0" rtlCol="0" anchor="ctr"/>
           <a:lstStyle/>
           <a:p>
-            <a:pPr indent="0" marL="0">
-              <a:buNone/>
-            </a:pPr>
-            <a:r>
-              <a:rPr lang="en-US" sz="1200" b="1" spc="200" kern="0" dirty="0">
+            <a:pPr marL="0" indent="0">
+              <a:buNone/>
+            </a:pPr>
+            <a:r>
+              <a:rPr lang="en-US" sz="1200" b="1" kern="0" spc="200" dirty="0">
                 <a:solidFill>
                   <a:srgbClr val="9257F1"/>
                 </a:solidFill>
@@ -16855,7 +16990,7 @@
           <a:bodyPr wrap="square" lIns="0" tIns="0" rIns="0" bIns="0" rtlCol="0" anchor="t"/>
           <a:lstStyle/>
           <a:p>
-            <a:pPr indent="0" marL="0">
+            <a:pPr marL="0" indent="0">
               <a:lnSpc>
                 <a:spcPts val="2600"/>
               </a:lnSpc>
@@ -16900,6 +17035,13 @@
             <a:prstDash val="solid"/>
           </a:ln>
         </p:spPr>
+        <p:txBody>
+          <a:bodyPr/>
+          <a:lstStyle/>
+          <a:p>
+            <a:endParaRPr lang="en-CO"/>
+          </a:p>
+        </p:txBody>
       </p:sp>
       <p:sp>
         <p:nvSpPr>
@@ -16922,11 +17064,11 @@
           <a:bodyPr wrap="square" lIns="0" tIns="0" rIns="0" bIns="0" rtlCol="0" anchor="ctr"/>
           <a:lstStyle/>
           <a:p>
-            <a:pPr indent="0" marL="0">
-              <a:buNone/>
-            </a:pPr>
-            <a:r>
-              <a:rPr lang="en-US" sz="1200" b="1" spc="200" kern="0" dirty="0">
+            <a:pPr marL="0" indent="0">
+              <a:buNone/>
+            </a:pPr>
+            <a:r>
+              <a:rPr lang="en-US" sz="1200" b="1" kern="0" spc="200" dirty="0">
                 <a:solidFill>
                   <a:srgbClr val="9257F1"/>
                 </a:solidFill>
@@ -16961,7 +17103,7 @@
           <a:bodyPr wrap="square" lIns="0" tIns="0" rIns="0" bIns="0" rtlCol="0" anchor="t"/>
           <a:lstStyle/>
           <a:p>
-            <a:pPr indent="0" marL="0">
+            <a:pPr marL="0" indent="0">
               <a:lnSpc>
                 <a:spcPts val="2600"/>
               </a:lnSpc>
@@ -17003,7 +17145,7 @@
           <a:bodyPr wrap="square" lIns="0" tIns="0" rIns="0" bIns="0" rtlCol="0" anchor="ctr"/>
           <a:lstStyle/>
           <a:p>
-            <a:pPr algn="ctr" indent="0" marL="0">
+            <a:pPr marL="0" indent="0" algn="ctr">
               <a:buNone/>
             </a:pPr>
             <a:r>
@@ -17037,6 +17179,7 @@
         <a:solidFill>
           <a:srgbClr val="161D2D"/>
         </a:solidFill>
+        <a:effectLst/>
       </p:bgPr>
     </p:bg>
     <p:spTree>
@@ -17074,7 +17217,7 @@
           <a:bodyPr wrap="square" lIns="0" tIns="0" rIns="0" bIns="0" rtlCol="0" anchor="ctr"/>
           <a:lstStyle/>
           <a:p>
-            <a:pPr algn="l" indent="0" marL="0">
+            <a:pPr marL="0" indent="0" algn="l">
               <a:buNone/>
             </a:pPr>
             <a:r>
@@ -17113,7 +17256,7 @@
           <a:bodyPr wrap="square" lIns="0" tIns="0" rIns="0" bIns="0" rtlCol="0" anchor="ctr"/>
           <a:lstStyle/>
           <a:p>
-            <a:pPr algn="r" indent="0" marL="0">
+            <a:pPr marL="0" indent="0" algn="r">
               <a:buNone/>
             </a:pPr>
             <a:r>
@@ -17133,14 +17276,14 @@
       </p:sp>
       <p:pic>
         <p:nvPicPr>
-          <p:cNvPr id="5" name="Image 0" descr="/sessions/awesome-wizardly-sagan/mnt/charla-ia-aws-ug-cucuta/multimedia/aws_ug_cucuta_logo.jpeg">    </p:cNvPr>
+          <p:cNvPr id="5" name="Image 0" descr="/sessions/awesome-wizardly-sagan/mnt/charla-ia-aws-ug-cucuta/multimedia/aws_ug_cucuta_logo.jpeg"/>
           <p:cNvPicPr>
             <a:picLocks noChangeAspect="1"/>
           </p:cNvPicPr>
           <p:nvPr/>
         </p:nvPicPr>
         <p:blipFill>
-          <a:blip r:embed="rId1">
+          <a:blip r:embed="rId3">
             <a:alphaModFix amt="75000"/>
           </a:blip>
           <a:stretch>
@@ -17178,7 +17321,7 @@
           <a:bodyPr wrap="square" lIns="0" tIns="0" rIns="0" bIns="0" rtlCol="0" anchor="ctr"/>
           <a:lstStyle/>
           <a:p>
-            <a:pPr algn="ctr" indent="0" marL="0">
+            <a:pPr marL="0" indent="0" algn="ctr">
               <a:buNone/>
             </a:pPr>
             <a:r>
@@ -17212,6 +17355,7 @@
         <a:solidFill>
           <a:srgbClr val="161D2D"/>
         </a:solidFill>
+        <a:effectLst/>
       </p:bgPr>
     </p:bg>
     <p:spTree>
@@ -17249,7 +17393,7 @@
           <a:bodyPr wrap="square" lIns="0" tIns="0" rIns="0" bIns="0" rtlCol="0" anchor="ctr"/>
           <a:lstStyle/>
           <a:p>
-            <a:pPr algn="l" indent="0" marL="0">
+            <a:pPr marL="0" indent="0" algn="l">
               <a:buNone/>
             </a:pPr>
             <a:r>
@@ -17288,7 +17432,7 @@
           <a:bodyPr wrap="square" lIns="0" tIns="0" rIns="0" bIns="0" rtlCol="0" anchor="ctr"/>
           <a:lstStyle/>
           <a:p>
-            <a:pPr algn="r" indent="0" marL="0">
+            <a:pPr marL="0" indent="0" algn="r">
               <a:buNone/>
             </a:pPr>
             <a:r>
@@ -17308,14 +17452,14 @@
       </p:sp>
       <p:pic>
         <p:nvPicPr>
-          <p:cNvPr id="5" name="Image 0" descr="/sessions/awesome-wizardly-sagan/mnt/charla-ia-aws-ug-cucuta/multimedia/aws_ug_cucuta_logo.jpeg">    </p:cNvPr>
+          <p:cNvPr id="5" name="Image 0" descr="/sessions/awesome-wizardly-sagan/mnt/charla-ia-aws-ug-cucuta/multimedia/aws_ug_cucuta_logo.jpeg"/>
           <p:cNvPicPr>
             <a:picLocks noChangeAspect="1"/>
           </p:cNvPicPr>
           <p:nvPr/>
         </p:nvPicPr>
         <p:blipFill>
-          <a:blip r:embed="rId1">
+          <a:blip r:embed="rId3">
             <a:alphaModFix amt="75000"/>
           </a:blip>
           <a:stretch>
@@ -17353,7 +17497,7 @@
           <a:bodyPr wrap="square" lIns="0" tIns="0" rIns="0" bIns="0" rtlCol="0" anchor="ctr"/>
           <a:lstStyle/>
           <a:p>
-            <a:pPr algn="ctr" indent="0" marL="0">
+            <a:pPr marL="0" indent="0" algn="ctr">
               <a:lnSpc>
                 <a:spcPts val="5400"/>
               </a:lnSpc>
@@ -17373,7 +17517,7 @@
             <a:endParaRPr lang="en-US" sz="4000" dirty="0"/>
           </a:p>
           <a:p>
-            <a:pPr algn="ctr" indent="0" marL="0">
+            <a:pPr marL="0" indent="0" algn="ctr">
               <a:lnSpc>
                 <a:spcPts val="5400"/>
               </a:lnSpc>
@@ -17415,7 +17559,7 @@
           <a:bodyPr wrap="square" lIns="0" tIns="0" rIns="0" bIns="0" rtlCol="0" anchor="ctr"/>
           <a:lstStyle/>
           <a:p>
-            <a:pPr algn="ctr" indent="0" marL="0">
+            <a:pPr marL="0" indent="0" algn="ctr">
               <a:buNone/>
             </a:pPr>
             <a:r>
@@ -17435,14 +17579,14 @@
       </p:sp>
       <p:pic>
         <p:nvPicPr>
-          <p:cNvPr id="8" name="Image 1" descr="/sessions/awesome-wizardly-sagan/mnt/charla-ia-aws-ug-cucuta/multimedia/aws_ug_cucuta_logo.jpeg">    </p:cNvPr>
+          <p:cNvPr id="8" name="Image 1" descr="/sessions/awesome-wizardly-sagan/mnt/charla-ia-aws-ug-cucuta/multimedia/aws_ug_cucuta_logo.jpeg"/>
           <p:cNvPicPr>
             <a:picLocks noChangeAspect="1"/>
           </p:cNvPicPr>
           <p:nvPr/>
         </p:nvPicPr>
         <p:blipFill>
-          <a:blip r:embed="rId2"/>
+          <a:blip r:embed="rId3"/>
           <a:stretch>
             <a:fillRect/>
           </a:stretch>
@@ -17473,6 +17617,7 @@
         <a:solidFill>
           <a:srgbClr val="161D2D"/>
         </a:solidFill>
+        <a:effectLst/>
       </p:bgPr>
     </p:bg>
     <p:spTree>
@@ -17510,7 +17655,7 @@
           <a:bodyPr wrap="square" lIns="0" tIns="0" rIns="0" bIns="0" rtlCol="0" anchor="ctr"/>
           <a:lstStyle/>
           <a:p>
-            <a:pPr algn="l" indent="0" marL="0">
+            <a:pPr marL="0" indent="0" algn="l">
               <a:buNone/>
             </a:pPr>
             <a:r>
@@ -17549,7 +17694,7 @@
           <a:bodyPr wrap="square" lIns="0" tIns="0" rIns="0" bIns="0" rtlCol="0" anchor="ctr"/>
           <a:lstStyle/>
           <a:p>
-            <a:pPr algn="r" indent="0" marL="0">
+            <a:pPr marL="0" indent="0" algn="r">
               <a:buNone/>
             </a:pPr>
             <a:r>
@@ -17569,14 +17714,14 @@
       </p:sp>
       <p:pic>
         <p:nvPicPr>
-          <p:cNvPr id="5" name="Image 0" descr="/sessions/awesome-wizardly-sagan/mnt/charla-ia-aws-ug-cucuta/multimedia/aws_ug_cucuta_logo.jpeg">    </p:cNvPr>
+          <p:cNvPr id="5" name="Image 0" descr="/sessions/awesome-wizardly-sagan/mnt/charla-ia-aws-ug-cucuta/multimedia/aws_ug_cucuta_logo.jpeg"/>
           <p:cNvPicPr>
             <a:picLocks noChangeAspect="1"/>
           </p:cNvPicPr>
           <p:nvPr/>
         </p:nvPicPr>
         <p:blipFill>
-          <a:blip r:embed="rId1">
+          <a:blip r:embed="rId3">
             <a:alphaModFix amt="75000"/>
           </a:blip>
           <a:stretch>
@@ -17614,7 +17759,7 @@
           <a:bodyPr wrap="square" lIns="0" tIns="0" rIns="0" bIns="0" rtlCol="0" anchor="ctr"/>
           <a:lstStyle/>
           <a:p>
-            <a:pPr algn="ctr" indent="0" marL="0">
+            <a:pPr marL="0" indent="0" algn="ctr">
               <a:lnSpc>
                 <a:spcPts val="5000"/>
               </a:lnSpc>
@@ -17634,7 +17779,7 @@
             <a:endParaRPr lang="en-US" sz="3400" dirty="0"/>
           </a:p>
           <a:p>
-            <a:pPr algn="ctr" indent="0" marL="0">
+            <a:pPr marL="0" indent="0" algn="ctr">
               <a:lnSpc>
                 <a:spcPts val="5000"/>
               </a:lnSpc>
@@ -17654,7 +17799,7 @@
             <a:endParaRPr lang="en-US" sz="3400" dirty="0"/>
           </a:p>
           <a:p>
-            <a:pPr algn="ctr" indent="0" marL="0">
+            <a:pPr marL="0" indent="0" algn="ctr">
               <a:lnSpc>
                 <a:spcPts val="5000"/>
               </a:lnSpc>
@@ -17674,7 +17819,7 @@
             <a:endParaRPr lang="en-US" sz="3400" dirty="0"/>
           </a:p>
           <a:p>
-            <a:pPr algn="ctr" indent="0" marL="0">
+            <a:pPr marL="0" indent="0" algn="ctr">
               <a:lnSpc>
                 <a:spcPts val="5000"/>
               </a:lnSpc>
@@ -17711,6 +17856,7 @@
         <a:solidFill>
           <a:srgbClr val="161D2D"/>
         </a:solidFill>
+        <a:effectLst/>
       </p:bgPr>
     </p:bg>
     <p:spTree>
@@ -17748,7 +17894,7 @@
           <a:bodyPr wrap="square" lIns="0" tIns="0" rIns="0" bIns="0" rtlCol="0" anchor="ctr"/>
           <a:lstStyle/>
           <a:p>
-            <a:pPr algn="l" indent="0" marL="0">
+            <a:pPr marL="0" indent="0" algn="l">
               <a:buNone/>
             </a:pPr>
             <a:r>
@@ -17787,7 +17933,7 @@
           <a:bodyPr wrap="square" lIns="0" tIns="0" rIns="0" bIns="0" rtlCol="0" anchor="ctr"/>
           <a:lstStyle/>
           <a:p>
-            <a:pPr algn="r" indent="0" marL="0">
+            <a:pPr marL="0" indent="0" algn="r">
               <a:buNone/>
             </a:pPr>
             <a:r>
@@ -17807,14 +17953,14 @@
       </p:sp>
       <p:pic>
         <p:nvPicPr>
-          <p:cNvPr id="5" name="Image 0" descr="/sessions/awesome-wizardly-sagan/mnt/charla-ia-aws-ug-cucuta/multimedia/aws_ug_cucuta_logo.jpeg">    </p:cNvPr>
+          <p:cNvPr id="5" name="Image 0" descr="/sessions/awesome-wizardly-sagan/mnt/charla-ia-aws-ug-cucuta/multimedia/aws_ug_cucuta_logo.jpeg"/>
           <p:cNvPicPr>
             <a:picLocks noChangeAspect="1"/>
           </p:cNvPicPr>
           <p:nvPr/>
         </p:nvPicPr>
         <p:blipFill>
-          <a:blip r:embed="rId1">
+          <a:blip r:embed="rId3">
             <a:alphaModFix amt="75000"/>
           </a:blip>
           <a:stretch>
@@ -17852,11 +17998,11 @@
           <a:bodyPr wrap="square" lIns="0" tIns="0" rIns="0" bIns="0" rtlCol="0" anchor="ctr"/>
           <a:lstStyle/>
           <a:p>
-            <a:pPr indent="0" marL="0">
-              <a:buNone/>
-            </a:pPr>
-            <a:r>
-              <a:rPr lang="en-US" sz="1200" b="1" spc="200" kern="0" dirty="0">
+            <a:pPr marL="0" indent="0">
+              <a:buNone/>
+            </a:pPr>
+            <a:r>
+              <a:rPr lang="en-US" sz="1200" b="1" kern="0" spc="200" dirty="0">
                 <a:solidFill>
                   <a:srgbClr val="9257F1"/>
                 </a:solidFill>
@@ -17891,7 +18037,7 @@
           <a:bodyPr wrap="square" lIns="0" tIns="0" rIns="0" bIns="0" rtlCol="0" anchor="ctr"/>
           <a:lstStyle/>
           <a:p>
-            <a:pPr indent="0" marL="0">
+            <a:pPr marL="0" indent="0">
               <a:buNone/>
             </a:pPr>
             <a:r>
@@ -17930,7 +18076,7 @@
           <a:bodyPr wrap="square" lIns="0" tIns="0" rIns="0" bIns="0" rtlCol="0" anchor="ctr"/>
           <a:lstStyle/>
           <a:p>
-            <a:pPr indent="0" marL="0">
+            <a:pPr marL="0" indent="0">
               <a:buNone/>
             </a:pPr>
             <a:r>
@@ -17969,7 +18115,7 @@
           <a:bodyPr wrap="square" lIns="0" tIns="0" rIns="0" bIns="0" rtlCol="0" anchor="ctr"/>
           <a:lstStyle/>
           <a:p>
-            <a:pPr indent="0" marL="0">
+            <a:pPr marL="0" indent="0">
               <a:buNone/>
             </a:pPr>
             <a:r>
@@ -18008,7 +18154,7 @@
           <a:bodyPr wrap="square" lIns="0" tIns="0" rIns="0" bIns="0" rtlCol="0" anchor="ctr"/>
           <a:lstStyle/>
           <a:p>
-            <a:pPr indent="0" marL="0">
+            <a:pPr marL="0" indent="0">
               <a:buNone/>
             </a:pPr>
             <a:r>
@@ -18047,7 +18193,7 @@
           <a:bodyPr wrap="square" lIns="0" tIns="0" rIns="0" bIns="0" rtlCol="0" anchor="ctr"/>
           <a:lstStyle/>
           <a:p>
-            <a:pPr indent="0" marL="0">
+            <a:pPr marL="0" indent="0">
               <a:buNone/>
             </a:pPr>
             <a:r>
@@ -18086,7 +18232,7 @@
           <a:bodyPr wrap="square" lIns="0" tIns="0" rIns="0" bIns="0" rtlCol="0" anchor="ctr"/>
           <a:lstStyle/>
           <a:p>
-            <a:pPr indent="0" marL="0">
+            <a:pPr marL="0" indent="0">
               <a:buNone/>
             </a:pPr>
             <a:r>
@@ -18128,17 +18274,24 @@
             <a:prstDash val="solid"/>
           </a:ln>
         </p:spPr>
+        <p:txBody>
+          <a:bodyPr/>
+          <a:lstStyle/>
+          <a:p>
+            <a:endParaRPr lang="en-CO"/>
+          </a:p>
+        </p:txBody>
       </p:sp>
       <p:pic>
         <p:nvPicPr>
-          <p:cNvPr id="14" name="Image 1" descr="/sessions/awesome-wizardly-sagan/mnt/charla-ia-aws-ug-cucuta/multimedia/1786485118307.jpeg">    </p:cNvPr>
+          <p:cNvPr id="14" name="Image 1" descr="/sessions/awesome-wizardly-sagan/mnt/charla-ia-aws-ug-cucuta/multimedia/1786485118307.jpeg"/>
           <p:cNvPicPr>
             <a:picLocks noChangeAspect="1"/>
           </p:cNvPicPr>
           <p:nvPr/>
         </p:nvPicPr>
         <p:blipFill>
-          <a:blip r:embed="rId2"/>
+          <a:blip r:embed="rId4"/>
           <a:stretch>
             <a:fillRect/>
           </a:stretch>
@@ -18174,7 +18327,7 @@
           <a:bodyPr wrap="square" lIns="0" tIns="0" rIns="0" bIns="0" rtlCol="0" anchor="ctr"/>
           <a:lstStyle/>
           <a:p>
-            <a:pPr algn="ctr" indent="0" marL="0">
+            <a:pPr marL="0" indent="0" algn="ctr">
               <a:buNone/>
             </a:pPr>
             <a:r>
@@ -18208,6 +18361,7 @@
         <a:solidFill>
           <a:srgbClr val="161D2D"/>
         </a:solidFill>
+        <a:effectLst/>
       </p:bgPr>
     </p:bg>
     <p:spTree>
@@ -18245,7 +18399,7 @@
           <a:bodyPr wrap="square" lIns="0" tIns="0" rIns="0" bIns="0" rtlCol="0" anchor="ctr"/>
           <a:lstStyle/>
           <a:p>
-            <a:pPr algn="l" indent="0" marL="0">
+            <a:pPr marL="0" indent="0" algn="l">
               <a:buNone/>
             </a:pPr>
             <a:r>
@@ -18284,7 +18438,7 @@
           <a:bodyPr wrap="square" lIns="0" tIns="0" rIns="0" bIns="0" rtlCol="0" anchor="ctr"/>
           <a:lstStyle/>
           <a:p>
-            <a:pPr algn="r" indent="0" marL="0">
+            <a:pPr marL="0" indent="0" algn="r">
               <a:buNone/>
             </a:pPr>
             <a:r>
@@ -18304,14 +18458,14 @@
       </p:sp>
       <p:pic>
         <p:nvPicPr>
-          <p:cNvPr id="5" name="Image 0" descr="/sessions/awesome-wizardly-sagan/mnt/charla-ia-aws-ug-cucuta/multimedia/aws_ug_cucuta_logo.jpeg">    </p:cNvPr>
+          <p:cNvPr id="5" name="Image 0" descr="/sessions/awesome-wizardly-sagan/mnt/charla-ia-aws-ug-cucuta/multimedia/aws_ug_cucuta_logo.jpeg"/>
           <p:cNvPicPr>
             <a:picLocks noChangeAspect="1"/>
           </p:cNvPicPr>
           <p:nvPr/>
         </p:nvPicPr>
         <p:blipFill>
-          <a:blip r:embed="rId1">
+          <a:blip r:embed="rId3">
             <a:alphaModFix amt="75000"/>
           </a:blip>
           <a:stretch>
@@ -18349,7 +18503,7 @@
           <a:bodyPr wrap="square" lIns="0" tIns="0" rIns="0" bIns="0" rtlCol="0" anchor="ctr"/>
           <a:lstStyle/>
           <a:p>
-            <a:pPr algn="ctr" indent="0" marL="0">
+            <a:pPr marL="0" indent="0" algn="ctr">
               <a:lnSpc>
                 <a:spcPts val="4800"/>
               </a:lnSpc>
@@ -18369,7 +18523,7 @@
             <a:endParaRPr lang="en-US" sz="3300" dirty="0"/>
           </a:p>
           <a:p>
-            <a:pPr algn="ctr" indent="0" marL="0">
+            <a:pPr marL="0" indent="0" algn="ctr">
               <a:lnSpc>
                 <a:spcPts val="4800"/>
               </a:lnSpc>
@@ -18389,7 +18543,7 @@
             <a:endParaRPr lang="en-US" sz="3300" dirty="0"/>
           </a:p>
           <a:p>
-            <a:pPr algn="ctr" indent="0" marL="0">
+            <a:pPr marL="0" indent="0" algn="ctr">
               <a:lnSpc>
                 <a:spcPts val="4800"/>
               </a:lnSpc>
@@ -18426,6 +18580,7 @@
         <a:solidFill>
           <a:srgbClr val="161D2D"/>
         </a:solidFill>
+        <a:effectLst/>
       </p:bgPr>
     </p:bg>
     <p:spTree>
@@ -18463,7 +18618,7 @@
           <a:bodyPr wrap="square" lIns="0" tIns="0" rIns="0" bIns="0" rtlCol="0" anchor="ctr"/>
           <a:lstStyle/>
           <a:p>
-            <a:pPr algn="l" indent="0" marL="0">
+            <a:pPr marL="0" indent="0" algn="l">
               <a:buNone/>
             </a:pPr>
             <a:r>
@@ -18502,7 +18657,7 @@
           <a:bodyPr wrap="square" lIns="0" tIns="0" rIns="0" bIns="0" rtlCol="0" anchor="ctr"/>
           <a:lstStyle/>
           <a:p>
-            <a:pPr algn="r" indent="0" marL="0">
+            <a:pPr marL="0" indent="0" algn="r">
               <a:buNone/>
             </a:pPr>
             <a:r>
@@ -18522,14 +18677,14 @@
       </p:sp>
       <p:pic>
         <p:nvPicPr>
-          <p:cNvPr id="5" name="Image 0" descr="/sessions/awesome-wizardly-sagan/mnt/charla-ia-aws-ug-cucuta/multimedia/aws_ug_cucuta_logo.jpeg">    </p:cNvPr>
+          <p:cNvPr id="5" name="Image 0" descr="/sessions/awesome-wizardly-sagan/mnt/charla-ia-aws-ug-cucuta/multimedia/aws_ug_cucuta_logo.jpeg"/>
           <p:cNvPicPr>
             <a:picLocks noChangeAspect="1"/>
           </p:cNvPicPr>
           <p:nvPr/>
         </p:nvPicPr>
         <p:blipFill>
-          <a:blip r:embed="rId1">
+          <a:blip r:embed="rId3">
             <a:alphaModFix amt="75000"/>
           </a:blip>
           <a:stretch>
@@ -18554,7 +18709,7 @@
         </p:nvSpPr>
         <p:spPr>
           <a:xfrm>
-            <a:off x="914400" y="2148840"/>
+            <a:off x="868680" y="1435608"/>
             <a:ext cx="10362895" cy="640080"/>
           </a:xfrm>
           <a:prstGeom prst="rect">
@@ -18567,7 +18722,7 @@
           <a:bodyPr wrap="square" lIns="0" tIns="0" rIns="0" bIns="0" rtlCol="0" anchor="ctr"/>
           <a:lstStyle/>
           <a:p>
-            <a:pPr algn="ctr" indent="0" marL="0">
+            <a:pPr marL="0" indent="0" algn="ctr">
               <a:buNone/>
             </a:pPr>
             <a:r>
@@ -18593,7 +18748,7 @@
         </p:nvSpPr>
         <p:spPr>
           <a:xfrm>
-            <a:off x="914400" y="3017520"/>
+            <a:off x="914399" y="2318004"/>
             <a:ext cx="10362895" cy="1645920"/>
           </a:xfrm>
           <a:prstGeom prst="rect">
@@ -18606,7 +18761,7 @@
           <a:bodyPr wrap="square" lIns="0" tIns="0" rIns="0" bIns="0" rtlCol="0" anchor="ctr"/>
           <a:lstStyle/>
           <a:p>
-            <a:pPr algn="ctr" indent="0" marL="0">
+            <a:pPr marL="0" indent="0" algn="ctr">
               <a:lnSpc>
                 <a:spcPts val="4600"/>
               </a:lnSpc>
@@ -18626,13 +18781,24 @@
             <a:endParaRPr lang="en-US" sz="3600" dirty="0"/>
           </a:p>
           <a:p>
-            <a:pPr algn="ctr" indent="0" marL="0">
+            <a:pPr marL="0" indent="0" algn="ctr">
               <a:lnSpc>
                 <a:spcPts val="4600"/>
               </a:lnSpc>
               <a:buNone/>
             </a:pPr>
             <a:r>
+              <a:rPr lang="en-US" sz="3600" b="1" dirty="0" err="1">
+                <a:solidFill>
+                  <a:srgbClr val="FFFFFF"/>
+                </a:solidFill>
+                <a:latin typeface="Arial" pitchFamily="34" charset="0"/>
+                <a:ea typeface="Arial" pitchFamily="34" charset="-122"/>
+                <a:cs typeface="Arial" pitchFamily="34" charset="-120"/>
+              </a:rPr>
+              <a:t>una</a:t>
+            </a:r>
+            <a:r>
               <a:rPr lang="en-US" sz="3600" b="1" dirty="0">
                 <a:solidFill>
                   <a:srgbClr val="FFFFFF"/>
@@ -18641,7 +18807,241 @@
                 <a:ea typeface="Arial" pitchFamily="34" charset="-122"/>
                 <a:cs typeface="Arial" pitchFamily="34" charset="-120"/>
               </a:rPr>
-              <a:t>una máquina también puede programar?</a:t>
+              <a:t> </a:t>
+            </a:r>
+            <a:r>
+              <a:rPr lang="en-US" sz="3600" b="1" dirty="0" err="1">
+                <a:solidFill>
+                  <a:srgbClr val="FFFFFF"/>
+                </a:solidFill>
+                <a:latin typeface="Arial" pitchFamily="34" charset="0"/>
+                <a:ea typeface="Arial" pitchFamily="34" charset="-122"/>
+                <a:cs typeface="Arial" pitchFamily="34" charset="-120"/>
+              </a:rPr>
+              <a:t>máquina</a:t>
+            </a:r>
+            <a:r>
+              <a:rPr lang="en-US" sz="3600" b="1" dirty="0">
+                <a:solidFill>
+                  <a:srgbClr val="FFFFFF"/>
+                </a:solidFill>
+                <a:latin typeface="Arial" pitchFamily="34" charset="0"/>
+                <a:ea typeface="Arial" pitchFamily="34" charset="-122"/>
+                <a:cs typeface="Arial" pitchFamily="34" charset="-120"/>
+              </a:rPr>
+              <a:t> también puede programar?</a:t>
+            </a:r>
+            <a:endParaRPr lang="en-US" sz="3600" dirty="0"/>
+          </a:p>
+        </p:txBody>
+      </p:sp>
+      <p:sp>
+        <p:nvSpPr>
+          <p:cNvPr id="2" name="Text 3">
+            <a:extLst>
+              <a:ext uri="{FF2B5EF4-FFF2-40B4-BE49-F238E27FC236}">
+                <a16:creationId xmlns:a16="http://schemas.microsoft.com/office/drawing/2014/main" id="{CA1DACB3-DDBC-1317-938A-05BA71295B6B}"/>
+              </a:ext>
+            </a:extLst>
+          </p:cNvPr>
+          <p:cNvSpPr/>
+          <p:nvPr/>
+        </p:nvSpPr>
+        <p:spPr>
+          <a:xfrm>
+            <a:off x="914398" y="4206240"/>
+            <a:ext cx="10362895" cy="1645920"/>
+          </a:xfrm>
+          <a:prstGeom prst="rect">
+            <a:avLst/>
+          </a:prstGeom>
+          <a:noFill/>
+          <a:ln/>
+        </p:spPr>
+        <p:txBody>
+          <a:bodyPr wrap="square" lIns="0" tIns="0" rIns="0" bIns="0" rtlCol="0" anchor="ctr"/>
+          <a:lstStyle/>
+          <a:p>
+            <a:pPr algn="ctr">
+              <a:lnSpc>
+                <a:spcPts val="4600"/>
+              </a:lnSpc>
+            </a:pPr>
+            <a:r>
+              <a:rPr lang="en-US" sz="2800" b="1" dirty="0">
+                <a:solidFill>
+                  <a:srgbClr val="9257F1"/>
+                </a:solidFill>
+                <a:latin typeface="Arial" pitchFamily="34" charset="0"/>
+                <a:ea typeface="Arial" pitchFamily="34" charset="-122"/>
+                <a:cs typeface="Arial" pitchFamily="34" charset="-120"/>
+              </a:rPr>
+              <a:t>Si </a:t>
+            </a:r>
+            <a:r>
+              <a:rPr lang="en-US" sz="2800" b="1" dirty="0" err="1">
+                <a:solidFill>
+                  <a:srgbClr val="9257F1"/>
+                </a:solidFill>
+                <a:latin typeface="Arial" pitchFamily="34" charset="0"/>
+                <a:ea typeface="Arial" pitchFamily="34" charset="-122"/>
+                <a:cs typeface="Arial" pitchFamily="34" charset="-120"/>
+              </a:rPr>
+              <a:t>escribir</a:t>
+            </a:r>
+            <a:r>
+              <a:rPr lang="en-US" sz="2800" b="1" dirty="0">
+                <a:solidFill>
+                  <a:srgbClr val="9257F1"/>
+                </a:solidFill>
+                <a:latin typeface="Arial" pitchFamily="34" charset="0"/>
+                <a:ea typeface="Arial" pitchFamily="34" charset="-122"/>
+                <a:cs typeface="Arial" pitchFamily="34" charset="-120"/>
+              </a:rPr>
+              <a:t> Código </a:t>
+            </a:r>
+            <a:r>
+              <a:rPr lang="en-US" sz="2800" b="1" dirty="0" err="1">
+                <a:solidFill>
+                  <a:srgbClr val="9257F1"/>
+                </a:solidFill>
+                <a:latin typeface="Arial" pitchFamily="34" charset="0"/>
+                <a:ea typeface="Arial" pitchFamily="34" charset="-122"/>
+                <a:cs typeface="Arial" pitchFamily="34" charset="-120"/>
+              </a:rPr>
+              <a:t>deja</a:t>
+            </a:r>
+            <a:r>
+              <a:rPr lang="en-US" sz="2800" b="1" dirty="0">
+                <a:solidFill>
+                  <a:srgbClr val="9257F1"/>
+                </a:solidFill>
+                <a:latin typeface="Arial" pitchFamily="34" charset="0"/>
+                <a:ea typeface="Arial" pitchFamily="34" charset="-122"/>
+                <a:cs typeface="Arial" pitchFamily="34" charset="-120"/>
+              </a:rPr>
+              <a:t> de ser </a:t>
+            </a:r>
+            <a:r>
+              <a:rPr lang="en-US" sz="2800" b="1" dirty="0" err="1">
+                <a:solidFill>
+                  <a:srgbClr val="9257F1"/>
+                </a:solidFill>
+                <a:latin typeface="Arial" pitchFamily="34" charset="0"/>
+                <a:ea typeface="Arial" pitchFamily="34" charset="-122"/>
+                <a:cs typeface="Arial" pitchFamily="34" charset="-120"/>
+              </a:rPr>
+              <a:t>nuestra</a:t>
+            </a:r>
+            <a:r>
+              <a:rPr lang="en-US" sz="2800" b="1" dirty="0">
+                <a:solidFill>
+                  <a:srgbClr val="9257F1"/>
+                </a:solidFill>
+                <a:latin typeface="Arial" pitchFamily="34" charset="0"/>
+                <a:ea typeface="Arial" pitchFamily="34" charset="-122"/>
+                <a:cs typeface="Arial" pitchFamily="34" charset="-120"/>
+              </a:rPr>
+              <a:t> principal </a:t>
+            </a:r>
+            <a:r>
+              <a:rPr lang="en-US" sz="2800" b="1" dirty="0" err="1">
+                <a:solidFill>
+                  <a:srgbClr val="9257F1"/>
+                </a:solidFill>
+                <a:latin typeface="Arial" pitchFamily="34" charset="0"/>
+                <a:ea typeface="Arial" pitchFamily="34" charset="-122"/>
+                <a:cs typeface="Arial" pitchFamily="34" charset="-120"/>
+              </a:rPr>
+              <a:t>ventaja</a:t>
+            </a:r>
+            <a:r>
+              <a:rPr lang="en-US" sz="2800" b="1" dirty="0">
+                <a:solidFill>
+                  <a:srgbClr val="9257F1"/>
+                </a:solidFill>
+                <a:latin typeface="Arial" pitchFamily="34" charset="0"/>
+                <a:ea typeface="Arial" pitchFamily="34" charset="-122"/>
+                <a:cs typeface="Arial" pitchFamily="34" charset="-120"/>
+              </a:rPr>
+              <a:t> competitive </a:t>
+            </a:r>
+            <a:r>
+              <a:rPr lang="en-US" sz="3600" b="1" dirty="0">
+                <a:solidFill>
+                  <a:srgbClr val="9257F1"/>
+                </a:solidFill>
+                <a:latin typeface="Arial" pitchFamily="34" charset="0"/>
+                <a:ea typeface="Arial" pitchFamily="34" charset="-122"/>
+                <a:cs typeface="Arial" pitchFamily="34" charset="-120"/>
+              </a:rPr>
+              <a:t>¿</a:t>
+            </a:r>
+            <a:r>
+              <a:rPr lang="en-US" sz="3600" b="1" dirty="0" err="1">
+                <a:solidFill>
+                  <a:srgbClr val="9257F1"/>
+                </a:solidFill>
+                <a:latin typeface="Arial" pitchFamily="34" charset="0"/>
+                <a:ea typeface="Arial" pitchFamily="34" charset="-122"/>
+                <a:cs typeface="Arial" pitchFamily="34" charset="-120"/>
+              </a:rPr>
+              <a:t>Cual</a:t>
+            </a:r>
+            <a:r>
+              <a:rPr lang="en-US" sz="3600" b="1" dirty="0">
+                <a:solidFill>
+                  <a:srgbClr val="9257F1"/>
+                </a:solidFill>
+                <a:latin typeface="Arial" pitchFamily="34" charset="0"/>
+                <a:ea typeface="Arial" pitchFamily="34" charset="-122"/>
+                <a:cs typeface="Arial" pitchFamily="34" charset="-120"/>
+              </a:rPr>
+              <a:t> </a:t>
+            </a:r>
+            <a:r>
+              <a:rPr lang="en-US" sz="3600" b="1" dirty="0" err="1">
+                <a:solidFill>
+                  <a:srgbClr val="9257F1"/>
+                </a:solidFill>
+                <a:latin typeface="Arial" pitchFamily="34" charset="0"/>
+                <a:ea typeface="Arial" pitchFamily="34" charset="-122"/>
+                <a:cs typeface="Arial" pitchFamily="34" charset="-120"/>
+              </a:rPr>
+              <a:t>será</a:t>
+            </a:r>
+            <a:r>
+              <a:rPr lang="en-US" sz="3600" b="1" dirty="0">
+                <a:solidFill>
+                  <a:srgbClr val="9257F1"/>
+                </a:solidFill>
+                <a:latin typeface="Arial" pitchFamily="34" charset="0"/>
+                <a:ea typeface="Arial" pitchFamily="34" charset="-122"/>
+                <a:cs typeface="Arial" pitchFamily="34" charset="-120"/>
+              </a:rPr>
+              <a:t> </a:t>
+            </a:r>
+            <a:r>
+              <a:rPr lang="en-US" sz="3600" b="1" dirty="0" err="1">
+                <a:solidFill>
+                  <a:srgbClr val="9257F1"/>
+                </a:solidFill>
+                <a:latin typeface="Arial" pitchFamily="34" charset="0"/>
+                <a:ea typeface="Arial" pitchFamily="34" charset="-122"/>
+                <a:cs typeface="Arial" pitchFamily="34" charset="-120"/>
+              </a:rPr>
+              <a:t>nuestro</a:t>
+            </a:r>
+            <a:r>
+              <a:rPr lang="en-US" sz="3600" b="1" dirty="0">
+                <a:solidFill>
+                  <a:srgbClr val="9257F1"/>
+                </a:solidFill>
+                <a:latin typeface="Arial" pitchFamily="34" charset="0"/>
+                <a:ea typeface="Arial" pitchFamily="34" charset="-122"/>
+                <a:cs typeface="Arial" pitchFamily="34" charset="-120"/>
+              </a:rPr>
+              <a:t> valor?</a:t>
             </a:r>
             <a:endParaRPr lang="en-US" sz="3600" dirty="0"/>
           </a:p>
@@ -18663,6 +19063,7 @@
         <a:solidFill>
           <a:srgbClr val="161D2D"/>
         </a:solidFill>
+        <a:effectLst/>
       </p:bgPr>
     </p:bg>
     <p:spTree>
@@ -18700,7 +19101,7 @@
           <a:bodyPr wrap="square" lIns="0" tIns="0" rIns="0" bIns="0" rtlCol="0" anchor="ctr"/>
           <a:lstStyle/>
           <a:p>
-            <a:pPr algn="l" indent="0" marL="0">
+            <a:pPr marL="0" indent="0" algn="l">
               <a:buNone/>
             </a:pPr>
             <a:r>
@@ -18739,7 +19140,7 @@
           <a:bodyPr wrap="square" lIns="0" tIns="0" rIns="0" bIns="0" rtlCol="0" anchor="ctr"/>
           <a:lstStyle/>
           <a:p>
-            <a:pPr algn="r" indent="0" marL="0">
+            <a:pPr marL="0" indent="0" algn="r">
               <a:buNone/>
             </a:pPr>
             <a:r>
@@ -18759,14 +19160,14 @@
       </p:sp>
       <p:pic>
         <p:nvPicPr>
-          <p:cNvPr id="5" name="Image 0" descr="/sessions/awesome-wizardly-sagan/mnt/charla-ia-aws-ug-cucuta/multimedia/aws_ug_cucuta_logo.jpeg">    </p:cNvPr>
+          <p:cNvPr id="5" name="Image 0" descr="/sessions/awesome-wizardly-sagan/mnt/charla-ia-aws-ug-cucuta/multimedia/aws_ug_cucuta_logo.jpeg"/>
           <p:cNvPicPr>
             <a:picLocks noChangeAspect="1"/>
           </p:cNvPicPr>
           <p:nvPr/>
         </p:nvPicPr>
         <p:blipFill>
-          <a:blip r:embed="rId1">
+          <a:blip r:embed="rId3">
             <a:alphaModFix amt="75000"/>
           </a:blip>
           <a:stretch>
@@ -18804,11 +19205,11 @@
           <a:bodyPr wrap="square" lIns="0" tIns="0" rIns="0" bIns="0" rtlCol="0" anchor="ctr"/>
           <a:lstStyle/>
           <a:p>
-            <a:pPr indent="0" marL="0">
-              <a:buNone/>
-            </a:pPr>
-            <a:r>
-              <a:rPr lang="en-US" sz="1200" b="1" spc="200" kern="0" dirty="0">
+            <a:pPr marL="0" indent="0">
+              <a:buNone/>
+            </a:pPr>
+            <a:r>
+              <a:rPr lang="en-US" sz="1200" b="1" kern="0" spc="200" dirty="0">
                 <a:solidFill>
                   <a:srgbClr val="9257F1"/>
                 </a:solidFill>
@@ -18843,7 +19244,7 @@
           <a:bodyPr wrap="square" lIns="0" tIns="0" rIns="0" bIns="0" rtlCol="0" anchor="t"/>
           <a:lstStyle/>
           <a:p>
-            <a:pPr indent="0" marL="0">
+            <a:pPr marL="0" indent="0">
               <a:buNone/>
             </a:pPr>
             <a:r>
@@ -18885,6 +19286,13 @@
             <a:prstDash val="solid"/>
           </a:ln>
         </p:spPr>
+        <p:txBody>
+          <a:bodyPr/>
+          <a:lstStyle/>
+          <a:p>
+            <a:endParaRPr lang="en-CO"/>
+          </a:p>
+        </p:txBody>
       </p:sp>
       <p:sp>
         <p:nvSpPr>
@@ -18907,11 +19315,11 @@
           <a:bodyPr wrap="square" lIns="0" tIns="0" rIns="0" bIns="0" rtlCol="0" anchor="ctr"/>
           <a:lstStyle/>
           <a:p>
-            <a:pPr indent="0" marL="0">
-              <a:buNone/>
-            </a:pPr>
-            <a:r>
-              <a:rPr lang="en-US" sz="1200" b="1" spc="200" kern="0" dirty="0">
+            <a:pPr marL="0" indent="0">
+              <a:buNone/>
+            </a:pPr>
+            <a:r>
+              <a:rPr lang="en-US" sz="1200" b="1" kern="0" spc="200" dirty="0">
                 <a:solidFill>
                   <a:srgbClr val="9257F1"/>
                 </a:solidFill>
@@ -18946,7 +19354,7 @@
           <a:bodyPr wrap="square" lIns="0" tIns="0" rIns="0" bIns="0" rtlCol="0" anchor="t"/>
           <a:lstStyle/>
           <a:p>
-            <a:pPr indent="0" marL="0">
+            <a:pPr marL="0" indent="0">
               <a:lnSpc>
                 <a:spcPts val="2600"/>
               </a:lnSpc>
@@ -18991,6 +19399,13 @@
             <a:prstDash val="solid"/>
           </a:ln>
         </p:spPr>
+        <p:txBody>
+          <a:bodyPr/>
+          <a:lstStyle/>
+          <a:p>
+            <a:endParaRPr lang="en-CO"/>
+          </a:p>
+        </p:txBody>
       </p:sp>
       <p:sp>
         <p:nvSpPr>
@@ -19013,11 +19428,11 @@
           <a:bodyPr wrap="square" lIns="0" tIns="0" rIns="0" bIns="0" rtlCol="0" anchor="ctr"/>
           <a:lstStyle/>
           <a:p>
-            <a:pPr indent="0" marL="0">
-              <a:buNone/>
-            </a:pPr>
-            <a:r>
-              <a:rPr lang="en-US" sz="1200" b="1" spc="200" kern="0" dirty="0">
+            <a:pPr marL="0" indent="0">
+              <a:buNone/>
+            </a:pPr>
+            <a:r>
+              <a:rPr lang="en-US" sz="1200" b="1" kern="0" spc="200" dirty="0">
                 <a:solidFill>
                   <a:srgbClr val="9257F1"/>
                 </a:solidFill>
@@ -19052,7 +19467,7 @@
           <a:bodyPr wrap="square" lIns="0" tIns="0" rIns="0" bIns="0" rtlCol="0" anchor="t"/>
           <a:lstStyle/>
           <a:p>
-            <a:pPr indent="0" marL="0">
+            <a:pPr marL="0" indent="0">
               <a:lnSpc>
                 <a:spcPts val="2600"/>
               </a:lnSpc>
@@ -19097,6 +19512,13 @@
             <a:prstDash val="solid"/>
           </a:ln>
         </p:spPr>
+        <p:txBody>
+          <a:bodyPr/>
+          <a:lstStyle/>
+          <a:p>
+            <a:endParaRPr lang="en-CO"/>
+          </a:p>
+        </p:txBody>
       </p:sp>
       <p:sp>
         <p:nvSpPr>
@@ -19119,11 +19541,11 @@
           <a:bodyPr wrap="square" lIns="0" tIns="0" rIns="0" bIns="0" rtlCol="0" anchor="ctr"/>
           <a:lstStyle/>
           <a:p>
-            <a:pPr indent="0" marL="0">
-              <a:buNone/>
-            </a:pPr>
-            <a:r>
-              <a:rPr lang="en-US" sz="1200" b="1" spc="200" kern="0" dirty="0">
+            <a:pPr marL="0" indent="0">
+              <a:buNone/>
+            </a:pPr>
+            <a:r>
+              <a:rPr lang="en-US" sz="1200" b="1" kern="0" spc="200" dirty="0">
                 <a:solidFill>
                   <a:srgbClr val="9257F1"/>
                 </a:solidFill>
@@ -19158,7 +19580,7 @@
           <a:bodyPr wrap="square" lIns="0" tIns="0" rIns="0" bIns="0" rtlCol="0" anchor="t"/>
           <a:lstStyle/>
           <a:p>
-            <a:pPr indent="0" marL="0">
+            <a:pPr marL="0" indent="0">
               <a:lnSpc>
                 <a:spcPts val="2600"/>
               </a:lnSpc>
@@ -19195,6 +19617,7 @@
         <a:solidFill>
           <a:srgbClr val="161D2D"/>
         </a:solidFill>
+        <a:effectLst/>
       </p:bgPr>
     </p:bg>
     <p:spTree>
@@ -19232,7 +19655,7 @@
           <a:bodyPr wrap="square" lIns="0" tIns="0" rIns="0" bIns="0" rtlCol="0" anchor="ctr"/>
           <a:lstStyle/>
           <a:p>
-            <a:pPr algn="l" indent="0" marL="0">
+            <a:pPr marL="0" indent="0" algn="l">
               <a:buNone/>
             </a:pPr>
             <a:r>
@@ -19271,7 +19694,7 @@
           <a:bodyPr wrap="square" lIns="0" tIns="0" rIns="0" bIns="0" rtlCol="0" anchor="ctr"/>
           <a:lstStyle/>
           <a:p>
-            <a:pPr algn="r" indent="0" marL="0">
+            <a:pPr marL="0" indent="0" algn="r">
               <a:buNone/>
             </a:pPr>
             <a:r>
@@ -19291,14 +19714,14 @@
       </p:sp>
       <p:pic>
         <p:nvPicPr>
-          <p:cNvPr id="5" name="Image 0" descr="/sessions/awesome-wizardly-sagan/mnt/charla-ia-aws-ug-cucuta/multimedia/aws_ug_cucuta_logo.jpeg">    </p:cNvPr>
+          <p:cNvPr id="5" name="Image 0" descr="/sessions/awesome-wizardly-sagan/mnt/charla-ia-aws-ug-cucuta/multimedia/aws_ug_cucuta_logo.jpeg"/>
           <p:cNvPicPr>
             <a:picLocks noChangeAspect="1"/>
           </p:cNvPicPr>
           <p:nvPr/>
         </p:nvPicPr>
         <p:blipFill>
-          <a:blip r:embed="rId1">
+          <a:blip r:embed="rId3">
             <a:alphaModFix amt="75000"/>
           </a:blip>
           <a:stretch>
@@ -19336,11 +19759,11 @@
           <a:bodyPr wrap="square" lIns="0" tIns="0" rIns="0" bIns="0" rtlCol="0" anchor="ctr"/>
           <a:lstStyle/>
           <a:p>
-            <a:pPr indent="0" marL="0">
-              <a:buNone/>
-            </a:pPr>
-            <a:r>
-              <a:rPr lang="en-US" sz="1200" b="1" spc="200" kern="0" dirty="0">
+            <a:pPr marL="0" indent="0">
+              <a:buNone/>
+            </a:pPr>
+            <a:r>
+              <a:rPr lang="en-US" sz="1200" b="1" kern="0" spc="200" dirty="0">
                 <a:solidFill>
                   <a:srgbClr val="9257F1"/>
                 </a:solidFill>
@@ -19375,7 +19798,7 @@
           <a:bodyPr wrap="square" lIns="0" tIns="0" rIns="0" bIns="0" rtlCol="0" anchor="ctr"/>
           <a:lstStyle/>
           <a:p>
-            <a:pPr indent="0" marL="0">
+            <a:pPr marL="0" indent="0">
               <a:buNone/>
             </a:pPr>
             <a:r>
@@ -19414,7 +19837,7 @@
           <a:bodyPr wrap="square" lIns="0" tIns="0" rIns="0" bIns="0" rtlCol="0" anchor="ctr"/>
           <a:lstStyle/>
           <a:p>
-            <a:pPr indent="0" marL="0">
+            <a:pPr marL="0" indent="0">
               <a:buNone/>
             </a:pPr>
             <a:r>
@@ -19453,7 +19876,7 @@
           <a:bodyPr wrap="square" lIns="0" tIns="0" rIns="0" bIns="0" rtlCol="0" anchor="ctr"/>
           <a:lstStyle/>
           <a:p>
-            <a:pPr indent="0" marL="0">
+            <a:pPr marL="0" indent="0">
               <a:buNone/>
             </a:pPr>
             <a:r>
@@ -19492,7 +19915,7 @@
           <a:bodyPr wrap="square" lIns="0" tIns="0" rIns="0" bIns="0" rtlCol="0" anchor="ctr"/>
           <a:lstStyle/>
           <a:p>
-            <a:pPr indent="0" marL="0">
+            <a:pPr marL="0" indent="0">
               <a:buNone/>
             </a:pPr>
             <a:r>
@@ -19531,7 +19954,7 @@
           <a:bodyPr wrap="square" lIns="0" tIns="0" rIns="0" bIns="0" rtlCol="0" anchor="ctr"/>
           <a:lstStyle/>
           <a:p>
-            <a:pPr indent="0" marL="0">
+            <a:pPr marL="0" indent="0">
               <a:buNone/>
             </a:pPr>
             <a:r>
@@ -19570,7 +19993,7 @@
           <a:bodyPr wrap="square" lIns="0" tIns="0" rIns="0" bIns="0" rtlCol="0" anchor="ctr"/>
           <a:lstStyle/>
           <a:p>
-            <a:pPr indent="0" marL="0">
+            <a:pPr marL="0" indent="0">
               <a:buNone/>
             </a:pPr>
             <a:r>
@@ -19609,7 +20032,7 @@
           <a:bodyPr wrap="square" lIns="0" tIns="0" rIns="0" bIns="0" rtlCol="0" anchor="ctr"/>
           <a:lstStyle/>
           <a:p>
-            <a:pPr indent="0" marL="0">
+            <a:pPr marL="0" indent="0">
               <a:buNone/>
             </a:pPr>
             <a:r>
@@ -19648,7 +20071,7 @@
           <a:bodyPr wrap="square" lIns="0" tIns="0" rIns="0" bIns="0" rtlCol="0" anchor="ctr"/>
           <a:lstStyle/>
           <a:p>
-            <a:pPr indent="0" marL="0">
+            <a:pPr marL="0" indent="0">
               <a:buNone/>
             </a:pPr>
             <a:r>
@@ -19687,7 +20110,7 @@
           <a:bodyPr wrap="square" lIns="0" tIns="0" rIns="0" bIns="0" rtlCol="0" anchor="ctr"/>
           <a:lstStyle/>
           <a:p>
-            <a:pPr indent="0" marL="0">
+            <a:pPr marL="0" indent="0">
               <a:buNone/>
             </a:pPr>
             <a:r>
@@ -19726,7 +20149,7 @@
           <a:bodyPr wrap="square" lIns="0" tIns="0" rIns="0" bIns="0" rtlCol="0" anchor="ctr"/>
           <a:lstStyle/>
           <a:p>
-            <a:pPr indent="0" marL="0">
+            <a:pPr marL="0" indent="0">
               <a:buNone/>
             </a:pPr>
             <a:r>
@@ -20045,4 +20468,319 @@
     </a:ext>
   </a:extLst>
 </a:theme>
+</file>
+
+<file path=ppt/theme/theme2.xml><?xml version="1.0" encoding="utf-8"?>
+<a:theme xmlns:a="http://schemas.openxmlformats.org/drawingml/2006/main" name="Office Theme">
+  <a:themeElements>
+    <a:clrScheme name="Office">
+      <a:dk1>
+        <a:sysClr val="windowText" lastClr="000000"/>
+      </a:dk1>
+      <a:lt1>
+        <a:sysClr val="window" lastClr="FFFFFF"/>
+      </a:lt1>
+      <a:dk2>
+        <a:srgbClr val="0E2841"/>
+      </a:dk2>
+      <a:lt2>
+        <a:srgbClr val="E8E8E8"/>
+      </a:lt2>
+      <a:accent1>
+        <a:srgbClr val="156082"/>
+      </a:accent1>
+      <a:accent2>
+        <a:srgbClr val="E97132"/>
+      </a:accent2>
+      <a:accent3>
+        <a:srgbClr val="196B24"/>
+      </a:accent3>
+      <a:accent4>
+        <a:srgbClr val="0F9ED5"/>
+      </a:accent4>
+      <a:accent5>
+        <a:srgbClr val="A02B93"/>
+      </a:accent5>
+      <a:accent6>
+        <a:srgbClr val="4EA72E"/>
+      </a:accent6>
+      <a:hlink>
+        <a:srgbClr val="467886"/>
+      </a:hlink>
+      <a:folHlink>
+        <a:srgbClr val="96607D"/>
+      </a:folHlink>
+    </a:clrScheme>
+    <a:fontScheme name="Office">
+      <a:majorFont>
+        <a:latin typeface="Aptos Display" panose="02110004020202020204"/>
+        <a:ea typeface=""/>
+        <a:cs typeface=""/>
+        <a:font script="Jpan" typeface="游ゴシック Light"/>
+        <a:font script="Hang" typeface="맑은 고딕"/>
+        <a:font script="Hans" typeface="等线 Light"/>
+        <a:font script="Hant" typeface="新細明體"/>
+        <a:font script="Arab" typeface="Times New Roman"/>
+        <a:font script="Hebr" typeface="Times New Roman"/>
+        <a:font script="Thai" typeface="Angsana New"/>
+        <a:font script="Ethi" typeface="Nyala"/>
+        <a:font script="Beng" typeface="Vrinda"/>
+        <a:font script="Gujr" typeface="Shruti"/>
+        <a:font script="Khmr" typeface="MoolBoran"/>
+        <a:font script="Knda" typeface="Tunga"/>
+        <a:font script="Guru" typeface="Raavi"/>
+        <a:font script="Cans" typeface="Euphemia"/>
+        <a:font script="Cher" typeface="Plantagenet Cherokee"/>
+        <a:font script="Yiii" typeface="Microsoft Yi Baiti"/>
+        <a:font script="Tibt" typeface="Microsoft Himalaya"/>
+        <a:font script="Thaa" typeface="MV Boli"/>
+        <a:font script="Deva" typeface="Mangal"/>
+        <a:font script="Telu" typeface="Gautami"/>
+        <a:font script="Taml" typeface="Latha"/>
+        <a:font script="Syrc" typeface="Estrangelo Edessa"/>
+        <a:font script="Orya" typeface="Kalinga"/>
+        <a:font script="Mlym" typeface="Kartika"/>
+        <a:font script="Laoo" typeface="DokChampa"/>
+        <a:font script="Sinh" typeface="Iskoola Pota"/>
+        <a:font script="Mong" typeface="Mongolian Baiti"/>
+        <a:font script="Viet" typeface="Times New Roman"/>
+        <a:font script="Uigh" typeface="Microsoft Uighur"/>
+        <a:font script="Geor" typeface="Sylfaen"/>
+        <a:font script="Armn" typeface="Arial"/>
+        <a:font script="Bugi" typeface="Leelawadee UI"/>
+        <a:font script="Bopo" typeface="Microsoft JhengHei"/>
+        <a:font script="Java" typeface="Javanese Text"/>
+        <a:font script="Lisu" typeface="Segoe UI"/>
+        <a:font script="Mymr" typeface="Myanmar Text"/>
+        <a:font script="Nkoo" typeface="Ebrima"/>
+        <a:font script="Olck" typeface="Nirmala UI"/>
+        <a:font script="Osma" typeface="Ebrima"/>
+        <a:font script="Phag" typeface="Phagspa"/>
+        <a:font script="Syrn" typeface="Estrangelo Edessa"/>
+        <a:font script="Syrj" typeface="Estrangelo Edessa"/>
+        <a:font script="Syre" typeface="Estrangelo Edessa"/>
+        <a:font script="Sora" typeface="Nirmala UI"/>
+        <a:font script="Tale" typeface="Microsoft Tai Le"/>
+        <a:font script="Talu" typeface="Microsoft New Tai Lue"/>
+        <a:font script="Tfng" typeface="Ebrima"/>
+      </a:majorFont>
+      <a:minorFont>
+        <a:latin typeface="Aptos" panose="02110004020202020204"/>
+        <a:ea typeface=""/>
+        <a:cs typeface=""/>
+        <a:font script="Jpan" typeface="游ゴシック"/>
+        <a:font script="Hang" typeface="맑은 고딕"/>
+        <a:font script="Hans" typeface="等线"/>
+        <a:font script="Hant" typeface="新細明體"/>
+        <a:font script="Arab" typeface="Arial"/>
+        <a:font script="Hebr" typeface="Arial"/>
+        <a:font script="Thai" typeface="Cordia New"/>
+        <a:font script="Ethi" typeface="Nyala"/>
+        <a:font script="Beng" typeface="Vrinda"/>
+        <a:font script="Gujr" typeface="Shruti"/>
+        <a:font script="Khmr" typeface="DaunPenh"/>
+        <a:font script="Knda" typeface="Tunga"/>
+        <a:font script="Guru" typeface="Raavi"/>
+        <a:font script="Cans" typeface="Euphemia"/>
+        <a:font script="Cher" typeface="Plantagenet Cherokee"/>
+        <a:font script="Yiii" typeface="Microsoft Yi Baiti"/>
+        <a:font script="Tibt" typeface="Microsoft Himalaya"/>
+        <a:font script="Thaa" typeface="MV Boli"/>
+        <a:font script="Deva" typeface="Mangal"/>
+        <a:font script="Telu" typeface="Gautami"/>
+        <a:font script="Taml" typeface="Latha"/>
+        <a:font script="Syrc" typeface="Estrangelo Edessa"/>
+        <a:font script="Orya" typeface="Kalinga"/>
+        <a:font script="Mlym" typeface="Kartika"/>
+        <a:font script="Laoo" typeface="DokChampa"/>
+        <a:font script="Sinh" typeface="Iskoola Pota"/>
+        <a:font script="Mong" typeface="Mongolian Baiti"/>
+        <a:font script="Viet" typeface="Arial"/>
+        <a:font script="Uigh" typeface="Microsoft Uighur"/>
+        <a:font script="Geor" typeface="Sylfaen"/>
+        <a:font script="Armn" typeface="Arial"/>
+        <a:font script="Bugi" typeface="Leelawadee UI"/>
+        <a:font script="Bopo" typeface="Microsoft JhengHei"/>
+        <a:font script="Java" typeface="Javanese Text"/>
+        <a:font script="Lisu" typeface="Segoe UI"/>
+        <a:font script="Mymr" typeface="Myanmar Text"/>
+        <a:font script="Nkoo" typeface="Ebrima"/>
+        <a:font script="Olck" typeface="Nirmala UI"/>
+        <a:font script="Osma" typeface="Ebrima"/>
+        <a:font script="Phag" typeface="Phagspa"/>
+        <a:font script="Syrn" typeface="Estrangelo Edessa"/>
+        <a:font script="Syrj" typeface="Estrangelo Edessa"/>
+        <a:font script="Syre" typeface="Estrangelo Edessa"/>
+        <a:font script="Sora" typeface="Nirmala UI"/>
+        <a:font script="Tale" typeface="Microsoft Tai Le"/>
+        <a:font script="Talu" typeface="Microsoft New Tai Lue"/>
+        <a:font script="Tfng" typeface="Ebrima"/>
+      </a:minorFont>
+    </a:fontScheme>
+    <a:fmtScheme name="Office">
+      <a:fillStyleLst>
+        <a:solidFill>
+          <a:schemeClr val="phClr"/>
+        </a:solidFill>
+        <a:gradFill rotWithShape="1">
+          <a:gsLst>
+            <a:gs pos="0">
+              <a:schemeClr val="phClr">
+                <a:lumMod val="110000"/>
+                <a:satMod val="105000"/>
+                <a:tint val="67000"/>
+              </a:schemeClr>
+            </a:gs>
+            <a:gs pos="50000">
+              <a:schemeClr val="phClr">
+                <a:lumMod val="105000"/>
+                <a:satMod val="103000"/>
+                <a:tint val="73000"/>
+              </a:schemeClr>
+            </a:gs>
+            <a:gs pos="100000">
+              <a:schemeClr val="phClr">
+                <a:lumMod val="105000"/>
+                <a:satMod val="109000"/>
+                <a:tint val="81000"/>
+              </a:schemeClr>
+            </a:gs>
+          </a:gsLst>
+          <a:lin ang="5400000" scaled="0"/>
+        </a:gradFill>
+        <a:gradFill rotWithShape="1">
+          <a:gsLst>
+            <a:gs pos="0">
+              <a:schemeClr val="phClr">
+                <a:satMod val="103000"/>
+                <a:lumMod val="102000"/>
+                <a:tint val="94000"/>
+              </a:schemeClr>
+            </a:gs>
+            <a:gs pos="50000">
+              <a:schemeClr val="phClr">
+                <a:satMod val="110000"/>
+                <a:lumMod val="100000"/>
+                <a:shade val="100000"/>
+              </a:schemeClr>
+            </a:gs>
+            <a:gs pos="100000">
+              <a:schemeClr val="phClr">
+                <a:lumMod val="99000"/>
+                <a:satMod val="120000"/>
+                <a:shade val="78000"/>
+              </a:schemeClr>
+            </a:gs>
+          </a:gsLst>
+          <a:lin ang="5400000" scaled="0"/>
+        </a:gradFill>
+      </a:fillStyleLst>
+      <a:lnStyleLst>
+        <a:ln w="12700" cap="flat" cmpd="sng" algn="ctr">
+          <a:solidFill>
+            <a:schemeClr val="phClr"/>
+          </a:solidFill>
+          <a:prstDash val="solid"/>
+          <a:miter lim="800000"/>
+        </a:ln>
+        <a:ln w="19050" cap="flat" cmpd="sng" algn="ctr">
+          <a:solidFill>
+            <a:schemeClr val="phClr"/>
+          </a:solidFill>
+          <a:prstDash val="solid"/>
+          <a:miter lim="800000"/>
+        </a:ln>
+        <a:ln w="25400" cap="flat" cmpd="sng" algn="ctr">
+          <a:solidFill>
+            <a:schemeClr val="phClr"/>
+          </a:solidFill>
+          <a:prstDash val="solid"/>
+          <a:miter lim="800000"/>
+        </a:ln>
+      </a:lnStyleLst>
+      <a:effectStyleLst>
+        <a:effectStyle>
+          <a:effectLst/>
+        </a:effectStyle>
+        <a:effectStyle>
+          <a:effectLst/>
+        </a:effectStyle>
+        <a:effectStyle>
+          <a:effectLst>
+            <a:outerShdw blurRad="57150" dist="19050" dir="5400000" algn="ctr" rotWithShape="0">
+              <a:srgbClr val="000000">
+                <a:alpha val="63000"/>
+              </a:srgbClr>
+            </a:outerShdw>
+          </a:effectLst>
+        </a:effectStyle>
+      </a:effectStyleLst>
+      <a:bgFillStyleLst>
+        <a:solidFill>
+          <a:schemeClr val="phClr"/>
+        </a:solidFill>
+        <a:solidFill>
+          <a:schemeClr val="phClr">
+            <a:tint val="95000"/>
+            <a:satMod val="170000"/>
+          </a:schemeClr>
+        </a:solidFill>
+        <a:gradFill rotWithShape="1">
+          <a:gsLst>
+            <a:gs pos="0">
+              <a:schemeClr val="phClr">
+                <a:tint val="93000"/>
+                <a:satMod val="150000"/>
+                <a:shade val="98000"/>
+                <a:lumMod val="102000"/>
+              </a:schemeClr>
+            </a:gs>
+            <a:gs pos="50000">
+              <a:schemeClr val="phClr">
+                <a:tint val="98000"/>
+                <a:satMod val="130000"/>
+                <a:shade val="90000"/>
+                <a:lumMod val="103000"/>
+              </a:schemeClr>
+            </a:gs>
+            <a:gs pos="100000">
+              <a:schemeClr val="phClr">
+                <a:shade val="63000"/>
+                <a:satMod val="120000"/>
+              </a:schemeClr>
+            </a:gs>
+          </a:gsLst>
+          <a:lin ang="5400000" scaled="0"/>
+        </a:gradFill>
+      </a:bgFillStyleLst>
+    </a:fmtScheme>
+  </a:themeElements>
+  <a:objectDefaults>
+    <a:lnDef>
+      <a:spPr/>
+      <a:bodyPr/>
+      <a:lstStyle/>
+      <a:style>
+        <a:lnRef idx="2">
+          <a:schemeClr val="accent1"/>
+        </a:lnRef>
+        <a:fillRef idx="0">
+          <a:schemeClr val="accent1"/>
+        </a:fillRef>
+        <a:effectRef idx="1">
+          <a:schemeClr val="accent1"/>
+        </a:effectRef>
+        <a:fontRef idx="minor">
+          <a:schemeClr val="tx1"/>
+        </a:fontRef>
+      </a:style>
+    </a:lnDef>
+  </a:objectDefaults>
+  <a:extraClrSchemeLst/>
+  <a:extLst>
+    <a:ext uri="{05A4C25C-085E-4340-85A3-A5531E510DB2}">
+      <thm15:themeFamily xmlns:thm15="http://schemas.microsoft.com/office/thememl/2012/main" name="Office Theme" id="{2E142A2C-CD16-42D6-873A-C26D2A0506FA}" vid="{1BDDFF52-6CD6-40A5-AB3C-68EB2F1E4D0A}"/>
+    </a:ext>
+  </a:extLst>
+</a:theme>
 </file>
--- a/Slides_IA_AWS_UG_Cucuta.pptx
+++ b/Slides_IA_AWS_UG_Cucuta.pptx
@@ -44,8 +44,8 @@
     <p:sldId id="289" r:id="rId35"/>
     <p:sldId id="290" r:id="rId36"/>
     <p:sldId id="291" r:id="rId37"/>
-    <p:sldId id="292" r:id="rId38"/>
-    <p:sldId id="293" r:id="rId39"/>
+    <p:sldId id="293" r:id="rId38"/>
+    <p:sldId id="292" r:id="rId39"/>
   </p:sldIdLst>
   <p:sldSz cx="12192000" cy="6858000"/>
   <p:notesSz cx="6858000" cy="12192000"/>
@@ -3259,13 +3259,7 @@
               <a:t>[6.4 Última frase]  38:48–39:58
 CIERRE
 ----------------------------------------
-Quizás dentro de algunos años escribamos mucho menos código a mano.
-Pero eso no significa que necesitemos menos ingeniería.
-Probablemente necesitemos más.
-Porque cuando cualquiera puede producir software, la diferencia entre producir código y construir un buen sistema se vuelve todavía más importante.
-&gt;&gt; Pausa. Última línea, más lento, mirando al público.
-Así que no tengan miedo de que la inteligencia artificial aprenda a programar.
-Preocúpense por aprender ustedes a hacer ingeniería.</a:t>
+</a:t>
             </a:r>
           </a:p>
         </p:txBody>
@@ -3355,7 +3349,13 @@
               <a:t>[6.4 Última frase]  38:48–39:58
 CIERRE
 ----------------------------------------
-</a:t>
+Quizás dentro de algunos años escribamos mucho menos código a mano.
+Pero eso no significa que necesitemos menos ingeniería.
+Probablemente necesitemos más.
+Porque cuando cualquiera puede producir software, la diferencia entre producir código y construir un buen sistema se vuelve todavía más importante.
+&gt;&gt; Pausa. Última línea, más lento, mirando al público.
+Así que no tengan miedo de que la inteligencia artificial aprenda a programar.
+Preocúpense por aprender ustedes a hacer ingeniería.</a:t>
             </a:r>
           </a:p>
         </p:txBody>
@@ -5055,574 +5055,674 @@
           </a:p>
         </p:txBody>
       </p:sp>
-      <p:sp>
-        <p:nvSpPr>
-          <p:cNvPr id="8" name="Shape 4"/>
-          <p:cNvSpPr/>
-          <p:nvPr/>
-        </p:nvSpPr>
-        <p:spPr>
+      <p:grpSp>
+        <p:nvGrpSpPr>
+          <p:cNvPr id="2" name="Group 1">
+            <a:extLst>
+              <a:ext uri="{FF2B5EF4-FFF2-40B4-BE49-F238E27FC236}">
+                <a16:creationId xmlns:a16="http://schemas.microsoft.com/office/drawing/2014/main" id="{B7642012-B655-6E83-F8D9-39569832E10D}"/>
+              </a:ext>
+            </a:extLst>
+          </p:cNvPr>
+          <p:cNvGrpSpPr/>
+          <p:nvPr/>
+        </p:nvGrpSpPr>
+        <p:grpSpPr>
           <a:xfrm>
             <a:off x="822960" y="2103120"/>
             <a:ext cx="2396414" cy="3529584"/>
-          </a:xfrm>
-          <a:prstGeom prst="rect">
-            <a:avLst/>
-          </a:prstGeom>
-          <a:solidFill>
-            <a:srgbClr val="1E2739"/>
-          </a:solidFill>
-          <a:ln w="12700">
+            <a:chOff x="822960" y="2103120"/>
+            <a:chExt cx="2396414" cy="3529584"/>
+          </a:xfrm>
+        </p:grpSpPr>
+        <p:sp>
+          <p:nvSpPr>
+            <p:cNvPr id="8" name="Shape 4"/>
+            <p:cNvSpPr/>
+            <p:nvPr/>
+          </p:nvSpPr>
+          <p:spPr>
+            <a:xfrm>
+              <a:off x="822960" y="2103120"/>
+              <a:ext cx="2396414" cy="3529584"/>
+            </a:xfrm>
+            <a:prstGeom prst="rect">
+              <a:avLst/>
+            </a:prstGeom>
             <a:solidFill>
-              <a:srgbClr val="2C3852"/>
+              <a:srgbClr val="1E2739"/>
             </a:solidFill>
-            <a:prstDash val="solid"/>
-          </a:ln>
-        </p:spPr>
-        <p:txBody>
-          <a:bodyPr/>
-          <a:lstStyle/>
-          <a:p>
-            <a:endParaRPr lang="en-CO"/>
-          </a:p>
-        </p:txBody>
-      </p:sp>
-      <p:sp>
-        <p:nvSpPr>
-          <p:cNvPr id="9" name="Text 5"/>
-          <p:cNvSpPr/>
-          <p:nvPr/>
-        </p:nvSpPr>
-        <p:spPr>
-          <a:xfrm>
-            <a:off x="1143000" y="2423160"/>
-            <a:ext cx="1756334" cy="320040"/>
-          </a:xfrm>
-          <a:prstGeom prst="rect">
-            <a:avLst/>
-          </a:prstGeom>
-          <a:noFill/>
-          <a:ln/>
-        </p:spPr>
-        <p:txBody>
-          <a:bodyPr wrap="square" lIns="0" tIns="0" rIns="0" bIns="0" rtlCol="0" anchor="ctr"/>
-          <a:lstStyle/>
-          <a:p>
-            <a:pPr marL="0" indent="0">
-              <a:buNone/>
-            </a:pPr>
-            <a:r>
-              <a:rPr lang="en-US" sz="1200" b="1" kern="0" spc="200" dirty="0">
-                <a:solidFill>
-                  <a:srgbClr val="9257F1"/>
-                </a:solidFill>
-                <a:latin typeface="Arial" pitchFamily="34" charset="0"/>
-                <a:ea typeface="Arial" pitchFamily="34" charset="-122"/>
-                <a:cs typeface="Arial" pitchFamily="34" charset="-120"/>
-              </a:rPr>
-              <a:t>1</a:t>
-            </a:r>
-            <a:endParaRPr lang="en-US" sz="1200" dirty="0"/>
-          </a:p>
-        </p:txBody>
-      </p:sp>
-      <p:sp>
-        <p:nvSpPr>
-          <p:cNvPr id="10" name="Text 6"/>
-          <p:cNvSpPr/>
-          <p:nvPr/>
-        </p:nvSpPr>
-        <p:spPr>
-          <a:xfrm>
-            <a:off x="1143000" y="2880360"/>
-            <a:ext cx="1756334" cy="2148840"/>
-          </a:xfrm>
-          <a:prstGeom prst="rect">
-            <a:avLst/>
-          </a:prstGeom>
-          <a:noFill/>
-          <a:ln/>
-        </p:spPr>
-        <p:txBody>
-          <a:bodyPr wrap="square" lIns="0" tIns="0" rIns="0" bIns="0" rtlCol="0" anchor="t"/>
-          <a:lstStyle/>
-          <a:p>
-            <a:pPr marL="0" indent="0">
-              <a:lnSpc>
-                <a:spcPts val="2600"/>
-              </a:lnSpc>
-              <a:buNone/>
-            </a:pPr>
-            <a:r>
-              <a:rPr lang="en-US" sz="1500" dirty="0">
-                <a:solidFill>
-                  <a:srgbClr val="FFFFFF"/>
-                </a:solidFill>
-                <a:latin typeface="Arial" pitchFamily="34" charset="0"/>
-                <a:ea typeface="Arial" pitchFamily="34" charset="-122"/>
-                <a:cs typeface="Arial" pitchFamily="34" charset="-120"/>
-              </a:rPr>
-              <a:t>Hablar con la máquina</a:t>
-            </a:r>
-            <a:endParaRPr lang="en-US" sz="1500" dirty="0"/>
-          </a:p>
-          <a:p>
-            <a:pPr marL="0" indent="0">
-              <a:lnSpc>
-                <a:spcPts val="2600"/>
-              </a:lnSpc>
-              <a:buNone/>
-            </a:pPr>
-            <a:endParaRPr lang="en-US" sz="1500" dirty="0"/>
-          </a:p>
-          <a:p>
-            <a:pPr marL="0" indent="0">
-              <a:lnSpc>
-                <a:spcPts val="2600"/>
-              </a:lnSpc>
-              <a:buNone/>
-            </a:pPr>
-            <a:r>
-              <a:rPr lang="en-US" sz="1500" dirty="0">
-                <a:solidFill>
-                  <a:srgbClr val="FFFFFF"/>
-                </a:solidFill>
-                <a:latin typeface="Arial" pitchFamily="34" charset="0"/>
-                <a:ea typeface="Arial" pitchFamily="34" charset="-122"/>
-                <a:cs typeface="Arial" pitchFamily="34" charset="-120"/>
-              </a:rPr>
-              <a:t>Memoria, compiladores, sistemas operativos. El código era escaso y caro.</a:t>
-            </a:r>
-            <a:endParaRPr lang="en-US" sz="1500" dirty="0"/>
-          </a:p>
-        </p:txBody>
-      </p:sp>
-      <p:sp>
-        <p:nvSpPr>
-          <p:cNvPr id="11" name="Shape 7"/>
-          <p:cNvSpPr/>
-          <p:nvPr/>
-        </p:nvSpPr>
-        <p:spPr>
+            <a:ln w="12700">
+              <a:solidFill>
+                <a:srgbClr val="2C3852"/>
+              </a:solidFill>
+              <a:prstDash val="solid"/>
+            </a:ln>
+          </p:spPr>
+          <p:txBody>
+            <a:bodyPr/>
+            <a:lstStyle/>
+            <a:p>
+              <a:endParaRPr lang="en-CO"/>
+            </a:p>
+          </p:txBody>
+        </p:sp>
+        <p:sp>
+          <p:nvSpPr>
+            <p:cNvPr id="9" name="Text 5"/>
+            <p:cNvSpPr/>
+            <p:nvPr/>
+          </p:nvSpPr>
+          <p:spPr>
+            <a:xfrm>
+              <a:off x="1143000" y="2423160"/>
+              <a:ext cx="1756334" cy="320040"/>
+            </a:xfrm>
+            <a:prstGeom prst="rect">
+              <a:avLst/>
+            </a:prstGeom>
+            <a:noFill/>
+            <a:ln/>
+          </p:spPr>
+          <p:txBody>
+            <a:bodyPr wrap="square" lIns="0" tIns="0" rIns="0" bIns="0" rtlCol="0" anchor="ctr"/>
+            <a:lstStyle/>
+            <a:p>
+              <a:pPr marL="0" indent="0">
+                <a:buNone/>
+              </a:pPr>
+              <a:r>
+                <a:rPr lang="en-US" sz="1200" b="1" kern="0" spc="200" dirty="0">
+                  <a:solidFill>
+                    <a:srgbClr val="9257F1"/>
+                  </a:solidFill>
+                  <a:latin typeface="Arial" pitchFamily="34" charset="0"/>
+                  <a:ea typeface="Arial" pitchFamily="34" charset="-122"/>
+                  <a:cs typeface="Arial" pitchFamily="34" charset="-120"/>
+                </a:rPr>
+                <a:t>1</a:t>
+              </a:r>
+              <a:endParaRPr lang="en-US" sz="1200" dirty="0"/>
+            </a:p>
+          </p:txBody>
+        </p:sp>
+        <p:sp>
+          <p:nvSpPr>
+            <p:cNvPr id="10" name="Text 6"/>
+            <p:cNvSpPr/>
+            <p:nvPr/>
+          </p:nvSpPr>
+          <p:spPr>
+            <a:xfrm>
+              <a:off x="1143000" y="2880360"/>
+              <a:ext cx="1756334" cy="837530"/>
+            </a:xfrm>
+            <a:prstGeom prst="rect">
+              <a:avLst/>
+            </a:prstGeom>
+            <a:noFill/>
+            <a:ln/>
+          </p:spPr>
+          <p:txBody>
+            <a:bodyPr wrap="square" lIns="0" tIns="0" rIns="0" bIns="0" rtlCol="0" anchor="t"/>
+            <a:lstStyle/>
+            <a:p>
+              <a:pPr marL="0" indent="0">
+                <a:lnSpc>
+                  <a:spcPts val="2600"/>
+                </a:lnSpc>
+                <a:buNone/>
+              </a:pPr>
+              <a:r>
+                <a:rPr lang="en-US" sz="1500" dirty="0">
+                  <a:solidFill>
+                    <a:srgbClr val="B34FFF"/>
+                  </a:solidFill>
+                  <a:latin typeface="Arial" pitchFamily="34" charset="0"/>
+                  <a:ea typeface="Arial" pitchFamily="34" charset="-122"/>
+                  <a:cs typeface="Arial" pitchFamily="34" charset="-120"/>
+                </a:rPr>
+                <a:t>Hablar con la máquina</a:t>
+              </a:r>
+              <a:endParaRPr lang="en-US" sz="1500" dirty="0">
+                <a:solidFill>
+                  <a:srgbClr val="B34FFF"/>
+                </a:solidFill>
+              </a:endParaRPr>
+            </a:p>
+            <a:p>
+              <a:pPr marL="0" indent="0">
+                <a:lnSpc>
+                  <a:spcPts val="2600"/>
+                </a:lnSpc>
+                <a:buNone/>
+              </a:pPr>
+              <a:endParaRPr lang="en-US" sz="1500" dirty="0"/>
+            </a:p>
+            <a:p>
+              <a:pPr marL="0" indent="0">
+                <a:lnSpc>
+                  <a:spcPts val="2600"/>
+                </a:lnSpc>
+                <a:buNone/>
+              </a:pPr>
+              <a:r>
+                <a:rPr lang="en-US" sz="1500" dirty="0">
+                  <a:solidFill>
+                    <a:srgbClr val="FFFFFF"/>
+                  </a:solidFill>
+                  <a:latin typeface="Arial" pitchFamily="34" charset="0"/>
+                  <a:ea typeface="Arial" pitchFamily="34" charset="-122"/>
+                  <a:cs typeface="Arial" pitchFamily="34" charset="-120"/>
+                </a:rPr>
+                <a:t>Memoria, compiladores, sistemas operativos. El código era escaso y caro.</a:t>
+              </a:r>
+              <a:endParaRPr lang="en-US" sz="1500" dirty="0"/>
+            </a:p>
+          </p:txBody>
+        </p:sp>
+      </p:grpSp>
+      <p:grpSp>
+        <p:nvGrpSpPr>
+          <p:cNvPr id="21" name="Group 20">
+            <a:extLst>
+              <a:ext uri="{FF2B5EF4-FFF2-40B4-BE49-F238E27FC236}">
+                <a16:creationId xmlns:a16="http://schemas.microsoft.com/office/drawing/2014/main" id="{8F5F7A03-D588-E76E-7490-60AD668006F6}"/>
+              </a:ext>
+            </a:extLst>
+          </p:cNvPr>
+          <p:cNvGrpSpPr/>
+          <p:nvPr/>
+        </p:nvGrpSpPr>
+        <p:grpSpPr>
           <a:xfrm>
             <a:off x="3539414" y="2103120"/>
             <a:ext cx="2396414" cy="3529584"/>
-          </a:xfrm>
-          <a:prstGeom prst="rect">
-            <a:avLst/>
-          </a:prstGeom>
-          <a:solidFill>
-            <a:srgbClr val="1E2739"/>
-          </a:solidFill>
-          <a:ln w="12700">
+            <a:chOff x="3539414" y="2103120"/>
+            <a:chExt cx="2396414" cy="3529584"/>
+          </a:xfrm>
+        </p:grpSpPr>
+        <p:sp>
+          <p:nvSpPr>
+            <p:cNvPr id="11" name="Shape 7"/>
+            <p:cNvSpPr/>
+            <p:nvPr/>
+          </p:nvSpPr>
+          <p:spPr>
+            <a:xfrm>
+              <a:off x="3539414" y="2103120"/>
+              <a:ext cx="2396414" cy="3529584"/>
+            </a:xfrm>
+            <a:prstGeom prst="rect">
+              <a:avLst/>
+            </a:prstGeom>
             <a:solidFill>
-              <a:srgbClr val="2C3852"/>
+              <a:srgbClr val="1E2739"/>
             </a:solidFill>
-            <a:prstDash val="solid"/>
-          </a:ln>
-        </p:spPr>
-        <p:txBody>
-          <a:bodyPr/>
-          <a:lstStyle/>
-          <a:p>
-            <a:endParaRPr lang="en-CO"/>
-          </a:p>
-        </p:txBody>
-      </p:sp>
-      <p:sp>
-        <p:nvSpPr>
-          <p:cNvPr id="12" name="Text 8"/>
-          <p:cNvSpPr/>
-          <p:nvPr/>
-        </p:nvSpPr>
-        <p:spPr>
-          <a:xfrm>
-            <a:off x="3859454" y="2423160"/>
-            <a:ext cx="1756334" cy="320040"/>
-          </a:xfrm>
-          <a:prstGeom prst="rect">
-            <a:avLst/>
-          </a:prstGeom>
-          <a:noFill/>
-          <a:ln/>
-        </p:spPr>
-        <p:txBody>
-          <a:bodyPr wrap="square" lIns="0" tIns="0" rIns="0" bIns="0" rtlCol="0" anchor="ctr"/>
-          <a:lstStyle/>
-          <a:p>
-            <a:pPr marL="0" indent="0">
-              <a:buNone/>
-            </a:pPr>
-            <a:r>
-              <a:rPr lang="en-US" sz="1200" b="1" kern="0" spc="200" dirty="0">
-                <a:solidFill>
-                  <a:srgbClr val="9257F1"/>
-                </a:solidFill>
-                <a:latin typeface="Arial" pitchFamily="34" charset="0"/>
-                <a:ea typeface="Arial" pitchFamily="34" charset="-122"/>
-                <a:cs typeface="Arial" pitchFamily="34" charset="-120"/>
-              </a:rPr>
-              <a:t>2</a:t>
-            </a:r>
-            <a:endParaRPr lang="en-US" sz="1200" dirty="0"/>
-          </a:p>
-        </p:txBody>
-      </p:sp>
-      <p:sp>
-        <p:nvSpPr>
-          <p:cNvPr id="13" name="Text 9"/>
-          <p:cNvSpPr/>
-          <p:nvPr/>
-        </p:nvSpPr>
-        <p:spPr>
-          <a:xfrm>
-            <a:off x="3859454" y="2880360"/>
-            <a:ext cx="1756334" cy="2148840"/>
-          </a:xfrm>
-          <a:prstGeom prst="rect">
-            <a:avLst/>
-          </a:prstGeom>
-          <a:noFill/>
-          <a:ln/>
-        </p:spPr>
-        <p:txBody>
-          <a:bodyPr wrap="square" lIns="0" tIns="0" rIns="0" bIns="0" rtlCol="0" anchor="t"/>
-          <a:lstStyle/>
-          <a:p>
-            <a:pPr marL="0" indent="0">
-              <a:lnSpc>
-                <a:spcPts val="2600"/>
-              </a:lnSpc>
-              <a:buNone/>
-            </a:pPr>
-            <a:r>
-              <a:rPr lang="en-US" sz="1500" dirty="0">
-                <a:solidFill>
-                  <a:srgbClr val="FFFFFF"/>
-                </a:solidFill>
-                <a:latin typeface="Arial" pitchFamily="34" charset="0"/>
-                <a:ea typeface="Arial" pitchFamily="34" charset="-122"/>
-                <a:cs typeface="Arial" pitchFamily="34" charset="-120"/>
-              </a:rPr>
-              <a:t>Las abstracciones</a:t>
-            </a:r>
-            <a:endParaRPr lang="en-US" sz="1500" dirty="0"/>
-          </a:p>
-          <a:p>
-            <a:pPr marL="0" indent="0">
-              <a:lnSpc>
-                <a:spcPts val="2600"/>
-              </a:lnSpc>
-              <a:buNone/>
-            </a:pPr>
-            <a:endParaRPr lang="en-US" sz="1500" dirty="0"/>
-          </a:p>
-          <a:p>
-            <a:pPr marL="0" indent="0">
-              <a:lnSpc>
-                <a:spcPts val="2600"/>
-              </a:lnSpc>
-              <a:buNone/>
-            </a:pPr>
-            <a:r>
-              <a:rPr lang="en-US" sz="1500" dirty="0">
-                <a:solidFill>
-                  <a:srgbClr val="FFFFFF"/>
-                </a:solidFill>
-                <a:latin typeface="Arial" pitchFamily="34" charset="0"/>
-                <a:ea typeface="Arial" pitchFamily="34" charset="-122"/>
-                <a:cs typeface="Arial" pitchFamily="34" charset="-120"/>
-              </a:rPr>
-              <a:t>Frameworks, cloud, contenedores, IaC, CI/CD. Más con menos esfuerzo.</a:t>
-            </a:r>
-            <a:endParaRPr lang="en-US" sz="1500" dirty="0"/>
-          </a:p>
-        </p:txBody>
-      </p:sp>
-      <p:sp>
-        <p:nvSpPr>
-          <p:cNvPr id="14" name="Shape 10"/>
-          <p:cNvSpPr/>
-          <p:nvPr/>
-        </p:nvSpPr>
-        <p:spPr>
+            <a:ln w="12700">
+              <a:solidFill>
+                <a:srgbClr val="2C3852"/>
+              </a:solidFill>
+              <a:prstDash val="solid"/>
+            </a:ln>
+          </p:spPr>
+          <p:txBody>
+            <a:bodyPr/>
+            <a:lstStyle/>
+            <a:p>
+              <a:endParaRPr lang="en-CO"/>
+            </a:p>
+          </p:txBody>
+        </p:sp>
+        <p:sp>
+          <p:nvSpPr>
+            <p:cNvPr id="12" name="Text 8"/>
+            <p:cNvSpPr/>
+            <p:nvPr/>
+          </p:nvSpPr>
+          <p:spPr>
+            <a:xfrm>
+              <a:off x="3859454" y="2423160"/>
+              <a:ext cx="1756334" cy="320040"/>
+            </a:xfrm>
+            <a:prstGeom prst="rect">
+              <a:avLst/>
+            </a:prstGeom>
+            <a:noFill/>
+            <a:ln/>
+          </p:spPr>
+          <p:txBody>
+            <a:bodyPr wrap="square" lIns="0" tIns="0" rIns="0" bIns="0" rtlCol="0" anchor="ctr"/>
+            <a:lstStyle/>
+            <a:p>
+              <a:pPr marL="0" indent="0">
+                <a:buNone/>
+              </a:pPr>
+              <a:r>
+                <a:rPr lang="en-US" sz="1200" b="1" kern="0" spc="200" dirty="0">
+                  <a:solidFill>
+                    <a:srgbClr val="9257F1"/>
+                  </a:solidFill>
+                  <a:latin typeface="Arial" pitchFamily="34" charset="0"/>
+                  <a:ea typeface="Arial" pitchFamily="34" charset="-122"/>
+                  <a:cs typeface="Arial" pitchFamily="34" charset="-120"/>
+                </a:rPr>
+                <a:t>2</a:t>
+              </a:r>
+              <a:endParaRPr lang="en-US" sz="1200" dirty="0"/>
+            </a:p>
+          </p:txBody>
+        </p:sp>
+        <p:sp>
+          <p:nvSpPr>
+            <p:cNvPr id="13" name="Text 9"/>
+            <p:cNvSpPr/>
+            <p:nvPr/>
+          </p:nvSpPr>
+          <p:spPr>
+            <a:xfrm>
+              <a:off x="3859454" y="2880360"/>
+              <a:ext cx="1756334" cy="2148840"/>
+            </a:xfrm>
+            <a:prstGeom prst="rect">
+              <a:avLst/>
+            </a:prstGeom>
+            <a:noFill/>
+            <a:ln/>
+          </p:spPr>
+          <p:txBody>
+            <a:bodyPr wrap="square" lIns="0" tIns="0" rIns="0" bIns="0" rtlCol="0" anchor="t"/>
+            <a:lstStyle/>
+            <a:p>
+              <a:pPr marL="0" indent="0">
+                <a:lnSpc>
+                  <a:spcPts val="2600"/>
+                </a:lnSpc>
+                <a:buNone/>
+              </a:pPr>
+              <a:r>
+                <a:rPr lang="en-US" sz="1500" dirty="0">
+                  <a:solidFill>
+                    <a:srgbClr val="B34FFF"/>
+                  </a:solidFill>
+                  <a:latin typeface="Arial" pitchFamily="34" charset="0"/>
+                  <a:ea typeface="Arial" pitchFamily="34" charset="-122"/>
+                  <a:cs typeface="Arial" pitchFamily="34" charset="-120"/>
+                </a:rPr>
+                <a:t>Las abstracciones</a:t>
+              </a:r>
+              <a:endParaRPr lang="en-US" sz="1500" dirty="0">
+                <a:solidFill>
+                  <a:srgbClr val="B34FFF"/>
+                </a:solidFill>
+              </a:endParaRPr>
+            </a:p>
+            <a:p>
+              <a:pPr marL="0" indent="0">
+                <a:lnSpc>
+                  <a:spcPts val="2600"/>
+                </a:lnSpc>
+                <a:buNone/>
+              </a:pPr>
+              <a:endParaRPr lang="en-US" sz="1500" dirty="0"/>
+            </a:p>
+            <a:p>
+              <a:pPr marL="0" indent="0">
+                <a:lnSpc>
+                  <a:spcPts val="2600"/>
+                </a:lnSpc>
+                <a:buNone/>
+              </a:pPr>
+              <a:r>
+                <a:rPr lang="en-US" sz="1500" dirty="0">
+                  <a:solidFill>
+                    <a:srgbClr val="FFFFFF"/>
+                  </a:solidFill>
+                  <a:latin typeface="Arial" pitchFamily="34" charset="0"/>
+                  <a:ea typeface="Arial" pitchFamily="34" charset="-122"/>
+                  <a:cs typeface="Arial" pitchFamily="34" charset="-120"/>
+                </a:rPr>
+                <a:t>Frameworks, cloud, contenedores, IaC, CI/CD. Más con menos esfuerzo.</a:t>
+              </a:r>
+              <a:endParaRPr lang="en-US" sz="1500" dirty="0"/>
+            </a:p>
+          </p:txBody>
+        </p:sp>
+      </p:grpSp>
+      <p:grpSp>
+        <p:nvGrpSpPr>
+          <p:cNvPr id="22" name="Group 21">
+            <a:extLst>
+              <a:ext uri="{FF2B5EF4-FFF2-40B4-BE49-F238E27FC236}">
+                <a16:creationId xmlns:a16="http://schemas.microsoft.com/office/drawing/2014/main" id="{191875B1-3AC6-A2D1-BC95-ED0E64994F94}"/>
+              </a:ext>
+            </a:extLst>
+          </p:cNvPr>
+          <p:cNvGrpSpPr/>
+          <p:nvPr/>
+        </p:nvGrpSpPr>
+        <p:grpSpPr>
           <a:xfrm>
             <a:off x="6255868" y="2103120"/>
             <a:ext cx="2396414" cy="3529584"/>
-          </a:xfrm>
-          <a:prstGeom prst="rect">
-            <a:avLst/>
-          </a:prstGeom>
-          <a:solidFill>
-            <a:srgbClr val="1E2739"/>
-          </a:solidFill>
-          <a:ln w="12700">
+            <a:chOff x="6255868" y="2103120"/>
+            <a:chExt cx="2396414" cy="3529584"/>
+          </a:xfrm>
+        </p:grpSpPr>
+        <p:sp>
+          <p:nvSpPr>
+            <p:cNvPr id="14" name="Shape 10"/>
+            <p:cNvSpPr/>
+            <p:nvPr/>
+          </p:nvSpPr>
+          <p:spPr>
+            <a:xfrm>
+              <a:off x="6255868" y="2103120"/>
+              <a:ext cx="2396414" cy="3529584"/>
+            </a:xfrm>
+            <a:prstGeom prst="rect">
+              <a:avLst/>
+            </a:prstGeom>
             <a:solidFill>
-              <a:srgbClr val="2C3852"/>
+              <a:srgbClr val="1E2739"/>
             </a:solidFill>
-            <a:prstDash val="solid"/>
-          </a:ln>
-        </p:spPr>
-        <p:txBody>
-          <a:bodyPr/>
-          <a:lstStyle/>
-          <a:p>
-            <a:endParaRPr lang="en-CO"/>
-          </a:p>
-        </p:txBody>
-      </p:sp>
-      <p:sp>
-        <p:nvSpPr>
-          <p:cNvPr id="15" name="Text 11"/>
-          <p:cNvSpPr/>
-          <p:nvPr/>
-        </p:nvSpPr>
-        <p:spPr>
-          <a:xfrm>
-            <a:off x="6575908" y="2423160"/>
-            <a:ext cx="1756334" cy="320040"/>
-          </a:xfrm>
-          <a:prstGeom prst="rect">
-            <a:avLst/>
-          </a:prstGeom>
-          <a:noFill/>
-          <a:ln/>
-        </p:spPr>
-        <p:txBody>
-          <a:bodyPr wrap="square" lIns="0" tIns="0" rIns="0" bIns="0" rtlCol="0" anchor="ctr"/>
-          <a:lstStyle/>
-          <a:p>
-            <a:pPr marL="0" indent="0">
-              <a:buNone/>
-            </a:pPr>
-            <a:r>
-              <a:rPr lang="en-US" sz="1200" b="1" kern="0" spc="200" dirty="0">
-                <a:solidFill>
-                  <a:srgbClr val="9257F1"/>
-                </a:solidFill>
-                <a:latin typeface="Arial" pitchFamily="34" charset="0"/>
-                <a:ea typeface="Arial" pitchFamily="34" charset="-122"/>
-                <a:cs typeface="Arial" pitchFamily="34" charset="-120"/>
-              </a:rPr>
-              <a:t>3</a:t>
-            </a:r>
-            <a:endParaRPr lang="en-US" sz="1200" dirty="0"/>
-          </a:p>
-        </p:txBody>
-      </p:sp>
-      <p:sp>
-        <p:nvSpPr>
-          <p:cNvPr id="16" name="Text 12"/>
-          <p:cNvSpPr/>
-          <p:nvPr/>
-        </p:nvSpPr>
-        <p:spPr>
-          <a:xfrm>
-            <a:off x="6575908" y="2880360"/>
-            <a:ext cx="1756334" cy="2148840"/>
-          </a:xfrm>
-          <a:prstGeom prst="rect">
-            <a:avLst/>
-          </a:prstGeom>
-          <a:noFill/>
-          <a:ln/>
-        </p:spPr>
-        <p:txBody>
-          <a:bodyPr wrap="square" lIns="0" tIns="0" rIns="0" bIns="0" rtlCol="0" anchor="t"/>
-          <a:lstStyle/>
-          <a:p>
-            <a:pPr marL="0" indent="0">
-              <a:lnSpc>
-                <a:spcPts val="2600"/>
-              </a:lnSpc>
-              <a:buNone/>
-            </a:pPr>
-            <a:r>
-              <a:rPr lang="en-US" sz="1500" dirty="0">
-                <a:solidFill>
-                  <a:srgbClr val="FFFFFF"/>
-                </a:solidFill>
-                <a:latin typeface="Arial" pitchFamily="34" charset="0"/>
-                <a:ea typeface="Arial" pitchFamily="34" charset="-122"/>
-                <a:cs typeface="Arial" pitchFamily="34" charset="-120"/>
-              </a:rPr>
-              <a:t>Google y Stack Overflow</a:t>
-            </a:r>
-            <a:endParaRPr lang="en-US" sz="1500" dirty="0"/>
-          </a:p>
-          <a:p>
-            <a:pPr marL="0" indent="0">
-              <a:lnSpc>
-                <a:spcPts val="2600"/>
-              </a:lnSpc>
-              <a:buNone/>
-            </a:pPr>
-            <a:endParaRPr lang="en-US" sz="1500" dirty="0"/>
-          </a:p>
-          <a:p>
-            <a:pPr marL="0" indent="0">
-              <a:lnSpc>
-                <a:spcPts val="2600"/>
-              </a:lnSpc>
-              <a:buNone/>
-            </a:pPr>
-            <a:r>
-              <a:rPr lang="en-US" sz="1500" dirty="0">
-                <a:solidFill>
-                  <a:srgbClr val="FFFFFF"/>
-                </a:solidFill>
-                <a:latin typeface="Arial" pitchFamily="34" charset="0"/>
-                <a:ea typeface="Arial" pitchFamily="34" charset="-122"/>
-                <a:cs typeface="Arial" pitchFamily="34" charset="-120"/>
-              </a:rPr>
-              <a:t>Dejamos de memorizar. La habilidad pasó a ser encontrar la respuesta.</a:t>
-            </a:r>
-            <a:endParaRPr lang="en-US" sz="1500" dirty="0"/>
-          </a:p>
-        </p:txBody>
-      </p:sp>
-      <p:sp>
-        <p:nvSpPr>
-          <p:cNvPr id="17" name="Shape 13"/>
-          <p:cNvSpPr/>
-          <p:nvPr/>
-        </p:nvSpPr>
-        <p:spPr>
+            <a:ln w="12700">
+              <a:solidFill>
+                <a:srgbClr val="2C3852"/>
+              </a:solidFill>
+              <a:prstDash val="solid"/>
+            </a:ln>
+          </p:spPr>
+          <p:txBody>
+            <a:bodyPr/>
+            <a:lstStyle/>
+            <a:p>
+              <a:endParaRPr lang="en-CO"/>
+            </a:p>
+          </p:txBody>
+        </p:sp>
+        <p:sp>
+          <p:nvSpPr>
+            <p:cNvPr id="15" name="Text 11"/>
+            <p:cNvSpPr/>
+            <p:nvPr/>
+          </p:nvSpPr>
+          <p:spPr>
+            <a:xfrm>
+              <a:off x="6575908" y="2423160"/>
+              <a:ext cx="1756334" cy="320040"/>
+            </a:xfrm>
+            <a:prstGeom prst="rect">
+              <a:avLst/>
+            </a:prstGeom>
+            <a:noFill/>
+            <a:ln/>
+          </p:spPr>
+          <p:txBody>
+            <a:bodyPr wrap="square" lIns="0" tIns="0" rIns="0" bIns="0" rtlCol="0" anchor="ctr"/>
+            <a:lstStyle/>
+            <a:p>
+              <a:pPr marL="0" indent="0">
+                <a:buNone/>
+              </a:pPr>
+              <a:r>
+                <a:rPr lang="en-US" sz="1200" b="1" kern="0" spc="200" dirty="0">
+                  <a:solidFill>
+                    <a:srgbClr val="9257F1"/>
+                  </a:solidFill>
+                  <a:latin typeface="Arial" pitchFamily="34" charset="0"/>
+                  <a:ea typeface="Arial" pitchFamily="34" charset="-122"/>
+                  <a:cs typeface="Arial" pitchFamily="34" charset="-120"/>
+                </a:rPr>
+                <a:t>3</a:t>
+              </a:r>
+              <a:endParaRPr lang="en-US" sz="1200" dirty="0"/>
+            </a:p>
+          </p:txBody>
+        </p:sp>
+        <p:sp>
+          <p:nvSpPr>
+            <p:cNvPr id="16" name="Text 12"/>
+            <p:cNvSpPr/>
+            <p:nvPr/>
+          </p:nvSpPr>
+          <p:spPr>
+            <a:xfrm>
+              <a:off x="6575908" y="2880360"/>
+              <a:ext cx="1756334" cy="2148840"/>
+            </a:xfrm>
+            <a:prstGeom prst="rect">
+              <a:avLst/>
+            </a:prstGeom>
+            <a:noFill/>
+            <a:ln/>
+          </p:spPr>
+          <p:txBody>
+            <a:bodyPr wrap="square" lIns="0" tIns="0" rIns="0" bIns="0" rtlCol="0" anchor="t"/>
+            <a:lstStyle/>
+            <a:p>
+              <a:pPr marL="0" indent="0">
+                <a:lnSpc>
+                  <a:spcPts val="2600"/>
+                </a:lnSpc>
+                <a:buNone/>
+              </a:pPr>
+              <a:r>
+                <a:rPr lang="en-US" sz="1500" dirty="0">
+                  <a:solidFill>
+                    <a:srgbClr val="B34FFF"/>
+                  </a:solidFill>
+                  <a:latin typeface="Arial" pitchFamily="34" charset="0"/>
+                  <a:ea typeface="Arial" pitchFamily="34" charset="-122"/>
+                  <a:cs typeface="Arial" pitchFamily="34" charset="-120"/>
+                </a:rPr>
+                <a:t>Google y Stack Overflow</a:t>
+              </a:r>
+              <a:endParaRPr lang="en-US" sz="1500" dirty="0">
+                <a:solidFill>
+                  <a:srgbClr val="B34FFF"/>
+                </a:solidFill>
+              </a:endParaRPr>
+            </a:p>
+            <a:p>
+              <a:pPr marL="0" indent="0">
+                <a:lnSpc>
+                  <a:spcPts val="2600"/>
+                </a:lnSpc>
+                <a:buNone/>
+              </a:pPr>
+              <a:endParaRPr lang="en-US" sz="1500" dirty="0"/>
+            </a:p>
+            <a:p>
+              <a:pPr marL="0" indent="0">
+                <a:lnSpc>
+                  <a:spcPts val="2600"/>
+                </a:lnSpc>
+                <a:buNone/>
+              </a:pPr>
+              <a:r>
+                <a:rPr lang="en-US" sz="1500" dirty="0">
+                  <a:solidFill>
+                    <a:srgbClr val="FFFFFF"/>
+                  </a:solidFill>
+                  <a:latin typeface="Arial" pitchFamily="34" charset="0"/>
+                  <a:ea typeface="Arial" pitchFamily="34" charset="-122"/>
+                  <a:cs typeface="Arial" pitchFamily="34" charset="-120"/>
+                </a:rPr>
+                <a:t>Dejamos de memorizar. La habilidad pasó a ser encontrar la respuesta.</a:t>
+              </a:r>
+              <a:endParaRPr lang="en-US" sz="1500" dirty="0"/>
+            </a:p>
+          </p:txBody>
+        </p:sp>
+      </p:grpSp>
+      <p:grpSp>
+        <p:nvGrpSpPr>
+          <p:cNvPr id="23" name="Group 22">
+            <a:extLst>
+              <a:ext uri="{FF2B5EF4-FFF2-40B4-BE49-F238E27FC236}">
+                <a16:creationId xmlns:a16="http://schemas.microsoft.com/office/drawing/2014/main" id="{BE8C0F0D-461E-9493-8491-7AA0BC2448C0}"/>
+              </a:ext>
+            </a:extLst>
+          </p:cNvPr>
+          <p:cNvGrpSpPr/>
+          <p:nvPr/>
+        </p:nvGrpSpPr>
+        <p:grpSpPr>
           <a:xfrm>
             <a:off x="8972321" y="2103120"/>
             <a:ext cx="2396414" cy="3529584"/>
-          </a:xfrm>
-          <a:prstGeom prst="rect">
-            <a:avLst/>
-          </a:prstGeom>
-          <a:solidFill>
-            <a:srgbClr val="1E2739"/>
-          </a:solidFill>
-          <a:ln w="12700">
+            <a:chOff x="8972321" y="2103120"/>
+            <a:chExt cx="2396414" cy="3529584"/>
+          </a:xfrm>
+        </p:grpSpPr>
+        <p:sp>
+          <p:nvSpPr>
+            <p:cNvPr id="17" name="Shape 13"/>
+            <p:cNvSpPr/>
+            <p:nvPr/>
+          </p:nvSpPr>
+          <p:spPr>
+            <a:xfrm>
+              <a:off x="8972321" y="2103120"/>
+              <a:ext cx="2396414" cy="3529584"/>
+            </a:xfrm>
+            <a:prstGeom prst="rect">
+              <a:avLst/>
+            </a:prstGeom>
             <a:solidFill>
-              <a:srgbClr val="2C3852"/>
+              <a:srgbClr val="1E2739"/>
             </a:solidFill>
-            <a:prstDash val="solid"/>
-          </a:ln>
-        </p:spPr>
-        <p:txBody>
-          <a:bodyPr/>
-          <a:lstStyle/>
-          <a:p>
-            <a:endParaRPr lang="en-CO"/>
-          </a:p>
-        </p:txBody>
-      </p:sp>
-      <p:sp>
-        <p:nvSpPr>
-          <p:cNvPr id="18" name="Text 14"/>
-          <p:cNvSpPr/>
-          <p:nvPr/>
-        </p:nvSpPr>
-        <p:spPr>
-          <a:xfrm>
-            <a:off x="9292361" y="2423160"/>
-            <a:ext cx="1756334" cy="320040"/>
-          </a:xfrm>
-          <a:prstGeom prst="rect">
-            <a:avLst/>
-          </a:prstGeom>
-          <a:noFill/>
-          <a:ln/>
-        </p:spPr>
-        <p:txBody>
-          <a:bodyPr wrap="square" lIns="0" tIns="0" rIns="0" bIns="0" rtlCol="0" anchor="ctr"/>
-          <a:lstStyle/>
-          <a:p>
-            <a:pPr marL="0" indent="0">
-              <a:buNone/>
-            </a:pPr>
-            <a:r>
-              <a:rPr lang="en-US" sz="1200" b="1" kern="0" spc="200" dirty="0">
-                <a:solidFill>
-                  <a:srgbClr val="9257F1"/>
-                </a:solidFill>
-                <a:latin typeface="Arial" pitchFamily="34" charset="0"/>
-                <a:ea typeface="Arial" pitchFamily="34" charset="-122"/>
-                <a:cs typeface="Arial" pitchFamily="34" charset="-120"/>
-              </a:rPr>
-              <a:t>4</a:t>
-            </a:r>
-            <a:endParaRPr lang="en-US" sz="1200" dirty="0"/>
-          </a:p>
-        </p:txBody>
-      </p:sp>
-      <p:sp>
-        <p:nvSpPr>
-          <p:cNvPr id="19" name="Text 15"/>
-          <p:cNvSpPr/>
-          <p:nvPr/>
-        </p:nvSpPr>
-        <p:spPr>
-          <a:xfrm>
-            <a:off x="9292361" y="2880360"/>
-            <a:ext cx="1756334" cy="2148840"/>
-          </a:xfrm>
-          <a:prstGeom prst="rect">
-            <a:avLst/>
-          </a:prstGeom>
-          <a:noFill/>
-          <a:ln/>
-        </p:spPr>
-        <p:txBody>
-          <a:bodyPr wrap="square" lIns="0" tIns="0" rIns="0" bIns="0" rtlCol="0" anchor="t"/>
-          <a:lstStyle/>
-          <a:p>
-            <a:pPr marL="0" indent="0">
-              <a:lnSpc>
-                <a:spcPts val="2600"/>
-              </a:lnSpc>
-              <a:buNone/>
-            </a:pPr>
-            <a:r>
-              <a:rPr lang="en-US" sz="1500" dirty="0">
-                <a:solidFill>
-                  <a:srgbClr val="FFFFFF"/>
-                </a:solidFill>
-                <a:latin typeface="Arial" pitchFamily="34" charset="0"/>
-                <a:ea typeface="Arial" pitchFamily="34" charset="-122"/>
-                <a:cs typeface="Arial" pitchFamily="34" charset="-120"/>
-              </a:rPr>
-              <a:t>IA generativa</a:t>
-            </a:r>
-            <a:endParaRPr lang="en-US" sz="1500" dirty="0"/>
-          </a:p>
-          <a:p>
-            <a:pPr marL="0" indent="0">
-              <a:lnSpc>
-                <a:spcPts val="2600"/>
-              </a:lnSpc>
-              <a:buNone/>
-            </a:pPr>
-            <a:endParaRPr lang="en-US" sz="1500" dirty="0"/>
-          </a:p>
-          <a:p>
-            <a:pPr marL="0" indent="0">
-              <a:lnSpc>
-                <a:spcPts val="2600"/>
-              </a:lnSpc>
-              <a:buNone/>
-            </a:pPr>
-            <a:r>
-              <a:rPr lang="en-US" sz="1500" dirty="0">
-                <a:solidFill>
-                  <a:srgbClr val="FFFFFF"/>
-                </a:solidFill>
-                <a:latin typeface="Arial" pitchFamily="34" charset="0"/>
-                <a:ea typeface="Arial" pitchFamily="34" charset="-122"/>
-                <a:cs typeface="Arial" pitchFamily="34" charset="-120"/>
-              </a:rPr>
-              <a:t>Ya no buscamos la respuesta. Automatizamos la producción del código.</a:t>
-            </a:r>
-            <a:endParaRPr lang="en-US" sz="1500" dirty="0"/>
-          </a:p>
-        </p:txBody>
-      </p:sp>
+            <a:ln w="12700">
+              <a:solidFill>
+                <a:srgbClr val="2C3852"/>
+              </a:solidFill>
+              <a:prstDash val="solid"/>
+            </a:ln>
+          </p:spPr>
+          <p:txBody>
+            <a:bodyPr/>
+            <a:lstStyle/>
+            <a:p>
+              <a:endParaRPr lang="en-CO"/>
+            </a:p>
+          </p:txBody>
+        </p:sp>
+        <p:sp>
+          <p:nvSpPr>
+            <p:cNvPr id="18" name="Text 14"/>
+            <p:cNvSpPr/>
+            <p:nvPr/>
+          </p:nvSpPr>
+          <p:spPr>
+            <a:xfrm>
+              <a:off x="9292361" y="2423160"/>
+              <a:ext cx="1756334" cy="320040"/>
+            </a:xfrm>
+            <a:prstGeom prst="rect">
+              <a:avLst/>
+            </a:prstGeom>
+            <a:noFill/>
+            <a:ln/>
+          </p:spPr>
+          <p:txBody>
+            <a:bodyPr wrap="square" lIns="0" tIns="0" rIns="0" bIns="0" rtlCol="0" anchor="ctr"/>
+            <a:lstStyle/>
+            <a:p>
+              <a:pPr marL="0" indent="0">
+                <a:buNone/>
+              </a:pPr>
+              <a:r>
+                <a:rPr lang="en-US" sz="1200" b="1" kern="0" spc="200" dirty="0">
+                  <a:solidFill>
+                    <a:srgbClr val="9257F1"/>
+                  </a:solidFill>
+                  <a:latin typeface="Arial" pitchFamily="34" charset="0"/>
+                  <a:ea typeface="Arial" pitchFamily="34" charset="-122"/>
+                  <a:cs typeface="Arial" pitchFamily="34" charset="-120"/>
+                </a:rPr>
+                <a:t>4</a:t>
+              </a:r>
+              <a:endParaRPr lang="en-US" sz="1200" dirty="0"/>
+            </a:p>
+          </p:txBody>
+        </p:sp>
+        <p:sp>
+          <p:nvSpPr>
+            <p:cNvPr id="19" name="Text 15"/>
+            <p:cNvSpPr/>
+            <p:nvPr/>
+          </p:nvSpPr>
+          <p:spPr>
+            <a:xfrm>
+              <a:off x="9292361" y="2880360"/>
+              <a:ext cx="1756334" cy="2148840"/>
+            </a:xfrm>
+            <a:prstGeom prst="rect">
+              <a:avLst/>
+            </a:prstGeom>
+            <a:noFill/>
+            <a:ln/>
+          </p:spPr>
+          <p:txBody>
+            <a:bodyPr wrap="square" lIns="0" tIns="0" rIns="0" bIns="0" rtlCol="0" anchor="t"/>
+            <a:lstStyle/>
+            <a:p>
+              <a:pPr marL="0" indent="0">
+                <a:lnSpc>
+                  <a:spcPts val="2600"/>
+                </a:lnSpc>
+                <a:buNone/>
+              </a:pPr>
+              <a:r>
+                <a:rPr lang="en-US" sz="1500" dirty="0">
+                  <a:solidFill>
+                    <a:srgbClr val="B34FFF"/>
+                  </a:solidFill>
+                  <a:latin typeface="Arial" pitchFamily="34" charset="0"/>
+                  <a:ea typeface="Arial" pitchFamily="34" charset="-122"/>
+                  <a:cs typeface="Arial" pitchFamily="34" charset="-120"/>
+                </a:rPr>
+                <a:t>IA generativa</a:t>
+              </a:r>
+              <a:endParaRPr lang="en-US" sz="1500" dirty="0">
+                <a:solidFill>
+                  <a:srgbClr val="B34FFF"/>
+                </a:solidFill>
+              </a:endParaRPr>
+            </a:p>
+            <a:p>
+              <a:pPr marL="0" indent="0">
+                <a:lnSpc>
+                  <a:spcPts val="2600"/>
+                </a:lnSpc>
+                <a:buNone/>
+              </a:pPr>
+              <a:endParaRPr lang="en-US" sz="1500" dirty="0"/>
+            </a:p>
+            <a:p>
+              <a:pPr marL="0" indent="0">
+                <a:lnSpc>
+                  <a:spcPts val="2600"/>
+                </a:lnSpc>
+                <a:buNone/>
+              </a:pPr>
+              <a:r>
+                <a:rPr lang="en-US" sz="1500" dirty="0">
+                  <a:solidFill>
+                    <a:srgbClr val="FFFFFF"/>
+                  </a:solidFill>
+                  <a:latin typeface="Arial" pitchFamily="34" charset="0"/>
+                  <a:ea typeface="Arial" pitchFamily="34" charset="-122"/>
+                  <a:cs typeface="Arial" pitchFamily="34" charset="-120"/>
+                </a:rPr>
+                <a:t>Ya no buscamos la respuesta. Automatizamos la producción del código.</a:t>
+              </a:r>
+              <a:endParaRPr lang="en-US" sz="1500" dirty="0"/>
+            </a:p>
+          </p:txBody>
+        </p:sp>
+      </p:grpSp>
       <p:sp>
         <p:nvSpPr>
           <p:cNvPr id="20" name="Text 16"/>
@@ -6144,7 +6244,29 @@
                 <a:ea typeface="Arial" pitchFamily="34" charset="-122"/>
                 <a:cs typeface="Arial" pitchFamily="34" charset="-120"/>
               </a:rPr>
-              <a:t>no eliminó a los ingenieros</a:t>
+              <a:t>no eliminó a </a:t>
+            </a:r>
+            <a:r>
+              <a:rPr lang="en-US" sz="2400" dirty="0" err="1">
+                <a:solidFill>
+                  <a:srgbClr val="8A93A8"/>
+                </a:solidFill>
+                <a:latin typeface="Arial" pitchFamily="34" charset="0"/>
+                <a:ea typeface="Arial" pitchFamily="34" charset="-122"/>
+                <a:cs typeface="Arial" pitchFamily="34" charset="-120"/>
+              </a:rPr>
+              <a:t>los</a:t>
+            </a:r>
+            <a:r>
+              <a:rPr lang="en-US" sz="2400" dirty="0">
+                <a:solidFill>
+                  <a:srgbClr val="8A93A8"/>
+                </a:solidFill>
+                <a:latin typeface="Arial" pitchFamily="34" charset="0"/>
+                <a:ea typeface="Arial" pitchFamily="34" charset="-122"/>
+                <a:cs typeface="Arial" pitchFamily="34" charset="-120"/>
+              </a:rPr>
+              <a:t> Ingenieros de infra</a:t>
             </a:r>
             <a:endParaRPr lang="en-US" sz="2400" dirty="0"/>
           </a:p>
@@ -7276,7 +7398,7 @@
               <a:buNone/>
             </a:pPr>
             <a:r>
-              <a:rPr lang="en-US" sz="2600" dirty="0">
+              <a:rPr lang="en-US" sz="2600" strike="sngStrike" dirty="0">
                 <a:solidFill>
                   <a:srgbClr val="48536B"/>
                 </a:solidFill>
@@ -7286,7 +7408,7 @@
               </a:rPr>
               <a:t>Problema  →  desarrollador  →  código</a:t>
             </a:r>
-            <a:endParaRPr lang="en-US" sz="2600" dirty="0"/>
+            <a:endParaRPr lang="en-US" sz="2600" strike="sngStrike" dirty="0"/>
           </a:p>
         </p:txBody>
       </p:sp>
@@ -8266,7 +8388,7 @@
               <a:buNone/>
             </a:pPr>
             <a:r>
-              <a:rPr lang="en-US" sz="2200" dirty="0">
+              <a:rPr lang="en-US" sz="2200" strike="sngStrike" dirty="0">
                 <a:solidFill>
                   <a:srgbClr val="48536B"/>
                 </a:solidFill>
@@ -8276,7 +8398,7 @@
               </a:rPr>
               <a:t>“Escribe esta función.”</a:t>
             </a:r>
-            <a:endParaRPr lang="en-US" sz="2200" dirty="0"/>
+            <a:endParaRPr lang="en-US" sz="2200" strike="sngStrike" dirty="0"/>
           </a:p>
         </p:txBody>
       </p:sp>
@@ -8565,6 +8687,17 @@
               <a:buChar char="•"/>
             </a:pPr>
             <a:r>
+              <a:rPr lang="en-US" sz="1600" dirty="0" err="1">
+                <a:solidFill>
+                  <a:srgbClr val="FFFFFF"/>
+                </a:solidFill>
+                <a:latin typeface="Arial" pitchFamily="34" charset="0"/>
+                <a:ea typeface="Arial" pitchFamily="34" charset="-122"/>
+                <a:cs typeface="Arial" pitchFamily="34" charset="-120"/>
+              </a:rPr>
+              <a:t>Ingeniero</a:t>
+            </a:r>
+            <a:r>
               <a:rPr lang="en-US" sz="1600" dirty="0">
                 <a:solidFill>
                   <a:srgbClr val="FFFFFF"/>
@@ -8573,29 +8706,7 @@
                 <a:ea typeface="Arial" pitchFamily="34" charset="-122"/>
                 <a:cs typeface="Arial" pitchFamily="34" charset="-120"/>
               </a:rPr>
-              <a:t>CEO y </a:t>
-            </a:r>
-            <a:r>
-              <a:rPr lang="en-US" sz="1600" dirty="0" err="1">
-                <a:solidFill>
-                  <a:srgbClr val="FFFFFF"/>
-                </a:solidFill>
-                <a:latin typeface="Arial" pitchFamily="34" charset="0"/>
-                <a:ea typeface="Arial" pitchFamily="34" charset="-122"/>
-                <a:cs typeface="Arial" pitchFamily="34" charset="-120"/>
-              </a:rPr>
-              <a:t>Fundador</a:t>
-            </a:r>
-            <a:r>
-              <a:rPr lang="en-US" sz="1600" dirty="0">
-                <a:solidFill>
-                  <a:srgbClr val="FFFFFF"/>
-                </a:solidFill>
-                <a:latin typeface="Arial" pitchFamily="34" charset="0"/>
-                <a:ea typeface="Arial" pitchFamily="34" charset="-122"/>
-                <a:cs typeface="Arial" pitchFamily="34" charset="-120"/>
-              </a:rPr>
-              <a:t> de GLD Consulting</a:t>
+              <a:t> de sistemas de la UFPS</a:t>
             </a:r>
             <a:endParaRPr lang="en-US" sz="1600" dirty="0"/>
           </a:p>
@@ -8608,6 +8719,17 @@
               <a:buChar char="•"/>
             </a:pPr>
             <a:r>
+              <a:rPr lang="en-US" sz="1600" dirty="0" err="1">
+                <a:solidFill>
+                  <a:srgbClr val="FFFFFF"/>
+                </a:solidFill>
+                <a:latin typeface="Arial" pitchFamily="34" charset="0"/>
+                <a:ea typeface="Arial" pitchFamily="34" charset="-122"/>
+                <a:cs typeface="Arial" pitchFamily="34" charset="-120"/>
+              </a:rPr>
+              <a:t>Máster</a:t>
+            </a:r>
+            <a:r>
               <a:rPr lang="en-US" sz="1600" dirty="0">
                 <a:solidFill>
                   <a:srgbClr val="FFFFFF"/>
@@ -8616,7 +8738,73 @@
                 <a:ea typeface="Arial" pitchFamily="34" charset="-122"/>
                 <a:cs typeface="Arial" pitchFamily="34" charset="-120"/>
               </a:rPr>
-              <a:t>Ingeniero de sistemas de la UFPS</a:t>
+              <a:t> en Inteligencia Artificial en el Instituto Europeo de </a:t>
+            </a:r>
+            <a:r>
+              <a:rPr lang="en-US" sz="1600" dirty="0" err="1">
+                <a:solidFill>
+                  <a:srgbClr val="FFFFFF"/>
+                </a:solidFill>
+                <a:latin typeface="Arial" pitchFamily="34" charset="0"/>
+                <a:ea typeface="Arial" pitchFamily="34" charset="-122"/>
+                <a:cs typeface="Arial" pitchFamily="34" charset="-120"/>
+              </a:rPr>
+              <a:t>Postgrado</a:t>
+            </a:r>
+            <a:r>
+              <a:rPr lang="en-US" sz="1600" dirty="0">
+                <a:solidFill>
+                  <a:srgbClr val="FFFFFF"/>
+                </a:solidFill>
+                <a:latin typeface="Arial" pitchFamily="34" charset="0"/>
+                <a:ea typeface="Arial" pitchFamily="34" charset="-122"/>
+                <a:cs typeface="Arial" pitchFamily="34" charset="-120"/>
+              </a:rPr>
+              <a:t> (</a:t>
+            </a:r>
+            <a:r>
+              <a:rPr lang="en-US" sz="1600" dirty="0" err="1">
+                <a:solidFill>
+                  <a:srgbClr val="FFFFFF"/>
+                </a:solidFill>
+                <a:latin typeface="Arial" pitchFamily="34" charset="0"/>
+                <a:ea typeface="Arial" pitchFamily="34" charset="-122"/>
+                <a:cs typeface="Arial" pitchFamily="34" charset="-120"/>
+              </a:rPr>
+              <a:t>en</a:t>
+            </a:r>
+            <a:r>
+              <a:rPr lang="en-US" sz="1600" dirty="0">
+                <a:solidFill>
+                  <a:srgbClr val="FFFFFF"/>
+                </a:solidFill>
+                <a:latin typeface="Arial" pitchFamily="34" charset="0"/>
+                <a:ea typeface="Arial" pitchFamily="34" charset="-122"/>
+                <a:cs typeface="Arial" pitchFamily="34" charset="-120"/>
+              </a:rPr>
+              <a:t> </a:t>
+            </a:r>
+            <a:r>
+              <a:rPr lang="en-US" sz="1600" dirty="0" err="1">
+                <a:solidFill>
+                  <a:srgbClr val="FFFFFF"/>
+                </a:solidFill>
+                <a:latin typeface="Arial" pitchFamily="34" charset="0"/>
+                <a:ea typeface="Arial" pitchFamily="34" charset="-122"/>
+                <a:cs typeface="Arial" pitchFamily="34" charset="-120"/>
+              </a:rPr>
+              <a:t>curso</a:t>
+            </a:r>
+            <a:r>
+              <a:rPr lang="en-US" sz="1600" dirty="0">
+                <a:solidFill>
+                  <a:srgbClr val="FFFFFF"/>
+                </a:solidFill>
+                <a:latin typeface="Arial" pitchFamily="34" charset="0"/>
+                <a:ea typeface="Arial" pitchFamily="34" charset="-122"/>
+                <a:cs typeface="Arial" pitchFamily="34" charset="-120"/>
+              </a:rPr>
+              <a:t>)</a:t>
             </a:r>
             <a:endParaRPr lang="en-US" sz="1600" dirty="0"/>
           </a:p>
@@ -8629,7 +8817,7 @@
               <a:buChar char="•"/>
             </a:pPr>
             <a:r>
-              <a:rPr lang="en-US" sz="1600" dirty="0" err="1">
+              <a:rPr lang="en-US" sz="1600" dirty="0">
                 <a:solidFill>
                   <a:srgbClr val="FFFFFF"/>
                 </a:solidFill>
@@ -8637,86 +8825,8 @@
                 <a:ea typeface="Arial" pitchFamily="34" charset="-122"/>
                 <a:cs typeface="Arial" pitchFamily="34" charset="-120"/>
               </a:rPr>
-              <a:t>Máster</a:t>
-            </a:r>
-            <a:r>
-              <a:rPr lang="en-US" sz="1600" dirty="0">
-                <a:solidFill>
-                  <a:srgbClr val="FFFFFF"/>
-                </a:solidFill>
-                <a:latin typeface="Arial" pitchFamily="34" charset="0"/>
-                <a:ea typeface="Arial" pitchFamily="34" charset="-122"/>
-                <a:cs typeface="Arial" pitchFamily="34" charset="-120"/>
-              </a:rPr>
-              <a:t> en Inteligencia Artificial en el Instituto Europeo de </a:t>
-            </a:r>
-            <a:r>
-              <a:rPr lang="en-US" sz="1600" dirty="0" err="1">
-                <a:solidFill>
-                  <a:srgbClr val="FFFFFF"/>
-                </a:solidFill>
-                <a:latin typeface="Arial" pitchFamily="34" charset="0"/>
-                <a:ea typeface="Arial" pitchFamily="34" charset="-122"/>
-                <a:cs typeface="Arial" pitchFamily="34" charset="-120"/>
-              </a:rPr>
-              <a:t>Postgrado</a:t>
-            </a:r>
-            <a:r>
-              <a:rPr lang="en-US" sz="1600" dirty="0">
-                <a:solidFill>
-                  <a:srgbClr val="FFFFFF"/>
-                </a:solidFill>
-                <a:latin typeface="Arial" pitchFamily="34" charset="0"/>
-                <a:ea typeface="Arial" pitchFamily="34" charset="-122"/>
-                <a:cs typeface="Arial" pitchFamily="34" charset="-120"/>
-              </a:rPr>
-              <a:t> (</a:t>
-            </a:r>
-            <a:r>
-              <a:rPr lang="en-US" sz="1600" dirty="0" err="1">
-                <a:solidFill>
-                  <a:srgbClr val="FFFFFF"/>
-                </a:solidFill>
-                <a:latin typeface="Arial" pitchFamily="34" charset="0"/>
-                <a:ea typeface="Arial" pitchFamily="34" charset="-122"/>
-                <a:cs typeface="Arial" pitchFamily="34" charset="-120"/>
-              </a:rPr>
-              <a:t>en</a:t>
-            </a:r>
-            <a:r>
-              <a:rPr lang="en-US" sz="1600" dirty="0">
-                <a:solidFill>
-                  <a:srgbClr val="FFFFFF"/>
-                </a:solidFill>
-                <a:latin typeface="Arial" pitchFamily="34" charset="0"/>
-                <a:ea typeface="Arial" pitchFamily="34" charset="-122"/>
-                <a:cs typeface="Arial" pitchFamily="34" charset="-120"/>
-              </a:rPr>
-              <a:t> </a:t>
-            </a:r>
-            <a:r>
-              <a:rPr lang="en-US" sz="1600" dirty="0" err="1">
-                <a:solidFill>
-                  <a:srgbClr val="FFFFFF"/>
-                </a:solidFill>
-                <a:latin typeface="Arial" pitchFamily="34" charset="0"/>
-                <a:ea typeface="Arial" pitchFamily="34" charset="-122"/>
-                <a:cs typeface="Arial" pitchFamily="34" charset="-120"/>
-              </a:rPr>
-              <a:t>curso</a:t>
-            </a:r>
-            <a:r>
-              <a:rPr lang="en-US" sz="1600" dirty="0">
-                <a:solidFill>
-                  <a:srgbClr val="FFFFFF"/>
-                </a:solidFill>
-                <a:latin typeface="Arial" pitchFamily="34" charset="0"/>
-                <a:ea typeface="Arial" pitchFamily="34" charset="-122"/>
-                <a:cs typeface="Arial" pitchFamily="34" charset="-120"/>
-              </a:rPr>
-              <a:t>)</a:t>
-            </a:r>
-            <a:endParaRPr lang="en-US" sz="1600" dirty="0"/>
+              <a:t>17 años de experiencia en IT y Desarrollo de Software</a:t>
+            </a:r>
           </a:p>
           <a:p>
             <a:pPr marL="342900" indent="-342900">
@@ -8724,6 +8834,7 @@
                 <a:spcPts val="900"/>
               </a:spcAft>
               <a:buSzPct val="100000"/>
+              <a:buFontTx/>
               <a:buChar char="•"/>
             </a:pPr>
             <a:r>
@@ -8735,7 +8846,29 @@
                 <a:ea typeface="Arial" pitchFamily="34" charset="-122"/>
                 <a:cs typeface="Arial" pitchFamily="34" charset="-120"/>
               </a:rPr>
-              <a:t>17 años de experiencia en IT y desarrollo de software</a:t>
+              <a:t>CEO y </a:t>
+            </a:r>
+            <a:r>
+              <a:rPr lang="en-US" sz="1600" dirty="0" err="1">
+                <a:solidFill>
+                  <a:srgbClr val="FFFFFF"/>
+                </a:solidFill>
+                <a:latin typeface="Arial" pitchFamily="34" charset="0"/>
+                <a:ea typeface="Arial" pitchFamily="34" charset="-122"/>
+                <a:cs typeface="Arial" pitchFamily="34" charset="-120"/>
+              </a:rPr>
+              <a:t>Fundador</a:t>
+            </a:r>
+            <a:r>
+              <a:rPr lang="en-US" sz="1600" dirty="0">
+                <a:solidFill>
+                  <a:srgbClr val="FFFFFF"/>
+                </a:solidFill>
+                <a:latin typeface="Arial" pitchFamily="34" charset="0"/>
+                <a:ea typeface="Arial" pitchFamily="34" charset="-122"/>
+                <a:cs typeface="Arial" pitchFamily="34" charset="-120"/>
+              </a:rPr>
+              <a:t> de GLD Consulting</a:t>
             </a:r>
             <a:endParaRPr lang="en-US" sz="1600" dirty="0"/>
           </a:p>
@@ -9130,7 +9263,7 @@
               <a:buNone/>
             </a:pPr>
             <a:r>
-              <a:rPr lang="en-US" sz="2800" dirty="0">
+              <a:rPr lang="en-US" sz="2800" strike="sngStrike" dirty="0">
                 <a:solidFill>
                   <a:srgbClr val="48536B"/>
                 </a:solidFill>
@@ -9140,7 +9273,7 @@
               </a:rPr>
               <a:t>“Sé programar en X.”</a:t>
             </a:r>
-            <a:endParaRPr lang="en-US" sz="2800" dirty="0"/>
+            <a:endParaRPr lang="en-US" sz="2800" strike="sngStrike" dirty="0"/>
           </a:p>
         </p:txBody>
       </p:sp>
@@ -11059,6 +11192,268 @@
   <p:clrMapOvr>
     <a:masterClrMapping/>
   </p:clrMapOvr>
+  <p:timing>
+    <p:tnLst>
+      <p:par>
+        <p:cTn id="1" dur="indefinite" restart="never" nodeType="tmRoot">
+          <p:childTnLst>
+            <p:seq concurrent="1" nextAc="seek">
+              <p:cTn id="2" dur="indefinite" nodeType="mainSeq">
+                <p:childTnLst>
+                  <p:par>
+                    <p:cTn id="3" fill="hold">
+                      <p:stCondLst>
+                        <p:cond delay="indefinite"/>
+                      </p:stCondLst>
+                      <p:childTnLst>
+                        <p:par>
+                          <p:cTn id="4" fill="hold">
+                            <p:stCondLst>
+                              <p:cond delay="0"/>
+                            </p:stCondLst>
+                            <p:childTnLst>
+                              <p:par>
+                                <p:cTn id="5" presetID="1" presetClass="entr" presetSubtype="0" fill="hold" grpId="0" nodeType="clickEffect">
+                                  <p:stCondLst>
+                                    <p:cond delay="0"/>
+                                  </p:stCondLst>
+                                  <p:childTnLst>
+                                    <p:set>
+                                      <p:cBhvr>
+                                        <p:cTn id="6" dur="1" fill="hold">
+                                          <p:stCondLst>
+                                            <p:cond delay="0"/>
+                                          </p:stCondLst>
+                                        </p:cTn>
+                                        <p:tgtEl>
+                                          <p:spTgt spid="8"/>
+                                        </p:tgtEl>
+                                        <p:attrNameLst>
+                                          <p:attrName>style.visibility</p:attrName>
+                                        </p:attrNameLst>
+                                      </p:cBhvr>
+                                      <p:to>
+                                        <p:strVal val="visible"/>
+                                      </p:to>
+                                    </p:set>
+                                  </p:childTnLst>
+                                </p:cTn>
+                              </p:par>
+                            </p:childTnLst>
+                          </p:cTn>
+                        </p:par>
+                      </p:childTnLst>
+                    </p:cTn>
+                  </p:par>
+                  <p:par>
+                    <p:cTn id="7" fill="hold">
+                      <p:stCondLst>
+                        <p:cond delay="indefinite"/>
+                      </p:stCondLst>
+                      <p:childTnLst>
+                        <p:par>
+                          <p:cTn id="8" fill="hold">
+                            <p:stCondLst>
+                              <p:cond delay="0"/>
+                            </p:stCondLst>
+                            <p:childTnLst>
+                              <p:par>
+                                <p:cTn id="9" presetID="1" presetClass="entr" presetSubtype="0" fill="hold" grpId="0" nodeType="clickEffect">
+                                  <p:stCondLst>
+                                    <p:cond delay="0"/>
+                                  </p:stCondLst>
+                                  <p:childTnLst>
+                                    <p:set>
+                                      <p:cBhvr>
+                                        <p:cTn id="10" dur="1" fill="hold">
+                                          <p:stCondLst>
+                                            <p:cond delay="0"/>
+                                          </p:stCondLst>
+                                        </p:cTn>
+                                        <p:tgtEl>
+                                          <p:spTgt spid="10"/>
+                                        </p:tgtEl>
+                                        <p:attrNameLst>
+                                          <p:attrName>style.visibility</p:attrName>
+                                        </p:attrNameLst>
+                                      </p:cBhvr>
+                                      <p:to>
+                                        <p:strVal val="visible"/>
+                                      </p:to>
+                                    </p:set>
+                                  </p:childTnLst>
+                                </p:cTn>
+                              </p:par>
+                            </p:childTnLst>
+                          </p:cTn>
+                        </p:par>
+                      </p:childTnLst>
+                    </p:cTn>
+                  </p:par>
+                  <p:par>
+                    <p:cTn id="11" fill="hold">
+                      <p:stCondLst>
+                        <p:cond delay="indefinite"/>
+                      </p:stCondLst>
+                      <p:childTnLst>
+                        <p:par>
+                          <p:cTn id="12" fill="hold">
+                            <p:stCondLst>
+                              <p:cond delay="0"/>
+                            </p:stCondLst>
+                            <p:childTnLst>
+                              <p:par>
+                                <p:cTn id="13" presetID="1" presetClass="entr" presetSubtype="0" fill="hold" grpId="0" nodeType="clickEffect">
+                                  <p:stCondLst>
+                                    <p:cond delay="0"/>
+                                  </p:stCondLst>
+                                  <p:childTnLst>
+                                    <p:set>
+                                      <p:cBhvr>
+                                        <p:cTn id="14" dur="1" fill="hold">
+                                          <p:stCondLst>
+                                            <p:cond delay="0"/>
+                                          </p:stCondLst>
+                                        </p:cTn>
+                                        <p:tgtEl>
+                                          <p:spTgt spid="12"/>
+                                        </p:tgtEl>
+                                        <p:attrNameLst>
+                                          <p:attrName>style.visibility</p:attrName>
+                                        </p:attrNameLst>
+                                      </p:cBhvr>
+                                      <p:to>
+                                        <p:strVal val="visible"/>
+                                      </p:to>
+                                    </p:set>
+                                  </p:childTnLst>
+                                </p:cTn>
+                              </p:par>
+                            </p:childTnLst>
+                          </p:cTn>
+                        </p:par>
+                      </p:childTnLst>
+                    </p:cTn>
+                  </p:par>
+                  <p:par>
+                    <p:cTn id="15" fill="hold">
+                      <p:stCondLst>
+                        <p:cond delay="indefinite"/>
+                      </p:stCondLst>
+                      <p:childTnLst>
+                        <p:par>
+                          <p:cTn id="16" fill="hold">
+                            <p:stCondLst>
+                              <p:cond delay="0"/>
+                            </p:stCondLst>
+                            <p:childTnLst>
+                              <p:par>
+                                <p:cTn id="17" presetID="1" presetClass="entr" presetSubtype="0" fill="hold" grpId="0" nodeType="clickEffect">
+                                  <p:stCondLst>
+                                    <p:cond delay="0"/>
+                                  </p:stCondLst>
+                                  <p:childTnLst>
+                                    <p:set>
+                                      <p:cBhvr>
+                                        <p:cTn id="18" dur="1" fill="hold">
+                                          <p:stCondLst>
+                                            <p:cond delay="0"/>
+                                          </p:stCondLst>
+                                        </p:cTn>
+                                        <p:tgtEl>
+                                          <p:spTgt spid="14"/>
+                                        </p:tgtEl>
+                                        <p:attrNameLst>
+                                          <p:attrName>style.visibility</p:attrName>
+                                        </p:attrNameLst>
+                                      </p:cBhvr>
+                                      <p:to>
+                                        <p:strVal val="visible"/>
+                                      </p:to>
+                                    </p:set>
+                                  </p:childTnLst>
+                                </p:cTn>
+                              </p:par>
+                            </p:childTnLst>
+                          </p:cTn>
+                        </p:par>
+                      </p:childTnLst>
+                    </p:cTn>
+                  </p:par>
+                  <p:par>
+                    <p:cTn id="19" fill="hold">
+                      <p:stCondLst>
+                        <p:cond delay="indefinite"/>
+                      </p:stCondLst>
+                      <p:childTnLst>
+                        <p:par>
+                          <p:cTn id="20" fill="hold">
+                            <p:stCondLst>
+                              <p:cond delay="0"/>
+                            </p:stCondLst>
+                            <p:childTnLst>
+                              <p:par>
+                                <p:cTn id="21" presetID="1" presetClass="entr" presetSubtype="0" fill="hold" grpId="0" nodeType="clickEffect">
+                                  <p:stCondLst>
+                                    <p:cond delay="0"/>
+                                  </p:stCondLst>
+                                  <p:childTnLst>
+                                    <p:set>
+                                      <p:cBhvr>
+                                        <p:cTn id="22" dur="1" fill="hold">
+                                          <p:stCondLst>
+                                            <p:cond delay="0"/>
+                                          </p:stCondLst>
+                                        </p:cTn>
+                                        <p:tgtEl>
+                                          <p:spTgt spid="16"/>
+                                        </p:tgtEl>
+                                        <p:attrNameLst>
+                                          <p:attrName>style.visibility</p:attrName>
+                                        </p:attrNameLst>
+                                      </p:cBhvr>
+                                      <p:to>
+                                        <p:strVal val="visible"/>
+                                      </p:to>
+                                    </p:set>
+                                  </p:childTnLst>
+                                </p:cTn>
+                              </p:par>
+                            </p:childTnLst>
+                          </p:cTn>
+                        </p:par>
+                      </p:childTnLst>
+                    </p:cTn>
+                  </p:par>
+                </p:childTnLst>
+              </p:cTn>
+              <p:prevCondLst>
+                <p:cond evt="onPrev" delay="0">
+                  <p:tgtEl>
+                    <p:sldTgt/>
+                  </p:tgtEl>
+                </p:cond>
+              </p:prevCondLst>
+              <p:nextCondLst>
+                <p:cond evt="onNext" delay="0">
+                  <p:tgtEl>
+                    <p:sldTgt/>
+                  </p:tgtEl>
+                </p:cond>
+              </p:nextCondLst>
+            </p:seq>
+          </p:childTnLst>
+        </p:cTn>
+      </p:par>
+    </p:tnLst>
+    <p:bldLst>
+      <p:bldP spid="8" grpId="0" animBg="1"/>
+      <p:bldP spid="10" grpId="0" animBg="1"/>
+      <p:bldP spid="12" grpId="0" animBg="1"/>
+      <p:bldP spid="14" grpId="0" animBg="1"/>
+      <p:bldP spid="16" grpId="0" animBg="1"/>
+    </p:bldLst>
+  </p:timing>
 </p:sld>
 </file>
 
@@ -17173,6 +17568,268 @@
 
 <file path=ppt/slides/slide37.xml><?xml version="1.0" encoding="utf-8"?>
 <p:sld xmlns:a="http://schemas.openxmlformats.org/drawingml/2006/main" xmlns:r="http://schemas.openxmlformats.org/officeDocument/2006/relationships" xmlns:p="http://schemas.openxmlformats.org/presentationml/2006/main">
+  <p:cSld name="Slide 38">
+    <p:bg>
+      <p:bgPr>
+        <a:solidFill>
+          <a:srgbClr val="161D2D"/>
+        </a:solidFill>
+        <a:effectLst/>
+      </p:bgPr>
+    </p:bg>
+    <p:spTree>
+      <p:nvGrpSpPr>
+        <p:cNvPr id="1" name=""/>
+        <p:cNvGrpSpPr/>
+        <p:nvPr/>
+      </p:nvGrpSpPr>
+      <p:grpSpPr>
+        <a:xfrm>
+          <a:off x="0" y="0"/>
+          <a:ext cx="0" cy="0"/>
+          <a:chOff x="0" y="0"/>
+          <a:chExt cx="0" cy="0"/>
+        </a:xfrm>
+      </p:grpSpPr>
+      <p:sp>
+        <p:nvSpPr>
+          <p:cNvPr id="3" name="Text 0"/>
+          <p:cNvSpPr/>
+          <p:nvPr/>
+        </p:nvSpPr>
+        <p:spPr>
+          <a:xfrm>
+            <a:off x="548640" y="6291072"/>
+            <a:ext cx="3657600" cy="274320"/>
+          </a:xfrm>
+          <a:prstGeom prst="rect">
+            <a:avLst/>
+          </a:prstGeom>
+          <a:noFill/>
+          <a:ln/>
+        </p:spPr>
+        <p:txBody>
+          <a:bodyPr wrap="square" lIns="0" tIns="0" rIns="0" bIns="0" rtlCol="0" anchor="ctr"/>
+          <a:lstStyle/>
+          <a:p>
+            <a:pPr marL="0" indent="0" algn="l">
+              <a:buNone/>
+            </a:pPr>
+            <a:r>
+              <a:rPr lang="en-US" sz="1000" dirty="0">
+                <a:solidFill>
+                  <a:srgbClr val="48536B"/>
+                </a:solidFill>
+                <a:latin typeface="Arial" pitchFamily="34" charset="0"/>
+                <a:ea typeface="Arial" pitchFamily="34" charset="-122"/>
+                <a:cs typeface="Arial" pitchFamily="34" charset="-120"/>
+              </a:rPr>
+              <a:t>6.4  ·  38:48–39:58</a:t>
+            </a:r>
+            <a:endParaRPr lang="en-US" sz="1000" dirty="0"/>
+          </a:p>
+        </p:txBody>
+      </p:sp>
+      <p:sp>
+        <p:nvSpPr>
+          <p:cNvPr id="4" name="Text 1"/>
+          <p:cNvSpPr/>
+          <p:nvPr/>
+        </p:nvSpPr>
+        <p:spPr>
+          <a:xfrm>
+            <a:off x="10042855" y="6291072"/>
+            <a:ext cx="914400" cy="274320"/>
+          </a:xfrm>
+          <a:prstGeom prst="rect">
+            <a:avLst/>
+          </a:prstGeom>
+          <a:noFill/>
+          <a:ln/>
+        </p:spPr>
+        <p:txBody>
+          <a:bodyPr wrap="square" lIns="0" tIns="0" rIns="0" bIns="0" rtlCol="0" anchor="ctr"/>
+          <a:lstStyle/>
+          <a:p>
+            <a:pPr marL="0" indent="0" algn="r">
+              <a:buNone/>
+            </a:pPr>
+            <a:r>
+              <a:rPr lang="en-US" sz="1000" dirty="0">
+                <a:solidFill>
+                  <a:srgbClr val="48536B"/>
+                </a:solidFill>
+                <a:latin typeface="Arial" pitchFamily="34" charset="0"/>
+                <a:ea typeface="Arial" pitchFamily="34" charset="-122"/>
+                <a:cs typeface="Arial" pitchFamily="34" charset="-120"/>
+              </a:rPr>
+              <a:t>38/38</a:t>
+            </a:r>
+            <a:endParaRPr lang="en-US" sz="1000" dirty="0"/>
+          </a:p>
+        </p:txBody>
+      </p:sp>
+      <p:pic>
+        <p:nvPicPr>
+          <p:cNvPr id="5" name="Image 0" descr="/sessions/awesome-wizardly-sagan/mnt/charla-ia-aws-ug-cucuta/multimedia/aws_ug_cucuta_logo.jpeg"/>
+          <p:cNvPicPr>
+            <a:picLocks noChangeAspect="1"/>
+          </p:cNvPicPr>
+          <p:nvPr/>
+        </p:nvPicPr>
+        <p:blipFill>
+          <a:blip r:embed="rId3">
+            <a:alphaModFix amt="75000"/>
+          </a:blip>
+          <a:stretch>
+            <a:fillRect/>
+          </a:stretch>
+        </p:blipFill>
+        <p:spPr>
+          <a:xfrm>
+            <a:off x="11231575" y="6071616"/>
+            <a:ext cx="457200" cy="457200"/>
+          </a:xfrm>
+          <a:prstGeom prst="rect">
+            <a:avLst/>
+          </a:prstGeom>
+        </p:spPr>
+      </p:pic>
+      <p:sp>
+        <p:nvSpPr>
+          <p:cNvPr id="6" name="Text 2"/>
+          <p:cNvSpPr/>
+          <p:nvPr/>
+        </p:nvSpPr>
+        <p:spPr>
+          <a:xfrm>
+            <a:off x="914400" y="1920240"/>
+            <a:ext cx="10362895" cy="2011680"/>
+          </a:xfrm>
+          <a:prstGeom prst="rect">
+            <a:avLst/>
+          </a:prstGeom>
+          <a:noFill/>
+          <a:ln/>
+        </p:spPr>
+        <p:txBody>
+          <a:bodyPr wrap="square" lIns="0" tIns="0" rIns="0" bIns="0" rtlCol="0" anchor="ctr"/>
+          <a:lstStyle/>
+          <a:p>
+            <a:pPr marL="0" indent="0" algn="ctr">
+              <a:lnSpc>
+                <a:spcPts val="5400"/>
+              </a:lnSpc>
+              <a:buNone/>
+            </a:pPr>
+            <a:r>
+              <a:rPr lang="en-US" sz="4000" b="1" dirty="0">
+                <a:solidFill>
+                  <a:srgbClr val="FFFFFF"/>
+                </a:solidFill>
+                <a:latin typeface="Arial" pitchFamily="34" charset="0"/>
+                <a:ea typeface="Arial" pitchFamily="34" charset="-122"/>
+                <a:cs typeface="Arial" pitchFamily="34" charset="-120"/>
+              </a:rPr>
+              <a:t>Don't compete with AI at writing code.</a:t>
+            </a:r>
+            <a:endParaRPr lang="en-US" sz="4000" dirty="0"/>
+          </a:p>
+          <a:p>
+            <a:pPr marL="0" indent="0" algn="ctr">
+              <a:lnSpc>
+                <a:spcPts val="5400"/>
+              </a:lnSpc>
+              <a:buNone/>
+            </a:pPr>
+            <a:r>
+              <a:rPr lang="en-US" sz="4000" b="1" dirty="0">
+                <a:solidFill>
+                  <a:srgbClr val="9257F1"/>
+                </a:solidFill>
+                <a:latin typeface="Arial" pitchFamily="34" charset="0"/>
+                <a:ea typeface="Arial" pitchFamily="34" charset="-122"/>
+                <a:cs typeface="Arial" pitchFamily="34" charset="-120"/>
+              </a:rPr>
+              <a:t>Learn to build what matters.</a:t>
+            </a:r>
+            <a:endParaRPr lang="en-US" sz="4000" dirty="0"/>
+          </a:p>
+        </p:txBody>
+      </p:sp>
+      <p:sp>
+        <p:nvSpPr>
+          <p:cNvPr id="7" name="Text 3"/>
+          <p:cNvSpPr/>
+          <p:nvPr/>
+        </p:nvSpPr>
+        <p:spPr>
+          <a:xfrm>
+            <a:off x="914400" y="4206240"/>
+            <a:ext cx="10362895" cy="548640"/>
+          </a:xfrm>
+          <a:prstGeom prst="rect">
+            <a:avLst/>
+          </a:prstGeom>
+          <a:noFill/>
+          <a:ln/>
+        </p:spPr>
+        <p:txBody>
+          <a:bodyPr wrap="square" lIns="0" tIns="0" rIns="0" bIns="0" rtlCol="0" anchor="ctr"/>
+          <a:lstStyle/>
+          <a:p>
+            <a:pPr marL="0" indent="0" algn="ctr">
+              <a:buNone/>
+            </a:pPr>
+            <a:r>
+              <a:rPr lang="en-US" sz="2200" dirty="0">
+                <a:solidFill>
+                  <a:srgbClr val="8A93A8"/>
+                </a:solidFill>
+                <a:latin typeface="Arial" pitchFamily="34" charset="0"/>
+                <a:ea typeface="Arial" pitchFamily="34" charset="-122"/>
+                <a:cs typeface="Arial" pitchFamily="34" charset="-120"/>
+              </a:rPr>
+              <a:t>Ingeniería  +  Cloud  +  IA  +  criterio.</a:t>
+            </a:r>
+            <a:endParaRPr lang="en-US" sz="2200" dirty="0"/>
+          </a:p>
+        </p:txBody>
+      </p:sp>
+      <p:pic>
+        <p:nvPicPr>
+          <p:cNvPr id="8" name="Image 1" descr="/sessions/awesome-wizardly-sagan/mnt/charla-ia-aws-ug-cucuta/multimedia/aws_ug_cucuta_logo.jpeg"/>
+          <p:cNvPicPr>
+            <a:picLocks noChangeAspect="1"/>
+          </p:cNvPicPr>
+          <p:nvPr/>
+        </p:nvPicPr>
+        <p:blipFill>
+          <a:blip r:embed="rId3"/>
+          <a:stretch>
+            <a:fillRect/>
+          </a:stretch>
+        </p:blipFill>
+        <p:spPr>
+          <a:xfrm>
+            <a:off x="5661508" y="5074920"/>
+            <a:ext cx="868680" cy="868680"/>
+          </a:xfrm>
+          <a:prstGeom prst="rect">
+            <a:avLst/>
+          </a:prstGeom>
+        </p:spPr>
+      </p:pic>
+    </p:spTree>
+  </p:cSld>
+  <p:clrMapOvr>
+    <a:masterClrMapping/>
+  </p:clrMapOvr>
+</p:sld>
+</file>
+
+<file path=ppt/slides/slide38.xml><?xml version="1.0" encoding="utf-8"?>
+<p:sld xmlns:a="http://schemas.openxmlformats.org/drawingml/2006/main" xmlns:r="http://schemas.openxmlformats.org/officeDocument/2006/relationships" xmlns:p="http://schemas.openxmlformats.org/presentationml/2006/main">
   <p:cSld name="Slide 37">
     <p:bg>
       <p:bgPr>
@@ -17339,262 +17996,30 @@
           </a:p>
         </p:txBody>
       </p:sp>
-    </p:spTree>
-  </p:cSld>
-  <p:clrMapOvr>
-    <a:masterClrMapping/>
-  </p:clrMapOvr>
-</p:sld>
-</file>
-
-<file path=ppt/slides/slide38.xml><?xml version="1.0" encoding="utf-8"?>
-<p:sld xmlns:a="http://schemas.openxmlformats.org/drawingml/2006/main" xmlns:r="http://schemas.openxmlformats.org/officeDocument/2006/relationships" xmlns:p="http://schemas.openxmlformats.org/presentationml/2006/main">
-  <p:cSld name="Slide 38">
-    <p:bg>
-      <p:bgPr>
-        <a:solidFill>
-          <a:srgbClr val="161D2D"/>
-        </a:solidFill>
-        <a:effectLst/>
-      </p:bgPr>
-    </p:bg>
-    <p:spTree>
-      <p:nvGrpSpPr>
-        <p:cNvPr id="1" name=""/>
-        <p:cNvGrpSpPr/>
-        <p:nvPr/>
-      </p:nvGrpSpPr>
-      <p:grpSpPr>
-        <a:xfrm>
-          <a:off x="0" y="0"/>
-          <a:ext cx="0" cy="0"/>
-          <a:chOff x="0" y="0"/>
-          <a:chExt cx="0" cy="0"/>
-        </a:xfrm>
-      </p:grpSpPr>
-      <p:sp>
-        <p:nvSpPr>
-          <p:cNvPr id="3" name="Text 0"/>
-          <p:cNvSpPr/>
-          <p:nvPr/>
-        </p:nvSpPr>
-        <p:spPr>
-          <a:xfrm>
-            <a:off x="548640" y="6291072"/>
-            <a:ext cx="3657600" cy="274320"/>
-          </a:xfrm>
-          <a:prstGeom prst="rect">
-            <a:avLst/>
-          </a:prstGeom>
-          <a:noFill/>
-          <a:ln/>
-        </p:spPr>
-        <p:txBody>
-          <a:bodyPr wrap="square" lIns="0" tIns="0" rIns="0" bIns="0" rtlCol="0" anchor="ctr"/>
-          <a:lstStyle/>
-          <a:p>
-            <a:pPr marL="0" indent="0" algn="l">
-              <a:buNone/>
-            </a:pPr>
-            <a:r>
-              <a:rPr lang="en-US" sz="1000" dirty="0">
-                <a:solidFill>
-                  <a:srgbClr val="48536B"/>
-                </a:solidFill>
-                <a:latin typeface="Arial" pitchFamily="34" charset="0"/>
-                <a:ea typeface="Arial" pitchFamily="34" charset="-122"/>
-                <a:cs typeface="Arial" pitchFamily="34" charset="-120"/>
-              </a:rPr>
-              <a:t>6.4  ·  38:48–39:58</a:t>
-            </a:r>
-            <a:endParaRPr lang="en-US" sz="1000" dirty="0"/>
-          </a:p>
-        </p:txBody>
-      </p:sp>
-      <p:sp>
-        <p:nvSpPr>
-          <p:cNvPr id="4" name="Text 1"/>
-          <p:cNvSpPr/>
-          <p:nvPr/>
-        </p:nvSpPr>
-        <p:spPr>
-          <a:xfrm>
-            <a:off x="10042855" y="6291072"/>
-            <a:ext cx="914400" cy="274320"/>
-          </a:xfrm>
-          <a:prstGeom prst="rect">
-            <a:avLst/>
-          </a:prstGeom>
-          <a:noFill/>
-          <a:ln/>
-        </p:spPr>
-        <p:txBody>
-          <a:bodyPr wrap="square" lIns="0" tIns="0" rIns="0" bIns="0" rtlCol="0" anchor="ctr"/>
-          <a:lstStyle/>
-          <a:p>
-            <a:pPr marL="0" indent="0" algn="r">
-              <a:buNone/>
-            </a:pPr>
-            <a:r>
-              <a:rPr lang="en-US" sz="1000" dirty="0">
-                <a:solidFill>
-                  <a:srgbClr val="48536B"/>
-                </a:solidFill>
-                <a:latin typeface="Arial" pitchFamily="34" charset="0"/>
-                <a:ea typeface="Arial" pitchFamily="34" charset="-122"/>
-                <a:cs typeface="Arial" pitchFamily="34" charset="-120"/>
-              </a:rPr>
-              <a:t>38/38</a:t>
-            </a:r>
-            <a:endParaRPr lang="en-US" sz="1000" dirty="0"/>
-          </a:p>
-        </p:txBody>
-      </p:sp>
       <p:pic>
         <p:nvPicPr>
-          <p:cNvPr id="5" name="Image 0" descr="/sessions/awesome-wizardly-sagan/mnt/charla-ia-aws-ug-cucuta/multimedia/aws_ug_cucuta_logo.jpeg"/>
+          <p:cNvPr id="9" name="Picture 8">
+            <a:extLst>
+              <a:ext uri="{FF2B5EF4-FFF2-40B4-BE49-F238E27FC236}">
+                <a16:creationId xmlns:a16="http://schemas.microsoft.com/office/drawing/2014/main" id="{4728CE6E-59B2-E306-436E-E50C0866240B}"/>
+              </a:ext>
+            </a:extLst>
+          </p:cNvPr>
           <p:cNvPicPr>
             <a:picLocks noChangeAspect="1"/>
           </p:cNvPicPr>
           <p:nvPr/>
         </p:nvPicPr>
         <p:blipFill>
-          <a:blip r:embed="rId3">
-            <a:alphaModFix amt="75000"/>
-          </a:blip>
+          <a:blip r:embed="rId4"/>
           <a:stretch>
             <a:fillRect/>
           </a:stretch>
         </p:blipFill>
         <p:spPr>
           <a:xfrm>
-            <a:off x="11231575" y="6071616"/>
-            <a:ext cx="457200" cy="457200"/>
-          </a:xfrm>
-          <a:prstGeom prst="rect">
-            <a:avLst/>
-          </a:prstGeom>
-        </p:spPr>
-      </p:pic>
-      <p:sp>
-        <p:nvSpPr>
-          <p:cNvPr id="6" name="Text 2"/>
-          <p:cNvSpPr/>
-          <p:nvPr/>
-        </p:nvSpPr>
-        <p:spPr>
-          <a:xfrm>
-            <a:off x="914400" y="1920240"/>
-            <a:ext cx="10362895" cy="2011680"/>
-          </a:xfrm>
-          <a:prstGeom prst="rect">
-            <a:avLst/>
-          </a:prstGeom>
-          <a:noFill/>
-          <a:ln/>
-        </p:spPr>
-        <p:txBody>
-          <a:bodyPr wrap="square" lIns="0" tIns="0" rIns="0" bIns="0" rtlCol="0" anchor="ctr"/>
-          <a:lstStyle/>
-          <a:p>
-            <a:pPr marL="0" indent="0" algn="ctr">
-              <a:lnSpc>
-                <a:spcPts val="5400"/>
-              </a:lnSpc>
-              <a:buNone/>
-            </a:pPr>
-            <a:r>
-              <a:rPr lang="en-US" sz="4000" b="1" dirty="0">
-                <a:solidFill>
-                  <a:srgbClr val="FFFFFF"/>
-                </a:solidFill>
-                <a:latin typeface="Arial" pitchFamily="34" charset="0"/>
-                <a:ea typeface="Arial" pitchFamily="34" charset="-122"/>
-                <a:cs typeface="Arial" pitchFamily="34" charset="-120"/>
-              </a:rPr>
-              <a:t>Don't compete with AI at writing code.</a:t>
-            </a:r>
-            <a:endParaRPr lang="en-US" sz="4000" dirty="0"/>
-          </a:p>
-          <a:p>
-            <a:pPr marL="0" indent="0" algn="ctr">
-              <a:lnSpc>
-                <a:spcPts val="5400"/>
-              </a:lnSpc>
-              <a:buNone/>
-            </a:pPr>
-            <a:r>
-              <a:rPr lang="en-US" sz="4000" b="1" dirty="0">
-                <a:solidFill>
-                  <a:srgbClr val="9257F1"/>
-                </a:solidFill>
-                <a:latin typeface="Arial" pitchFamily="34" charset="0"/>
-                <a:ea typeface="Arial" pitchFamily="34" charset="-122"/>
-                <a:cs typeface="Arial" pitchFamily="34" charset="-120"/>
-              </a:rPr>
-              <a:t>Learn to build what matters.</a:t>
-            </a:r>
-            <a:endParaRPr lang="en-US" sz="4000" dirty="0"/>
-          </a:p>
-        </p:txBody>
-      </p:sp>
-      <p:sp>
-        <p:nvSpPr>
-          <p:cNvPr id="7" name="Text 3"/>
-          <p:cNvSpPr/>
-          <p:nvPr/>
-        </p:nvSpPr>
-        <p:spPr>
-          <a:xfrm>
-            <a:off x="914400" y="4206240"/>
-            <a:ext cx="10362895" cy="548640"/>
-          </a:xfrm>
-          <a:prstGeom prst="rect">
-            <a:avLst/>
-          </a:prstGeom>
-          <a:noFill/>
-          <a:ln/>
-        </p:spPr>
-        <p:txBody>
-          <a:bodyPr wrap="square" lIns="0" tIns="0" rIns="0" bIns="0" rtlCol="0" anchor="ctr"/>
-          <a:lstStyle/>
-          <a:p>
-            <a:pPr marL="0" indent="0" algn="ctr">
-              <a:buNone/>
-            </a:pPr>
-            <a:r>
-              <a:rPr lang="en-US" sz="2200" dirty="0">
-                <a:solidFill>
-                  <a:srgbClr val="8A93A8"/>
-                </a:solidFill>
-                <a:latin typeface="Arial" pitchFamily="34" charset="0"/>
-                <a:ea typeface="Arial" pitchFamily="34" charset="-122"/>
-                <a:cs typeface="Arial" pitchFamily="34" charset="-120"/>
-              </a:rPr>
-              <a:t>Ingeniería  +  Cloud  +  IA  +  criterio.</a:t>
-            </a:r>
-            <a:endParaRPr lang="en-US" sz="2200" dirty="0"/>
-          </a:p>
-        </p:txBody>
-      </p:sp>
-      <p:pic>
-        <p:nvPicPr>
-          <p:cNvPr id="8" name="Image 1" descr="/sessions/awesome-wizardly-sagan/mnt/charla-ia-aws-ug-cucuta/multimedia/aws_ug_cucuta_logo.jpeg"/>
-          <p:cNvPicPr>
-            <a:picLocks noChangeAspect="1"/>
-          </p:cNvPicPr>
-          <p:nvPr/>
-        </p:nvPicPr>
-        <p:blipFill>
-          <a:blip r:embed="rId3"/>
-          <a:stretch>
-            <a:fillRect/>
-          </a:stretch>
-        </p:blipFill>
-        <p:spPr>
-          <a:xfrm>
-            <a:off x="5661508" y="5074920"/>
-            <a:ext cx="868680" cy="868680"/>
+            <a:off x="3657600" y="990600"/>
+            <a:ext cx="4876800" cy="4876800"/>
           </a:xfrm>
           <a:prstGeom prst="rect">
             <a:avLst/>
@@ -18898,7 +19323,7 @@
                 <a:ea typeface="Arial" pitchFamily="34" charset="-122"/>
                 <a:cs typeface="Arial" pitchFamily="34" charset="-120"/>
               </a:rPr>
-              <a:t> Código </a:t>
+              <a:t> </a:t>
             </a:r>
             <a:r>
               <a:rPr lang="en-US" sz="2800" b="1" dirty="0" err="1">
@@ -18909,6 +19334,28 @@
                 <a:ea typeface="Arial" pitchFamily="34" charset="-122"/>
                 <a:cs typeface="Arial" pitchFamily="34" charset="-120"/>
               </a:rPr>
+              <a:t>código</a:t>
+            </a:r>
+            <a:r>
+              <a:rPr lang="en-US" sz="2800" b="1" dirty="0">
+                <a:solidFill>
+                  <a:srgbClr val="9257F1"/>
+                </a:solidFill>
+                <a:latin typeface="Arial" pitchFamily="34" charset="0"/>
+                <a:ea typeface="Arial" pitchFamily="34" charset="-122"/>
+                <a:cs typeface="Arial" pitchFamily="34" charset="-120"/>
+              </a:rPr>
+              <a:t> </a:t>
+            </a:r>
+            <a:r>
+              <a:rPr lang="en-US" sz="2800" b="1" dirty="0" err="1">
+                <a:solidFill>
+                  <a:srgbClr val="9257F1"/>
+                </a:solidFill>
+                <a:latin typeface="Arial" pitchFamily="34" charset="0"/>
+                <a:ea typeface="Arial" pitchFamily="34" charset="-122"/>
+                <a:cs typeface="Arial" pitchFamily="34" charset="-120"/>
+              </a:rPr>
               <a:t>deja</a:t>
             </a:r>
             <a:r>
@@ -18964,7 +19411,29 @@
                 <a:ea typeface="Arial" pitchFamily="34" charset="-122"/>
                 <a:cs typeface="Arial" pitchFamily="34" charset="-120"/>
               </a:rPr>
-              <a:t> competitive </a:t>
+              <a:t> </a:t>
+            </a:r>
+            <a:r>
+              <a:rPr lang="en-US" sz="2800" b="1" dirty="0" err="1">
+                <a:solidFill>
+                  <a:srgbClr val="9257F1"/>
+                </a:solidFill>
+                <a:latin typeface="Arial" pitchFamily="34" charset="0"/>
+                <a:ea typeface="Arial" pitchFamily="34" charset="-122"/>
+                <a:cs typeface="Arial" pitchFamily="34" charset="-120"/>
+              </a:rPr>
+              <a:t>competitiva</a:t>
+            </a:r>
+            <a:r>
+              <a:rPr lang="en-US" sz="2800" b="1" dirty="0">
+                <a:solidFill>
+                  <a:srgbClr val="9257F1"/>
+                </a:solidFill>
+                <a:latin typeface="Arial" pitchFamily="34" charset="0"/>
+                <a:ea typeface="Arial" pitchFamily="34" charset="-122"/>
+                <a:cs typeface="Arial" pitchFamily="34" charset="-120"/>
+              </a:rPr>
+              <a:t> </a:t>
             </a:r>
             <a:r>
               <a:rPr lang="en-US" sz="3600" b="1" dirty="0">
@@ -19262,345 +19731,408 @@
           </a:p>
         </p:txBody>
       </p:sp>
-      <p:sp>
-        <p:nvSpPr>
-          <p:cNvPr id="8" name="Shape 4"/>
-          <p:cNvSpPr/>
-          <p:nvPr/>
-        </p:nvSpPr>
-        <p:spPr>
+      <p:grpSp>
+        <p:nvGrpSpPr>
+          <p:cNvPr id="2" name="Group 1">
+            <a:extLst>
+              <a:ext uri="{FF2B5EF4-FFF2-40B4-BE49-F238E27FC236}">
+                <a16:creationId xmlns:a16="http://schemas.microsoft.com/office/drawing/2014/main" id="{732E9A59-E852-9D83-7D00-A05748C5E1D5}"/>
+              </a:ext>
+            </a:extLst>
+          </p:cNvPr>
+          <p:cNvGrpSpPr/>
+          <p:nvPr/>
+        </p:nvGrpSpPr>
+        <p:grpSpPr>
           <a:xfrm>
             <a:off x="822960" y="2148840"/>
             <a:ext cx="3301898" cy="3200400"/>
-          </a:xfrm>
-          <a:prstGeom prst="rect">
-            <a:avLst/>
-          </a:prstGeom>
-          <a:solidFill>
-            <a:srgbClr val="1E2739"/>
-          </a:solidFill>
-          <a:ln w="12700">
+            <a:chOff x="822960" y="2148840"/>
+            <a:chExt cx="3301898" cy="3200400"/>
+          </a:xfrm>
+        </p:grpSpPr>
+        <p:sp>
+          <p:nvSpPr>
+            <p:cNvPr id="8" name="Shape 4"/>
+            <p:cNvSpPr/>
+            <p:nvPr/>
+          </p:nvSpPr>
+          <p:spPr>
+            <a:xfrm>
+              <a:off x="822960" y="2148840"/>
+              <a:ext cx="3301898" cy="3200400"/>
+            </a:xfrm>
+            <a:prstGeom prst="rect">
+              <a:avLst/>
+            </a:prstGeom>
             <a:solidFill>
-              <a:srgbClr val="2C3852"/>
+              <a:srgbClr val="1E2739"/>
             </a:solidFill>
-            <a:prstDash val="solid"/>
-          </a:ln>
-        </p:spPr>
-        <p:txBody>
-          <a:bodyPr/>
-          <a:lstStyle/>
-          <a:p>
-            <a:endParaRPr lang="en-CO"/>
-          </a:p>
-        </p:txBody>
-      </p:sp>
-      <p:sp>
-        <p:nvSpPr>
-          <p:cNvPr id="9" name="Text 5"/>
-          <p:cNvSpPr/>
-          <p:nvPr/>
-        </p:nvSpPr>
-        <p:spPr>
-          <a:xfrm>
-            <a:off x="1143000" y="2468880"/>
-            <a:ext cx="2661818" cy="320040"/>
-          </a:xfrm>
-          <a:prstGeom prst="rect">
-            <a:avLst/>
-          </a:prstGeom>
-          <a:noFill/>
-          <a:ln/>
-        </p:spPr>
-        <p:txBody>
-          <a:bodyPr wrap="square" lIns="0" tIns="0" rIns="0" bIns="0" rtlCol="0" anchor="ctr"/>
-          <a:lstStyle/>
-          <a:p>
-            <a:pPr marL="0" indent="0">
-              <a:buNone/>
-            </a:pPr>
-            <a:r>
-              <a:rPr lang="en-US" sz="1200" b="1" kern="0" spc="200" dirty="0">
-                <a:solidFill>
-                  <a:srgbClr val="9257F1"/>
-                </a:solidFill>
-                <a:latin typeface="Arial" pitchFamily="34" charset="0"/>
-                <a:ea typeface="Arial" pitchFamily="34" charset="-122"/>
-                <a:cs typeface="Arial" pitchFamily="34" charset="-120"/>
-              </a:rPr>
-              <a:t>ESTUDIANTES</a:t>
-            </a:r>
-            <a:endParaRPr lang="en-US" sz="1200" dirty="0"/>
-          </a:p>
-        </p:txBody>
-      </p:sp>
-      <p:sp>
-        <p:nvSpPr>
-          <p:cNvPr id="10" name="Text 6"/>
-          <p:cNvSpPr/>
-          <p:nvPr/>
-        </p:nvSpPr>
-        <p:spPr>
-          <a:xfrm>
-            <a:off x="1143000" y="2926080"/>
-            <a:ext cx="2661818" cy="2057400"/>
-          </a:xfrm>
-          <a:prstGeom prst="rect">
-            <a:avLst/>
-          </a:prstGeom>
-          <a:noFill/>
-          <a:ln/>
-        </p:spPr>
-        <p:txBody>
-          <a:bodyPr wrap="square" lIns="0" tIns="0" rIns="0" bIns="0" rtlCol="0" anchor="t"/>
-          <a:lstStyle/>
-          <a:p>
-            <a:pPr marL="0" indent="0">
-              <a:lnSpc>
-                <a:spcPts val="2600"/>
-              </a:lnSpc>
-              <a:buNone/>
-            </a:pPr>
-            <a:r>
-              <a:rPr lang="en-US" sz="2000" b="1" dirty="0">
-                <a:solidFill>
-                  <a:srgbClr val="FFFFFF"/>
-                </a:solidFill>
-                <a:latin typeface="Arial" pitchFamily="34" charset="0"/>
-                <a:ea typeface="Arial" pitchFamily="34" charset="-122"/>
-                <a:cs typeface="Arial" pitchFamily="34" charset="-120"/>
-              </a:rPr>
-              <a:t>¿Para qué estoy aprendiendo a programar?</a:t>
-            </a:r>
-            <a:endParaRPr lang="en-US" sz="2000" dirty="0"/>
-          </a:p>
-        </p:txBody>
-      </p:sp>
-      <p:sp>
-        <p:nvSpPr>
-          <p:cNvPr id="11" name="Shape 7"/>
-          <p:cNvSpPr/>
-          <p:nvPr/>
-        </p:nvSpPr>
-        <p:spPr>
+            <a:ln w="12700">
+              <a:solidFill>
+                <a:srgbClr val="2C3852"/>
+              </a:solidFill>
+              <a:prstDash val="solid"/>
+            </a:ln>
+          </p:spPr>
+          <p:txBody>
+            <a:bodyPr/>
+            <a:lstStyle/>
+            <a:p>
+              <a:endParaRPr lang="en-CO"/>
+            </a:p>
+          </p:txBody>
+        </p:sp>
+        <p:sp>
+          <p:nvSpPr>
+            <p:cNvPr id="9" name="Text 5"/>
+            <p:cNvSpPr/>
+            <p:nvPr/>
+          </p:nvSpPr>
+          <p:spPr>
+            <a:xfrm>
+              <a:off x="1143000" y="2468880"/>
+              <a:ext cx="2661818" cy="320040"/>
+            </a:xfrm>
+            <a:prstGeom prst="rect">
+              <a:avLst/>
+            </a:prstGeom>
+            <a:noFill/>
+            <a:ln/>
+          </p:spPr>
+          <p:txBody>
+            <a:bodyPr wrap="square" lIns="0" tIns="0" rIns="0" bIns="0" rtlCol="0" anchor="ctr"/>
+            <a:lstStyle/>
+            <a:p>
+              <a:pPr marL="0" indent="0">
+                <a:buNone/>
+              </a:pPr>
+              <a:r>
+                <a:rPr lang="en-US" sz="1200" b="1" kern="0" spc="200" dirty="0">
+                  <a:solidFill>
+                    <a:srgbClr val="9257F1"/>
+                  </a:solidFill>
+                  <a:latin typeface="Arial" pitchFamily="34" charset="0"/>
+                  <a:ea typeface="Arial" pitchFamily="34" charset="-122"/>
+                  <a:cs typeface="Arial" pitchFamily="34" charset="-120"/>
+                </a:rPr>
+                <a:t>ESTUDIANTES</a:t>
+              </a:r>
+              <a:endParaRPr lang="en-US" sz="1200" dirty="0"/>
+            </a:p>
+          </p:txBody>
+        </p:sp>
+        <p:sp>
+          <p:nvSpPr>
+            <p:cNvPr id="10" name="Text 6"/>
+            <p:cNvSpPr/>
+            <p:nvPr/>
+          </p:nvSpPr>
+          <p:spPr>
+            <a:xfrm>
+              <a:off x="1143000" y="2926080"/>
+              <a:ext cx="2661818" cy="2057400"/>
+            </a:xfrm>
+            <a:prstGeom prst="rect">
+              <a:avLst/>
+            </a:prstGeom>
+            <a:noFill/>
+            <a:ln/>
+          </p:spPr>
+          <p:txBody>
+            <a:bodyPr wrap="square" lIns="0" tIns="0" rIns="0" bIns="0" rtlCol="0" anchor="t"/>
+            <a:lstStyle/>
+            <a:p>
+              <a:pPr marL="0" indent="0">
+                <a:lnSpc>
+                  <a:spcPts val="2600"/>
+                </a:lnSpc>
+                <a:buNone/>
+              </a:pPr>
+              <a:r>
+                <a:rPr lang="en-US" sz="2000" b="1" dirty="0">
+                  <a:solidFill>
+                    <a:srgbClr val="FFFFFF"/>
+                  </a:solidFill>
+                  <a:latin typeface="Arial" pitchFamily="34" charset="0"/>
+                  <a:ea typeface="Arial" pitchFamily="34" charset="-122"/>
+                  <a:cs typeface="Arial" pitchFamily="34" charset="-120"/>
+                </a:rPr>
+                <a:t>¿Para qué estoy aprendiendo a programar?</a:t>
+              </a:r>
+              <a:endParaRPr lang="en-US" sz="2000" dirty="0"/>
+            </a:p>
+          </p:txBody>
+        </p:sp>
+      </p:grpSp>
+      <p:grpSp>
+        <p:nvGrpSpPr>
+          <p:cNvPr id="17" name="Group 16">
+            <a:extLst>
+              <a:ext uri="{FF2B5EF4-FFF2-40B4-BE49-F238E27FC236}">
+                <a16:creationId xmlns:a16="http://schemas.microsoft.com/office/drawing/2014/main" id="{C91EF9BC-BEFE-CC83-F411-C192C3B4DB94}"/>
+              </a:ext>
+            </a:extLst>
+          </p:cNvPr>
+          <p:cNvGrpSpPr/>
+          <p:nvPr/>
+        </p:nvGrpSpPr>
+        <p:grpSpPr>
           <a:xfrm>
             <a:off x="4444898" y="2148840"/>
             <a:ext cx="3301898" cy="3200400"/>
-          </a:xfrm>
-          <a:prstGeom prst="rect">
-            <a:avLst/>
-          </a:prstGeom>
-          <a:solidFill>
-            <a:srgbClr val="1E2739"/>
-          </a:solidFill>
-          <a:ln w="12700">
+            <a:chOff x="4444898" y="2148840"/>
+            <a:chExt cx="3301898" cy="3200400"/>
+          </a:xfrm>
+        </p:grpSpPr>
+        <p:sp>
+          <p:nvSpPr>
+            <p:cNvPr id="11" name="Shape 7"/>
+            <p:cNvSpPr/>
+            <p:nvPr/>
+          </p:nvSpPr>
+          <p:spPr>
+            <a:xfrm>
+              <a:off x="4444898" y="2148840"/>
+              <a:ext cx="3301898" cy="3200400"/>
+            </a:xfrm>
+            <a:prstGeom prst="rect">
+              <a:avLst/>
+            </a:prstGeom>
             <a:solidFill>
-              <a:srgbClr val="2C3852"/>
+              <a:srgbClr val="1E2739"/>
             </a:solidFill>
-            <a:prstDash val="solid"/>
-          </a:ln>
-        </p:spPr>
-        <p:txBody>
-          <a:bodyPr/>
-          <a:lstStyle/>
-          <a:p>
-            <a:endParaRPr lang="en-CO"/>
-          </a:p>
-        </p:txBody>
-      </p:sp>
-      <p:sp>
-        <p:nvSpPr>
-          <p:cNvPr id="12" name="Text 8"/>
-          <p:cNvSpPr/>
-          <p:nvPr/>
-        </p:nvSpPr>
-        <p:spPr>
-          <a:xfrm>
-            <a:off x="4764938" y="2468880"/>
-            <a:ext cx="2661818" cy="320040"/>
-          </a:xfrm>
-          <a:prstGeom prst="rect">
-            <a:avLst/>
-          </a:prstGeom>
-          <a:noFill/>
-          <a:ln/>
-        </p:spPr>
-        <p:txBody>
-          <a:bodyPr wrap="square" lIns="0" tIns="0" rIns="0" bIns="0" rtlCol="0" anchor="ctr"/>
-          <a:lstStyle/>
-          <a:p>
-            <a:pPr marL="0" indent="0">
-              <a:buNone/>
-            </a:pPr>
-            <a:r>
-              <a:rPr lang="en-US" sz="1200" b="1" kern="0" spc="200" dirty="0">
-                <a:solidFill>
-                  <a:srgbClr val="9257F1"/>
-                </a:solidFill>
-                <a:latin typeface="Arial" pitchFamily="34" charset="0"/>
-                <a:ea typeface="Arial" pitchFamily="34" charset="-122"/>
-                <a:cs typeface="Arial" pitchFamily="34" charset="-120"/>
-              </a:rPr>
-              <a:t>QUIEN YA TRABAJA</a:t>
-            </a:r>
-            <a:endParaRPr lang="en-US" sz="1200" dirty="0"/>
-          </a:p>
-        </p:txBody>
-      </p:sp>
-      <p:sp>
-        <p:nvSpPr>
-          <p:cNvPr id="13" name="Text 9"/>
-          <p:cNvSpPr/>
-          <p:nvPr/>
-        </p:nvSpPr>
-        <p:spPr>
-          <a:xfrm>
-            <a:off x="4764938" y="2926080"/>
-            <a:ext cx="2661818" cy="2057400"/>
-          </a:xfrm>
-          <a:prstGeom prst="rect">
-            <a:avLst/>
-          </a:prstGeom>
-          <a:noFill/>
-          <a:ln/>
-        </p:spPr>
-        <p:txBody>
-          <a:bodyPr wrap="square" lIns="0" tIns="0" rIns="0" bIns="0" rtlCol="0" anchor="t"/>
-          <a:lstStyle/>
-          <a:p>
-            <a:pPr marL="0" indent="0">
-              <a:lnSpc>
-                <a:spcPts val="2600"/>
-              </a:lnSpc>
-              <a:buNone/>
-            </a:pPr>
-            <a:r>
-              <a:rPr lang="en-US" sz="2000" b="1" dirty="0">
-                <a:solidFill>
-                  <a:srgbClr val="FFFFFF"/>
-                </a:solidFill>
-                <a:latin typeface="Arial" pitchFamily="34" charset="0"/>
-                <a:ea typeface="Arial" pitchFamily="34" charset="-122"/>
-                <a:cs typeface="Arial" pitchFamily="34" charset="-120"/>
-              </a:rPr>
-              <a:t>¿Lo que sé hacer hoy seguirá siendo valioso dentro de cinco años?</a:t>
-            </a:r>
-            <a:endParaRPr lang="en-US" sz="2000" dirty="0"/>
-          </a:p>
-        </p:txBody>
-      </p:sp>
-      <p:sp>
-        <p:nvSpPr>
-          <p:cNvPr id="14" name="Shape 10"/>
-          <p:cNvSpPr/>
-          <p:nvPr/>
-        </p:nvSpPr>
-        <p:spPr>
+            <a:ln w="12700">
+              <a:solidFill>
+                <a:srgbClr val="2C3852"/>
+              </a:solidFill>
+              <a:prstDash val="solid"/>
+            </a:ln>
+          </p:spPr>
+          <p:txBody>
+            <a:bodyPr/>
+            <a:lstStyle/>
+            <a:p>
+              <a:endParaRPr lang="en-CO"/>
+            </a:p>
+          </p:txBody>
+        </p:sp>
+        <p:sp>
+          <p:nvSpPr>
+            <p:cNvPr id="12" name="Text 8"/>
+            <p:cNvSpPr/>
+            <p:nvPr/>
+          </p:nvSpPr>
+          <p:spPr>
+            <a:xfrm>
+              <a:off x="4764938" y="2468880"/>
+              <a:ext cx="2661818" cy="320040"/>
+            </a:xfrm>
+            <a:prstGeom prst="rect">
+              <a:avLst/>
+            </a:prstGeom>
+            <a:noFill/>
+            <a:ln/>
+          </p:spPr>
+          <p:txBody>
+            <a:bodyPr wrap="square" lIns="0" tIns="0" rIns="0" bIns="0" rtlCol="0" anchor="ctr"/>
+            <a:lstStyle/>
+            <a:p>
+              <a:pPr marL="0" indent="0">
+                <a:buNone/>
+              </a:pPr>
+              <a:r>
+                <a:rPr lang="en-US" sz="1200" b="1" kern="0" spc="200" dirty="0">
+                  <a:solidFill>
+                    <a:srgbClr val="9257F1"/>
+                  </a:solidFill>
+                  <a:latin typeface="Arial" pitchFamily="34" charset="0"/>
+                  <a:ea typeface="Arial" pitchFamily="34" charset="-122"/>
+                  <a:cs typeface="Arial" pitchFamily="34" charset="-120"/>
+                </a:rPr>
+                <a:t>QUIEN YA TRABAJA</a:t>
+              </a:r>
+              <a:endParaRPr lang="en-US" sz="1200" dirty="0"/>
+            </a:p>
+          </p:txBody>
+        </p:sp>
+        <p:sp>
+          <p:nvSpPr>
+            <p:cNvPr id="13" name="Text 9"/>
+            <p:cNvSpPr/>
+            <p:nvPr/>
+          </p:nvSpPr>
+          <p:spPr>
+            <a:xfrm>
+              <a:off x="4764938" y="2926080"/>
+              <a:ext cx="2661818" cy="2057400"/>
+            </a:xfrm>
+            <a:prstGeom prst="rect">
+              <a:avLst/>
+            </a:prstGeom>
+            <a:noFill/>
+            <a:ln/>
+          </p:spPr>
+          <p:txBody>
+            <a:bodyPr wrap="square" lIns="0" tIns="0" rIns="0" bIns="0" rtlCol="0" anchor="t"/>
+            <a:lstStyle/>
+            <a:p>
+              <a:pPr marL="0" indent="0">
+                <a:lnSpc>
+                  <a:spcPts val="2600"/>
+                </a:lnSpc>
+                <a:buNone/>
+              </a:pPr>
+              <a:r>
+                <a:rPr lang="en-US" sz="2000" b="1" dirty="0">
+                  <a:solidFill>
+                    <a:srgbClr val="FFFFFF"/>
+                  </a:solidFill>
+                  <a:latin typeface="Arial" pitchFamily="34" charset="0"/>
+                  <a:ea typeface="Arial" pitchFamily="34" charset="-122"/>
+                  <a:cs typeface="Arial" pitchFamily="34" charset="-120"/>
+                </a:rPr>
+                <a:t>¿Lo que sé hacer hoy seguirá siendo valioso dentro de cinco años?</a:t>
+              </a:r>
+              <a:endParaRPr lang="en-US" sz="2000" dirty="0"/>
+            </a:p>
+          </p:txBody>
+        </p:sp>
+      </p:grpSp>
+      <p:grpSp>
+        <p:nvGrpSpPr>
+          <p:cNvPr id="18" name="Group 17">
+            <a:extLst>
+              <a:ext uri="{FF2B5EF4-FFF2-40B4-BE49-F238E27FC236}">
+                <a16:creationId xmlns:a16="http://schemas.microsoft.com/office/drawing/2014/main" id="{93FFFAA0-3564-1ADB-57AA-090E99769698}"/>
+              </a:ext>
+            </a:extLst>
+          </p:cNvPr>
+          <p:cNvGrpSpPr/>
+          <p:nvPr/>
+        </p:nvGrpSpPr>
+        <p:grpSpPr>
           <a:xfrm>
             <a:off x="8066837" y="2148840"/>
             <a:ext cx="3301898" cy="3200400"/>
-          </a:xfrm>
-          <a:prstGeom prst="rect">
-            <a:avLst/>
-          </a:prstGeom>
-          <a:solidFill>
-            <a:srgbClr val="1E2739"/>
-          </a:solidFill>
-          <a:ln w="12700">
+            <a:chOff x="8066837" y="2148840"/>
+            <a:chExt cx="3301898" cy="3200400"/>
+          </a:xfrm>
+        </p:grpSpPr>
+        <p:sp>
+          <p:nvSpPr>
+            <p:cNvPr id="14" name="Shape 10"/>
+            <p:cNvSpPr/>
+            <p:nvPr/>
+          </p:nvSpPr>
+          <p:spPr>
+            <a:xfrm>
+              <a:off x="8066837" y="2148840"/>
+              <a:ext cx="3301898" cy="3200400"/>
+            </a:xfrm>
+            <a:prstGeom prst="rect">
+              <a:avLst/>
+            </a:prstGeom>
             <a:solidFill>
-              <a:srgbClr val="2C3852"/>
+              <a:srgbClr val="1E2739"/>
             </a:solidFill>
-            <a:prstDash val="solid"/>
-          </a:ln>
-        </p:spPr>
-        <p:txBody>
-          <a:bodyPr/>
-          <a:lstStyle/>
-          <a:p>
-            <a:endParaRPr lang="en-CO"/>
-          </a:p>
-        </p:txBody>
-      </p:sp>
-      <p:sp>
-        <p:nvSpPr>
-          <p:cNvPr id="15" name="Text 11"/>
-          <p:cNvSpPr/>
-          <p:nvPr/>
-        </p:nvSpPr>
-        <p:spPr>
-          <a:xfrm>
-            <a:off x="8386877" y="2468880"/>
-            <a:ext cx="2661818" cy="320040"/>
-          </a:xfrm>
-          <a:prstGeom prst="rect">
-            <a:avLst/>
-          </a:prstGeom>
-          <a:noFill/>
-          <a:ln/>
-        </p:spPr>
-        <p:txBody>
-          <a:bodyPr wrap="square" lIns="0" tIns="0" rIns="0" bIns="0" rtlCol="0" anchor="ctr"/>
-          <a:lstStyle/>
-          <a:p>
-            <a:pPr marL="0" indent="0">
-              <a:buNone/>
-            </a:pPr>
-            <a:r>
-              <a:rPr lang="en-US" sz="1200" b="1" kern="0" spc="200" dirty="0">
-                <a:solidFill>
-                  <a:srgbClr val="9257F1"/>
-                </a:solidFill>
-                <a:latin typeface="Arial" pitchFamily="34" charset="0"/>
-                <a:ea typeface="Arial" pitchFamily="34" charset="-122"/>
-                <a:cs typeface="Arial" pitchFamily="34" charset="-120"/>
-              </a:rPr>
-              <a:t>EMPRESAS</a:t>
-            </a:r>
-            <a:endParaRPr lang="en-US" sz="1200" dirty="0"/>
-          </a:p>
-        </p:txBody>
-      </p:sp>
-      <p:sp>
-        <p:nvSpPr>
-          <p:cNvPr id="16" name="Text 12"/>
-          <p:cNvSpPr/>
-          <p:nvPr/>
-        </p:nvSpPr>
-        <p:spPr>
-          <a:xfrm>
-            <a:off x="8386877" y="2926080"/>
-            <a:ext cx="2661818" cy="2057400"/>
-          </a:xfrm>
-          <a:prstGeom prst="rect">
-            <a:avLst/>
-          </a:prstGeom>
-          <a:noFill/>
-          <a:ln/>
-        </p:spPr>
-        <p:txBody>
-          <a:bodyPr wrap="square" lIns="0" tIns="0" rIns="0" bIns="0" rtlCol="0" anchor="t"/>
-          <a:lstStyle/>
-          <a:p>
-            <a:pPr marL="0" indent="0">
-              <a:lnSpc>
-                <a:spcPts val="2600"/>
-              </a:lnSpc>
-              <a:buNone/>
-            </a:pPr>
-            <a:r>
-              <a:rPr lang="en-US" sz="2000" b="1" dirty="0">
-                <a:solidFill>
-                  <a:srgbClr val="FFFFFF"/>
-                </a:solidFill>
-                <a:latin typeface="Arial" pitchFamily="34" charset="0"/>
-                <a:ea typeface="Arial" pitchFamily="34" charset="-122"/>
-                <a:cs typeface="Arial" pitchFamily="34" charset="-120"/>
-              </a:rPr>
-              <a:t>¿Qué debería esperar de un ingeniero que tiene IA disponible todo el tiempo?</a:t>
-            </a:r>
-            <a:endParaRPr lang="en-US" sz="2000" dirty="0"/>
-          </a:p>
-        </p:txBody>
-      </p:sp>
+            <a:ln w="12700">
+              <a:solidFill>
+                <a:srgbClr val="2C3852"/>
+              </a:solidFill>
+              <a:prstDash val="solid"/>
+            </a:ln>
+          </p:spPr>
+          <p:txBody>
+            <a:bodyPr/>
+            <a:lstStyle/>
+            <a:p>
+              <a:endParaRPr lang="en-CO"/>
+            </a:p>
+          </p:txBody>
+        </p:sp>
+        <p:sp>
+          <p:nvSpPr>
+            <p:cNvPr id="15" name="Text 11"/>
+            <p:cNvSpPr/>
+            <p:nvPr/>
+          </p:nvSpPr>
+          <p:spPr>
+            <a:xfrm>
+              <a:off x="8386877" y="2468880"/>
+              <a:ext cx="2661818" cy="320040"/>
+            </a:xfrm>
+            <a:prstGeom prst="rect">
+              <a:avLst/>
+            </a:prstGeom>
+            <a:noFill/>
+            <a:ln/>
+          </p:spPr>
+          <p:txBody>
+            <a:bodyPr wrap="square" lIns="0" tIns="0" rIns="0" bIns="0" rtlCol="0" anchor="ctr"/>
+            <a:lstStyle/>
+            <a:p>
+              <a:pPr marL="0" indent="0">
+                <a:buNone/>
+              </a:pPr>
+              <a:r>
+                <a:rPr lang="en-US" sz="1200" b="1" kern="0" spc="200" dirty="0">
+                  <a:solidFill>
+                    <a:srgbClr val="9257F1"/>
+                  </a:solidFill>
+                  <a:latin typeface="Arial" pitchFamily="34" charset="0"/>
+                  <a:ea typeface="Arial" pitchFamily="34" charset="-122"/>
+                  <a:cs typeface="Arial" pitchFamily="34" charset="-120"/>
+                </a:rPr>
+                <a:t>EMPRESAS</a:t>
+              </a:r>
+              <a:endParaRPr lang="en-US" sz="1200" dirty="0"/>
+            </a:p>
+          </p:txBody>
+        </p:sp>
+        <p:sp>
+          <p:nvSpPr>
+            <p:cNvPr id="16" name="Text 12"/>
+            <p:cNvSpPr/>
+            <p:nvPr/>
+          </p:nvSpPr>
+          <p:spPr>
+            <a:xfrm>
+              <a:off x="8386877" y="2926080"/>
+              <a:ext cx="2661818" cy="2057400"/>
+            </a:xfrm>
+            <a:prstGeom prst="rect">
+              <a:avLst/>
+            </a:prstGeom>
+            <a:noFill/>
+            <a:ln/>
+          </p:spPr>
+          <p:txBody>
+            <a:bodyPr wrap="square" lIns="0" tIns="0" rIns="0" bIns="0" rtlCol="0" anchor="t"/>
+            <a:lstStyle/>
+            <a:p>
+              <a:pPr marL="0" indent="0">
+                <a:lnSpc>
+                  <a:spcPts val="2600"/>
+                </a:lnSpc>
+                <a:buNone/>
+              </a:pPr>
+              <a:r>
+                <a:rPr lang="en-US" sz="2000" b="1" dirty="0">
+                  <a:solidFill>
+                    <a:srgbClr val="FFFFFF"/>
+                  </a:solidFill>
+                  <a:latin typeface="Arial" pitchFamily="34" charset="0"/>
+                  <a:ea typeface="Arial" pitchFamily="34" charset="-122"/>
+                  <a:cs typeface="Arial" pitchFamily="34" charset="-120"/>
+                </a:rPr>
+                <a:t>¿Qué debería esperar de un ingeniero que tiene IA disponible todo el tiempo?</a:t>
+              </a:r>
+              <a:endParaRPr lang="en-US" sz="2000" dirty="0"/>
+            </a:p>
+          </p:txBody>
+        </p:sp>
+      </p:grpSp>
     </p:spTree>
   </p:cSld>
   <p:clrMapOvr>
@@ -19777,396 +20309,501 @@
           </a:p>
         </p:txBody>
       </p:sp>
-      <p:sp>
-        <p:nvSpPr>
-          <p:cNvPr id="7" name="Text 3"/>
-          <p:cNvSpPr/>
-          <p:nvPr/>
-        </p:nvSpPr>
-        <p:spPr>
+      <p:grpSp>
+        <p:nvGrpSpPr>
+          <p:cNvPr id="2" name="Group 1">
+            <a:extLst>
+              <a:ext uri="{FF2B5EF4-FFF2-40B4-BE49-F238E27FC236}">
+                <a16:creationId xmlns:a16="http://schemas.microsoft.com/office/drawing/2014/main" id="{8BACF8E8-A2D5-6371-B6C5-82A748520B46}"/>
+              </a:ext>
+            </a:extLst>
+          </p:cNvPr>
+          <p:cNvGrpSpPr/>
+          <p:nvPr/>
+        </p:nvGrpSpPr>
+        <p:grpSpPr>
           <a:xfrm>
             <a:off x="822960" y="1371600"/>
-            <a:ext cx="640080" cy="640080"/>
-          </a:xfrm>
-          <a:prstGeom prst="rect">
-            <a:avLst/>
-          </a:prstGeom>
-          <a:noFill/>
-          <a:ln/>
-        </p:spPr>
-        <p:txBody>
-          <a:bodyPr wrap="square" lIns="0" tIns="0" rIns="0" bIns="0" rtlCol="0" anchor="ctr"/>
-          <a:lstStyle/>
-          <a:p>
-            <a:pPr marL="0" indent="0">
-              <a:buNone/>
-            </a:pPr>
-            <a:r>
-              <a:rPr lang="en-US" sz="3000" b="1" dirty="0">
-                <a:solidFill>
-                  <a:srgbClr val="9257F1"/>
-                </a:solidFill>
-                <a:latin typeface="Arial" pitchFamily="34" charset="0"/>
-                <a:ea typeface="Arial" pitchFamily="34" charset="-122"/>
-                <a:cs typeface="Arial" pitchFamily="34" charset="-120"/>
-              </a:rPr>
-              <a:t>1</a:t>
-            </a:r>
-            <a:endParaRPr lang="en-US" sz="3000" dirty="0"/>
-          </a:p>
-        </p:txBody>
-      </p:sp>
-      <p:sp>
-        <p:nvSpPr>
-          <p:cNvPr id="8" name="Text 4"/>
-          <p:cNvSpPr/>
-          <p:nvPr/>
-        </p:nvSpPr>
-        <p:spPr>
-          <a:xfrm>
-            <a:off x="1600200" y="1371600"/>
-            <a:ext cx="9631375" cy="640080"/>
-          </a:xfrm>
-          <a:prstGeom prst="rect">
-            <a:avLst/>
-          </a:prstGeom>
-          <a:noFill/>
-          <a:ln/>
-        </p:spPr>
-        <p:txBody>
-          <a:bodyPr wrap="square" lIns="0" tIns="0" rIns="0" bIns="0" rtlCol="0" anchor="ctr"/>
-          <a:lstStyle/>
-          <a:p>
-            <a:pPr marL="0" indent="0">
-              <a:buNone/>
-            </a:pPr>
-            <a:r>
-              <a:rPr lang="en-US" sz="2200" dirty="0">
-                <a:solidFill>
-                  <a:srgbClr val="FFFFFF"/>
-                </a:solidFill>
-                <a:latin typeface="Arial" pitchFamily="34" charset="0"/>
-                <a:ea typeface="Arial" pitchFamily="34" charset="-122"/>
-                <a:cs typeface="Arial" pitchFamily="34" charset="-120"/>
-              </a:rPr>
-              <a:t>¿Qué cambió realmente con la inteligencia artificial?</a:t>
-            </a:r>
-            <a:endParaRPr lang="en-US" sz="2200" dirty="0"/>
-          </a:p>
-        </p:txBody>
-      </p:sp>
-      <p:sp>
-        <p:nvSpPr>
-          <p:cNvPr id="9" name="Text 5"/>
-          <p:cNvSpPr/>
-          <p:nvPr/>
-        </p:nvSpPr>
-        <p:spPr>
+            <a:ext cx="10408615" cy="640080"/>
+            <a:chOff x="822960" y="1371600"/>
+            <a:chExt cx="10408615" cy="640080"/>
+          </a:xfrm>
+        </p:grpSpPr>
+        <p:sp>
+          <p:nvSpPr>
+            <p:cNvPr id="7" name="Text 3"/>
+            <p:cNvSpPr/>
+            <p:nvPr/>
+          </p:nvSpPr>
+          <p:spPr>
+            <a:xfrm>
+              <a:off x="822960" y="1371600"/>
+              <a:ext cx="640080" cy="640080"/>
+            </a:xfrm>
+            <a:prstGeom prst="rect">
+              <a:avLst/>
+            </a:prstGeom>
+            <a:noFill/>
+            <a:ln/>
+          </p:spPr>
+          <p:txBody>
+            <a:bodyPr wrap="square" lIns="0" tIns="0" rIns="0" bIns="0" rtlCol="0" anchor="ctr"/>
+            <a:lstStyle/>
+            <a:p>
+              <a:pPr marL="0" indent="0">
+                <a:buNone/>
+              </a:pPr>
+              <a:r>
+                <a:rPr lang="en-US" sz="3000" b="1" dirty="0">
+                  <a:solidFill>
+                    <a:srgbClr val="9257F1"/>
+                  </a:solidFill>
+                  <a:latin typeface="Arial" pitchFamily="34" charset="0"/>
+                  <a:ea typeface="Arial" pitchFamily="34" charset="-122"/>
+                  <a:cs typeface="Arial" pitchFamily="34" charset="-120"/>
+                </a:rPr>
+                <a:t>1</a:t>
+              </a:r>
+              <a:endParaRPr lang="en-US" sz="3000" dirty="0"/>
+            </a:p>
+          </p:txBody>
+        </p:sp>
+        <p:sp>
+          <p:nvSpPr>
+            <p:cNvPr id="8" name="Text 4"/>
+            <p:cNvSpPr/>
+            <p:nvPr/>
+          </p:nvSpPr>
+          <p:spPr>
+            <a:xfrm>
+              <a:off x="1600200" y="1371600"/>
+              <a:ext cx="9631375" cy="640080"/>
+            </a:xfrm>
+            <a:prstGeom prst="rect">
+              <a:avLst/>
+            </a:prstGeom>
+            <a:noFill/>
+            <a:ln/>
+          </p:spPr>
+          <p:txBody>
+            <a:bodyPr wrap="square" lIns="0" tIns="0" rIns="0" bIns="0" rtlCol="0" anchor="ctr"/>
+            <a:lstStyle/>
+            <a:p>
+              <a:pPr marL="0" indent="0">
+                <a:buNone/>
+              </a:pPr>
+              <a:r>
+                <a:rPr lang="en-US" sz="2200" dirty="0">
+                  <a:solidFill>
+                    <a:srgbClr val="FFFFFF"/>
+                  </a:solidFill>
+                  <a:latin typeface="Arial" pitchFamily="34" charset="0"/>
+                  <a:ea typeface="Arial" pitchFamily="34" charset="-122"/>
+                  <a:cs typeface="Arial" pitchFamily="34" charset="-120"/>
+                </a:rPr>
+                <a:t>¿Qué cambió realmente con la inteligencia artificial?</a:t>
+              </a:r>
+              <a:endParaRPr lang="en-US" sz="2200" dirty="0"/>
+            </a:p>
+          </p:txBody>
+        </p:sp>
+      </p:grpSp>
+      <p:grpSp>
+        <p:nvGrpSpPr>
+          <p:cNvPr id="17" name="Group 16">
+            <a:extLst>
+              <a:ext uri="{FF2B5EF4-FFF2-40B4-BE49-F238E27FC236}">
+                <a16:creationId xmlns:a16="http://schemas.microsoft.com/office/drawing/2014/main" id="{9B39826F-573B-1CFC-2459-25A321F03D90}"/>
+              </a:ext>
+            </a:extLst>
+          </p:cNvPr>
+          <p:cNvGrpSpPr/>
+          <p:nvPr/>
+        </p:nvGrpSpPr>
+        <p:grpSpPr>
           <a:xfrm>
             <a:off x="822960" y="2286000"/>
-            <a:ext cx="640080" cy="640080"/>
-          </a:xfrm>
-          <a:prstGeom prst="rect">
-            <a:avLst/>
-          </a:prstGeom>
-          <a:noFill/>
-          <a:ln/>
-        </p:spPr>
-        <p:txBody>
-          <a:bodyPr wrap="square" lIns="0" tIns="0" rIns="0" bIns="0" rtlCol="0" anchor="ctr"/>
-          <a:lstStyle/>
-          <a:p>
-            <a:pPr marL="0" indent="0">
-              <a:buNone/>
-            </a:pPr>
-            <a:r>
-              <a:rPr lang="en-US" sz="3000" b="1" dirty="0">
-                <a:solidFill>
-                  <a:srgbClr val="9257F1"/>
-                </a:solidFill>
-                <a:latin typeface="Arial" pitchFamily="34" charset="0"/>
-                <a:ea typeface="Arial" pitchFamily="34" charset="-122"/>
-                <a:cs typeface="Arial" pitchFamily="34" charset="-120"/>
-              </a:rPr>
-              <a:t>2</a:t>
-            </a:r>
-            <a:endParaRPr lang="en-US" sz="3000" dirty="0"/>
-          </a:p>
-        </p:txBody>
-      </p:sp>
-      <p:sp>
-        <p:nvSpPr>
-          <p:cNvPr id="10" name="Text 6"/>
-          <p:cNvSpPr/>
-          <p:nvPr/>
-        </p:nvSpPr>
-        <p:spPr>
-          <a:xfrm>
-            <a:off x="1600200" y="2286000"/>
-            <a:ext cx="9631375" cy="640080"/>
-          </a:xfrm>
-          <a:prstGeom prst="rect">
-            <a:avLst/>
-          </a:prstGeom>
-          <a:noFill/>
-          <a:ln/>
-        </p:spPr>
-        <p:txBody>
-          <a:bodyPr wrap="square" lIns="0" tIns="0" rIns="0" bIns="0" rtlCol="0" anchor="ctr"/>
-          <a:lstStyle/>
-          <a:p>
-            <a:pPr marL="0" indent="0">
-              <a:buNone/>
-            </a:pPr>
-            <a:r>
-              <a:rPr lang="en-US" sz="2200" dirty="0">
-                <a:solidFill>
-                  <a:srgbClr val="FFFFFF"/>
-                </a:solidFill>
-                <a:latin typeface="Arial" pitchFamily="34" charset="0"/>
-                <a:ea typeface="Arial" pitchFamily="34" charset="-122"/>
-                <a:cs typeface="Arial" pitchFamily="34" charset="-120"/>
-              </a:rPr>
-              <a:t>¿Se va a acabar el trabajo para los programadores?</a:t>
-            </a:r>
-            <a:endParaRPr lang="en-US" sz="2200" dirty="0"/>
-          </a:p>
-        </p:txBody>
-      </p:sp>
-      <p:sp>
-        <p:nvSpPr>
-          <p:cNvPr id="11" name="Text 7"/>
-          <p:cNvSpPr/>
-          <p:nvPr/>
-        </p:nvSpPr>
-        <p:spPr>
+            <a:ext cx="10408615" cy="640080"/>
+            <a:chOff x="822960" y="2286000"/>
+            <a:chExt cx="10408615" cy="640080"/>
+          </a:xfrm>
+        </p:grpSpPr>
+        <p:sp>
+          <p:nvSpPr>
+            <p:cNvPr id="9" name="Text 5"/>
+            <p:cNvSpPr/>
+            <p:nvPr/>
+          </p:nvSpPr>
+          <p:spPr>
+            <a:xfrm>
+              <a:off x="822960" y="2286000"/>
+              <a:ext cx="640080" cy="640080"/>
+            </a:xfrm>
+            <a:prstGeom prst="rect">
+              <a:avLst/>
+            </a:prstGeom>
+            <a:noFill/>
+            <a:ln/>
+          </p:spPr>
+          <p:txBody>
+            <a:bodyPr wrap="square" lIns="0" tIns="0" rIns="0" bIns="0" rtlCol="0" anchor="ctr"/>
+            <a:lstStyle/>
+            <a:p>
+              <a:pPr marL="0" indent="0">
+                <a:buNone/>
+              </a:pPr>
+              <a:r>
+                <a:rPr lang="en-US" sz="3000" b="1" dirty="0">
+                  <a:solidFill>
+                    <a:srgbClr val="9257F1"/>
+                  </a:solidFill>
+                  <a:latin typeface="Arial" pitchFamily="34" charset="0"/>
+                  <a:ea typeface="Arial" pitchFamily="34" charset="-122"/>
+                  <a:cs typeface="Arial" pitchFamily="34" charset="-120"/>
+                </a:rPr>
+                <a:t>2</a:t>
+              </a:r>
+              <a:endParaRPr lang="en-US" sz="3000" dirty="0"/>
+            </a:p>
+          </p:txBody>
+        </p:sp>
+        <p:sp>
+          <p:nvSpPr>
+            <p:cNvPr id="10" name="Text 6"/>
+            <p:cNvSpPr/>
+            <p:nvPr/>
+          </p:nvSpPr>
+          <p:spPr>
+            <a:xfrm>
+              <a:off x="1600200" y="2286000"/>
+              <a:ext cx="9631375" cy="640080"/>
+            </a:xfrm>
+            <a:prstGeom prst="rect">
+              <a:avLst/>
+            </a:prstGeom>
+            <a:noFill/>
+            <a:ln/>
+          </p:spPr>
+          <p:txBody>
+            <a:bodyPr wrap="square" lIns="0" tIns="0" rIns="0" bIns="0" rtlCol="0" anchor="ctr"/>
+            <a:lstStyle/>
+            <a:p>
+              <a:pPr marL="0" indent="0">
+                <a:buNone/>
+              </a:pPr>
+              <a:r>
+                <a:rPr lang="en-US" sz="2200" dirty="0">
+                  <a:solidFill>
+                    <a:srgbClr val="FFFFFF"/>
+                  </a:solidFill>
+                  <a:latin typeface="Arial" pitchFamily="34" charset="0"/>
+                  <a:ea typeface="Arial" pitchFamily="34" charset="-122"/>
+                  <a:cs typeface="Arial" pitchFamily="34" charset="-120"/>
+                </a:rPr>
+                <a:t>¿Se va a acabar el trabajo para los programadores?</a:t>
+              </a:r>
+              <a:endParaRPr lang="en-US" sz="2200" dirty="0"/>
+            </a:p>
+          </p:txBody>
+        </p:sp>
+      </p:grpSp>
+      <p:grpSp>
+        <p:nvGrpSpPr>
+          <p:cNvPr id="18" name="Group 17">
+            <a:extLst>
+              <a:ext uri="{FF2B5EF4-FFF2-40B4-BE49-F238E27FC236}">
+                <a16:creationId xmlns:a16="http://schemas.microsoft.com/office/drawing/2014/main" id="{B0618DC1-24BD-D7E5-8C28-6C62D4CCACF5}"/>
+              </a:ext>
+            </a:extLst>
+          </p:cNvPr>
+          <p:cNvGrpSpPr/>
+          <p:nvPr/>
+        </p:nvGrpSpPr>
+        <p:grpSpPr>
           <a:xfrm>
             <a:off x="822960" y="3200400"/>
-            <a:ext cx="640080" cy="640080"/>
-          </a:xfrm>
-          <a:prstGeom prst="rect">
-            <a:avLst/>
-          </a:prstGeom>
-          <a:noFill/>
-          <a:ln/>
-        </p:spPr>
-        <p:txBody>
-          <a:bodyPr wrap="square" lIns="0" tIns="0" rIns="0" bIns="0" rtlCol="0" anchor="ctr"/>
-          <a:lstStyle/>
-          <a:p>
-            <a:pPr marL="0" indent="0">
-              <a:buNone/>
-            </a:pPr>
-            <a:r>
-              <a:rPr lang="en-US" sz="3000" b="1" dirty="0">
-                <a:solidFill>
-                  <a:srgbClr val="9257F1"/>
-                </a:solidFill>
-                <a:latin typeface="Arial" pitchFamily="34" charset="0"/>
-                <a:ea typeface="Arial" pitchFamily="34" charset="-122"/>
-                <a:cs typeface="Arial" pitchFamily="34" charset="-120"/>
-              </a:rPr>
-              <a:t>3</a:t>
-            </a:r>
-            <a:endParaRPr lang="en-US" sz="3000" dirty="0"/>
-          </a:p>
-        </p:txBody>
-      </p:sp>
-      <p:sp>
-        <p:nvSpPr>
-          <p:cNvPr id="12" name="Text 8"/>
-          <p:cNvSpPr/>
-          <p:nvPr/>
-        </p:nvSpPr>
-        <p:spPr>
-          <a:xfrm>
-            <a:off x="1600200" y="3200400"/>
-            <a:ext cx="9631375" cy="640080"/>
-          </a:xfrm>
-          <a:prstGeom prst="rect">
-            <a:avLst/>
-          </a:prstGeom>
-          <a:noFill/>
-          <a:ln/>
-        </p:spPr>
-        <p:txBody>
-          <a:bodyPr wrap="square" lIns="0" tIns="0" rIns="0" bIns="0" rtlCol="0" anchor="ctr"/>
-          <a:lstStyle/>
-          <a:p>
-            <a:pPr marL="0" indent="0">
-              <a:buNone/>
-            </a:pPr>
-            <a:r>
-              <a:rPr lang="en-US" sz="2200" dirty="0">
-                <a:solidFill>
-                  <a:srgbClr val="FFFFFF"/>
-                </a:solidFill>
-                <a:latin typeface="Arial" pitchFamily="34" charset="0"/>
-                <a:ea typeface="Arial" pitchFamily="34" charset="-122"/>
-                <a:cs typeface="Arial" pitchFamily="34" charset="-120"/>
-              </a:rPr>
-              <a:t>¿Qué pasa cuando la IA escribe software que no entendemos?</a:t>
-            </a:r>
-            <a:endParaRPr lang="en-US" sz="2200" dirty="0"/>
-          </a:p>
-        </p:txBody>
-      </p:sp>
-      <p:sp>
-        <p:nvSpPr>
-          <p:cNvPr id="13" name="Text 9"/>
-          <p:cNvSpPr/>
-          <p:nvPr/>
-        </p:nvSpPr>
-        <p:spPr>
+            <a:ext cx="10408615" cy="640080"/>
+            <a:chOff x="822960" y="3200400"/>
+            <a:chExt cx="10408615" cy="640080"/>
+          </a:xfrm>
+        </p:grpSpPr>
+        <p:sp>
+          <p:nvSpPr>
+            <p:cNvPr id="11" name="Text 7"/>
+            <p:cNvSpPr/>
+            <p:nvPr/>
+          </p:nvSpPr>
+          <p:spPr>
+            <a:xfrm>
+              <a:off x="822960" y="3200400"/>
+              <a:ext cx="640080" cy="640080"/>
+            </a:xfrm>
+            <a:prstGeom prst="rect">
+              <a:avLst/>
+            </a:prstGeom>
+            <a:noFill/>
+            <a:ln/>
+          </p:spPr>
+          <p:txBody>
+            <a:bodyPr wrap="square" lIns="0" tIns="0" rIns="0" bIns="0" rtlCol="0" anchor="ctr"/>
+            <a:lstStyle/>
+            <a:p>
+              <a:pPr marL="0" indent="0">
+                <a:buNone/>
+              </a:pPr>
+              <a:r>
+                <a:rPr lang="en-US" sz="3000" b="1" dirty="0">
+                  <a:solidFill>
+                    <a:srgbClr val="9257F1"/>
+                  </a:solidFill>
+                  <a:latin typeface="Arial" pitchFamily="34" charset="0"/>
+                  <a:ea typeface="Arial" pitchFamily="34" charset="-122"/>
+                  <a:cs typeface="Arial" pitchFamily="34" charset="-120"/>
+                </a:rPr>
+                <a:t>3</a:t>
+              </a:r>
+              <a:endParaRPr lang="en-US" sz="3000" dirty="0"/>
+            </a:p>
+          </p:txBody>
+        </p:sp>
+        <p:sp>
+          <p:nvSpPr>
+            <p:cNvPr id="12" name="Text 8"/>
+            <p:cNvSpPr/>
+            <p:nvPr/>
+          </p:nvSpPr>
+          <p:spPr>
+            <a:xfrm>
+              <a:off x="1600200" y="3200400"/>
+              <a:ext cx="9631375" cy="640080"/>
+            </a:xfrm>
+            <a:prstGeom prst="rect">
+              <a:avLst/>
+            </a:prstGeom>
+            <a:noFill/>
+            <a:ln/>
+          </p:spPr>
+          <p:txBody>
+            <a:bodyPr wrap="square" lIns="0" tIns="0" rIns="0" bIns="0" rtlCol="0" anchor="ctr"/>
+            <a:lstStyle/>
+            <a:p>
+              <a:pPr marL="0" indent="0">
+                <a:buNone/>
+              </a:pPr>
+              <a:r>
+                <a:rPr lang="en-US" sz="2200" dirty="0">
+                  <a:solidFill>
+                    <a:srgbClr val="FFFFFF"/>
+                  </a:solidFill>
+                  <a:latin typeface="Arial" pitchFamily="34" charset="0"/>
+                  <a:ea typeface="Arial" pitchFamily="34" charset="-122"/>
+                  <a:cs typeface="Arial" pitchFamily="34" charset="-120"/>
+                </a:rPr>
+                <a:t>¿Qué pasa cuando la IA escribe software que no entendemos?</a:t>
+              </a:r>
+              <a:endParaRPr lang="en-US" sz="2200" dirty="0"/>
+            </a:p>
+          </p:txBody>
+        </p:sp>
+      </p:grpSp>
+      <p:grpSp>
+        <p:nvGrpSpPr>
+          <p:cNvPr id="19" name="Group 18">
+            <a:extLst>
+              <a:ext uri="{FF2B5EF4-FFF2-40B4-BE49-F238E27FC236}">
+                <a16:creationId xmlns:a16="http://schemas.microsoft.com/office/drawing/2014/main" id="{DD29F4C2-026A-A62B-49F7-348755B6EA2A}"/>
+              </a:ext>
+            </a:extLst>
+          </p:cNvPr>
+          <p:cNvGrpSpPr/>
+          <p:nvPr/>
+        </p:nvGrpSpPr>
+        <p:grpSpPr>
           <a:xfrm>
             <a:off x="822960" y="4114800"/>
-            <a:ext cx="640080" cy="640080"/>
-          </a:xfrm>
-          <a:prstGeom prst="rect">
-            <a:avLst/>
-          </a:prstGeom>
-          <a:noFill/>
-          <a:ln/>
-        </p:spPr>
-        <p:txBody>
-          <a:bodyPr wrap="square" lIns="0" tIns="0" rIns="0" bIns="0" rtlCol="0" anchor="ctr"/>
-          <a:lstStyle/>
-          <a:p>
-            <a:pPr marL="0" indent="0">
-              <a:buNone/>
-            </a:pPr>
-            <a:r>
-              <a:rPr lang="en-US" sz="3000" b="1" dirty="0">
-                <a:solidFill>
-                  <a:srgbClr val="9257F1"/>
-                </a:solidFill>
-                <a:latin typeface="Arial" pitchFamily="34" charset="0"/>
-                <a:ea typeface="Arial" pitchFamily="34" charset="-122"/>
-                <a:cs typeface="Arial" pitchFamily="34" charset="-120"/>
-              </a:rPr>
-              <a:t>4</a:t>
-            </a:r>
-            <a:endParaRPr lang="en-US" sz="3000" dirty="0"/>
-          </a:p>
-        </p:txBody>
-      </p:sp>
-      <p:sp>
-        <p:nvSpPr>
-          <p:cNvPr id="14" name="Text 10"/>
-          <p:cNvSpPr/>
-          <p:nvPr/>
-        </p:nvSpPr>
-        <p:spPr>
-          <a:xfrm>
-            <a:off x="1600200" y="4114800"/>
-            <a:ext cx="9631375" cy="640080"/>
-          </a:xfrm>
-          <a:prstGeom prst="rect">
-            <a:avLst/>
-          </a:prstGeom>
-          <a:noFill/>
-          <a:ln/>
-        </p:spPr>
-        <p:txBody>
-          <a:bodyPr wrap="square" lIns="0" tIns="0" rIns="0" bIns="0" rtlCol="0" anchor="ctr"/>
-          <a:lstStyle/>
-          <a:p>
-            <a:pPr marL="0" indent="0">
-              <a:buNone/>
-            </a:pPr>
-            <a:r>
-              <a:rPr lang="en-US" sz="2200" dirty="0">
-                <a:solidFill>
-                  <a:srgbClr val="FFFFFF"/>
-                </a:solidFill>
-                <a:latin typeface="Arial" pitchFamily="34" charset="0"/>
-                <a:ea typeface="Arial" pitchFamily="34" charset="-122"/>
-                <a:cs typeface="Arial" pitchFamily="34" charset="-120"/>
-              </a:rPr>
-              <a:t>¿Vale la pena aprender a programar?</a:t>
-            </a:r>
-            <a:endParaRPr lang="en-US" sz="2200" dirty="0"/>
-          </a:p>
-        </p:txBody>
-      </p:sp>
-      <p:sp>
-        <p:nvSpPr>
-          <p:cNvPr id="15" name="Text 11"/>
-          <p:cNvSpPr/>
-          <p:nvPr/>
-        </p:nvSpPr>
-        <p:spPr>
+            <a:ext cx="10408615" cy="640080"/>
+            <a:chOff x="822960" y="4114800"/>
+            <a:chExt cx="10408615" cy="640080"/>
+          </a:xfrm>
+        </p:grpSpPr>
+        <p:sp>
+          <p:nvSpPr>
+            <p:cNvPr id="13" name="Text 9"/>
+            <p:cNvSpPr/>
+            <p:nvPr/>
+          </p:nvSpPr>
+          <p:spPr>
+            <a:xfrm>
+              <a:off x="822960" y="4114800"/>
+              <a:ext cx="640080" cy="640080"/>
+            </a:xfrm>
+            <a:prstGeom prst="rect">
+              <a:avLst/>
+            </a:prstGeom>
+            <a:noFill/>
+            <a:ln/>
+          </p:spPr>
+          <p:txBody>
+            <a:bodyPr wrap="square" lIns="0" tIns="0" rIns="0" bIns="0" rtlCol="0" anchor="ctr"/>
+            <a:lstStyle/>
+            <a:p>
+              <a:pPr marL="0" indent="0">
+                <a:buNone/>
+              </a:pPr>
+              <a:r>
+                <a:rPr lang="en-US" sz="3000" b="1" dirty="0">
+                  <a:solidFill>
+                    <a:srgbClr val="9257F1"/>
+                  </a:solidFill>
+                  <a:latin typeface="Arial" pitchFamily="34" charset="0"/>
+                  <a:ea typeface="Arial" pitchFamily="34" charset="-122"/>
+                  <a:cs typeface="Arial" pitchFamily="34" charset="-120"/>
+                </a:rPr>
+                <a:t>4</a:t>
+              </a:r>
+              <a:endParaRPr lang="en-US" sz="3000" dirty="0"/>
+            </a:p>
+          </p:txBody>
+        </p:sp>
+        <p:sp>
+          <p:nvSpPr>
+            <p:cNvPr id="14" name="Text 10"/>
+            <p:cNvSpPr/>
+            <p:nvPr/>
+          </p:nvSpPr>
+          <p:spPr>
+            <a:xfrm>
+              <a:off x="1600200" y="4114800"/>
+              <a:ext cx="9631375" cy="640080"/>
+            </a:xfrm>
+            <a:prstGeom prst="rect">
+              <a:avLst/>
+            </a:prstGeom>
+            <a:noFill/>
+            <a:ln/>
+          </p:spPr>
+          <p:txBody>
+            <a:bodyPr wrap="square" lIns="0" tIns="0" rIns="0" bIns="0" rtlCol="0" anchor="ctr"/>
+            <a:lstStyle/>
+            <a:p>
+              <a:pPr marL="0" indent="0">
+                <a:buNone/>
+              </a:pPr>
+              <a:r>
+                <a:rPr lang="en-US" sz="2200" dirty="0">
+                  <a:solidFill>
+                    <a:srgbClr val="FFFFFF"/>
+                  </a:solidFill>
+                  <a:latin typeface="Arial" pitchFamily="34" charset="0"/>
+                  <a:ea typeface="Arial" pitchFamily="34" charset="-122"/>
+                  <a:cs typeface="Arial" pitchFamily="34" charset="-120"/>
+                </a:rPr>
+                <a:t>¿Vale la pena aprender a programar?</a:t>
+              </a:r>
+              <a:endParaRPr lang="en-US" sz="2200" dirty="0"/>
+            </a:p>
+          </p:txBody>
+        </p:sp>
+      </p:grpSp>
+      <p:grpSp>
+        <p:nvGrpSpPr>
+          <p:cNvPr id="20" name="Group 19">
+            <a:extLst>
+              <a:ext uri="{FF2B5EF4-FFF2-40B4-BE49-F238E27FC236}">
+                <a16:creationId xmlns:a16="http://schemas.microsoft.com/office/drawing/2014/main" id="{6327B06F-7009-3B4C-AA40-54D04DCDA2B5}"/>
+              </a:ext>
+            </a:extLst>
+          </p:cNvPr>
+          <p:cNvGrpSpPr/>
+          <p:nvPr/>
+        </p:nvGrpSpPr>
+        <p:grpSpPr>
           <a:xfrm>
             <a:off x="822960" y="5029200"/>
-            <a:ext cx="640080" cy="640080"/>
-          </a:xfrm>
-          <a:prstGeom prst="rect">
-            <a:avLst/>
-          </a:prstGeom>
-          <a:noFill/>
-          <a:ln/>
-        </p:spPr>
-        <p:txBody>
-          <a:bodyPr wrap="square" lIns="0" tIns="0" rIns="0" bIns="0" rtlCol="0" anchor="ctr"/>
-          <a:lstStyle/>
-          <a:p>
-            <a:pPr marL="0" indent="0">
-              <a:buNone/>
-            </a:pPr>
-            <a:r>
-              <a:rPr lang="en-US" sz="3000" b="1" dirty="0">
-                <a:solidFill>
-                  <a:srgbClr val="9257F1"/>
-                </a:solidFill>
-                <a:latin typeface="Arial" pitchFamily="34" charset="0"/>
-                <a:ea typeface="Arial" pitchFamily="34" charset="-122"/>
-                <a:cs typeface="Arial" pitchFamily="34" charset="-120"/>
-              </a:rPr>
-              <a:t>5</a:t>
-            </a:r>
-            <a:endParaRPr lang="en-US" sz="3000" dirty="0"/>
-          </a:p>
-        </p:txBody>
-      </p:sp>
-      <p:sp>
-        <p:nvSpPr>
-          <p:cNvPr id="16" name="Text 12"/>
-          <p:cNvSpPr/>
-          <p:nvPr/>
-        </p:nvSpPr>
-        <p:spPr>
-          <a:xfrm>
-            <a:off x="1600200" y="5029200"/>
-            <a:ext cx="9631375" cy="640080"/>
-          </a:xfrm>
-          <a:prstGeom prst="rect">
-            <a:avLst/>
-          </a:prstGeom>
-          <a:noFill/>
-          <a:ln/>
-        </p:spPr>
-        <p:txBody>
-          <a:bodyPr wrap="square" lIns="0" tIns="0" rIns="0" bIns="0" rtlCol="0" anchor="ctr"/>
-          <a:lstStyle/>
-          <a:p>
-            <a:pPr marL="0" indent="0">
-              <a:buNone/>
-            </a:pPr>
-            <a:r>
-              <a:rPr lang="en-US" sz="2200" dirty="0">
-                <a:solidFill>
-                  <a:srgbClr val="FFFFFF"/>
-                </a:solidFill>
-                <a:latin typeface="Arial" pitchFamily="34" charset="0"/>
-                <a:ea typeface="Arial" pitchFamily="34" charset="-122"/>
-                <a:cs typeface="Arial" pitchFamily="34" charset="-120"/>
-              </a:rPr>
-              <a:t>¿Qué deberíamos aprender ahora?</a:t>
-            </a:r>
-            <a:endParaRPr lang="en-US" sz="2200" dirty="0"/>
-          </a:p>
-        </p:txBody>
-      </p:sp>
+            <a:ext cx="10408615" cy="640080"/>
+            <a:chOff x="822960" y="5029200"/>
+            <a:chExt cx="10408615" cy="640080"/>
+          </a:xfrm>
+        </p:grpSpPr>
+        <p:sp>
+          <p:nvSpPr>
+            <p:cNvPr id="15" name="Text 11"/>
+            <p:cNvSpPr/>
+            <p:nvPr/>
+          </p:nvSpPr>
+          <p:spPr>
+            <a:xfrm>
+              <a:off x="822960" y="5029200"/>
+              <a:ext cx="640080" cy="640080"/>
+            </a:xfrm>
+            <a:prstGeom prst="rect">
+              <a:avLst/>
+            </a:prstGeom>
+            <a:noFill/>
+            <a:ln/>
+          </p:spPr>
+          <p:txBody>
+            <a:bodyPr wrap="square" lIns="0" tIns="0" rIns="0" bIns="0" rtlCol="0" anchor="ctr"/>
+            <a:lstStyle/>
+            <a:p>
+              <a:pPr marL="0" indent="0">
+                <a:buNone/>
+              </a:pPr>
+              <a:r>
+                <a:rPr lang="en-US" sz="3000" b="1" dirty="0">
+                  <a:solidFill>
+                    <a:srgbClr val="9257F1"/>
+                  </a:solidFill>
+                  <a:latin typeface="Arial" pitchFamily="34" charset="0"/>
+                  <a:ea typeface="Arial" pitchFamily="34" charset="-122"/>
+                  <a:cs typeface="Arial" pitchFamily="34" charset="-120"/>
+                </a:rPr>
+                <a:t>5</a:t>
+              </a:r>
+              <a:endParaRPr lang="en-US" sz="3000" dirty="0"/>
+            </a:p>
+          </p:txBody>
+        </p:sp>
+        <p:sp>
+          <p:nvSpPr>
+            <p:cNvPr id="16" name="Text 12"/>
+            <p:cNvSpPr/>
+            <p:nvPr/>
+          </p:nvSpPr>
+          <p:spPr>
+            <a:xfrm>
+              <a:off x="1600200" y="5029200"/>
+              <a:ext cx="9631375" cy="640080"/>
+            </a:xfrm>
+            <a:prstGeom prst="rect">
+              <a:avLst/>
+            </a:prstGeom>
+            <a:noFill/>
+            <a:ln/>
+          </p:spPr>
+          <p:txBody>
+            <a:bodyPr wrap="square" lIns="0" tIns="0" rIns="0" bIns="0" rtlCol="0" anchor="ctr"/>
+            <a:lstStyle/>
+            <a:p>
+              <a:pPr marL="0" indent="0">
+                <a:buNone/>
+              </a:pPr>
+              <a:r>
+                <a:rPr lang="en-US" sz="2200" dirty="0">
+                  <a:solidFill>
+                    <a:srgbClr val="FFFFFF"/>
+                  </a:solidFill>
+                  <a:latin typeface="Arial" pitchFamily="34" charset="0"/>
+                  <a:ea typeface="Arial" pitchFamily="34" charset="-122"/>
+                  <a:cs typeface="Arial" pitchFamily="34" charset="-120"/>
+                </a:rPr>
+                <a:t>¿Qué deberíamos aprender ahora?</a:t>
+              </a:r>
+              <a:endParaRPr lang="en-US" sz="2200" dirty="0"/>
+            </a:p>
+          </p:txBody>
+        </p:sp>
+      </p:grpSp>
     </p:spTree>
   </p:cSld>
   <p:clrMapOvr>

--- a/Slides_IA_AWS_UG_Cucuta.pptx
+++ b/Slides_IA_AWS_UG_Cucuta.pptx
@@ -15519,7 +15519,7 @@
         </p:nvSpPr>
         <p:spPr>
           <a:xfrm>
-            <a:off x="822960" y="4069080"/>
+            <a:off x="548640" y="4087368"/>
             <a:ext cx="2606040" cy="1417320"/>
           </a:xfrm>
           <a:prstGeom prst="rect">
@@ -15551,7 +15551,7 @@
         </p:nvSpPr>
         <p:spPr>
           <a:xfrm>
-            <a:off x="1024128" y="4233672"/>
+            <a:off x="749808" y="4251960"/>
             <a:ext cx="2203704" cy="457200"/>
           </a:xfrm>
           <a:prstGeom prst="rect">
@@ -15590,7 +15590,7 @@
         </p:nvSpPr>
         <p:spPr>
           <a:xfrm>
-            <a:off x="1024128" y="4727448"/>
+            <a:off x="749808" y="4745736"/>
             <a:ext cx="2203704" cy="594360"/>
           </a:xfrm>
           <a:prstGeom prst="rect">
@@ -15672,7 +15672,7 @@
         </p:nvSpPr>
         <p:spPr>
           <a:xfrm>
-            <a:off x="3685032" y="3538728"/>
+            <a:off x="3410712" y="3557016"/>
             <a:ext cx="2606040" cy="1947672"/>
           </a:xfrm>
           <a:prstGeom prst="rect">
@@ -15704,7 +15704,7 @@
         </p:nvSpPr>
         <p:spPr>
           <a:xfrm>
-            <a:off x="3886200" y="3703320"/>
+            <a:off x="3611880" y="3721608"/>
             <a:ext cx="2203704" cy="457200"/>
           </a:xfrm>
           <a:prstGeom prst="rect">
@@ -15743,7 +15743,7 @@
         </p:nvSpPr>
         <p:spPr>
           <a:xfrm>
-            <a:off x="3886200" y="4197096"/>
+            <a:off x="3611880" y="4215384"/>
             <a:ext cx="2203704" cy="1124712"/>
           </a:xfrm>
           <a:prstGeom prst="rect">
@@ -15825,7 +15825,7 @@
         </p:nvSpPr>
         <p:spPr>
           <a:xfrm>
-            <a:off x="6547104" y="3008376"/>
+            <a:off x="6272784" y="3026664"/>
             <a:ext cx="2606040" cy="2478024"/>
           </a:xfrm>
           <a:prstGeom prst="rect">
@@ -15857,7 +15857,7 @@
         </p:nvSpPr>
         <p:spPr>
           <a:xfrm>
-            <a:off x="6748272" y="3172968"/>
+            <a:off x="6473952" y="3191256"/>
             <a:ext cx="2203704" cy="457200"/>
           </a:xfrm>
           <a:prstGeom prst="rect">
@@ -15896,7 +15896,7 @@
         </p:nvSpPr>
         <p:spPr>
           <a:xfrm>
-            <a:off x="6748272" y="3666744"/>
+            <a:off x="6473952" y="3685032"/>
             <a:ext cx="2203704" cy="1655064"/>
           </a:xfrm>
           <a:prstGeom prst="rect">
@@ -15978,7 +15978,7 @@
         </p:nvSpPr>
         <p:spPr>
           <a:xfrm>
-            <a:off x="9409176" y="2478024"/>
+            <a:off x="9134856" y="2496312"/>
             <a:ext cx="2606040" cy="3008376"/>
           </a:xfrm>
           <a:prstGeom prst="rect">
@@ -16010,7 +16010,7 @@
         </p:nvSpPr>
         <p:spPr>
           <a:xfrm>
-            <a:off x="9610344" y="2642616"/>
+            <a:off x="9336024" y="2660904"/>
             <a:ext cx="2203704" cy="457200"/>
           </a:xfrm>
           <a:prstGeom prst="rect">
@@ -16049,7 +16049,7 @@
         </p:nvSpPr>
         <p:spPr>
           <a:xfrm>
-            <a:off x="9610344" y="3136392"/>
+            <a:off x="9336024" y="3154680"/>
             <a:ext cx="2203704" cy="2185416"/>
           </a:xfrm>
           <a:prstGeom prst="rect">
@@ -17400,7 +17400,117 @@
                 <a:ea typeface="Arial" pitchFamily="34" charset="-122"/>
                 <a:cs typeface="Arial" pitchFamily="34" charset="-120"/>
               </a:rPr>
-              <a:t>Usar IA será parte normal del trabajo. La ventaja está en usarla con criterio de ingeniería.</a:t>
+              <a:t>Usar IA no </a:t>
+            </a:r>
+            <a:r>
+              <a:rPr lang="en-US" sz="1700" dirty="0" err="1">
+                <a:solidFill>
+                  <a:srgbClr val="FFFFFF"/>
+                </a:solidFill>
+                <a:latin typeface="Arial" pitchFamily="34" charset="0"/>
+                <a:ea typeface="Arial" pitchFamily="34" charset="-122"/>
+                <a:cs typeface="Arial" pitchFamily="34" charset="-120"/>
+              </a:rPr>
+              <a:t>nos</a:t>
+            </a:r>
+            <a:r>
+              <a:rPr lang="en-US" sz="1700" dirty="0">
+                <a:solidFill>
+                  <a:srgbClr val="FFFFFF"/>
+                </a:solidFill>
+                <a:latin typeface="Arial" pitchFamily="34" charset="0"/>
+                <a:ea typeface="Arial" pitchFamily="34" charset="-122"/>
+                <a:cs typeface="Arial" pitchFamily="34" charset="-120"/>
+              </a:rPr>
+              <a:t> </a:t>
+            </a:r>
+            <a:r>
+              <a:rPr lang="en-US" sz="1700" dirty="0" err="1">
+                <a:solidFill>
+                  <a:srgbClr val="FFFFFF"/>
+                </a:solidFill>
+                <a:latin typeface="Arial" pitchFamily="34" charset="0"/>
+                <a:ea typeface="Arial" pitchFamily="34" charset="-122"/>
+                <a:cs typeface="Arial" pitchFamily="34" charset="-120"/>
+              </a:rPr>
+              <a:t>robará</a:t>
+            </a:r>
+            <a:r>
+              <a:rPr lang="en-US" sz="1700" dirty="0">
+                <a:solidFill>
+                  <a:srgbClr val="FFFFFF"/>
+                </a:solidFill>
+                <a:latin typeface="Arial" pitchFamily="34" charset="0"/>
+                <a:ea typeface="Arial" pitchFamily="34" charset="-122"/>
+                <a:cs typeface="Arial" pitchFamily="34" charset="-120"/>
+              </a:rPr>
+              <a:t> el </a:t>
+            </a:r>
+            <a:r>
+              <a:rPr lang="en-US" sz="1700" dirty="0" err="1">
+                <a:solidFill>
+                  <a:srgbClr val="FFFFFF"/>
+                </a:solidFill>
+                <a:latin typeface="Arial" pitchFamily="34" charset="0"/>
+                <a:ea typeface="Arial" pitchFamily="34" charset="-122"/>
+                <a:cs typeface="Arial" pitchFamily="34" charset="-120"/>
+              </a:rPr>
+              <a:t>trabajo</a:t>
+            </a:r>
+            <a:r>
+              <a:rPr lang="en-US" sz="1700" dirty="0">
+                <a:solidFill>
+                  <a:srgbClr val="FFFFFF"/>
+                </a:solidFill>
+                <a:latin typeface="Arial" pitchFamily="34" charset="0"/>
+                <a:ea typeface="Arial" pitchFamily="34" charset="-122"/>
+                <a:cs typeface="Arial" pitchFamily="34" charset="-120"/>
+              </a:rPr>
+              <a:t>, la IA </a:t>
+            </a:r>
+            <a:r>
+              <a:rPr lang="en-US" sz="1700" dirty="0" err="1">
+                <a:solidFill>
+                  <a:srgbClr val="FFFFFF"/>
+                </a:solidFill>
+                <a:latin typeface="Arial" pitchFamily="34" charset="0"/>
+                <a:ea typeface="Arial" pitchFamily="34" charset="-122"/>
+                <a:cs typeface="Arial" pitchFamily="34" charset="-120"/>
+              </a:rPr>
+              <a:t>será</a:t>
+            </a:r>
+            <a:r>
+              <a:rPr lang="en-US" sz="1700" dirty="0">
+                <a:solidFill>
+                  <a:srgbClr val="FFFFFF"/>
+                </a:solidFill>
+                <a:latin typeface="Arial" pitchFamily="34" charset="0"/>
+                <a:ea typeface="Arial" pitchFamily="34" charset="-122"/>
+                <a:cs typeface="Arial" pitchFamily="34" charset="-120"/>
+              </a:rPr>
+              <a:t> parte normal del </a:t>
+            </a:r>
+            <a:r>
+              <a:rPr lang="en-US" sz="1700" dirty="0" err="1">
+                <a:solidFill>
+                  <a:srgbClr val="FFFFFF"/>
+                </a:solidFill>
+                <a:latin typeface="Arial" pitchFamily="34" charset="0"/>
+                <a:ea typeface="Arial" pitchFamily="34" charset="-122"/>
+                <a:cs typeface="Arial" pitchFamily="34" charset="-120"/>
+              </a:rPr>
+              <a:t>mismo</a:t>
+            </a:r>
+            <a:r>
+              <a:rPr lang="en-US" sz="1700" dirty="0">
+                <a:solidFill>
+                  <a:srgbClr val="FFFFFF"/>
+                </a:solidFill>
+                <a:latin typeface="Arial" pitchFamily="34" charset="0"/>
+                <a:ea typeface="Arial" pitchFamily="34" charset="-122"/>
+                <a:cs typeface="Arial" pitchFamily="34" charset="-120"/>
+              </a:rPr>
+              <a:t>. La ventaja está en usarla con criterio de ingeniería.</a:t>
             </a:r>
             <a:endParaRPr lang="en-US" sz="1700" dirty="0"/>
           </a:p>
@@ -18018,8 +18128,118 @@
         </p:blipFill>
         <p:spPr>
           <a:xfrm>
-            <a:off x="3657600" y="990600"/>
-            <a:ext cx="4876800" cy="4876800"/>
+            <a:off x="669220" y="1498670"/>
+            <a:ext cx="3537020" cy="3537020"/>
+          </a:xfrm>
+          <a:prstGeom prst="rect">
+            <a:avLst/>
+          </a:prstGeom>
+        </p:spPr>
+      </p:pic>
+      <p:sp>
+        <p:nvSpPr>
+          <p:cNvPr id="2" name="Text 3">
+            <a:extLst>
+              <a:ext uri="{FF2B5EF4-FFF2-40B4-BE49-F238E27FC236}">
+                <a16:creationId xmlns:a16="http://schemas.microsoft.com/office/drawing/2014/main" id="{E29C7E32-D083-B05D-6085-C0CCB0673101}"/>
+              </a:ext>
+            </a:extLst>
+          </p:cNvPr>
+          <p:cNvSpPr/>
+          <p:nvPr/>
+        </p:nvSpPr>
+        <p:spPr>
+          <a:xfrm>
+            <a:off x="548640" y="5035690"/>
+            <a:ext cx="3416440" cy="548640"/>
+          </a:xfrm>
+          <a:prstGeom prst="rect">
+            <a:avLst/>
+          </a:prstGeom>
+          <a:noFill/>
+          <a:ln/>
+        </p:spPr>
+        <p:txBody>
+          <a:bodyPr wrap="square" lIns="0" tIns="0" rIns="0" bIns="0" rtlCol="0" anchor="ctr"/>
+          <a:lstStyle/>
+          <a:p>
+            <a:pPr marL="0" indent="0" algn="ctr">
+              <a:buNone/>
+            </a:pPr>
+            <a:r>
+              <a:rPr lang="en-US" sz="2200" dirty="0">
+                <a:solidFill>
+                  <a:srgbClr val="8A93A8"/>
+                </a:solidFill>
+                <a:latin typeface="Arial" pitchFamily="34" charset="0"/>
+                <a:cs typeface="Arial" pitchFamily="34" charset="-120"/>
+              </a:rPr>
+              <a:t>Repo Git</a:t>
+            </a:r>
+            <a:endParaRPr lang="en-US" sz="2200" dirty="0"/>
+          </a:p>
+        </p:txBody>
+      </p:sp>
+      <p:pic>
+        <p:nvPicPr>
+          <p:cNvPr id="8" name="Picture 7">
+            <a:extLst>
+              <a:ext uri="{FF2B5EF4-FFF2-40B4-BE49-F238E27FC236}">
+                <a16:creationId xmlns:a16="http://schemas.microsoft.com/office/drawing/2014/main" id="{CD0639CF-6733-1A00-C71B-80A6CB007E62}"/>
+              </a:ext>
+            </a:extLst>
+          </p:cNvPr>
+          <p:cNvPicPr>
+            <a:picLocks noChangeAspect="1"/>
+          </p:cNvPicPr>
+          <p:nvPr/>
+        </p:nvPicPr>
+        <p:blipFill>
+          <a:blip r:embed="rId5"/>
+          <a:stretch>
+            <a:fillRect/>
+          </a:stretch>
+        </p:blipFill>
+        <p:spPr>
+          <a:xfrm>
+            <a:off x="5705579" y="1457430"/>
+            <a:ext cx="2247900" cy="3619500"/>
+          </a:xfrm>
+          <a:prstGeom prst="rect">
+            <a:avLst/>
+          </a:prstGeom>
+        </p:spPr>
+      </p:pic>
+      <p:pic>
+        <p:nvPicPr>
+          <p:cNvPr id="10" name="Graphic 9">
+            <a:extLst>
+              <a:ext uri="{FF2B5EF4-FFF2-40B4-BE49-F238E27FC236}">
+                <a16:creationId xmlns:a16="http://schemas.microsoft.com/office/drawing/2014/main" id="{52282F34-D698-E90D-34F9-28630A8E94FE}"/>
+              </a:ext>
+            </a:extLst>
+          </p:cNvPr>
+          <p:cNvPicPr>
+            <a:picLocks noChangeAspect="1"/>
+          </p:cNvPicPr>
+          <p:nvPr/>
+        </p:nvPicPr>
+        <p:blipFill>
+          <a:blip>
+            <a:extLst>
+              <a:ext uri="{96DAC541-7B7A-43D3-8B79-37D633B846F1}">
+                <asvg:svgBlip xmlns:asvg="http://schemas.microsoft.com/office/drawing/2016/SVG/main" r:embed="rId6"/>
+              </a:ext>
+            </a:extLst>
+          </a:blip>
+          <a:stretch>
+            <a:fillRect/>
+          </a:stretch>
+        </p:blipFill>
+        <p:spPr>
+          <a:xfrm>
+            <a:off x="7953479" y="1457430"/>
+            <a:ext cx="3619500" cy="3619500"/>
           </a:xfrm>
           <a:prstGeom prst="rect">
             <a:avLst/>
